--- a/images/chap4/system_architecture.pptx
+++ b/images/chap4/system_architecture.pptx
@@ -5,9 +5,9 @@
     <p:sldMasterId id="2147483648" r:id="rId1"/>
   </p:sldMasterIdLst>
   <p:sldIdLst>
-    <p:sldId id="256" r:id="rId3"/>
+    <p:sldId id="256" r:id="rId2"/>
   </p:sldIdLst>
-  <p:sldSz cx="12191365" cy="6858000" type="screen4x3"/>
+  <p:sldSz cx="12192000" cy="6858000"/>
   <p:notesSz cx="6858000" cy="9144000"/>
   <p:defaultTextStyle>
     <a:defPPr>
@@ -161,10 +161,9 @@
           <a:lstStyle/>
           <a:p>
             <a:r>
-              <a:rPr lang="en-US" smtClean="0"/>
+              <a:rPr lang="en-US"/>
               <a:t>Click to edit Master title style</a:t>
             </a:r>
-            <a:endParaRPr lang="en-US"/>
           </a:p>
         </p:txBody>
       </p:sp>
@@ -280,10 +279,9 @@
           </a:lstStyle>
           <a:p>
             <a:r>
-              <a:rPr lang="en-US" smtClean="0"/>
+              <a:rPr lang="en-US"/>
               <a:t>Click to edit Master subtitle style</a:t>
             </a:r>
-            <a:endParaRPr lang="en-US"/>
           </a:p>
         </p:txBody>
       </p:sp>
@@ -304,6 +302,7 @@
           <a:p>
             <a:fld id="{5BCAD085-E8A6-8845-BD4E-CB4CCA059FC4}" type="datetimeFigureOut">
               <a:rPr lang="en-US" smtClean="0"/>
+              <a:t>4/17/2026</a:t>
             </a:fld>
             <a:endParaRPr lang="en-US"/>
           </a:p>
@@ -345,6 +344,7 @@
           <a:p>
             <a:fld id="{C1FF6DA9-008F-8B48-92A6-B652298478BF}" type="slidenum">
               <a:rPr lang="en-US" smtClean="0"/>
+              <a:t>‹#›</a:t>
             </a:fld>
             <a:endParaRPr lang="en-US"/>
           </a:p>
@@ -391,10 +391,9 @@
           <a:lstStyle/>
           <a:p>
             <a:r>
-              <a:rPr lang="en-US" smtClean="0"/>
+              <a:rPr lang="en-US"/>
               <a:t>Click to edit Master title style</a:t>
             </a:r>
-            <a:endParaRPr lang="en-US"/>
           </a:p>
         </p:txBody>
       </p:sp>
@@ -415,42 +414,37 @@
           <a:p>
             <a:pPr lvl="0"/>
             <a:r>
-              <a:rPr lang="en-US" smtClean="0"/>
+              <a:rPr lang="en-US"/>
               <a:t>Click to edit Master text styles</a:t>
             </a:r>
-            <a:endParaRPr lang="en-US" smtClean="0"/>
           </a:p>
           <a:p>
             <a:pPr lvl="1"/>
             <a:r>
-              <a:rPr lang="en-US" smtClean="0"/>
+              <a:rPr lang="en-US"/>
               <a:t>Second level</a:t>
             </a:r>
-            <a:endParaRPr lang="en-US" smtClean="0"/>
           </a:p>
           <a:p>
             <a:pPr lvl="2"/>
             <a:r>
-              <a:rPr lang="en-US" smtClean="0"/>
+              <a:rPr lang="en-US"/>
               <a:t>Third level</a:t>
             </a:r>
-            <a:endParaRPr lang="en-US" smtClean="0"/>
           </a:p>
           <a:p>
             <a:pPr lvl="3"/>
             <a:r>
-              <a:rPr lang="en-US" smtClean="0"/>
+              <a:rPr lang="en-US"/>
               <a:t>Fourth level</a:t>
             </a:r>
-            <a:endParaRPr lang="en-US" smtClean="0"/>
           </a:p>
           <a:p>
             <a:pPr lvl="4"/>
             <a:r>
-              <a:rPr lang="en-US" smtClean="0"/>
+              <a:rPr lang="en-US"/>
               <a:t>Fifth level</a:t>
             </a:r>
-            <a:endParaRPr lang="en-US"/>
           </a:p>
         </p:txBody>
       </p:sp>
@@ -471,6 +465,7 @@
           <a:p>
             <a:fld id="{5BCAD085-E8A6-8845-BD4E-CB4CCA059FC4}" type="datetimeFigureOut">
               <a:rPr lang="en-US" smtClean="0"/>
+              <a:t>4/17/2026</a:t>
             </a:fld>
             <a:endParaRPr lang="en-US"/>
           </a:p>
@@ -512,6 +507,7 @@
           <a:p>
             <a:fld id="{C1FF6DA9-008F-8B48-92A6-B652298478BF}" type="slidenum">
               <a:rPr lang="en-US" smtClean="0"/>
+              <a:t>‹#›</a:t>
             </a:fld>
             <a:endParaRPr lang="en-US"/>
           </a:p>
@@ -563,10 +559,9 @@
           <a:lstStyle/>
           <a:p>
             <a:r>
-              <a:rPr lang="en-US" smtClean="0"/>
+              <a:rPr lang="en-US"/>
               <a:t>Click to edit Master title style</a:t>
             </a:r>
-            <a:endParaRPr lang="en-US"/>
           </a:p>
         </p:txBody>
       </p:sp>
@@ -592,42 +587,37 @@
           <a:p>
             <a:pPr lvl="0"/>
             <a:r>
-              <a:rPr lang="en-US" smtClean="0"/>
+              <a:rPr lang="en-US"/>
               <a:t>Click to edit Master text styles</a:t>
             </a:r>
-            <a:endParaRPr lang="en-US" smtClean="0"/>
           </a:p>
           <a:p>
             <a:pPr lvl="1"/>
             <a:r>
-              <a:rPr lang="en-US" smtClean="0"/>
+              <a:rPr lang="en-US"/>
               <a:t>Second level</a:t>
             </a:r>
-            <a:endParaRPr lang="en-US" smtClean="0"/>
           </a:p>
           <a:p>
             <a:pPr lvl="2"/>
             <a:r>
-              <a:rPr lang="en-US" smtClean="0"/>
+              <a:rPr lang="en-US"/>
               <a:t>Third level</a:t>
             </a:r>
-            <a:endParaRPr lang="en-US" smtClean="0"/>
           </a:p>
           <a:p>
             <a:pPr lvl="3"/>
             <a:r>
-              <a:rPr lang="en-US" smtClean="0"/>
+              <a:rPr lang="en-US"/>
               <a:t>Fourth level</a:t>
             </a:r>
-            <a:endParaRPr lang="en-US" smtClean="0"/>
           </a:p>
           <a:p>
             <a:pPr lvl="4"/>
             <a:r>
-              <a:rPr lang="en-US" smtClean="0"/>
+              <a:rPr lang="en-US"/>
               <a:t>Fifth level</a:t>
             </a:r>
-            <a:endParaRPr lang="en-US"/>
           </a:p>
         </p:txBody>
       </p:sp>
@@ -648,6 +638,7 @@
           <a:p>
             <a:fld id="{5BCAD085-E8A6-8845-BD4E-CB4CCA059FC4}" type="datetimeFigureOut">
               <a:rPr lang="en-US" smtClean="0"/>
+              <a:t>4/17/2026</a:t>
             </a:fld>
             <a:endParaRPr lang="en-US"/>
           </a:p>
@@ -689,6 +680,7 @@
           <a:p>
             <a:fld id="{C1FF6DA9-008F-8B48-92A6-B652298478BF}" type="slidenum">
               <a:rPr lang="en-US" smtClean="0"/>
+              <a:t>‹#›</a:t>
             </a:fld>
             <a:endParaRPr lang="en-US"/>
           </a:p>
@@ -735,10 +727,9 @@
           <a:lstStyle/>
           <a:p>
             <a:r>
-              <a:rPr lang="en-US" smtClean="0"/>
+              <a:rPr lang="en-US"/>
               <a:t>Click to edit Master title style</a:t>
             </a:r>
-            <a:endParaRPr lang="en-US"/>
           </a:p>
         </p:txBody>
       </p:sp>
@@ -759,42 +750,37 @@
           <a:p>
             <a:pPr lvl="0"/>
             <a:r>
-              <a:rPr lang="en-US" smtClean="0"/>
+              <a:rPr lang="en-US"/>
               <a:t>Click to edit Master text styles</a:t>
             </a:r>
-            <a:endParaRPr lang="en-US" smtClean="0"/>
           </a:p>
           <a:p>
             <a:pPr lvl="1"/>
             <a:r>
-              <a:rPr lang="en-US" smtClean="0"/>
+              <a:rPr lang="en-US"/>
               <a:t>Second level</a:t>
             </a:r>
-            <a:endParaRPr lang="en-US" smtClean="0"/>
           </a:p>
           <a:p>
             <a:pPr lvl="2"/>
             <a:r>
-              <a:rPr lang="en-US" smtClean="0"/>
+              <a:rPr lang="en-US"/>
               <a:t>Third level</a:t>
             </a:r>
-            <a:endParaRPr lang="en-US" smtClean="0"/>
           </a:p>
           <a:p>
             <a:pPr lvl="3"/>
             <a:r>
-              <a:rPr lang="en-US" smtClean="0"/>
+              <a:rPr lang="en-US"/>
               <a:t>Fourth level</a:t>
             </a:r>
-            <a:endParaRPr lang="en-US" smtClean="0"/>
           </a:p>
           <a:p>
             <a:pPr lvl="4"/>
             <a:r>
-              <a:rPr lang="en-US" smtClean="0"/>
+              <a:rPr lang="en-US"/>
               <a:t>Fifth level</a:t>
             </a:r>
-            <a:endParaRPr lang="en-US"/>
           </a:p>
         </p:txBody>
       </p:sp>
@@ -815,6 +801,7 @@
           <a:p>
             <a:fld id="{5BCAD085-E8A6-8845-BD4E-CB4CCA059FC4}" type="datetimeFigureOut">
               <a:rPr lang="en-US" smtClean="0"/>
+              <a:t>4/17/2026</a:t>
             </a:fld>
             <a:endParaRPr lang="en-US"/>
           </a:p>
@@ -856,6 +843,7 @@
           <a:p>
             <a:fld id="{C1FF6DA9-008F-8B48-92A6-B652298478BF}" type="slidenum">
               <a:rPr lang="en-US" smtClean="0"/>
+              <a:t>‹#›</a:t>
             </a:fld>
             <a:endParaRPr lang="en-US"/>
           </a:p>
@@ -911,10 +899,9 @@
           </a:lstStyle>
           <a:p>
             <a:r>
-              <a:rPr lang="en-US" smtClean="0"/>
+              <a:rPr lang="en-US"/>
               <a:t>Click to edit Master title style</a:t>
             </a:r>
-            <a:endParaRPr lang="en-US"/>
           </a:p>
         </p:txBody>
       </p:sp>
@@ -1031,10 +1018,9 @@
           <a:p>
             <a:pPr lvl="0"/>
             <a:r>
-              <a:rPr lang="en-US" smtClean="0"/>
+              <a:rPr lang="en-US"/>
               <a:t>Click to edit Master text styles</a:t>
             </a:r>
-            <a:endParaRPr lang="en-US" smtClean="0"/>
           </a:p>
         </p:txBody>
       </p:sp>
@@ -1055,6 +1041,7 @@
           <a:p>
             <a:fld id="{5BCAD085-E8A6-8845-BD4E-CB4CCA059FC4}" type="datetimeFigureOut">
               <a:rPr lang="en-US" smtClean="0"/>
+              <a:t>4/17/2026</a:t>
             </a:fld>
             <a:endParaRPr lang="en-US"/>
           </a:p>
@@ -1096,6 +1083,7 @@
           <a:p>
             <a:fld id="{C1FF6DA9-008F-8B48-92A6-B652298478BF}" type="slidenum">
               <a:rPr lang="en-US" smtClean="0"/>
+              <a:t>‹#›</a:t>
             </a:fld>
             <a:endParaRPr lang="en-US"/>
           </a:p>
@@ -1142,10 +1130,9 @@
           <a:lstStyle/>
           <a:p>
             <a:r>
-              <a:rPr lang="en-US" smtClean="0"/>
+              <a:rPr lang="en-US"/>
               <a:t>Click to edit Master title style</a:t>
             </a:r>
-            <a:endParaRPr lang="en-US"/>
           </a:p>
         </p:txBody>
       </p:sp>
@@ -1199,42 +1186,37 @@
           <a:p>
             <a:pPr lvl="0"/>
             <a:r>
-              <a:rPr lang="en-US" smtClean="0"/>
+              <a:rPr lang="en-US"/>
               <a:t>Click to edit Master text styles</a:t>
             </a:r>
-            <a:endParaRPr lang="en-US" smtClean="0"/>
           </a:p>
           <a:p>
             <a:pPr lvl="1"/>
             <a:r>
-              <a:rPr lang="en-US" smtClean="0"/>
+              <a:rPr lang="en-US"/>
               <a:t>Second level</a:t>
             </a:r>
-            <a:endParaRPr lang="en-US" smtClean="0"/>
           </a:p>
           <a:p>
             <a:pPr lvl="2"/>
             <a:r>
-              <a:rPr lang="en-US" smtClean="0"/>
+              <a:rPr lang="en-US"/>
               <a:t>Third level</a:t>
             </a:r>
-            <a:endParaRPr lang="en-US" smtClean="0"/>
           </a:p>
           <a:p>
             <a:pPr lvl="3"/>
             <a:r>
-              <a:rPr lang="en-US" smtClean="0"/>
+              <a:rPr lang="en-US"/>
               <a:t>Fourth level</a:t>
             </a:r>
-            <a:endParaRPr lang="en-US" smtClean="0"/>
           </a:p>
           <a:p>
             <a:pPr lvl="4"/>
             <a:r>
-              <a:rPr lang="en-US" smtClean="0"/>
+              <a:rPr lang="en-US"/>
               <a:t>Fifth level</a:t>
             </a:r>
-            <a:endParaRPr lang="en-US"/>
           </a:p>
         </p:txBody>
       </p:sp>
@@ -1288,42 +1270,37 @@
           <a:p>
             <a:pPr lvl="0"/>
             <a:r>
-              <a:rPr lang="en-US" smtClean="0"/>
+              <a:rPr lang="en-US"/>
               <a:t>Click to edit Master text styles</a:t>
             </a:r>
-            <a:endParaRPr lang="en-US" smtClean="0"/>
           </a:p>
           <a:p>
             <a:pPr lvl="1"/>
             <a:r>
-              <a:rPr lang="en-US" smtClean="0"/>
+              <a:rPr lang="en-US"/>
               <a:t>Second level</a:t>
             </a:r>
-            <a:endParaRPr lang="en-US" smtClean="0"/>
           </a:p>
           <a:p>
             <a:pPr lvl="2"/>
             <a:r>
-              <a:rPr lang="en-US" smtClean="0"/>
+              <a:rPr lang="en-US"/>
               <a:t>Third level</a:t>
             </a:r>
-            <a:endParaRPr lang="en-US" smtClean="0"/>
           </a:p>
           <a:p>
             <a:pPr lvl="3"/>
             <a:r>
-              <a:rPr lang="en-US" smtClean="0"/>
+              <a:rPr lang="en-US"/>
               <a:t>Fourth level</a:t>
             </a:r>
-            <a:endParaRPr lang="en-US" smtClean="0"/>
           </a:p>
           <a:p>
             <a:pPr lvl="4"/>
             <a:r>
-              <a:rPr lang="en-US" smtClean="0"/>
+              <a:rPr lang="en-US"/>
               <a:t>Fifth level</a:t>
             </a:r>
-            <a:endParaRPr lang="en-US"/>
           </a:p>
         </p:txBody>
       </p:sp>
@@ -1344,6 +1321,7 @@
           <a:p>
             <a:fld id="{5BCAD085-E8A6-8845-BD4E-CB4CCA059FC4}" type="datetimeFigureOut">
               <a:rPr lang="en-US" smtClean="0"/>
+              <a:t>4/17/2026</a:t>
             </a:fld>
             <a:endParaRPr lang="en-US"/>
           </a:p>
@@ -1385,6 +1363,7 @@
           <a:p>
             <a:fld id="{C1FF6DA9-008F-8B48-92A6-B652298478BF}" type="slidenum">
               <a:rPr lang="en-US" smtClean="0"/>
+              <a:t>‹#›</a:t>
             </a:fld>
             <a:endParaRPr lang="en-US"/>
           </a:p>
@@ -1435,10 +1414,9 @@
           </a:lstStyle>
           <a:p>
             <a:r>
-              <a:rPr lang="en-US" smtClean="0"/>
+              <a:rPr lang="en-US"/>
               <a:t>Click to edit Master title style</a:t>
             </a:r>
-            <a:endParaRPr lang="en-US"/>
           </a:p>
         </p:txBody>
       </p:sp>
@@ -1501,10 +1479,9 @@
           <a:p>
             <a:pPr lvl="0"/>
             <a:r>
-              <a:rPr lang="en-US" smtClean="0"/>
+              <a:rPr lang="en-US"/>
               <a:t>Click to edit Master text styles</a:t>
             </a:r>
-            <a:endParaRPr lang="en-US" smtClean="0"/>
           </a:p>
         </p:txBody>
       </p:sp>
@@ -1558,42 +1535,37 @@
           <a:p>
             <a:pPr lvl="0"/>
             <a:r>
-              <a:rPr lang="en-US" smtClean="0"/>
+              <a:rPr lang="en-US"/>
               <a:t>Click to edit Master text styles</a:t>
             </a:r>
-            <a:endParaRPr lang="en-US" smtClean="0"/>
           </a:p>
           <a:p>
             <a:pPr lvl="1"/>
             <a:r>
-              <a:rPr lang="en-US" smtClean="0"/>
+              <a:rPr lang="en-US"/>
               <a:t>Second level</a:t>
             </a:r>
-            <a:endParaRPr lang="en-US" smtClean="0"/>
           </a:p>
           <a:p>
             <a:pPr lvl="2"/>
             <a:r>
-              <a:rPr lang="en-US" smtClean="0"/>
+              <a:rPr lang="en-US"/>
               <a:t>Third level</a:t>
             </a:r>
-            <a:endParaRPr lang="en-US" smtClean="0"/>
           </a:p>
           <a:p>
             <a:pPr lvl="3"/>
             <a:r>
-              <a:rPr lang="en-US" smtClean="0"/>
+              <a:rPr lang="en-US"/>
               <a:t>Fourth level</a:t>
             </a:r>
-            <a:endParaRPr lang="en-US" smtClean="0"/>
           </a:p>
           <a:p>
             <a:pPr lvl="4"/>
             <a:r>
-              <a:rPr lang="en-US" smtClean="0"/>
+              <a:rPr lang="en-US"/>
               <a:t>Fifth level</a:t>
             </a:r>
-            <a:endParaRPr lang="en-US"/>
           </a:p>
         </p:txBody>
       </p:sp>
@@ -1656,10 +1628,9 @@
           <a:p>
             <a:pPr lvl="0"/>
             <a:r>
-              <a:rPr lang="en-US" smtClean="0"/>
+              <a:rPr lang="en-US"/>
               <a:t>Click to edit Master text styles</a:t>
             </a:r>
-            <a:endParaRPr lang="en-US" smtClean="0"/>
           </a:p>
         </p:txBody>
       </p:sp>
@@ -1713,42 +1684,37 @@
           <a:p>
             <a:pPr lvl="0"/>
             <a:r>
-              <a:rPr lang="en-US" smtClean="0"/>
+              <a:rPr lang="en-US"/>
               <a:t>Click to edit Master text styles</a:t>
             </a:r>
-            <a:endParaRPr lang="en-US" smtClean="0"/>
           </a:p>
           <a:p>
             <a:pPr lvl="1"/>
             <a:r>
-              <a:rPr lang="en-US" smtClean="0"/>
+              <a:rPr lang="en-US"/>
               <a:t>Second level</a:t>
             </a:r>
-            <a:endParaRPr lang="en-US" smtClean="0"/>
           </a:p>
           <a:p>
             <a:pPr lvl="2"/>
             <a:r>
-              <a:rPr lang="en-US" smtClean="0"/>
+              <a:rPr lang="en-US"/>
               <a:t>Third level</a:t>
             </a:r>
-            <a:endParaRPr lang="en-US" smtClean="0"/>
           </a:p>
           <a:p>
             <a:pPr lvl="3"/>
             <a:r>
-              <a:rPr lang="en-US" smtClean="0"/>
+              <a:rPr lang="en-US"/>
               <a:t>Fourth level</a:t>
             </a:r>
-            <a:endParaRPr lang="en-US" smtClean="0"/>
           </a:p>
           <a:p>
             <a:pPr lvl="4"/>
             <a:r>
-              <a:rPr lang="en-US" smtClean="0"/>
+              <a:rPr lang="en-US"/>
               <a:t>Fifth level</a:t>
             </a:r>
-            <a:endParaRPr lang="en-US"/>
           </a:p>
         </p:txBody>
       </p:sp>
@@ -1769,6 +1735,7 @@
           <a:p>
             <a:fld id="{5BCAD085-E8A6-8845-BD4E-CB4CCA059FC4}" type="datetimeFigureOut">
               <a:rPr lang="en-US" smtClean="0"/>
+              <a:t>4/17/2026</a:t>
             </a:fld>
             <a:endParaRPr lang="en-US"/>
           </a:p>
@@ -1810,6 +1777,7 @@
           <a:p>
             <a:fld id="{C1FF6DA9-008F-8B48-92A6-B652298478BF}" type="slidenum">
               <a:rPr lang="en-US" smtClean="0"/>
+              <a:t>‹#›</a:t>
             </a:fld>
             <a:endParaRPr lang="en-US"/>
           </a:p>
@@ -1856,10 +1824,9 @@
           <a:lstStyle/>
           <a:p>
             <a:r>
-              <a:rPr lang="en-US" smtClean="0"/>
+              <a:rPr lang="en-US"/>
               <a:t>Click to edit Master title style</a:t>
             </a:r>
-            <a:endParaRPr lang="en-US"/>
           </a:p>
         </p:txBody>
       </p:sp>
@@ -1880,6 +1847,7 @@
           <a:p>
             <a:fld id="{5BCAD085-E8A6-8845-BD4E-CB4CCA059FC4}" type="datetimeFigureOut">
               <a:rPr lang="en-US" smtClean="0"/>
+              <a:t>4/17/2026</a:t>
             </a:fld>
             <a:endParaRPr lang="en-US"/>
           </a:p>
@@ -1921,6 +1889,7 @@
           <a:p>
             <a:fld id="{C1FF6DA9-008F-8B48-92A6-B652298478BF}" type="slidenum">
               <a:rPr lang="en-US" smtClean="0"/>
+              <a:t>‹#›</a:t>
             </a:fld>
             <a:endParaRPr lang="en-US"/>
           </a:p>
@@ -1968,6 +1937,7 @@
           <a:p>
             <a:fld id="{5BCAD085-E8A6-8845-BD4E-CB4CCA059FC4}" type="datetimeFigureOut">
               <a:rPr lang="en-US" smtClean="0"/>
+              <a:t>4/17/2026</a:t>
             </a:fld>
             <a:endParaRPr lang="en-US"/>
           </a:p>
@@ -2009,6 +1979,7 @@
           <a:p>
             <a:fld id="{C1FF6DA9-008F-8B48-92A6-B652298478BF}" type="slidenum">
               <a:rPr lang="en-US" smtClean="0"/>
+              <a:t>‹#›</a:t>
             </a:fld>
             <a:endParaRPr lang="en-US"/>
           </a:p>
@@ -2064,10 +2035,9 @@
           </a:lstStyle>
           <a:p>
             <a:r>
-              <a:rPr lang="en-US" smtClean="0"/>
+              <a:rPr lang="en-US"/>
               <a:t>Click to edit Master title style</a:t>
             </a:r>
-            <a:endParaRPr lang="en-US"/>
           </a:p>
         </p:txBody>
       </p:sp>
@@ -2121,42 +2091,37 @@
           <a:p>
             <a:pPr lvl="0"/>
             <a:r>
-              <a:rPr lang="en-US" smtClean="0"/>
+              <a:rPr lang="en-US"/>
               <a:t>Click to edit Master text styles</a:t>
             </a:r>
-            <a:endParaRPr lang="en-US" smtClean="0"/>
           </a:p>
           <a:p>
             <a:pPr lvl="1"/>
             <a:r>
-              <a:rPr lang="en-US" smtClean="0"/>
+              <a:rPr lang="en-US"/>
               <a:t>Second level</a:t>
             </a:r>
-            <a:endParaRPr lang="en-US" smtClean="0"/>
           </a:p>
           <a:p>
             <a:pPr lvl="2"/>
             <a:r>
-              <a:rPr lang="en-US" smtClean="0"/>
+              <a:rPr lang="en-US"/>
               <a:t>Third level</a:t>
             </a:r>
-            <a:endParaRPr lang="en-US" smtClean="0"/>
           </a:p>
           <a:p>
             <a:pPr lvl="3"/>
             <a:r>
-              <a:rPr lang="en-US" smtClean="0"/>
+              <a:rPr lang="en-US"/>
               <a:t>Fourth level</a:t>
             </a:r>
-            <a:endParaRPr lang="en-US" smtClean="0"/>
           </a:p>
           <a:p>
             <a:pPr lvl="4"/>
             <a:r>
-              <a:rPr lang="en-US" smtClean="0"/>
+              <a:rPr lang="en-US"/>
               <a:t>Fifth level</a:t>
             </a:r>
-            <a:endParaRPr lang="en-US"/>
           </a:p>
         </p:txBody>
       </p:sp>
@@ -2219,10 +2184,9 @@
           <a:p>
             <a:pPr lvl="0"/>
             <a:r>
-              <a:rPr lang="en-US" smtClean="0"/>
+              <a:rPr lang="en-US"/>
               <a:t>Click to edit Master text styles</a:t>
             </a:r>
-            <a:endParaRPr lang="en-US" smtClean="0"/>
           </a:p>
         </p:txBody>
       </p:sp>
@@ -2243,6 +2207,7 @@
           <a:p>
             <a:fld id="{5BCAD085-E8A6-8845-BD4E-CB4CCA059FC4}" type="datetimeFigureOut">
               <a:rPr lang="en-US" smtClean="0"/>
+              <a:t>4/17/2026</a:t>
             </a:fld>
             <a:endParaRPr lang="en-US"/>
           </a:p>
@@ -2284,6 +2249,7 @@
           <a:p>
             <a:fld id="{C1FF6DA9-008F-8B48-92A6-B652298478BF}" type="slidenum">
               <a:rPr lang="en-US" smtClean="0"/>
+              <a:t>‹#›</a:t>
             </a:fld>
             <a:endParaRPr lang="en-US"/>
           </a:p>
@@ -2339,10 +2305,9 @@
           </a:lstStyle>
           <a:p>
             <a:r>
-              <a:rPr lang="en-US" smtClean="0"/>
+              <a:rPr lang="en-US"/>
               <a:t>Click to edit Master title style</a:t>
             </a:r>
-            <a:endParaRPr lang="en-US"/>
           </a:p>
         </p:txBody>
       </p:sp>
@@ -2466,10 +2431,9 @@
           <a:p>
             <a:pPr lvl="0"/>
             <a:r>
-              <a:rPr lang="en-US" smtClean="0"/>
+              <a:rPr lang="en-US"/>
               <a:t>Click to edit Master text styles</a:t>
             </a:r>
-            <a:endParaRPr lang="en-US" smtClean="0"/>
           </a:p>
         </p:txBody>
       </p:sp>
@@ -2490,6 +2454,7 @@
           <a:p>
             <a:fld id="{5BCAD085-E8A6-8845-BD4E-CB4CCA059FC4}" type="datetimeFigureOut">
               <a:rPr lang="en-US" smtClean="0"/>
+              <a:t>4/17/2026</a:t>
             </a:fld>
             <a:endParaRPr lang="en-US"/>
           </a:p>
@@ -2531,6 +2496,7 @@
           <a:p>
             <a:fld id="{C1FF6DA9-008F-8B48-92A6-B652298478BF}" type="slidenum">
               <a:rPr lang="en-US" smtClean="0"/>
+              <a:t>‹#›</a:t>
             </a:fld>
             <a:endParaRPr lang="en-US"/>
           </a:p>
@@ -2592,10 +2558,9 @@
           <a:lstStyle/>
           <a:p>
             <a:r>
-              <a:rPr lang="en-US" smtClean="0"/>
+              <a:rPr lang="en-US"/>
               <a:t>Click to edit Master title style</a:t>
             </a:r>
-            <a:endParaRPr lang="en-US"/>
           </a:p>
         </p:txBody>
       </p:sp>
@@ -2626,42 +2591,37 @@
           <a:p>
             <a:pPr lvl="0"/>
             <a:r>
-              <a:rPr lang="en-US" smtClean="0"/>
+              <a:rPr lang="en-US"/>
               <a:t>Click to edit Master text styles</a:t>
             </a:r>
-            <a:endParaRPr lang="en-US" smtClean="0"/>
           </a:p>
           <a:p>
             <a:pPr lvl="1"/>
             <a:r>
-              <a:rPr lang="en-US" smtClean="0"/>
+              <a:rPr lang="en-US"/>
               <a:t>Second level</a:t>
             </a:r>
-            <a:endParaRPr lang="en-US" smtClean="0"/>
           </a:p>
           <a:p>
             <a:pPr lvl="2"/>
             <a:r>
-              <a:rPr lang="en-US" smtClean="0"/>
+              <a:rPr lang="en-US"/>
               <a:t>Third level</a:t>
             </a:r>
-            <a:endParaRPr lang="en-US" smtClean="0"/>
           </a:p>
           <a:p>
             <a:pPr lvl="3"/>
             <a:r>
-              <a:rPr lang="en-US" smtClean="0"/>
+              <a:rPr lang="en-US"/>
               <a:t>Fourth level</a:t>
             </a:r>
-            <a:endParaRPr lang="en-US" smtClean="0"/>
           </a:p>
           <a:p>
             <a:pPr lvl="4"/>
             <a:r>
-              <a:rPr lang="en-US" smtClean="0"/>
+              <a:rPr lang="en-US"/>
               <a:t>Fifth level</a:t>
             </a:r>
-            <a:endParaRPr lang="en-US"/>
           </a:p>
         </p:txBody>
       </p:sp>
@@ -2700,6 +2660,7 @@
           <a:p>
             <a:fld id="{5BCAD085-E8A6-8845-BD4E-CB4CCA059FC4}" type="datetimeFigureOut">
               <a:rPr lang="en-US" smtClean="0"/>
+              <a:t>4/17/2026</a:t>
             </a:fld>
             <a:endParaRPr lang="en-US"/>
           </a:p>
@@ -2777,6 +2738,7 @@
           <a:p>
             <a:fld id="{C1FF6DA9-008F-8B48-92A6-B652298478BF}" type="slidenum">
               <a:rPr lang="en-US" smtClean="0"/>
+              <a:t>‹#›</a:t>
             </a:fld>
             <a:endParaRPr lang="en-US"/>
           </a:p>
@@ -3060,7 +3022,14 @@
         <p:cNvGrpSpPr/>
         <p:nvPr/>
       </p:nvGrpSpPr>
-      <p:grpSpPr/>
+      <p:grpSpPr>
+        <a:xfrm>
+          <a:off x="0" y="0"/>
+          <a:ext cx="0" cy="0"/>
+          <a:chOff x="0" y="0"/>
+          <a:chExt cx="0" cy="0"/>
+        </a:xfrm>
+      </p:grpSpPr>
       <p:sp>
         <p:nvSpPr>
           <p:cNvPr id="2" name="Rounded Rectangle 1"/>
@@ -3080,7 +3049,7 @@
           </a:solidFill>
           <a:ln w="22860">
             <a:solidFill>
-              <a:srgbClr val="1565C0"/>
+              <a:schemeClr val="tx1"/>
             </a:solidFill>
           </a:ln>
         </p:spPr>
@@ -3103,6 +3072,10 @@
           <a:lstStyle/>
           <a:p>
             <a:pPr algn="ctr"/>
+            <a:endParaRPr sz="3200" b="1" dirty="0">
+              <a:latin typeface="宋体" panose="02010600030101010101" pitchFamily="2" charset="-122"/>
+              <a:ea typeface="宋体" panose="02010600030101010101" pitchFamily="2" charset="-122"/>
+            </a:endParaRPr>
           </a:p>
         </p:txBody>
       </p:sp>
@@ -3115,7 +3088,7 @@
         <p:spPr>
           <a:xfrm>
             <a:off x="391875" y="311727"/>
-            <a:ext cx="3338202" cy="184150"/>
+            <a:ext cx="3338202" cy="307777"/>
           </a:xfrm>
           <a:prstGeom prst="rect">
             <a:avLst/>
@@ -3140,38 +3113,12 @@
               </a:spcAft>
             </a:pPr>
             <a:r>
-              <a:rPr sz="1200" b="1" i="0">
-                <a:solidFill>
-                  <a:srgbClr val="1565C0"/>
-                </a:solidFill>
-                <a:latin typeface="微软雅黑" panose="020B0503020204020204" charset="-122"/>
+              <a:rPr lang="zh-CN" altLang="en-US" sz="2000" b="1" i="0" dirty="0">
+                <a:latin typeface="宋体" panose="02010600030101010101" pitchFamily="2" charset="-122"/>
+                <a:ea typeface="宋体" panose="02010600030101010101" pitchFamily="2" charset="-122"/>
               </a:rPr>
-              <a:t>«layer»  </a:t>
+              <a:t>界面层</a:t>
             </a:r>
-            <a:r>
-              <a:rPr lang="zh-CN" sz="1200" b="1" i="0">
-                <a:solidFill>
-                  <a:srgbClr val="1565C0"/>
-                </a:solidFill>
-                <a:latin typeface="微软雅黑" panose="020B0503020204020204" charset="-122"/>
-              </a:rPr>
-              <a:t>界面</a:t>
-            </a:r>
-            <a:r>
-              <a:rPr sz="1200" b="1" i="0">
-                <a:solidFill>
-                  <a:srgbClr val="1565C0"/>
-                </a:solidFill>
-                <a:latin typeface="微软雅黑" panose="020B0503020204020204" charset="-122"/>
-              </a:rPr>
-              <a:t>层  </a:t>
-            </a:r>
-            <a:endParaRPr sz="1200" b="1" i="0">
-              <a:solidFill>
-                <a:srgbClr val="1565C0"/>
-              </a:solidFill>
-              <a:latin typeface="微软雅黑" panose="020B0503020204020204" charset="-122"/>
-            </a:endParaRPr>
           </a:p>
         </p:txBody>
       </p:sp>
@@ -3194,7 +3141,7 @@
           </a:solidFill>
           <a:ln w="22860">
             <a:solidFill>
-              <a:srgbClr val="E65100"/>
+              <a:schemeClr val="tx1"/>
             </a:solidFill>
           </a:ln>
         </p:spPr>
@@ -3217,6 +3164,10 @@
           <a:lstStyle/>
           <a:p>
             <a:pPr algn="ctr"/>
+            <a:endParaRPr sz="3200" b="1">
+              <a:latin typeface="宋体" panose="02010600030101010101" pitchFamily="2" charset="-122"/>
+              <a:ea typeface="宋体" panose="02010600030101010101" pitchFamily="2" charset="-122"/>
+            </a:endParaRPr>
           </a:p>
         </p:txBody>
       </p:sp>
@@ -3228,8 +3179,8 @@
         </p:nvSpPr>
         <p:spPr>
           <a:xfrm>
-            <a:off x="471885" y="1717559"/>
-            <a:ext cx="3338202" cy="184150"/>
+            <a:off x="471702" y="1726488"/>
+            <a:ext cx="3338202" cy="307777"/>
           </a:xfrm>
           <a:prstGeom prst="rect">
             <a:avLst/>
@@ -3254,19 +3205,15 @@
               </a:spcAft>
             </a:pPr>
             <a:r>
-              <a:rPr sz="1200" b="1" i="0">
-                <a:solidFill>
-                  <a:srgbClr val="E65100"/>
-                </a:solidFill>
-                <a:latin typeface="微软雅黑" panose="020B0503020204020204" charset="-122"/>
+              <a:rPr lang="zh-CN" altLang="en-US" sz="2000" b="1" i="0" dirty="0">
+                <a:latin typeface="宋体" panose="02010600030101010101" pitchFamily="2" charset="-122"/>
+                <a:ea typeface="宋体" panose="02010600030101010101" pitchFamily="2" charset="-122"/>
               </a:rPr>
-              <a:t>«layer»  服务层  </a:t>
+              <a:t>服务层</a:t>
             </a:r>
-            <a:endParaRPr sz="1200" b="1" i="0">
-              <a:solidFill>
-                <a:srgbClr val="E65100"/>
-              </a:solidFill>
-              <a:latin typeface="微软雅黑" panose="020B0503020204020204" charset="-122"/>
+            <a:endParaRPr sz="2000" b="1" i="0" dirty="0">
+              <a:latin typeface="宋体" panose="02010600030101010101" pitchFamily="2" charset="-122"/>
+              <a:ea typeface="宋体" panose="02010600030101010101" pitchFamily="2" charset="-122"/>
             </a:endParaRPr>
           </a:p>
         </p:txBody>
@@ -3279,7 +3226,7 @@
         </p:nvSpPr>
         <p:spPr>
           <a:xfrm>
-            <a:off x="217708" y="3911600"/>
+            <a:off x="181423" y="3924473"/>
             <a:ext cx="10232315" cy="1433945"/>
           </a:xfrm>
           <a:prstGeom prst="roundRect">
@@ -3290,7 +3237,7 @@
           </a:solidFill>
           <a:ln w="22860">
             <a:solidFill>
-              <a:srgbClr val="6A1B9A"/>
+              <a:schemeClr val="tx1"/>
             </a:solidFill>
           </a:ln>
         </p:spPr>
@@ -3313,6 +3260,10 @@
           <a:lstStyle/>
           <a:p>
             <a:pPr algn="ctr"/>
+            <a:endParaRPr sz="3200" b="1">
+              <a:latin typeface="宋体" panose="02010600030101010101" pitchFamily="2" charset="-122"/>
+              <a:ea typeface="宋体" panose="02010600030101010101" pitchFamily="2" charset="-122"/>
+            </a:endParaRPr>
           </a:p>
         </p:txBody>
       </p:sp>
@@ -3325,7 +3276,7 @@
         <p:spPr>
           <a:xfrm>
             <a:off x="391875" y="3973945"/>
-            <a:ext cx="3338202" cy="184150"/>
+            <a:ext cx="3338202" cy="307777"/>
           </a:xfrm>
           <a:prstGeom prst="rect">
             <a:avLst/>
@@ -3350,20 +3301,19 @@
               </a:spcAft>
             </a:pPr>
             <a:r>
-              <a:rPr sz="1200" b="1" i="0">
-                <a:solidFill>
-                  <a:srgbClr val="6A1B9A"/>
-                </a:solidFill>
-                <a:latin typeface="微软雅黑" panose="020B0503020204020204" charset="-122"/>
+              <a:rPr sz="2000" b="1" i="0" dirty="0" err="1">
+                <a:latin typeface="宋体" panose="02010600030101010101" pitchFamily="2" charset="-122"/>
+                <a:ea typeface="宋体" panose="02010600030101010101" pitchFamily="2" charset="-122"/>
               </a:rPr>
-              <a:t>«layer»  智能引擎层  </a:t>
+              <a:t>智能引擎层</a:t>
             </a:r>
-            <a:endParaRPr sz="1200" b="1" i="0">
-              <a:solidFill>
-                <a:srgbClr val="6A1B9A"/>
-              </a:solidFill>
-              <a:latin typeface="微软雅黑" panose="020B0503020204020204" charset="-122"/>
-            </a:endParaRPr>
+            <a:r>
+              <a:rPr sz="2000" b="1" i="0" dirty="0">
+                <a:latin typeface="宋体" panose="02010600030101010101" pitchFamily="2" charset="-122"/>
+                <a:ea typeface="宋体" panose="02010600030101010101" pitchFamily="2" charset="-122"/>
+              </a:rPr>
+              <a:t>  </a:t>
+            </a:r>
           </a:p>
         </p:txBody>
       </p:sp>
@@ -3386,7 +3336,7 @@
           </a:solidFill>
           <a:ln w="22860">
             <a:solidFill>
-              <a:srgbClr val="2E7D32"/>
+              <a:schemeClr val="tx1"/>
             </a:solidFill>
           </a:ln>
         </p:spPr>
@@ -3409,6 +3359,10 @@
           <a:lstStyle/>
           <a:p>
             <a:pPr algn="ctr"/>
+            <a:endParaRPr sz="3200" b="1">
+              <a:latin typeface="宋体" panose="02010600030101010101" pitchFamily="2" charset="-122"/>
+              <a:ea typeface="宋体" panose="02010600030101010101" pitchFamily="2" charset="-122"/>
+            </a:endParaRPr>
           </a:p>
         </p:txBody>
       </p:sp>
@@ -3421,7 +3375,7 @@
         <p:spPr>
           <a:xfrm>
             <a:off x="391875" y="5563754"/>
-            <a:ext cx="3338202" cy="184150"/>
+            <a:ext cx="3338202" cy="307777"/>
           </a:xfrm>
           <a:prstGeom prst="rect">
             <a:avLst/>
@@ -3446,865 +3400,15 @@
               </a:spcAft>
             </a:pPr>
             <a:r>
-              <a:rPr sz="1200" b="1" i="0">
-                <a:solidFill>
-                  <a:srgbClr val="2E7D32"/>
-                </a:solidFill>
-                <a:latin typeface="微软雅黑" panose="020B0503020204020204" charset="-122"/>
+              <a:rPr lang="zh-CN" altLang="en-US" sz="2000" b="1" i="0" dirty="0">
+                <a:latin typeface="宋体" panose="02010600030101010101" pitchFamily="2" charset="-122"/>
+                <a:ea typeface="宋体" panose="02010600030101010101" pitchFamily="2" charset="-122"/>
               </a:rPr>
-              <a:t>«layer»  数据层  </a:t>
+              <a:t>数据层</a:t>
             </a:r>
-            <a:endParaRPr sz="1200" b="1" i="0">
-              <a:solidFill>
-                <a:srgbClr val="2E7D32"/>
-              </a:solidFill>
-              <a:latin typeface="微软雅黑" panose="020B0503020204020204" charset="-122"/>
-            </a:endParaRPr>
-          </a:p>
-        </p:txBody>
-      </p:sp>
-      <p:sp>
-        <p:nvSpPr>
-          <p:cNvPr id="10" name="Rectangle 9"/>
-          <p:cNvSpPr/>
-          <p:nvPr/>
-        </p:nvSpPr>
-        <p:spPr>
-          <a:xfrm>
-            <a:off x="798265" y="567343"/>
-            <a:ext cx="2177088" cy="548640"/>
-          </a:xfrm>
-          <a:prstGeom prst="rect">
-            <a:avLst/>
-          </a:prstGeom>
-          <a:solidFill>
-            <a:srgbClr val="FFFFFF"/>
-          </a:solidFill>
-          <a:ln w="13970">
-            <a:solidFill>
-              <a:srgbClr val="546E7A"/>
-            </a:solidFill>
-          </a:ln>
-        </p:spPr>
-        <p:style>
-          <a:lnRef idx="1">
-            <a:schemeClr val="accent1"/>
-          </a:lnRef>
-          <a:fillRef idx="3">
-            <a:schemeClr val="accent1"/>
-          </a:fillRef>
-          <a:effectRef idx="2">
-            <a:schemeClr val="accent1"/>
-          </a:effectRef>
-          <a:fontRef idx="minor">
-            <a:schemeClr val="lt1"/>
-          </a:fontRef>
-        </p:style>
-        <p:txBody>
-          <a:bodyPr rtlCol="0" anchor="ctr"/>
-          <a:lstStyle/>
-          <a:p>
-            <a:pPr algn="ctr"/>
-          </a:p>
-        </p:txBody>
-      </p:sp>
-      <p:sp>
-        <p:nvSpPr>
-          <p:cNvPr id="11" name="Rectangle 10"/>
-          <p:cNvSpPr/>
-          <p:nvPr/>
-        </p:nvSpPr>
-        <p:spPr>
-          <a:xfrm>
-            <a:off x="2779416" y="604750"/>
-            <a:ext cx="137882" cy="143394"/>
-          </a:xfrm>
-          <a:prstGeom prst="rect">
-            <a:avLst/>
-          </a:prstGeom>
-          <a:solidFill>
-            <a:srgbClr val="FFFFFF"/>
-          </a:solidFill>
-          <a:ln w="10160">
-            <a:solidFill>
-              <a:srgbClr val="546E7A"/>
-            </a:solidFill>
-          </a:ln>
-        </p:spPr>
-        <p:style>
-          <a:lnRef idx="1">
-            <a:schemeClr val="accent1"/>
-          </a:lnRef>
-          <a:fillRef idx="3">
-            <a:schemeClr val="accent1"/>
-          </a:fillRef>
-          <a:effectRef idx="2">
-            <a:schemeClr val="accent1"/>
-          </a:effectRef>
-          <a:fontRef idx="minor">
-            <a:schemeClr val="lt1"/>
-          </a:fontRef>
-        </p:style>
-        <p:txBody>
-          <a:bodyPr rtlCol="0" anchor="ctr"/>
-          <a:lstStyle/>
-          <a:p>
-            <a:pPr algn="ctr"/>
-          </a:p>
-        </p:txBody>
-      </p:sp>
-      <p:sp>
-        <p:nvSpPr>
-          <p:cNvPr id="12" name="Rectangle 11"/>
-          <p:cNvSpPr/>
-          <p:nvPr/>
-        </p:nvSpPr>
-        <p:spPr>
-          <a:xfrm>
-            <a:off x="2750388" y="617219"/>
-            <a:ext cx="58055" cy="41148"/>
-          </a:xfrm>
-          <a:prstGeom prst="rect">
-            <a:avLst/>
-          </a:prstGeom>
-          <a:solidFill>
-            <a:srgbClr val="FFFFFF"/>
-          </a:solidFill>
-          <a:ln w="10160">
-            <a:solidFill>
-              <a:srgbClr val="546E7A"/>
-            </a:solidFill>
-          </a:ln>
-        </p:spPr>
-        <p:style>
-          <a:lnRef idx="1">
-            <a:schemeClr val="accent1"/>
-          </a:lnRef>
-          <a:fillRef idx="3">
-            <a:schemeClr val="accent1"/>
-          </a:fillRef>
-          <a:effectRef idx="2">
-            <a:schemeClr val="accent1"/>
-          </a:effectRef>
-          <a:fontRef idx="minor">
-            <a:schemeClr val="lt1"/>
-          </a:fontRef>
-        </p:style>
-        <p:txBody>
-          <a:bodyPr rtlCol="0" anchor="ctr"/>
-          <a:lstStyle/>
-          <a:p>
-            <a:pPr algn="ctr"/>
-          </a:p>
-        </p:txBody>
-      </p:sp>
-      <p:sp>
-        <p:nvSpPr>
-          <p:cNvPr id="13" name="Rectangle 12"/>
-          <p:cNvSpPr/>
-          <p:nvPr/>
-        </p:nvSpPr>
-        <p:spPr>
-          <a:xfrm>
-            <a:off x="2750388" y="672083"/>
-            <a:ext cx="58055" cy="41148"/>
-          </a:xfrm>
-          <a:prstGeom prst="rect">
-            <a:avLst/>
-          </a:prstGeom>
-          <a:solidFill>
-            <a:srgbClr val="FFFFFF"/>
-          </a:solidFill>
-          <a:ln w="10160">
-            <a:solidFill>
-              <a:srgbClr val="546E7A"/>
-            </a:solidFill>
-          </a:ln>
-        </p:spPr>
-        <p:style>
-          <a:lnRef idx="1">
-            <a:schemeClr val="accent1"/>
-          </a:lnRef>
-          <a:fillRef idx="3">
-            <a:schemeClr val="accent1"/>
-          </a:fillRef>
-          <a:effectRef idx="2">
-            <a:schemeClr val="accent1"/>
-          </a:effectRef>
-          <a:fontRef idx="minor">
-            <a:schemeClr val="lt1"/>
-          </a:fontRef>
-        </p:style>
-        <p:txBody>
-          <a:bodyPr rtlCol="0" anchor="ctr"/>
-          <a:lstStyle/>
-          <a:p>
-            <a:pPr algn="ctr"/>
-          </a:p>
-        </p:txBody>
-      </p:sp>
-      <p:sp>
-        <p:nvSpPr>
-          <p:cNvPr id="14" name="TextBox 13"/>
-          <p:cNvSpPr txBox="1"/>
-          <p:nvPr/>
-        </p:nvSpPr>
-        <p:spPr>
-          <a:xfrm>
-            <a:off x="914377" y="617219"/>
-            <a:ext cx="1814240" cy="99752"/>
-          </a:xfrm>
-          <a:prstGeom prst="rect">
-            <a:avLst/>
-          </a:prstGeom>
-          <a:noFill/>
-          <a:ln>
-            <a:noFill/>
-          </a:ln>
-        </p:spPr>
-        <p:txBody>
-          <a:bodyPr wrap="square" lIns="0" tIns="0" rIns="0" bIns="0" anchor="t">
-            <a:spAutoFit/>
-          </a:bodyPr>
-          <a:lstStyle/>
-          <a:p>
-            <a:pPr algn="ctr">
-              <a:spcBef>
-                <a:spcPts val="0"/>
-              </a:spcBef>
-              <a:spcAft>
-                <a:spcPts val="0"/>
-              </a:spcAft>
-            </a:pPr>
-            <a:r>
-              <a:rPr sz="830" b="0" i="1">
-                <a:solidFill>
-                  <a:srgbClr val="555555"/>
-                </a:solidFill>
-                <a:latin typeface="微软雅黑" panose="020B0503020204020204" charset="-122"/>
-              </a:rPr>
-              <a:t>«component»</a:t>
-            </a:r>
-            <a:endParaRPr sz="830" b="0" i="1">
-              <a:solidFill>
-                <a:srgbClr val="555555"/>
-              </a:solidFill>
-              <a:latin typeface="微软雅黑" panose="020B0503020204020204" charset="-122"/>
-            </a:endParaRPr>
-          </a:p>
-        </p:txBody>
-      </p:sp>
-      <p:sp>
-        <p:nvSpPr>
-          <p:cNvPr id="15" name="TextBox 14"/>
-          <p:cNvSpPr txBox="1"/>
-          <p:nvPr/>
-        </p:nvSpPr>
-        <p:spPr>
-          <a:xfrm>
-            <a:off x="914377" y="791787"/>
-            <a:ext cx="1944865" cy="149629"/>
-          </a:xfrm>
-          <a:prstGeom prst="rect">
-            <a:avLst/>
-          </a:prstGeom>
-          <a:noFill/>
-          <a:ln>
-            <a:noFill/>
-          </a:ln>
-        </p:spPr>
-        <p:txBody>
-          <a:bodyPr wrap="square" lIns="0" tIns="0" rIns="0" bIns="0" anchor="ctr">
-            <a:spAutoFit/>
-          </a:bodyPr>
-          <a:lstStyle/>
-          <a:p>
-            <a:pPr algn="ctr">
-              <a:spcBef>
-                <a:spcPts val="0"/>
-              </a:spcBef>
-              <a:spcAft>
-                <a:spcPts val="0"/>
-              </a:spcAft>
-            </a:pPr>
-            <a:r>
-              <a:rPr sz="1240" b="1" i="0">
-                <a:solidFill>
-                  <a:srgbClr val="1A1A2E"/>
-                </a:solidFill>
-                <a:latin typeface="微软雅黑" panose="020B0503020204020204" charset="-122"/>
-              </a:rPr>
-              <a:t>Vue3 视图组件</a:t>
-            </a:r>
-            <a:endParaRPr sz="1240" b="1" i="0">
-              <a:solidFill>
-                <a:srgbClr val="1A1A2E"/>
-              </a:solidFill>
-              <a:latin typeface="微软雅黑" panose="020B0503020204020204" charset="-122"/>
-            </a:endParaRPr>
-          </a:p>
-        </p:txBody>
-      </p:sp>
-      <p:sp>
-        <p:nvSpPr>
-          <p:cNvPr id="16" name="Rectangle 15"/>
-          <p:cNvSpPr/>
-          <p:nvPr/>
-        </p:nvSpPr>
-        <p:spPr>
-          <a:xfrm>
-            <a:off x="4136468" y="567343"/>
-            <a:ext cx="2177088" cy="548640"/>
-          </a:xfrm>
-          <a:prstGeom prst="rect">
-            <a:avLst/>
-          </a:prstGeom>
-          <a:solidFill>
-            <a:srgbClr val="FFFFFF"/>
-          </a:solidFill>
-          <a:ln w="13970">
-            <a:solidFill>
-              <a:srgbClr val="546E7A"/>
-            </a:solidFill>
-          </a:ln>
-        </p:spPr>
-        <p:style>
-          <a:lnRef idx="1">
-            <a:schemeClr val="accent1"/>
-          </a:lnRef>
-          <a:fillRef idx="3">
-            <a:schemeClr val="accent1"/>
-          </a:fillRef>
-          <a:effectRef idx="2">
-            <a:schemeClr val="accent1"/>
-          </a:effectRef>
-          <a:fontRef idx="minor">
-            <a:schemeClr val="lt1"/>
-          </a:fontRef>
-        </p:style>
-        <p:txBody>
-          <a:bodyPr rtlCol="0" anchor="ctr"/>
-          <a:lstStyle/>
-          <a:p>
-            <a:pPr algn="ctr"/>
-          </a:p>
-        </p:txBody>
-      </p:sp>
-      <p:sp>
-        <p:nvSpPr>
-          <p:cNvPr id="17" name="Rectangle 16"/>
-          <p:cNvSpPr/>
-          <p:nvPr/>
-        </p:nvSpPr>
-        <p:spPr>
-          <a:xfrm>
-            <a:off x="6117618" y="604750"/>
-            <a:ext cx="137882" cy="143394"/>
-          </a:xfrm>
-          <a:prstGeom prst="rect">
-            <a:avLst/>
-          </a:prstGeom>
-          <a:solidFill>
-            <a:srgbClr val="FFFFFF"/>
-          </a:solidFill>
-          <a:ln w="10160">
-            <a:solidFill>
-              <a:srgbClr val="546E7A"/>
-            </a:solidFill>
-          </a:ln>
-        </p:spPr>
-        <p:style>
-          <a:lnRef idx="1">
-            <a:schemeClr val="accent1"/>
-          </a:lnRef>
-          <a:fillRef idx="3">
-            <a:schemeClr val="accent1"/>
-          </a:fillRef>
-          <a:effectRef idx="2">
-            <a:schemeClr val="accent1"/>
-          </a:effectRef>
-          <a:fontRef idx="minor">
-            <a:schemeClr val="lt1"/>
-          </a:fontRef>
-        </p:style>
-        <p:txBody>
-          <a:bodyPr rtlCol="0" anchor="ctr"/>
-          <a:lstStyle/>
-          <a:p>
-            <a:pPr algn="ctr"/>
-          </a:p>
-        </p:txBody>
-      </p:sp>
-      <p:sp>
-        <p:nvSpPr>
-          <p:cNvPr id="18" name="Rectangle 17"/>
-          <p:cNvSpPr/>
-          <p:nvPr/>
-        </p:nvSpPr>
-        <p:spPr>
-          <a:xfrm>
-            <a:off x="6088590" y="617219"/>
-            <a:ext cx="58055" cy="41148"/>
-          </a:xfrm>
-          <a:prstGeom prst="rect">
-            <a:avLst/>
-          </a:prstGeom>
-          <a:solidFill>
-            <a:srgbClr val="FFFFFF"/>
-          </a:solidFill>
-          <a:ln w="10160">
-            <a:solidFill>
-              <a:srgbClr val="546E7A"/>
-            </a:solidFill>
-          </a:ln>
-        </p:spPr>
-        <p:style>
-          <a:lnRef idx="1">
-            <a:schemeClr val="accent1"/>
-          </a:lnRef>
-          <a:fillRef idx="3">
-            <a:schemeClr val="accent1"/>
-          </a:fillRef>
-          <a:effectRef idx="2">
-            <a:schemeClr val="accent1"/>
-          </a:effectRef>
-          <a:fontRef idx="minor">
-            <a:schemeClr val="lt1"/>
-          </a:fontRef>
-        </p:style>
-        <p:txBody>
-          <a:bodyPr rtlCol="0" anchor="ctr"/>
-          <a:lstStyle/>
-          <a:p>
-            <a:pPr algn="ctr"/>
-          </a:p>
-        </p:txBody>
-      </p:sp>
-      <p:sp>
-        <p:nvSpPr>
-          <p:cNvPr id="19" name="Rectangle 18"/>
-          <p:cNvSpPr/>
-          <p:nvPr/>
-        </p:nvSpPr>
-        <p:spPr>
-          <a:xfrm>
-            <a:off x="6088590" y="672083"/>
-            <a:ext cx="58055" cy="41148"/>
-          </a:xfrm>
-          <a:prstGeom prst="rect">
-            <a:avLst/>
-          </a:prstGeom>
-          <a:solidFill>
-            <a:srgbClr val="FFFFFF"/>
-          </a:solidFill>
-          <a:ln w="10160">
-            <a:solidFill>
-              <a:srgbClr val="546E7A"/>
-            </a:solidFill>
-          </a:ln>
-        </p:spPr>
-        <p:style>
-          <a:lnRef idx="1">
-            <a:schemeClr val="accent1"/>
-          </a:lnRef>
-          <a:fillRef idx="3">
-            <a:schemeClr val="accent1"/>
-          </a:fillRef>
-          <a:effectRef idx="2">
-            <a:schemeClr val="accent1"/>
-          </a:effectRef>
-          <a:fontRef idx="minor">
-            <a:schemeClr val="lt1"/>
-          </a:fontRef>
-        </p:style>
-        <p:txBody>
-          <a:bodyPr rtlCol="0" anchor="ctr"/>
-          <a:lstStyle/>
-          <a:p>
-            <a:pPr algn="ctr"/>
-          </a:p>
-        </p:txBody>
-      </p:sp>
-      <p:sp>
-        <p:nvSpPr>
-          <p:cNvPr id="20" name="TextBox 19"/>
-          <p:cNvSpPr txBox="1"/>
-          <p:nvPr/>
-        </p:nvSpPr>
-        <p:spPr>
-          <a:xfrm>
-            <a:off x="4252579" y="617219"/>
-            <a:ext cx="1814240" cy="99752"/>
-          </a:xfrm>
-          <a:prstGeom prst="rect">
-            <a:avLst/>
-          </a:prstGeom>
-          <a:noFill/>
-          <a:ln>
-            <a:noFill/>
-          </a:ln>
-        </p:spPr>
-        <p:txBody>
-          <a:bodyPr wrap="square" lIns="0" tIns="0" rIns="0" bIns="0" anchor="t">
-            <a:spAutoFit/>
-          </a:bodyPr>
-          <a:lstStyle/>
-          <a:p>
-            <a:pPr algn="ctr">
-              <a:spcBef>
-                <a:spcPts val="0"/>
-              </a:spcBef>
-              <a:spcAft>
-                <a:spcPts val="0"/>
-              </a:spcAft>
-            </a:pPr>
-            <a:r>
-              <a:rPr sz="830" b="0" i="1">
-                <a:solidFill>
-                  <a:srgbClr val="555555"/>
-                </a:solidFill>
-                <a:latin typeface="微软雅黑" panose="020B0503020204020204" charset="-122"/>
-              </a:rPr>
-              <a:t>«component»</a:t>
-            </a:r>
-            <a:endParaRPr sz="830" b="0" i="1">
-              <a:solidFill>
-                <a:srgbClr val="555555"/>
-              </a:solidFill>
-              <a:latin typeface="微软雅黑" panose="020B0503020204020204" charset="-122"/>
-            </a:endParaRPr>
-          </a:p>
-        </p:txBody>
-      </p:sp>
-      <p:sp>
-        <p:nvSpPr>
-          <p:cNvPr id="21" name="TextBox 20"/>
-          <p:cNvSpPr txBox="1"/>
-          <p:nvPr/>
-        </p:nvSpPr>
-        <p:spPr>
-          <a:xfrm>
-            <a:off x="4252579" y="791787"/>
-            <a:ext cx="1944865" cy="149629"/>
-          </a:xfrm>
-          <a:prstGeom prst="rect">
-            <a:avLst/>
-          </a:prstGeom>
-          <a:noFill/>
-          <a:ln>
-            <a:noFill/>
-          </a:ln>
-        </p:spPr>
-        <p:txBody>
-          <a:bodyPr wrap="square" lIns="0" tIns="0" rIns="0" bIns="0" anchor="ctr">
-            <a:spAutoFit/>
-          </a:bodyPr>
-          <a:lstStyle/>
-          <a:p>
-            <a:pPr algn="ctr">
-              <a:spcBef>
-                <a:spcPts val="0"/>
-              </a:spcBef>
-              <a:spcAft>
-                <a:spcPts val="0"/>
-              </a:spcAft>
-            </a:pPr>
-            <a:r>
-              <a:rPr sz="1240" b="1" i="0">
-                <a:solidFill>
-                  <a:srgbClr val="1A1A2E"/>
-                </a:solidFill>
-                <a:latin typeface="微软雅黑" panose="020B0503020204020204" charset="-122"/>
-              </a:rPr>
-              <a:t>Pinia 状态管理</a:t>
-            </a:r>
-            <a:endParaRPr sz="1240" b="1" i="0">
-              <a:solidFill>
-                <a:srgbClr val="1A1A2E"/>
-              </a:solidFill>
-              <a:latin typeface="微软雅黑" panose="020B0503020204020204" charset="-122"/>
-            </a:endParaRPr>
-          </a:p>
-        </p:txBody>
-      </p:sp>
-      <p:sp>
-        <p:nvSpPr>
-          <p:cNvPr id="22" name="Rectangle 21"/>
-          <p:cNvSpPr/>
-          <p:nvPr/>
-        </p:nvSpPr>
-        <p:spPr>
-          <a:xfrm>
-            <a:off x="7474670" y="567343"/>
-            <a:ext cx="2177088" cy="548640"/>
-          </a:xfrm>
-          <a:prstGeom prst="rect">
-            <a:avLst/>
-          </a:prstGeom>
-          <a:solidFill>
-            <a:srgbClr val="FFFFFF"/>
-          </a:solidFill>
-          <a:ln w="13970">
-            <a:solidFill>
-              <a:srgbClr val="546E7A"/>
-            </a:solidFill>
-          </a:ln>
-        </p:spPr>
-        <p:style>
-          <a:lnRef idx="1">
-            <a:schemeClr val="accent1"/>
-          </a:lnRef>
-          <a:fillRef idx="3">
-            <a:schemeClr val="accent1"/>
-          </a:fillRef>
-          <a:effectRef idx="2">
-            <a:schemeClr val="accent1"/>
-          </a:effectRef>
-          <a:fontRef idx="minor">
-            <a:schemeClr val="lt1"/>
-          </a:fontRef>
-        </p:style>
-        <p:txBody>
-          <a:bodyPr rtlCol="0" anchor="ctr"/>
-          <a:lstStyle/>
-          <a:p>
-            <a:pPr algn="ctr"/>
-          </a:p>
-        </p:txBody>
-      </p:sp>
-      <p:sp>
-        <p:nvSpPr>
-          <p:cNvPr id="23" name="Rectangle 22"/>
-          <p:cNvSpPr/>
-          <p:nvPr/>
-        </p:nvSpPr>
-        <p:spPr>
-          <a:xfrm>
-            <a:off x="9455820" y="604750"/>
-            <a:ext cx="137882" cy="143394"/>
-          </a:xfrm>
-          <a:prstGeom prst="rect">
-            <a:avLst/>
-          </a:prstGeom>
-          <a:solidFill>
-            <a:srgbClr val="FFFFFF"/>
-          </a:solidFill>
-          <a:ln w="10160">
-            <a:solidFill>
-              <a:srgbClr val="546E7A"/>
-            </a:solidFill>
-          </a:ln>
-        </p:spPr>
-        <p:style>
-          <a:lnRef idx="1">
-            <a:schemeClr val="accent1"/>
-          </a:lnRef>
-          <a:fillRef idx="3">
-            <a:schemeClr val="accent1"/>
-          </a:fillRef>
-          <a:effectRef idx="2">
-            <a:schemeClr val="accent1"/>
-          </a:effectRef>
-          <a:fontRef idx="minor">
-            <a:schemeClr val="lt1"/>
-          </a:fontRef>
-        </p:style>
-        <p:txBody>
-          <a:bodyPr rtlCol="0" anchor="ctr"/>
-          <a:lstStyle/>
-          <a:p>
-            <a:pPr algn="ctr"/>
-          </a:p>
-        </p:txBody>
-      </p:sp>
-      <p:sp>
-        <p:nvSpPr>
-          <p:cNvPr id="24" name="Rectangle 23"/>
-          <p:cNvSpPr/>
-          <p:nvPr/>
-        </p:nvSpPr>
-        <p:spPr>
-          <a:xfrm>
-            <a:off x="9426792" y="617219"/>
-            <a:ext cx="58055" cy="41148"/>
-          </a:xfrm>
-          <a:prstGeom prst="rect">
-            <a:avLst/>
-          </a:prstGeom>
-          <a:solidFill>
-            <a:srgbClr val="FFFFFF"/>
-          </a:solidFill>
-          <a:ln w="10160">
-            <a:solidFill>
-              <a:srgbClr val="546E7A"/>
-            </a:solidFill>
-          </a:ln>
-        </p:spPr>
-        <p:style>
-          <a:lnRef idx="1">
-            <a:schemeClr val="accent1"/>
-          </a:lnRef>
-          <a:fillRef idx="3">
-            <a:schemeClr val="accent1"/>
-          </a:fillRef>
-          <a:effectRef idx="2">
-            <a:schemeClr val="accent1"/>
-          </a:effectRef>
-          <a:fontRef idx="minor">
-            <a:schemeClr val="lt1"/>
-          </a:fontRef>
-        </p:style>
-        <p:txBody>
-          <a:bodyPr rtlCol="0" anchor="ctr"/>
-          <a:lstStyle/>
-          <a:p>
-            <a:pPr algn="ctr"/>
-          </a:p>
-        </p:txBody>
-      </p:sp>
-      <p:sp>
-        <p:nvSpPr>
-          <p:cNvPr id="25" name="Rectangle 24"/>
-          <p:cNvSpPr/>
-          <p:nvPr/>
-        </p:nvSpPr>
-        <p:spPr>
-          <a:xfrm>
-            <a:off x="9426792" y="672083"/>
-            <a:ext cx="58055" cy="41148"/>
-          </a:xfrm>
-          <a:prstGeom prst="rect">
-            <a:avLst/>
-          </a:prstGeom>
-          <a:solidFill>
-            <a:srgbClr val="FFFFFF"/>
-          </a:solidFill>
-          <a:ln w="10160">
-            <a:solidFill>
-              <a:srgbClr val="546E7A"/>
-            </a:solidFill>
-          </a:ln>
-        </p:spPr>
-        <p:style>
-          <a:lnRef idx="1">
-            <a:schemeClr val="accent1"/>
-          </a:lnRef>
-          <a:fillRef idx="3">
-            <a:schemeClr val="accent1"/>
-          </a:fillRef>
-          <a:effectRef idx="2">
-            <a:schemeClr val="accent1"/>
-          </a:effectRef>
-          <a:fontRef idx="minor">
-            <a:schemeClr val="lt1"/>
-          </a:fontRef>
-        </p:style>
-        <p:txBody>
-          <a:bodyPr rtlCol="0" anchor="ctr"/>
-          <a:lstStyle/>
-          <a:p>
-            <a:pPr algn="ctr"/>
-          </a:p>
-        </p:txBody>
-      </p:sp>
-      <p:sp>
-        <p:nvSpPr>
-          <p:cNvPr id="26" name="TextBox 25"/>
-          <p:cNvSpPr txBox="1"/>
-          <p:nvPr/>
-        </p:nvSpPr>
-        <p:spPr>
-          <a:xfrm>
-            <a:off x="7590781" y="617219"/>
-            <a:ext cx="1814240" cy="99752"/>
-          </a:xfrm>
-          <a:prstGeom prst="rect">
-            <a:avLst/>
-          </a:prstGeom>
-          <a:noFill/>
-          <a:ln>
-            <a:noFill/>
-          </a:ln>
-        </p:spPr>
-        <p:txBody>
-          <a:bodyPr wrap="square" lIns="0" tIns="0" rIns="0" bIns="0" anchor="t">
-            <a:spAutoFit/>
-          </a:bodyPr>
-          <a:lstStyle/>
-          <a:p>
-            <a:pPr algn="ctr">
-              <a:spcBef>
-                <a:spcPts val="0"/>
-              </a:spcBef>
-              <a:spcAft>
-                <a:spcPts val="0"/>
-              </a:spcAft>
-            </a:pPr>
-            <a:r>
-              <a:rPr sz="830" b="0" i="1">
-                <a:solidFill>
-                  <a:srgbClr val="555555"/>
-                </a:solidFill>
-                <a:latin typeface="微软雅黑" panose="020B0503020204020204" charset="-122"/>
-              </a:rPr>
-              <a:t>«component»</a:t>
-            </a:r>
-            <a:endParaRPr sz="830" b="0" i="1">
-              <a:solidFill>
-                <a:srgbClr val="555555"/>
-              </a:solidFill>
-              <a:latin typeface="微软雅黑" panose="020B0503020204020204" charset="-122"/>
-            </a:endParaRPr>
-          </a:p>
-        </p:txBody>
-      </p:sp>
-      <p:sp>
-        <p:nvSpPr>
-          <p:cNvPr id="27" name="TextBox 26"/>
-          <p:cNvSpPr txBox="1"/>
-          <p:nvPr/>
-        </p:nvSpPr>
-        <p:spPr>
-          <a:xfrm>
-            <a:off x="7590781" y="791787"/>
-            <a:ext cx="1944865" cy="149629"/>
-          </a:xfrm>
-          <a:prstGeom prst="rect">
-            <a:avLst/>
-          </a:prstGeom>
-          <a:noFill/>
-          <a:ln>
-            <a:noFill/>
-          </a:ln>
-        </p:spPr>
-        <p:txBody>
-          <a:bodyPr wrap="square" lIns="0" tIns="0" rIns="0" bIns="0" anchor="ctr">
-            <a:spAutoFit/>
-          </a:bodyPr>
-          <a:lstStyle/>
-          <a:p>
-            <a:pPr algn="ctr">
-              <a:spcBef>
-                <a:spcPts val="0"/>
-              </a:spcBef>
-              <a:spcAft>
-                <a:spcPts val="0"/>
-              </a:spcAft>
-            </a:pPr>
-            <a:r>
-              <a:rPr sz="1240" b="1" i="0">
-                <a:solidFill>
-                  <a:srgbClr val="1A1A2E"/>
-                </a:solidFill>
-                <a:latin typeface="微软雅黑" panose="020B0503020204020204" charset="-122"/>
-              </a:rPr>
-              <a:t>ECharts 可视化图表</a:t>
-            </a:r>
-            <a:endParaRPr sz="1240" b="1" i="0">
-              <a:solidFill>
-                <a:srgbClr val="1A1A2E"/>
-              </a:solidFill>
-              <a:latin typeface="微软雅黑" panose="020B0503020204020204" charset="-122"/>
+            <a:endParaRPr sz="2000" b="1" i="0" dirty="0">
+              <a:latin typeface="宋体" panose="02010600030101010101" pitchFamily="2" charset="-122"/>
+              <a:ea typeface="宋体" panose="02010600030101010101" pitchFamily="2" charset="-122"/>
             </a:endParaRPr>
           </a:p>
         </p:txBody>
@@ -4351,6 +3455,10 @@
           <a:lstStyle/>
           <a:p>
             <a:pPr algn="ctr"/>
+            <a:endParaRPr sz="3200" b="1">
+              <a:latin typeface="宋体" panose="02010600030101010101" pitchFamily="2" charset="-122"/>
+              <a:ea typeface="宋体" panose="02010600030101010101" pitchFamily="2" charset="-122"/>
+            </a:endParaRPr>
           </a:p>
         </p:txBody>
       </p:sp>
@@ -4396,6 +3504,10 @@
           <a:lstStyle/>
           <a:p>
             <a:pPr algn="ctr"/>
+            <a:endParaRPr sz="3200" b="1">
+              <a:latin typeface="宋体" panose="02010600030101010101" pitchFamily="2" charset="-122"/>
+              <a:ea typeface="宋体" panose="02010600030101010101" pitchFamily="2" charset="-122"/>
+            </a:endParaRPr>
           </a:p>
         </p:txBody>
       </p:sp>
@@ -4441,6 +3553,10 @@
           <a:lstStyle/>
           <a:p>
             <a:pPr algn="ctr"/>
+            <a:endParaRPr sz="3200" b="1">
+              <a:latin typeface="宋体" panose="02010600030101010101" pitchFamily="2" charset="-122"/>
+              <a:ea typeface="宋体" panose="02010600030101010101" pitchFamily="2" charset="-122"/>
+            </a:endParaRPr>
           </a:p>
         </p:txBody>
       </p:sp>
@@ -4486,19 +3602,23 @@
           <a:lstStyle/>
           <a:p>
             <a:pPr algn="ctr"/>
-          </a:p>
-        </p:txBody>
-      </p:sp>
-      <p:sp>
-        <p:nvSpPr>
-          <p:cNvPr id="32" name="TextBox 31"/>
+            <a:endParaRPr sz="3200" b="1">
+              <a:latin typeface="宋体" panose="02010600030101010101" pitchFamily="2" charset="-122"/>
+              <a:ea typeface="宋体" panose="02010600030101010101" pitchFamily="2" charset="-122"/>
+            </a:endParaRPr>
+          </a:p>
+        </p:txBody>
+      </p:sp>
+      <p:sp>
+        <p:nvSpPr>
+          <p:cNvPr id="33" name="TextBox 32"/>
           <p:cNvSpPr txBox="1"/>
           <p:nvPr/>
         </p:nvSpPr>
         <p:spPr>
           <a:xfrm>
-            <a:off x="2075490" y="1979929"/>
-            <a:ext cx="2394797" cy="99752"/>
+            <a:off x="2075490" y="2062955"/>
+            <a:ext cx="2525422" cy="307777"/>
           </a:xfrm>
           <a:prstGeom prst="rect">
             <a:avLst/>
@@ -4509,7 +3629,7 @@
           </a:ln>
         </p:spPr>
         <p:txBody>
-          <a:bodyPr wrap="square" lIns="0" tIns="0" rIns="0" bIns="0" anchor="t">
+          <a:bodyPr wrap="square" lIns="0" tIns="0" rIns="0" bIns="0" anchor="ctr">
             <a:spAutoFit/>
           </a:bodyPr>
           <a:lstStyle/>
@@ -4523,121 +3643,31 @@
               </a:spcAft>
             </a:pPr>
             <a:r>
-              <a:rPr sz="830" b="0" i="1">
-                <a:solidFill>
-                  <a:srgbClr val="555555"/>
-                </a:solidFill>
-                <a:latin typeface="微软雅黑" panose="020B0503020204020204" charset="-122"/>
-              </a:rPr>
-              <a:t>«component»</a:t>
-            </a:r>
-            <a:endParaRPr sz="830" b="0" i="1">
-              <a:solidFill>
-                <a:srgbClr val="555555"/>
-              </a:solidFill>
-              <a:latin typeface="微软雅黑" panose="020B0503020204020204" charset="-122"/>
-            </a:endParaRPr>
-          </a:p>
-        </p:txBody>
-      </p:sp>
-      <p:sp>
-        <p:nvSpPr>
-          <p:cNvPr id="33" name="TextBox 32"/>
-          <p:cNvSpPr txBox="1"/>
-          <p:nvPr/>
-        </p:nvSpPr>
-        <p:spPr>
-          <a:xfrm>
-            <a:off x="2075490" y="2142028"/>
-            <a:ext cx="2525422" cy="149629"/>
-          </a:xfrm>
-          <a:prstGeom prst="rect">
-            <a:avLst/>
-          </a:prstGeom>
-          <a:noFill/>
-          <a:ln>
-            <a:noFill/>
-          </a:ln>
-        </p:spPr>
-        <p:txBody>
-          <a:bodyPr wrap="square" lIns="0" tIns="0" rIns="0" bIns="0" anchor="ctr">
-            <a:spAutoFit/>
-          </a:bodyPr>
-          <a:lstStyle/>
-          <a:p>
-            <a:pPr algn="ctr">
-              <a:spcBef>
-                <a:spcPts val="0"/>
-              </a:spcBef>
-              <a:spcAft>
-                <a:spcPts val="0"/>
-              </a:spcAft>
-            </a:pPr>
-            <a:r>
-              <a:rPr sz="1240" b="1" i="0">
+              <a:rPr sz="2000" b="1" i="0" dirty="0">
                 <a:solidFill>
                   <a:srgbClr val="1A1A2E"/>
                 </a:solidFill>
-                <a:latin typeface="微软雅黑" panose="020B0503020204020204" charset="-122"/>
+                <a:latin typeface="宋体" panose="02010600030101010101" pitchFamily="2" charset="-122"/>
+                <a:ea typeface="宋体" panose="02010600030101010101" pitchFamily="2" charset="-122"/>
               </a:rPr>
-              <a:t>REST API 网关</a:t>
+              <a:t>REST API </a:t>
             </a:r>
-            <a:endParaRPr sz="1240" b="1" i="0">
+            <a:r>
+              <a:rPr sz="2000" b="1" i="0" dirty="0" err="1">
+                <a:solidFill>
+                  <a:srgbClr val="1A1A2E"/>
+                </a:solidFill>
+                <a:latin typeface="宋体" panose="02010600030101010101" pitchFamily="2" charset="-122"/>
+                <a:ea typeface="宋体" panose="02010600030101010101" pitchFamily="2" charset="-122"/>
+              </a:rPr>
+              <a:t>网关</a:t>
+            </a:r>
+            <a:endParaRPr sz="2000" b="1" i="0" dirty="0">
               <a:solidFill>
                 <a:srgbClr val="1A1A2E"/>
               </a:solidFill>
-              <a:latin typeface="微软雅黑" panose="020B0503020204020204" charset="-122"/>
-            </a:endParaRPr>
-          </a:p>
-        </p:txBody>
-      </p:sp>
-      <p:sp>
-        <p:nvSpPr>
-          <p:cNvPr id="34" name="TextBox 33"/>
-          <p:cNvSpPr txBox="1"/>
-          <p:nvPr/>
-        </p:nvSpPr>
-        <p:spPr>
-          <a:xfrm>
-            <a:off x="2090004" y="2341533"/>
-            <a:ext cx="2496394" cy="99752"/>
-          </a:xfrm>
-          <a:prstGeom prst="rect">
-            <a:avLst/>
-          </a:prstGeom>
-          <a:noFill/>
-          <a:ln>
-            <a:noFill/>
-          </a:ln>
-        </p:spPr>
-        <p:txBody>
-          <a:bodyPr wrap="square" lIns="0" tIns="0" rIns="0" bIns="0" anchor="ctr">
-            <a:spAutoFit/>
-          </a:bodyPr>
-          <a:lstStyle/>
-          <a:p>
-            <a:pPr algn="ctr">
-              <a:spcBef>
-                <a:spcPts val="0"/>
-              </a:spcBef>
-              <a:spcAft>
-                <a:spcPts val="0"/>
-              </a:spcAft>
-            </a:pPr>
-            <a:r>
-              <a:rPr sz="950" b="0" i="0">
-                <a:solidFill>
-                  <a:srgbClr val="555555"/>
-                </a:solidFill>
-                <a:latin typeface="微软雅黑" panose="020B0503020204020204" charset="-122"/>
-              </a:rPr>
-              <a:t>Flask / 鉴权</a:t>
-            </a:r>
-            <a:endParaRPr sz="950" b="0" i="0">
-              <a:solidFill>
-                <a:srgbClr val="555555"/>
-              </a:solidFill>
-              <a:latin typeface="微软雅黑" panose="020B0503020204020204" charset="-122"/>
+              <a:latin typeface="宋体" panose="02010600030101010101" pitchFamily="2" charset="-122"/>
+              <a:ea typeface="宋体" panose="02010600030101010101" pitchFamily="2" charset="-122"/>
             </a:endParaRPr>
           </a:p>
         </p:txBody>
@@ -4684,6 +3714,10 @@
           <a:lstStyle/>
           <a:p>
             <a:pPr algn="ctr"/>
+            <a:endParaRPr sz="3200" b="1">
+              <a:latin typeface="宋体" panose="02010600030101010101" pitchFamily="2" charset="-122"/>
+              <a:ea typeface="宋体" panose="02010600030101010101" pitchFamily="2" charset="-122"/>
+            </a:endParaRPr>
           </a:p>
         </p:txBody>
       </p:sp>
@@ -4729,6 +3763,10 @@
           <a:lstStyle/>
           <a:p>
             <a:pPr algn="ctr"/>
+            <a:endParaRPr sz="3200" b="1">
+              <a:latin typeface="宋体" panose="02010600030101010101" pitchFamily="2" charset="-122"/>
+              <a:ea typeface="宋体" panose="02010600030101010101" pitchFamily="2" charset="-122"/>
+            </a:endParaRPr>
           </a:p>
         </p:txBody>
       </p:sp>
@@ -4774,6 +3812,10 @@
           <a:lstStyle/>
           <a:p>
             <a:pPr algn="ctr"/>
+            <a:endParaRPr sz="3200" b="1">
+              <a:latin typeface="宋体" panose="02010600030101010101" pitchFamily="2" charset="-122"/>
+              <a:ea typeface="宋体" panose="02010600030101010101" pitchFamily="2" charset="-122"/>
+            </a:endParaRPr>
           </a:p>
         </p:txBody>
       </p:sp>
@@ -4819,19 +3861,23 @@
           <a:lstStyle/>
           <a:p>
             <a:pPr algn="ctr"/>
-          </a:p>
-        </p:txBody>
-      </p:sp>
-      <p:sp>
-        <p:nvSpPr>
-          <p:cNvPr id="39" name="TextBox 38"/>
+            <a:endParaRPr sz="3200" b="1">
+              <a:latin typeface="宋体" panose="02010600030101010101" pitchFamily="2" charset="-122"/>
+              <a:ea typeface="宋体" panose="02010600030101010101" pitchFamily="2" charset="-122"/>
+            </a:endParaRPr>
+          </a:p>
+        </p:txBody>
+      </p:sp>
+      <p:sp>
+        <p:nvSpPr>
+          <p:cNvPr id="40" name="TextBox 39"/>
           <p:cNvSpPr txBox="1"/>
           <p:nvPr/>
         </p:nvSpPr>
         <p:spPr>
           <a:xfrm>
-            <a:off x="5921680" y="1979929"/>
-            <a:ext cx="1959379" cy="99752"/>
+            <a:off x="5921680" y="2062955"/>
+            <a:ext cx="2090004" cy="307777"/>
           </a:xfrm>
           <a:prstGeom prst="rect">
             <a:avLst/>
@@ -4842,7 +3888,7 @@
           </a:ln>
         </p:spPr>
         <p:txBody>
-          <a:bodyPr wrap="square" lIns="0" tIns="0" rIns="0" bIns="0" anchor="t">
+          <a:bodyPr wrap="square" lIns="0" tIns="0" rIns="0" bIns="0" anchor="ctr">
             <a:spAutoFit/>
           </a:bodyPr>
           <a:lstStyle/>
@@ -4856,454 +3902,21 @@
               </a:spcAft>
             </a:pPr>
             <a:r>
-              <a:rPr sz="830" b="0" i="1">
-                <a:solidFill>
-                  <a:srgbClr val="555555"/>
-                </a:solidFill>
-                <a:latin typeface="微软雅黑" panose="020B0503020204020204" charset="-122"/>
-              </a:rPr>
-              <a:t>«component»</a:t>
-            </a:r>
-            <a:endParaRPr sz="830" b="0" i="1">
-              <a:solidFill>
-                <a:srgbClr val="555555"/>
-              </a:solidFill>
-              <a:latin typeface="微软雅黑" panose="020B0503020204020204" charset="-122"/>
-            </a:endParaRPr>
-          </a:p>
-        </p:txBody>
-      </p:sp>
-      <p:sp>
-        <p:nvSpPr>
-          <p:cNvPr id="40" name="TextBox 39"/>
-          <p:cNvSpPr txBox="1"/>
-          <p:nvPr/>
-        </p:nvSpPr>
-        <p:spPr>
-          <a:xfrm>
-            <a:off x="5921680" y="2142028"/>
-            <a:ext cx="2090004" cy="149629"/>
-          </a:xfrm>
-          <a:prstGeom prst="rect">
-            <a:avLst/>
-          </a:prstGeom>
-          <a:noFill/>
-          <a:ln>
-            <a:noFill/>
-          </a:ln>
-        </p:spPr>
-        <p:txBody>
-          <a:bodyPr wrap="square" lIns="0" tIns="0" rIns="0" bIns="0" anchor="ctr">
-            <a:spAutoFit/>
-          </a:bodyPr>
-          <a:lstStyle/>
-          <a:p>
-            <a:pPr algn="ctr">
-              <a:spcBef>
-                <a:spcPts val="0"/>
-              </a:spcBef>
-              <a:spcAft>
-                <a:spcPts val="0"/>
-              </a:spcAft>
-            </a:pPr>
-            <a:r>
-              <a:rPr sz="1240" b="1" i="0">
+              <a:rPr sz="2000" b="1" i="0" dirty="0" err="1">
                 <a:solidFill>
                   <a:srgbClr val="1A1A2E"/>
                 </a:solidFill>
-                <a:latin typeface="微软雅黑" panose="020B0503020204020204" charset="-122"/>
+                <a:latin typeface="宋体" panose="02010600030101010101" pitchFamily="2" charset="-122"/>
+                <a:ea typeface="宋体" panose="02010600030101010101" pitchFamily="2" charset="-122"/>
               </a:rPr>
               <a:t>任务调度器</a:t>
             </a:r>
-            <a:endParaRPr sz="1240" b="1" i="0">
+            <a:endParaRPr sz="2000" b="1" i="0" dirty="0">
               <a:solidFill>
                 <a:srgbClr val="1A1A2E"/>
               </a:solidFill>
-              <a:latin typeface="微软雅黑" panose="020B0503020204020204" charset="-122"/>
-            </a:endParaRPr>
-          </a:p>
-        </p:txBody>
-      </p:sp>
-      <p:sp>
-        <p:nvSpPr>
-          <p:cNvPr id="41" name="TextBox 40"/>
-          <p:cNvSpPr txBox="1"/>
-          <p:nvPr/>
-        </p:nvSpPr>
-        <p:spPr>
-          <a:xfrm>
-            <a:off x="5936194" y="2341533"/>
-            <a:ext cx="2060977" cy="99752"/>
-          </a:xfrm>
-          <a:prstGeom prst="rect">
-            <a:avLst/>
-          </a:prstGeom>
-          <a:noFill/>
-          <a:ln>
-            <a:noFill/>
-          </a:ln>
-        </p:spPr>
-        <p:txBody>
-          <a:bodyPr wrap="square" lIns="0" tIns="0" rIns="0" bIns="0" anchor="ctr">
-            <a:spAutoFit/>
-          </a:bodyPr>
-          <a:lstStyle/>
-          <a:p>
-            <a:pPr algn="ctr">
-              <a:spcBef>
-                <a:spcPts val="0"/>
-              </a:spcBef>
-              <a:spcAft>
-                <a:spcPts val="0"/>
-              </a:spcAft>
-            </a:pPr>
-            <a:r>
-              <a:rPr sz="950" b="0" i="0">
-                <a:solidFill>
-                  <a:srgbClr val="555555"/>
-                </a:solidFill>
-                <a:latin typeface="微软雅黑" panose="020B0503020204020204" charset="-122"/>
-              </a:rPr>
-              <a:t>异步调度</a:t>
-            </a:r>
-            <a:endParaRPr sz="950" b="0" i="0">
-              <a:solidFill>
-                <a:srgbClr val="555555"/>
-              </a:solidFill>
-              <a:latin typeface="微软雅黑" panose="020B0503020204020204" charset="-122"/>
-            </a:endParaRPr>
-          </a:p>
-        </p:txBody>
-      </p:sp>
-      <p:sp>
-        <p:nvSpPr>
-          <p:cNvPr id="42" name="Rectangle 41"/>
-          <p:cNvSpPr/>
-          <p:nvPr/>
-        </p:nvSpPr>
-        <p:spPr>
-          <a:xfrm>
-            <a:off x="471702" y="2908877"/>
-            <a:ext cx="1959379" cy="561109"/>
-          </a:xfrm>
-          <a:prstGeom prst="rect">
-            <a:avLst/>
-          </a:prstGeom>
-          <a:solidFill>
-            <a:srgbClr val="FFFFFF"/>
-          </a:solidFill>
-          <a:ln w="13970">
-            <a:solidFill>
-              <a:srgbClr val="546E7A"/>
-            </a:solidFill>
-          </a:ln>
-        </p:spPr>
-        <p:style>
-          <a:lnRef idx="1">
-            <a:schemeClr val="accent1"/>
-          </a:lnRef>
-          <a:fillRef idx="3">
-            <a:schemeClr val="accent1"/>
-          </a:fillRef>
-          <a:effectRef idx="2">
-            <a:schemeClr val="accent1"/>
-          </a:effectRef>
-          <a:fontRef idx="minor">
-            <a:schemeClr val="lt1"/>
-          </a:fontRef>
-        </p:style>
-        <p:txBody>
-          <a:bodyPr rtlCol="0" anchor="ctr"/>
-          <a:lstStyle/>
-          <a:p>
-            <a:pPr algn="ctr"/>
-          </a:p>
-        </p:txBody>
-      </p:sp>
-      <p:sp>
-        <p:nvSpPr>
-          <p:cNvPr id="43" name="Rectangle 42"/>
-          <p:cNvSpPr/>
-          <p:nvPr/>
-        </p:nvSpPr>
-        <p:spPr>
-          <a:xfrm>
-            <a:off x="2235144" y="2946284"/>
-            <a:ext cx="137882" cy="143394"/>
-          </a:xfrm>
-          <a:prstGeom prst="rect">
-            <a:avLst/>
-          </a:prstGeom>
-          <a:solidFill>
-            <a:srgbClr val="FFFFFF"/>
-          </a:solidFill>
-          <a:ln w="10160">
-            <a:solidFill>
-              <a:srgbClr val="546E7A"/>
-            </a:solidFill>
-          </a:ln>
-        </p:spPr>
-        <p:style>
-          <a:lnRef idx="1">
-            <a:schemeClr val="accent1"/>
-          </a:lnRef>
-          <a:fillRef idx="3">
-            <a:schemeClr val="accent1"/>
-          </a:fillRef>
-          <a:effectRef idx="2">
-            <a:schemeClr val="accent1"/>
-          </a:effectRef>
-          <a:fontRef idx="minor">
-            <a:schemeClr val="lt1"/>
-          </a:fontRef>
-        </p:style>
-        <p:txBody>
-          <a:bodyPr rtlCol="0" anchor="ctr"/>
-          <a:lstStyle/>
-          <a:p>
-            <a:pPr algn="ctr"/>
-          </a:p>
-        </p:txBody>
-      </p:sp>
-      <p:sp>
-        <p:nvSpPr>
-          <p:cNvPr id="44" name="Rectangle 43"/>
-          <p:cNvSpPr/>
-          <p:nvPr/>
-        </p:nvSpPr>
-        <p:spPr>
-          <a:xfrm>
-            <a:off x="2206116" y="2958753"/>
-            <a:ext cx="58055" cy="41148"/>
-          </a:xfrm>
-          <a:prstGeom prst="rect">
-            <a:avLst/>
-          </a:prstGeom>
-          <a:solidFill>
-            <a:srgbClr val="FFFFFF"/>
-          </a:solidFill>
-          <a:ln w="10160">
-            <a:solidFill>
-              <a:srgbClr val="546E7A"/>
-            </a:solidFill>
-          </a:ln>
-        </p:spPr>
-        <p:style>
-          <a:lnRef idx="1">
-            <a:schemeClr val="accent1"/>
-          </a:lnRef>
-          <a:fillRef idx="3">
-            <a:schemeClr val="accent1"/>
-          </a:fillRef>
-          <a:effectRef idx="2">
-            <a:schemeClr val="accent1"/>
-          </a:effectRef>
-          <a:fontRef idx="minor">
-            <a:schemeClr val="lt1"/>
-          </a:fontRef>
-        </p:style>
-        <p:txBody>
-          <a:bodyPr rtlCol="0" anchor="ctr"/>
-          <a:lstStyle/>
-          <a:p>
-            <a:pPr algn="ctr"/>
-          </a:p>
-        </p:txBody>
-      </p:sp>
-      <p:sp>
-        <p:nvSpPr>
-          <p:cNvPr id="45" name="Rectangle 44"/>
-          <p:cNvSpPr/>
-          <p:nvPr/>
-        </p:nvSpPr>
-        <p:spPr>
-          <a:xfrm>
-            <a:off x="2206116" y="3013617"/>
-            <a:ext cx="58055" cy="41148"/>
-          </a:xfrm>
-          <a:prstGeom prst="rect">
-            <a:avLst/>
-          </a:prstGeom>
-          <a:solidFill>
-            <a:srgbClr val="FFFFFF"/>
-          </a:solidFill>
-          <a:ln w="10160">
-            <a:solidFill>
-              <a:srgbClr val="546E7A"/>
-            </a:solidFill>
-          </a:ln>
-        </p:spPr>
-        <p:style>
-          <a:lnRef idx="1">
-            <a:schemeClr val="accent1"/>
-          </a:lnRef>
-          <a:fillRef idx="3">
-            <a:schemeClr val="accent1"/>
-          </a:fillRef>
-          <a:effectRef idx="2">
-            <a:schemeClr val="accent1"/>
-          </a:effectRef>
-          <a:fontRef idx="minor">
-            <a:schemeClr val="lt1"/>
-          </a:fontRef>
-        </p:style>
-        <p:txBody>
-          <a:bodyPr rtlCol="0" anchor="ctr"/>
-          <a:lstStyle/>
-          <a:p>
-            <a:pPr algn="ctr"/>
-          </a:p>
-        </p:txBody>
-      </p:sp>
-      <p:sp>
-        <p:nvSpPr>
-          <p:cNvPr id="46" name="TextBox 45"/>
-          <p:cNvSpPr txBox="1"/>
-          <p:nvPr/>
-        </p:nvSpPr>
-        <p:spPr>
-          <a:xfrm>
-            <a:off x="587813" y="2958753"/>
-            <a:ext cx="1596531" cy="99752"/>
-          </a:xfrm>
-          <a:prstGeom prst="rect">
-            <a:avLst/>
-          </a:prstGeom>
-          <a:noFill/>
-          <a:ln>
-            <a:noFill/>
-          </a:ln>
-        </p:spPr>
-        <p:txBody>
-          <a:bodyPr wrap="square" lIns="0" tIns="0" rIns="0" bIns="0" anchor="t">
-            <a:spAutoFit/>
-          </a:bodyPr>
-          <a:lstStyle/>
-          <a:p>
-            <a:pPr algn="ctr">
-              <a:spcBef>
-                <a:spcPts val="0"/>
-              </a:spcBef>
-              <a:spcAft>
-                <a:spcPts val="0"/>
-              </a:spcAft>
-            </a:pPr>
-            <a:r>
-              <a:rPr sz="830" b="0" i="1">
-                <a:solidFill>
-                  <a:srgbClr val="555555"/>
-                </a:solidFill>
-                <a:latin typeface="微软雅黑" panose="020B0503020204020204" charset="-122"/>
-              </a:rPr>
-              <a:t>«component»</a:t>
-            </a:r>
-            <a:endParaRPr sz="830" b="0" i="1">
-              <a:solidFill>
-                <a:srgbClr val="555555"/>
-              </a:solidFill>
-              <a:latin typeface="微软雅黑" panose="020B0503020204020204" charset="-122"/>
-            </a:endParaRPr>
-          </a:p>
-        </p:txBody>
-      </p:sp>
-      <p:sp>
-        <p:nvSpPr>
-          <p:cNvPr id="47" name="TextBox 46"/>
-          <p:cNvSpPr txBox="1"/>
-          <p:nvPr/>
-        </p:nvSpPr>
-        <p:spPr>
-          <a:xfrm>
-            <a:off x="587813" y="3095913"/>
-            <a:ext cx="1727156" cy="149629"/>
-          </a:xfrm>
-          <a:prstGeom prst="rect">
-            <a:avLst/>
-          </a:prstGeom>
-          <a:noFill/>
-          <a:ln>
-            <a:noFill/>
-          </a:ln>
-        </p:spPr>
-        <p:txBody>
-          <a:bodyPr wrap="square" lIns="0" tIns="0" rIns="0" bIns="0" anchor="ctr">
-            <a:spAutoFit/>
-          </a:bodyPr>
-          <a:lstStyle/>
-          <a:p>
-            <a:pPr algn="ctr">
-              <a:spcBef>
-                <a:spcPts val="0"/>
-              </a:spcBef>
-              <a:spcAft>
-                <a:spcPts val="0"/>
-              </a:spcAft>
-            </a:pPr>
-            <a:r>
-              <a:rPr sz="1240" b="1" i="0">
-                <a:solidFill>
-                  <a:srgbClr val="1A1A2E"/>
-                </a:solidFill>
-                <a:latin typeface="微软雅黑" panose="020B0503020204020204" charset="-122"/>
-              </a:rPr>
-              <a:t>CVE 知识库</a:t>
-            </a:r>
-            <a:endParaRPr sz="1240" b="1" i="0">
-              <a:solidFill>
-                <a:srgbClr val="1A1A2E"/>
-              </a:solidFill>
-              <a:latin typeface="微软雅黑" panose="020B0503020204020204" charset="-122"/>
-            </a:endParaRPr>
-          </a:p>
-        </p:txBody>
-      </p:sp>
-      <p:sp>
-        <p:nvSpPr>
-          <p:cNvPr id="48" name="TextBox 47"/>
-          <p:cNvSpPr txBox="1"/>
-          <p:nvPr/>
-        </p:nvSpPr>
-        <p:spPr>
-          <a:xfrm>
-            <a:off x="602327" y="3295419"/>
-            <a:ext cx="1698128" cy="99752"/>
-          </a:xfrm>
-          <a:prstGeom prst="rect">
-            <a:avLst/>
-          </a:prstGeom>
-          <a:noFill/>
-          <a:ln>
-            <a:noFill/>
-          </a:ln>
-        </p:spPr>
-        <p:txBody>
-          <a:bodyPr wrap="square" lIns="0" tIns="0" rIns="0" bIns="0" anchor="ctr">
-            <a:spAutoFit/>
-          </a:bodyPr>
-          <a:lstStyle/>
-          <a:p>
-            <a:pPr algn="ctr">
-              <a:spcBef>
-                <a:spcPts val="0"/>
-              </a:spcBef>
-              <a:spcAft>
-                <a:spcPts val="0"/>
-              </a:spcAft>
-            </a:pPr>
-            <a:r>
-              <a:rPr sz="950" b="0" i="0">
-                <a:solidFill>
-                  <a:srgbClr val="555555"/>
-                </a:solidFill>
-                <a:latin typeface="微软雅黑" panose="020B0503020204020204" charset="-122"/>
-              </a:rPr>
-              <a:t>导入 / 检索</a:t>
-            </a:r>
-            <a:endParaRPr sz="950" b="0" i="0">
-              <a:solidFill>
-                <a:srgbClr val="555555"/>
-              </a:solidFill>
-              <a:latin typeface="微软雅黑" panose="020B0503020204020204" charset="-122"/>
+              <a:latin typeface="宋体" panose="02010600030101010101" pitchFamily="2" charset="-122"/>
+              <a:ea typeface="宋体" panose="02010600030101010101" pitchFamily="2" charset="-122"/>
             </a:endParaRPr>
           </a:p>
         </p:txBody>
@@ -5350,6 +3963,10 @@
           <a:lstStyle/>
           <a:p>
             <a:pPr algn="ctr"/>
+            <a:endParaRPr sz="3200" b="1">
+              <a:latin typeface="宋体" panose="02010600030101010101" pitchFamily="2" charset="-122"/>
+              <a:ea typeface="宋体" panose="02010600030101010101" pitchFamily="2" charset="-122"/>
+            </a:endParaRPr>
           </a:p>
         </p:txBody>
       </p:sp>
@@ -5395,6 +4012,10 @@
           <a:lstStyle/>
           <a:p>
             <a:pPr algn="ctr"/>
+            <a:endParaRPr sz="3200" b="1">
+              <a:latin typeface="宋体" panose="02010600030101010101" pitchFamily="2" charset="-122"/>
+              <a:ea typeface="宋体" panose="02010600030101010101" pitchFamily="2" charset="-122"/>
+            </a:endParaRPr>
           </a:p>
         </p:txBody>
       </p:sp>
@@ -5440,6 +4061,10 @@
           <a:lstStyle/>
           <a:p>
             <a:pPr algn="ctr"/>
+            <a:endParaRPr sz="3200" b="1">
+              <a:latin typeface="宋体" panose="02010600030101010101" pitchFamily="2" charset="-122"/>
+              <a:ea typeface="宋体" panose="02010600030101010101" pitchFamily="2" charset="-122"/>
+            </a:endParaRPr>
           </a:p>
         </p:txBody>
       </p:sp>
@@ -5485,19 +4110,23 @@
           <a:lstStyle/>
           <a:p>
             <a:pPr algn="ctr"/>
-          </a:p>
-        </p:txBody>
-      </p:sp>
-      <p:sp>
-        <p:nvSpPr>
-          <p:cNvPr id="53" name="TextBox 52"/>
+            <a:endParaRPr sz="3200" b="1">
+              <a:latin typeface="宋体" panose="02010600030101010101" pitchFamily="2" charset="-122"/>
+              <a:ea typeface="宋体" panose="02010600030101010101" pitchFamily="2" charset="-122"/>
+            </a:endParaRPr>
+          </a:p>
+        </p:txBody>
+      </p:sp>
+      <p:sp>
+        <p:nvSpPr>
+          <p:cNvPr id="54" name="TextBox 53"/>
           <p:cNvSpPr txBox="1"/>
           <p:nvPr/>
         </p:nvSpPr>
         <p:spPr>
           <a:xfrm>
-            <a:off x="2764902" y="2958753"/>
-            <a:ext cx="1596531" cy="99752"/>
+            <a:off x="2764902" y="3016840"/>
+            <a:ext cx="1727156" cy="307777"/>
           </a:xfrm>
           <a:prstGeom prst="rect">
             <a:avLst/>
@@ -5508,7 +4137,7 @@
           </a:ln>
         </p:spPr>
         <p:txBody>
-          <a:bodyPr wrap="square" lIns="0" tIns="0" rIns="0" bIns="0" anchor="t">
+          <a:bodyPr wrap="square" lIns="0" tIns="0" rIns="0" bIns="0" anchor="ctr">
             <a:spAutoFit/>
           </a:bodyPr>
           <a:lstStyle/>
@@ -5522,121 +4151,21 @@
               </a:spcAft>
             </a:pPr>
             <a:r>
-              <a:rPr sz="830" b="0" i="1">
-                <a:solidFill>
-                  <a:srgbClr val="555555"/>
-                </a:solidFill>
-                <a:latin typeface="微软雅黑" panose="020B0503020204020204" charset="-122"/>
-              </a:rPr>
-              <a:t>«component»</a:t>
-            </a:r>
-            <a:endParaRPr sz="830" b="0" i="1">
-              <a:solidFill>
-                <a:srgbClr val="555555"/>
-              </a:solidFill>
-              <a:latin typeface="微软雅黑" panose="020B0503020204020204" charset="-122"/>
-            </a:endParaRPr>
-          </a:p>
-        </p:txBody>
-      </p:sp>
-      <p:sp>
-        <p:nvSpPr>
-          <p:cNvPr id="54" name="TextBox 53"/>
-          <p:cNvSpPr txBox="1"/>
-          <p:nvPr/>
-        </p:nvSpPr>
-        <p:spPr>
-          <a:xfrm>
-            <a:off x="2764902" y="3095913"/>
-            <a:ext cx="1727156" cy="149629"/>
-          </a:xfrm>
-          <a:prstGeom prst="rect">
-            <a:avLst/>
-          </a:prstGeom>
-          <a:noFill/>
-          <a:ln>
-            <a:noFill/>
-          </a:ln>
-        </p:spPr>
-        <p:txBody>
-          <a:bodyPr wrap="square" lIns="0" tIns="0" rIns="0" bIns="0" anchor="ctr">
-            <a:spAutoFit/>
-          </a:bodyPr>
-          <a:lstStyle/>
-          <a:p>
-            <a:pPr algn="ctr">
-              <a:spcBef>
-                <a:spcPts val="0"/>
-              </a:spcBef>
-              <a:spcAft>
-                <a:spcPts val="0"/>
-              </a:spcAft>
-            </a:pPr>
-            <a:r>
-              <a:rPr sz="1240" b="1" i="0">
+              <a:rPr sz="2000" b="1" i="0" dirty="0" err="1">
                 <a:solidFill>
                   <a:srgbClr val="1A1A2E"/>
                 </a:solidFill>
-                <a:latin typeface="微软雅黑" panose="020B0503020204020204" charset="-122"/>
+                <a:latin typeface="宋体" panose="02010600030101010101" pitchFamily="2" charset="-122"/>
+                <a:ea typeface="宋体" panose="02010600030101010101" pitchFamily="2" charset="-122"/>
               </a:rPr>
               <a:t>策略生成</a:t>
             </a:r>
-            <a:endParaRPr sz="1240" b="1" i="0">
+            <a:endParaRPr sz="2000" b="1" i="0" dirty="0">
               <a:solidFill>
                 <a:srgbClr val="1A1A2E"/>
               </a:solidFill>
-              <a:latin typeface="微软雅黑" panose="020B0503020204020204" charset="-122"/>
-            </a:endParaRPr>
-          </a:p>
-        </p:txBody>
-      </p:sp>
-      <p:sp>
-        <p:nvSpPr>
-          <p:cNvPr id="55" name="TextBox 54"/>
-          <p:cNvSpPr txBox="1"/>
-          <p:nvPr/>
-        </p:nvSpPr>
-        <p:spPr>
-          <a:xfrm>
-            <a:off x="2779416" y="3295419"/>
-            <a:ext cx="1698128" cy="99752"/>
-          </a:xfrm>
-          <a:prstGeom prst="rect">
-            <a:avLst/>
-          </a:prstGeom>
-          <a:noFill/>
-          <a:ln>
-            <a:noFill/>
-          </a:ln>
-        </p:spPr>
-        <p:txBody>
-          <a:bodyPr wrap="square" lIns="0" tIns="0" rIns="0" bIns="0" anchor="ctr">
-            <a:spAutoFit/>
-          </a:bodyPr>
-          <a:lstStyle/>
-          <a:p>
-            <a:pPr algn="ctr">
-              <a:spcBef>
-                <a:spcPts val="0"/>
-              </a:spcBef>
-              <a:spcAft>
-                <a:spcPts val="0"/>
-              </a:spcAft>
-            </a:pPr>
-            <a:r>
-              <a:rPr sz="950" b="0" i="0">
-                <a:solidFill>
-                  <a:srgbClr val="555555"/>
-                </a:solidFill>
-                <a:latin typeface="微软雅黑" panose="020B0503020204020204" charset="-122"/>
-              </a:rPr>
-              <a:t>候选生成</a:t>
-            </a:r>
-            <a:endParaRPr sz="950" b="0" i="0">
-              <a:solidFill>
-                <a:srgbClr val="555555"/>
-              </a:solidFill>
-              <a:latin typeface="微软雅黑" panose="020B0503020204020204" charset="-122"/>
+              <a:latin typeface="宋体" panose="02010600030101010101" pitchFamily="2" charset="-122"/>
+              <a:ea typeface="宋体" panose="02010600030101010101" pitchFamily="2" charset="-122"/>
             </a:endParaRPr>
           </a:p>
         </p:txBody>
@@ -5683,6 +4212,10 @@
           <a:lstStyle/>
           <a:p>
             <a:pPr algn="ctr"/>
+            <a:endParaRPr sz="3200" b="1">
+              <a:latin typeface="宋体" panose="02010600030101010101" pitchFamily="2" charset="-122"/>
+              <a:ea typeface="宋体" panose="02010600030101010101" pitchFamily="2" charset="-122"/>
+            </a:endParaRPr>
           </a:p>
         </p:txBody>
       </p:sp>
@@ -5728,6 +4261,10 @@
           <a:lstStyle/>
           <a:p>
             <a:pPr algn="ctr"/>
+            <a:endParaRPr sz="3200" b="1">
+              <a:latin typeface="宋体" panose="02010600030101010101" pitchFamily="2" charset="-122"/>
+              <a:ea typeface="宋体" panose="02010600030101010101" pitchFamily="2" charset="-122"/>
+            </a:endParaRPr>
           </a:p>
         </p:txBody>
       </p:sp>
@@ -5773,6 +4310,10 @@
           <a:lstStyle/>
           <a:p>
             <a:pPr algn="ctr"/>
+            <a:endParaRPr sz="3200" b="1">
+              <a:latin typeface="宋体" panose="02010600030101010101" pitchFamily="2" charset="-122"/>
+              <a:ea typeface="宋体" panose="02010600030101010101" pitchFamily="2" charset="-122"/>
+            </a:endParaRPr>
           </a:p>
         </p:txBody>
       </p:sp>
@@ -5818,19 +4359,23 @@
           <a:lstStyle/>
           <a:p>
             <a:pPr algn="ctr"/>
-          </a:p>
-        </p:txBody>
-      </p:sp>
-      <p:sp>
-        <p:nvSpPr>
-          <p:cNvPr id="60" name="TextBox 59"/>
+            <a:endParaRPr sz="3200" b="1">
+              <a:latin typeface="宋体" panose="02010600030101010101" pitchFamily="2" charset="-122"/>
+              <a:ea typeface="宋体" panose="02010600030101010101" pitchFamily="2" charset="-122"/>
+            </a:endParaRPr>
+          </a:p>
+        </p:txBody>
+      </p:sp>
+      <p:sp>
+        <p:nvSpPr>
+          <p:cNvPr id="61" name="TextBox 60"/>
           <p:cNvSpPr txBox="1"/>
           <p:nvPr/>
         </p:nvSpPr>
         <p:spPr>
           <a:xfrm>
-            <a:off x="4941990" y="2958753"/>
-            <a:ext cx="1596531" cy="99752"/>
+            <a:off x="4941990" y="3016840"/>
+            <a:ext cx="1727156" cy="307777"/>
           </a:xfrm>
           <a:prstGeom prst="rect">
             <a:avLst/>
@@ -5841,7 +4386,7 @@
           </a:ln>
         </p:spPr>
         <p:txBody>
-          <a:bodyPr wrap="square" lIns="0" tIns="0" rIns="0" bIns="0" anchor="t">
+          <a:bodyPr wrap="square" lIns="0" tIns="0" rIns="0" bIns="0" anchor="ctr">
             <a:spAutoFit/>
           </a:bodyPr>
           <a:lstStyle/>
@@ -5855,121 +4400,21 @@
               </a:spcAft>
             </a:pPr>
             <a:r>
-              <a:rPr sz="830" b="0" i="1">
-                <a:solidFill>
-                  <a:srgbClr val="555555"/>
-                </a:solidFill>
-                <a:latin typeface="微软雅黑" panose="020B0503020204020204" charset="-122"/>
-              </a:rPr>
-              <a:t>«component»</a:t>
-            </a:r>
-            <a:endParaRPr sz="830" b="0" i="1">
-              <a:solidFill>
-                <a:srgbClr val="555555"/>
-              </a:solidFill>
-              <a:latin typeface="微软雅黑" panose="020B0503020204020204" charset="-122"/>
-            </a:endParaRPr>
-          </a:p>
-        </p:txBody>
-      </p:sp>
-      <p:sp>
-        <p:nvSpPr>
-          <p:cNvPr id="61" name="TextBox 60"/>
-          <p:cNvSpPr txBox="1"/>
-          <p:nvPr/>
-        </p:nvSpPr>
-        <p:spPr>
-          <a:xfrm>
-            <a:off x="4941990" y="3095913"/>
-            <a:ext cx="1727156" cy="149629"/>
-          </a:xfrm>
-          <a:prstGeom prst="rect">
-            <a:avLst/>
-          </a:prstGeom>
-          <a:noFill/>
-          <a:ln>
-            <a:noFill/>
-          </a:ln>
-        </p:spPr>
-        <p:txBody>
-          <a:bodyPr wrap="square" lIns="0" tIns="0" rIns="0" bIns="0" anchor="ctr">
-            <a:spAutoFit/>
-          </a:bodyPr>
-          <a:lstStyle/>
-          <a:p>
-            <a:pPr algn="ctr">
-              <a:spcBef>
-                <a:spcPts val="0"/>
-              </a:spcBef>
-              <a:spcAft>
-                <a:spcPts val="0"/>
-              </a:spcAft>
-            </a:pPr>
-            <a:r>
-              <a:rPr sz="1240" b="1" i="0">
+              <a:rPr sz="2000" b="1" i="0" dirty="0" err="1">
                 <a:solidFill>
                   <a:srgbClr val="1A1A2E"/>
                 </a:solidFill>
-                <a:latin typeface="微软雅黑" panose="020B0503020204020204" charset="-122"/>
+                <a:latin typeface="宋体" panose="02010600030101010101" pitchFamily="2" charset="-122"/>
+                <a:ea typeface="宋体" panose="02010600030101010101" pitchFamily="2" charset="-122"/>
               </a:rPr>
               <a:t>评审与排序</a:t>
             </a:r>
-            <a:endParaRPr sz="1240" b="1" i="0">
+            <a:endParaRPr sz="2000" b="1" i="0" dirty="0">
               <a:solidFill>
                 <a:srgbClr val="1A1A2E"/>
               </a:solidFill>
-              <a:latin typeface="微软雅黑" panose="020B0503020204020204" charset="-122"/>
-            </a:endParaRPr>
-          </a:p>
-        </p:txBody>
-      </p:sp>
-      <p:sp>
-        <p:nvSpPr>
-          <p:cNvPr id="62" name="TextBox 61"/>
-          <p:cNvSpPr txBox="1"/>
-          <p:nvPr/>
-        </p:nvSpPr>
-        <p:spPr>
-          <a:xfrm>
-            <a:off x="4956504" y="3295419"/>
-            <a:ext cx="1698128" cy="99752"/>
-          </a:xfrm>
-          <a:prstGeom prst="rect">
-            <a:avLst/>
-          </a:prstGeom>
-          <a:noFill/>
-          <a:ln>
-            <a:noFill/>
-          </a:ln>
-        </p:spPr>
-        <p:txBody>
-          <a:bodyPr wrap="square" lIns="0" tIns="0" rIns="0" bIns="0" anchor="ctr">
-            <a:spAutoFit/>
-          </a:bodyPr>
-          <a:lstStyle/>
-          <a:p>
-            <a:pPr algn="ctr">
-              <a:spcBef>
-                <a:spcPts val="0"/>
-              </a:spcBef>
-              <a:spcAft>
-                <a:spcPts val="0"/>
-              </a:spcAft>
-            </a:pPr>
-            <a:r>
-              <a:rPr sz="950" b="0" i="0">
-                <a:solidFill>
-                  <a:srgbClr val="555555"/>
-                </a:solidFill>
-                <a:latin typeface="微软雅黑" panose="020B0503020204020204" charset="-122"/>
-              </a:rPr>
-              <a:t>评审聚合</a:t>
-            </a:r>
-            <a:endParaRPr sz="950" b="0" i="0">
-              <a:solidFill>
-                <a:srgbClr val="555555"/>
-              </a:solidFill>
-              <a:latin typeface="微软雅黑" panose="020B0503020204020204" charset="-122"/>
+              <a:latin typeface="宋体" panose="02010600030101010101" pitchFamily="2" charset="-122"/>
+              <a:ea typeface="宋体" panose="02010600030101010101" pitchFamily="2" charset="-122"/>
             </a:endParaRPr>
           </a:p>
         </p:txBody>
@@ -6016,6 +4461,10 @@
           <a:lstStyle/>
           <a:p>
             <a:pPr algn="ctr"/>
+            <a:endParaRPr sz="3200" b="1">
+              <a:latin typeface="宋体" panose="02010600030101010101" pitchFamily="2" charset="-122"/>
+              <a:ea typeface="宋体" panose="02010600030101010101" pitchFamily="2" charset="-122"/>
+            </a:endParaRPr>
           </a:p>
         </p:txBody>
       </p:sp>
@@ -6061,6 +4510,10 @@
           <a:lstStyle/>
           <a:p>
             <a:pPr algn="ctr"/>
+            <a:endParaRPr sz="3200" b="1">
+              <a:latin typeface="宋体" panose="02010600030101010101" pitchFamily="2" charset="-122"/>
+              <a:ea typeface="宋体" panose="02010600030101010101" pitchFamily="2" charset="-122"/>
+            </a:endParaRPr>
           </a:p>
         </p:txBody>
       </p:sp>
@@ -6106,6 +4559,10 @@
           <a:lstStyle/>
           <a:p>
             <a:pPr algn="ctr"/>
+            <a:endParaRPr sz="3200" b="1">
+              <a:latin typeface="宋体" panose="02010600030101010101" pitchFamily="2" charset="-122"/>
+              <a:ea typeface="宋体" panose="02010600030101010101" pitchFamily="2" charset="-122"/>
+            </a:endParaRPr>
           </a:p>
         </p:txBody>
       </p:sp>
@@ -6151,19 +4608,23 @@
           <a:lstStyle/>
           <a:p>
             <a:pPr algn="ctr"/>
-          </a:p>
-        </p:txBody>
-      </p:sp>
-      <p:sp>
-        <p:nvSpPr>
-          <p:cNvPr id="67" name="TextBox 66"/>
+            <a:endParaRPr sz="3200" b="1">
+              <a:latin typeface="宋体" panose="02010600030101010101" pitchFamily="2" charset="-122"/>
+              <a:ea typeface="宋体" panose="02010600030101010101" pitchFamily="2" charset="-122"/>
+            </a:endParaRPr>
+          </a:p>
+        </p:txBody>
+      </p:sp>
+      <p:sp>
+        <p:nvSpPr>
+          <p:cNvPr id="68" name="TextBox 67"/>
           <p:cNvSpPr txBox="1"/>
           <p:nvPr/>
         </p:nvSpPr>
         <p:spPr>
           <a:xfrm>
-            <a:off x="7119079" y="2958753"/>
-            <a:ext cx="1596531" cy="99752"/>
+            <a:off x="7119079" y="3016840"/>
+            <a:ext cx="1727156" cy="307777"/>
           </a:xfrm>
           <a:prstGeom prst="rect">
             <a:avLst/>
@@ -6174,7 +4635,7 @@
           </a:ln>
         </p:spPr>
         <p:txBody>
-          <a:bodyPr wrap="square" lIns="0" tIns="0" rIns="0" bIns="0" anchor="t">
+          <a:bodyPr wrap="square" lIns="0" tIns="0" rIns="0" bIns="0" anchor="ctr">
             <a:spAutoFit/>
           </a:bodyPr>
           <a:lstStyle/>
@@ -6188,1723 +4649,21 @@
               </a:spcAft>
             </a:pPr>
             <a:r>
-              <a:rPr sz="830" b="0" i="1">
-                <a:solidFill>
-                  <a:srgbClr val="555555"/>
-                </a:solidFill>
-                <a:latin typeface="微软雅黑" panose="020B0503020204020204" charset="-122"/>
-              </a:rPr>
-              <a:t>«component»</a:t>
-            </a:r>
-            <a:endParaRPr sz="830" b="0" i="1">
-              <a:solidFill>
-                <a:srgbClr val="555555"/>
-              </a:solidFill>
-              <a:latin typeface="微软雅黑" panose="020B0503020204020204" charset="-122"/>
-            </a:endParaRPr>
-          </a:p>
-        </p:txBody>
-      </p:sp>
-      <p:sp>
-        <p:nvSpPr>
-          <p:cNvPr id="68" name="TextBox 67"/>
-          <p:cNvSpPr txBox="1"/>
-          <p:nvPr/>
-        </p:nvSpPr>
-        <p:spPr>
-          <a:xfrm>
-            <a:off x="7119079" y="3095913"/>
-            <a:ext cx="1727156" cy="149629"/>
-          </a:xfrm>
-          <a:prstGeom prst="rect">
-            <a:avLst/>
-          </a:prstGeom>
-          <a:noFill/>
-          <a:ln>
-            <a:noFill/>
-          </a:ln>
-        </p:spPr>
-        <p:txBody>
-          <a:bodyPr wrap="square" lIns="0" tIns="0" rIns="0" bIns="0" anchor="ctr">
-            <a:spAutoFit/>
-          </a:bodyPr>
-          <a:lstStyle/>
-          <a:p>
-            <a:pPr algn="ctr">
-              <a:spcBef>
-                <a:spcPts val="0"/>
-              </a:spcBef>
-              <a:spcAft>
-                <a:spcPts val="0"/>
-              </a:spcAft>
-            </a:pPr>
-            <a:r>
-              <a:rPr sz="1240" b="1" i="0">
+              <a:rPr sz="2000" b="1" i="0" dirty="0" err="1">
                 <a:solidFill>
                   <a:srgbClr val="1A1A2E"/>
                 </a:solidFill>
-                <a:latin typeface="微软雅黑" panose="020B0503020204020204" charset="-122"/>
+                <a:latin typeface="宋体" panose="02010600030101010101" pitchFamily="2" charset="-122"/>
+                <a:ea typeface="宋体" panose="02010600030101010101" pitchFamily="2" charset="-122"/>
               </a:rPr>
               <a:t>部署管理</a:t>
             </a:r>
-            <a:endParaRPr sz="1240" b="1" i="0">
+            <a:endParaRPr sz="2000" b="1" i="0" dirty="0">
               <a:solidFill>
                 <a:srgbClr val="1A1A2E"/>
               </a:solidFill>
-              <a:latin typeface="微软雅黑" panose="020B0503020204020204" charset="-122"/>
-            </a:endParaRPr>
-          </a:p>
-        </p:txBody>
-      </p:sp>
-      <p:sp>
-        <p:nvSpPr>
-          <p:cNvPr id="69" name="TextBox 68"/>
-          <p:cNvSpPr txBox="1"/>
-          <p:nvPr/>
-        </p:nvSpPr>
-        <p:spPr>
-          <a:xfrm>
-            <a:off x="7133593" y="3295419"/>
-            <a:ext cx="1698128" cy="99752"/>
-          </a:xfrm>
-          <a:prstGeom prst="rect">
-            <a:avLst/>
-          </a:prstGeom>
-          <a:noFill/>
-          <a:ln>
-            <a:noFill/>
-          </a:ln>
-        </p:spPr>
-        <p:txBody>
-          <a:bodyPr wrap="square" lIns="0" tIns="0" rIns="0" bIns="0" anchor="ctr">
-            <a:spAutoFit/>
-          </a:bodyPr>
-          <a:lstStyle/>
-          <a:p>
-            <a:pPr algn="ctr">
-              <a:spcBef>
-                <a:spcPts val="0"/>
-              </a:spcBef>
-              <a:spcAft>
-                <a:spcPts val="0"/>
-              </a:spcAft>
-            </a:pPr>
-            <a:r>
-              <a:rPr sz="950" b="0" i="0">
-                <a:solidFill>
-                  <a:srgbClr val="555555"/>
-                </a:solidFill>
-                <a:latin typeface="微软雅黑" panose="020B0503020204020204" charset="-122"/>
-              </a:rPr>
-              <a:t>下发 / 回滚</a:t>
-            </a:r>
-            <a:endParaRPr sz="950" b="0" i="0">
-              <a:solidFill>
-                <a:srgbClr val="555555"/>
-              </a:solidFill>
-              <a:latin typeface="微软雅黑" panose="020B0503020204020204" charset="-122"/>
-            </a:endParaRPr>
-          </a:p>
-        </p:txBody>
-      </p:sp>
-      <p:sp>
-        <p:nvSpPr>
-          <p:cNvPr id="70" name="Rectangle 69"/>
-          <p:cNvSpPr/>
-          <p:nvPr/>
-        </p:nvSpPr>
-        <p:spPr>
-          <a:xfrm>
-            <a:off x="653415" y="4291965"/>
-            <a:ext cx="9506585" cy="673100"/>
-          </a:xfrm>
-          <a:prstGeom prst="rect">
-            <a:avLst/>
-          </a:prstGeom>
-          <a:solidFill>
-            <a:srgbClr val="F9F0FF"/>
-          </a:solidFill>
-          <a:ln w="13970">
-            <a:solidFill>
-              <a:srgbClr val="6A1B9A"/>
-            </a:solidFill>
-          </a:ln>
-        </p:spPr>
-        <p:style>
-          <a:lnRef idx="1">
-            <a:schemeClr val="accent1"/>
-          </a:lnRef>
-          <a:fillRef idx="3">
-            <a:schemeClr val="accent1"/>
-          </a:fillRef>
-          <a:effectRef idx="2">
-            <a:schemeClr val="accent1"/>
-          </a:effectRef>
-          <a:fontRef idx="minor">
-            <a:schemeClr val="lt1"/>
-          </a:fontRef>
-        </p:style>
-        <p:txBody>
-          <a:bodyPr rtlCol="0" anchor="ctr"/>
-          <a:lstStyle/>
-          <a:p>
-            <a:pPr algn="ctr"/>
-          </a:p>
-        </p:txBody>
-      </p:sp>
-      <p:sp>
-        <p:nvSpPr>
-          <p:cNvPr id="74" name="TextBox 73"/>
-          <p:cNvSpPr txBox="1"/>
-          <p:nvPr/>
-        </p:nvSpPr>
-        <p:spPr>
-          <a:xfrm>
-            <a:off x="769237" y="4341783"/>
-            <a:ext cx="2394797" cy="99752"/>
-          </a:xfrm>
-          <a:prstGeom prst="rect">
-            <a:avLst/>
-          </a:prstGeom>
-          <a:noFill/>
-          <a:ln>
-            <a:noFill/>
-          </a:ln>
-        </p:spPr>
-        <p:txBody>
-          <a:bodyPr wrap="square" lIns="0" tIns="0" rIns="0" bIns="0" anchor="t">
-            <a:spAutoFit/>
-          </a:bodyPr>
-          <a:lstStyle/>
-          <a:p>
-            <a:pPr algn="ctr">
-              <a:spcBef>
-                <a:spcPts val="0"/>
-              </a:spcBef>
-              <a:spcAft>
-                <a:spcPts val="0"/>
-              </a:spcAft>
-            </a:pPr>
-            <a:r>
-              <a:rPr sz="830" b="0" i="1">
-                <a:solidFill>
-                  <a:srgbClr val="555555"/>
-                </a:solidFill>
-                <a:latin typeface="微软雅黑" panose="020B0503020204020204" charset="-122"/>
-              </a:rPr>
-              <a:t>«component»</a:t>
-            </a:r>
-            <a:endParaRPr sz="830" b="0" i="1">
-              <a:solidFill>
-                <a:srgbClr val="555555"/>
-              </a:solidFill>
-              <a:latin typeface="微软雅黑" panose="020B0503020204020204" charset="-122"/>
-            </a:endParaRPr>
-          </a:p>
-        </p:txBody>
-      </p:sp>
-      <p:sp>
-        <p:nvSpPr>
-          <p:cNvPr id="75" name="TextBox 74"/>
-          <p:cNvSpPr txBox="1"/>
-          <p:nvPr/>
-        </p:nvSpPr>
-        <p:spPr>
-          <a:xfrm>
-            <a:off x="769237" y="4591165"/>
-            <a:ext cx="2525422" cy="149629"/>
-          </a:xfrm>
-          <a:prstGeom prst="rect">
-            <a:avLst/>
-          </a:prstGeom>
-          <a:noFill/>
-          <a:ln>
-            <a:noFill/>
-          </a:ln>
-        </p:spPr>
-        <p:txBody>
-          <a:bodyPr wrap="square" lIns="0" tIns="0" rIns="0" bIns="0" anchor="ctr">
-            <a:spAutoFit/>
-          </a:bodyPr>
-          <a:lstStyle/>
-          <a:p>
-            <a:pPr algn="ctr">
-              <a:spcBef>
-                <a:spcPts val="0"/>
-              </a:spcBef>
-              <a:spcAft>
-                <a:spcPts val="0"/>
-              </a:spcAft>
-            </a:pPr>
-            <a:r>
-              <a:rPr sz="1240" b="1" i="0">
-                <a:solidFill>
-                  <a:srgbClr val="1A1A2E"/>
-                </a:solidFill>
-                <a:latin typeface="微软雅黑" panose="020B0503020204020204" charset="-122"/>
-              </a:rPr>
-              <a:t>KPEAgent 核心引擎</a:t>
-            </a:r>
-            <a:endParaRPr sz="1240" b="1" i="0">
-              <a:solidFill>
-                <a:srgbClr val="1A1A2E"/>
-              </a:solidFill>
-              <a:latin typeface="微软雅黑" panose="020B0503020204020204" charset="-122"/>
-            </a:endParaRPr>
-          </a:p>
-        </p:txBody>
-      </p:sp>
-      <p:sp>
-        <p:nvSpPr>
-          <p:cNvPr id="76" name="TextBox 75"/>
-          <p:cNvSpPr txBox="1"/>
-          <p:nvPr/>
-        </p:nvSpPr>
-        <p:spPr>
-          <a:xfrm>
-            <a:off x="783751" y="4790670"/>
-            <a:ext cx="2496394" cy="99752"/>
-          </a:xfrm>
-          <a:prstGeom prst="rect">
-            <a:avLst/>
-          </a:prstGeom>
-          <a:noFill/>
-          <a:ln>
-            <a:noFill/>
-          </a:ln>
-        </p:spPr>
-        <p:txBody>
-          <a:bodyPr wrap="square" lIns="0" tIns="0" rIns="0" bIns="0" anchor="ctr">
-            <a:spAutoFit/>
-          </a:bodyPr>
-          <a:lstStyle/>
-          <a:p>
-            <a:pPr algn="ctr">
-              <a:spcBef>
-                <a:spcPts val="0"/>
-              </a:spcBef>
-              <a:spcAft>
-                <a:spcPts val="0"/>
-              </a:spcAft>
-            </a:pPr>
-            <a:r>
-              <a:rPr sz="950" b="0" i="0">
-                <a:solidFill>
-                  <a:srgbClr val="555555"/>
-                </a:solidFill>
-                <a:latin typeface="微软雅黑" panose="020B0503020204020204" charset="-122"/>
-              </a:rPr>
-              <a:t>统一编排</a:t>
-            </a:r>
-            <a:endParaRPr sz="950" b="0" i="0">
-              <a:solidFill>
-                <a:srgbClr val="555555"/>
-              </a:solidFill>
-              <a:latin typeface="微软雅黑" panose="020B0503020204020204" charset="-122"/>
-            </a:endParaRPr>
-          </a:p>
-        </p:txBody>
-      </p:sp>
-      <p:sp>
-        <p:nvSpPr>
-          <p:cNvPr id="77" name="Rectangle 76"/>
-          <p:cNvSpPr/>
-          <p:nvPr/>
-        </p:nvSpPr>
-        <p:spPr>
-          <a:xfrm>
-            <a:off x="4100183" y="4348018"/>
-            <a:ext cx="1814240" cy="561109"/>
-          </a:xfrm>
-          <a:prstGeom prst="rect">
-            <a:avLst/>
-          </a:prstGeom>
-          <a:solidFill>
-            <a:srgbClr val="FFFFFF"/>
-          </a:solidFill>
-          <a:ln w="13970">
-            <a:solidFill>
-              <a:srgbClr val="546E7A"/>
-            </a:solidFill>
-          </a:ln>
-        </p:spPr>
-        <p:style>
-          <a:lnRef idx="1">
-            <a:schemeClr val="accent1"/>
-          </a:lnRef>
-          <a:fillRef idx="3">
-            <a:schemeClr val="accent1"/>
-          </a:fillRef>
-          <a:effectRef idx="2">
-            <a:schemeClr val="accent1"/>
-          </a:effectRef>
-          <a:fontRef idx="minor">
-            <a:schemeClr val="lt1"/>
-          </a:fontRef>
-        </p:style>
-        <p:txBody>
-          <a:bodyPr rtlCol="0" anchor="ctr"/>
-          <a:lstStyle/>
-          <a:p>
-            <a:pPr algn="ctr"/>
-          </a:p>
-        </p:txBody>
-      </p:sp>
-      <p:sp>
-        <p:nvSpPr>
-          <p:cNvPr id="78" name="Rectangle 77"/>
-          <p:cNvSpPr/>
-          <p:nvPr/>
-        </p:nvSpPr>
-        <p:spPr>
-          <a:xfrm>
-            <a:off x="5718485" y="4385425"/>
-            <a:ext cx="137882" cy="143394"/>
-          </a:xfrm>
-          <a:prstGeom prst="rect">
-            <a:avLst/>
-          </a:prstGeom>
-          <a:solidFill>
-            <a:srgbClr val="FFFFFF"/>
-          </a:solidFill>
-          <a:ln w="10160">
-            <a:solidFill>
-              <a:srgbClr val="546E7A"/>
-            </a:solidFill>
-          </a:ln>
-        </p:spPr>
-        <p:style>
-          <a:lnRef idx="1">
-            <a:schemeClr val="accent1"/>
-          </a:lnRef>
-          <a:fillRef idx="3">
-            <a:schemeClr val="accent1"/>
-          </a:fillRef>
-          <a:effectRef idx="2">
-            <a:schemeClr val="accent1"/>
-          </a:effectRef>
-          <a:fontRef idx="minor">
-            <a:schemeClr val="lt1"/>
-          </a:fontRef>
-        </p:style>
-        <p:txBody>
-          <a:bodyPr rtlCol="0" anchor="ctr"/>
-          <a:lstStyle/>
-          <a:p>
-            <a:pPr algn="ctr"/>
-          </a:p>
-        </p:txBody>
-      </p:sp>
-      <p:sp>
-        <p:nvSpPr>
-          <p:cNvPr id="79" name="Rectangle 78"/>
-          <p:cNvSpPr/>
-          <p:nvPr/>
-        </p:nvSpPr>
-        <p:spPr>
-          <a:xfrm>
-            <a:off x="5689457" y="4397894"/>
-            <a:ext cx="58055" cy="41148"/>
-          </a:xfrm>
-          <a:prstGeom prst="rect">
-            <a:avLst/>
-          </a:prstGeom>
-          <a:solidFill>
-            <a:srgbClr val="FFFFFF"/>
-          </a:solidFill>
-          <a:ln w="10160">
-            <a:solidFill>
-              <a:srgbClr val="546E7A"/>
-            </a:solidFill>
-          </a:ln>
-        </p:spPr>
-        <p:style>
-          <a:lnRef idx="1">
-            <a:schemeClr val="accent1"/>
-          </a:lnRef>
-          <a:fillRef idx="3">
-            <a:schemeClr val="accent1"/>
-          </a:fillRef>
-          <a:effectRef idx="2">
-            <a:schemeClr val="accent1"/>
-          </a:effectRef>
-          <a:fontRef idx="minor">
-            <a:schemeClr val="lt1"/>
-          </a:fontRef>
-        </p:style>
-        <p:txBody>
-          <a:bodyPr rtlCol="0" anchor="ctr"/>
-          <a:lstStyle/>
-          <a:p>
-            <a:pPr algn="ctr"/>
-          </a:p>
-        </p:txBody>
-      </p:sp>
-      <p:sp>
-        <p:nvSpPr>
-          <p:cNvPr id="80" name="Rectangle 79"/>
-          <p:cNvSpPr/>
-          <p:nvPr/>
-        </p:nvSpPr>
-        <p:spPr>
-          <a:xfrm>
-            <a:off x="5689457" y="4452758"/>
-            <a:ext cx="58055" cy="41148"/>
-          </a:xfrm>
-          <a:prstGeom prst="rect">
-            <a:avLst/>
-          </a:prstGeom>
-          <a:solidFill>
-            <a:srgbClr val="FFFFFF"/>
-          </a:solidFill>
-          <a:ln w="10160">
-            <a:solidFill>
-              <a:srgbClr val="546E7A"/>
-            </a:solidFill>
-          </a:ln>
-        </p:spPr>
-        <p:style>
-          <a:lnRef idx="1">
-            <a:schemeClr val="accent1"/>
-          </a:lnRef>
-          <a:fillRef idx="3">
-            <a:schemeClr val="accent1"/>
-          </a:fillRef>
-          <a:effectRef idx="2">
-            <a:schemeClr val="accent1"/>
-          </a:effectRef>
-          <a:fontRef idx="minor">
-            <a:schemeClr val="lt1"/>
-          </a:fontRef>
-        </p:style>
-        <p:txBody>
-          <a:bodyPr rtlCol="0" anchor="ctr"/>
-          <a:lstStyle/>
-          <a:p>
-            <a:pPr algn="ctr"/>
-          </a:p>
-        </p:txBody>
-      </p:sp>
-      <p:sp>
-        <p:nvSpPr>
-          <p:cNvPr id="81" name="TextBox 80"/>
-          <p:cNvSpPr txBox="1"/>
-          <p:nvPr/>
-        </p:nvSpPr>
-        <p:spPr>
-          <a:xfrm>
-            <a:off x="4216294" y="4397894"/>
-            <a:ext cx="1451392" cy="99752"/>
-          </a:xfrm>
-          <a:prstGeom prst="rect">
-            <a:avLst/>
-          </a:prstGeom>
-          <a:noFill/>
-          <a:ln>
-            <a:noFill/>
-          </a:ln>
-        </p:spPr>
-        <p:txBody>
-          <a:bodyPr wrap="square" lIns="0" tIns="0" rIns="0" bIns="0" anchor="t">
-            <a:spAutoFit/>
-          </a:bodyPr>
-          <a:lstStyle/>
-          <a:p>
-            <a:pPr algn="ctr">
-              <a:spcBef>
-                <a:spcPts val="0"/>
-              </a:spcBef>
-              <a:spcAft>
-                <a:spcPts val="0"/>
-              </a:spcAft>
-            </a:pPr>
-            <a:r>
-              <a:rPr sz="830" b="0" i="1">
-                <a:solidFill>
-                  <a:srgbClr val="555555"/>
-                </a:solidFill>
-                <a:latin typeface="微软雅黑" panose="020B0503020204020204" charset="-122"/>
-              </a:rPr>
-              <a:t>«component»</a:t>
-            </a:r>
-            <a:endParaRPr sz="830" b="0" i="1">
-              <a:solidFill>
-                <a:srgbClr val="555555"/>
-              </a:solidFill>
-              <a:latin typeface="微软雅黑" panose="020B0503020204020204" charset="-122"/>
-            </a:endParaRPr>
-          </a:p>
-        </p:txBody>
-      </p:sp>
-      <p:sp>
-        <p:nvSpPr>
-          <p:cNvPr id="82" name="TextBox 81"/>
-          <p:cNvSpPr txBox="1"/>
-          <p:nvPr/>
-        </p:nvSpPr>
-        <p:spPr>
-          <a:xfrm>
-            <a:off x="4216294" y="4535054"/>
-            <a:ext cx="1582017" cy="149629"/>
-          </a:xfrm>
-          <a:prstGeom prst="rect">
-            <a:avLst/>
-          </a:prstGeom>
-          <a:noFill/>
-          <a:ln>
-            <a:noFill/>
-          </a:ln>
-        </p:spPr>
-        <p:txBody>
-          <a:bodyPr wrap="square" lIns="0" tIns="0" rIns="0" bIns="0" anchor="ctr">
-            <a:spAutoFit/>
-          </a:bodyPr>
-          <a:lstStyle/>
-          <a:p>
-            <a:pPr algn="ctr">
-              <a:spcBef>
-                <a:spcPts val="0"/>
-              </a:spcBef>
-              <a:spcAft>
-                <a:spcPts val="0"/>
-              </a:spcAft>
-            </a:pPr>
-            <a:r>
-              <a:rPr sz="1240" b="1" i="0">
-                <a:solidFill>
-                  <a:srgbClr val="1A1A2E"/>
-                </a:solidFill>
-                <a:latin typeface="微软雅黑" panose="020B0503020204020204" charset="-122"/>
-              </a:rPr>
-              <a:t>RAG 检索器</a:t>
-            </a:r>
-            <a:endParaRPr sz="1240" b="1" i="0">
-              <a:solidFill>
-                <a:srgbClr val="1A1A2E"/>
-              </a:solidFill>
-              <a:latin typeface="微软雅黑" panose="020B0503020204020204" charset="-122"/>
-            </a:endParaRPr>
-          </a:p>
-        </p:txBody>
-      </p:sp>
-      <p:sp>
-        <p:nvSpPr>
-          <p:cNvPr id="83" name="TextBox 82"/>
-          <p:cNvSpPr txBox="1"/>
-          <p:nvPr/>
-        </p:nvSpPr>
-        <p:spPr>
-          <a:xfrm>
-            <a:off x="4230808" y="4734559"/>
-            <a:ext cx="1552989" cy="99752"/>
-          </a:xfrm>
-          <a:prstGeom prst="rect">
-            <a:avLst/>
-          </a:prstGeom>
-          <a:noFill/>
-          <a:ln>
-            <a:noFill/>
-          </a:ln>
-        </p:spPr>
-        <p:txBody>
-          <a:bodyPr wrap="square" lIns="0" tIns="0" rIns="0" bIns="0" anchor="ctr">
-            <a:spAutoFit/>
-          </a:bodyPr>
-          <a:lstStyle/>
-          <a:p>
-            <a:pPr algn="ctr">
-              <a:spcBef>
-                <a:spcPts val="0"/>
-              </a:spcBef>
-              <a:spcAft>
-                <a:spcPts val="0"/>
-              </a:spcAft>
-            </a:pPr>
-            <a:r>
-              <a:rPr sz="950" b="0" i="0">
-                <a:solidFill>
-                  <a:srgbClr val="555555"/>
-                </a:solidFill>
-                <a:latin typeface="微软雅黑" panose="020B0503020204020204" charset="-122"/>
-              </a:rPr>
-              <a:t>证据检索</a:t>
-            </a:r>
-            <a:endParaRPr sz="950" b="0" i="0">
-              <a:solidFill>
-                <a:srgbClr val="555555"/>
-              </a:solidFill>
-              <a:latin typeface="微软雅黑" panose="020B0503020204020204" charset="-122"/>
-            </a:endParaRPr>
-          </a:p>
-        </p:txBody>
-      </p:sp>
-      <p:sp>
-        <p:nvSpPr>
-          <p:cNvPr id="84" name="Rectangle 83"/>
-          <p:cNvSpPr/>
-          <p:nvPr/>
-        </p:nvSpPr>
-        <p:spPr>
-          <a:xfrm>
-            <a:off x="6132132" y="4348018"/>
-            <a:ext cx="1814240" cy="561109"/>
-          </a:xfrm>
-          <a:prstGeom prst="rect">
-            <a:avLst/>
-          </a:prstGeom>
-          <a:solidFill>
-            <a:srgbClr val="FFFFFF"/>
-          </a:solidFill>
-          <a:ln w="13970">
-            <a:solidFill>
-              <a:srgbClr val="546E7A"/>
-            </a:solidFill>
-          </a:ln>
-        </p:spPr>
-        <p:style>
-          <a:lnRef idx="1">
-            <a:schemeClr val="accent1"/>
-          </a:lnRef>
-          <a:fillRef idx="3">
-            <a:schemeClr val="accent1"/>
-          </a:fillRef>
-          <a:effectRef idx="2">
-            <a:schemeClr val="accent1"/>
-          </a:effectRef>
-          <a:fontRef idx="minor">
-            <a:schemeClr val="lt1"/>
-          </a:fontRef>
-        </p:style>
-        <p:txBody>
-          <a:bodyPr rtlCol="0" anchor="ctr"/>
-          <a:lstStyle/>
-          <a:p>
-            <a:pPr algn="ctr"/>
-          </a:p>
-        </p:txBody>
-      </p:sp>
-      <p:sp>
-        <p:nvSpPr>
-          <p:cNvPr id="85" name="Rectangle 84"/>
-          <p:cNvSpPr/>
-          <p:nvPr/>
-        </p:nvSpPr>
-        <p:spPr>
-          <a:xfrm>
-            <a:off x="7750434" y="4385425"/>
-            <a:ext cx="137882" cy="143394"/>
-          </a:xfrm>
-          <a:prstGeom prst="rect">
-            <a:avLst/>
-          </a:prstGeom>
-          <a:solidFill>
-            <a:srgbClr val="FFFFFF"/>
-          </a:solidFill>
-          <a:ln w="10160">
-            <a:solidFill>
-              <a:srgbClr val="546E7A"/>
-            </a:solidFill>
-          </a:ln>
-        </p:spPr>
-        <p:style>
-          <a:lnRef idx="1">
-            <a:schemeClr val="accent1"/>
-          </a:lnRef>
-          <a:fillRef idx="3">
-            <a:schemeClr val="accent1"/>
-          </a:fillRef>
-          <a:effectRef idx="2">
-            <a:schemeClr val="accent1"/>
-          </a:effectRef>
-          <a:fontRef idx="minor">
-            <a:schemeClr val="lt1"/>
-          </a:fontRef>
-        </p:style>
-        <p:txBody>
-          <a:bodyPr rtlCol="0" anchor="ctr"/>
-          <a:lstStyle/>
-          <a:p>
-            <a:pPr algn="ctr"/>
-          </a:p>
-        </p:txBody>
-      </p:sp>
-      <p:sp>
-        <p:nvSpPr>
-          <p:cNvPr id="86" name="Rectangle 85"/>
-          <p:cNvSpPr/>
-          <p:nvPr/>
-        </p:nvSpPr>
-        <p:spPr>
-          <a:xfrm>
-            <a:off x="7721406" y="4397894"/>
-            <a:ext cx="58055" cy="41148"/>
-          </a:xfrm>
-          <a:prstGeom prst="rect">
-            <a:avLst/>
-          </a:prstGeom>
-          <a:solidFill>
-            <a:srgbClr val="FFFFFF"/>
-          </a:solidFill>
-          <a:ln w="10160">
-            <a:solidFill>
-              <a:srgbClr val="546E7A"/>
-            </a:solidFill>
-          </a:ln>
-        </p:spPr>
-        <p:style>
-          <a:lnRef idx="1">
-            <a:schemeClr val="accent1"/>
-          </a:lnRef>
-          <a:fillRef idx="3">
-            <a:schemeClr val="accent1"/>
-          </a:fillRef>
-          <a:effectRef idx="2">
-            <a:schemeClr val="accent1"/>
-          </a:effectRef>
-          <a:fontRef idx="minor">
-            <a:schemeClr val="lt1"/>
-          </a:fontRef>
-        </p:style>
-        <p:txBody>
-          <a:bodyPr rtlCol="0" anchor="ctr"/>
-          <a:lstStyle/>
-          <a:p>
-            <a:pPr algn="ctr"/>
-          </a:p>
-        </p:txBody>
-      </p:sp>
-      <p:sp>
-        <p:nvSpPr>
-          <p:cNvPr id="87" name="Rectangle 86"/>
-          <p:cNvSpPr/>
-          <p:nvPr/>
-        </p:nvSpPr>
-        <p:spPr>
-          <a:xfrm>
-            <a:off x="7721406" y="4452758"/>
-            <a:ext cx="58055" cy="41148"/>
-          </a:xfrm>
-          <a:prstGeom prst="rect">
-            <a:avLst/>
-          </a:prstGeom>
-          <a:solidFill>
-            <a:srgbClr val="FFFFFF"/>
-          </a:solidFill>
-          <a:ln w="10160">
-            <a:solidFill>
-              <a:srgbClr val="546E7A"/>
-            </a:solidFill>
-          </a:ln>
-        </p:spPr>
-        <p:style>
-          <a:lnRef idx="1">
-            <a:schemeClr val="accent1"/>
-          </a:lnRef>
-          <a:fillRef idx="3">
-            <a:schemeClr val="accent1"/>
-          </a:fillRef>
-          <a:effectRef idx="2">
-            <a:schemeClr val="accent1"/>
-          </a:effectRef>
-          <a:fontRef idx="minor">
-            <a:schemeClr val="lt1"/>
-          </a:fontRef>
-        </p:style>
-        <p:txBody>
-          <a:bodyPr rtlCol="0" anchor="ctr"/>
-          <a:lstStyle/>
-          <a:p>
-            <a:pPr algn="ctr"/>
-          </a:p>
-        </p:txBody>
-      </p:sp>
-      <p:sp>
-        <p:nvSpPr>
-          <p:cNvPr id="88" name="TextBox 87"/>
-          <p:cNvSpPr txBox="1"/>
-          <p:nvPr/>
-        </p:nvSpPr>
-        <p:spPr>
-          <a:xfrm>
-            <a:off x="6248243" y="4397894"/>
-            <a:ext cx="1451392" cy="99752"/>
-          </a:xfrm>
-          <a:prstGeom prst="rect">
-            <a:avLst/>
-          </a:prstGeom>
-          <a:noFill/>
-          <a:ln>
-            <a:noFill/>
-          </a:ln>
-        </p:spPr>
-        <p:txBody>
-          <a:bodyPr wrap="square" lIns="0" tIns="0" rIns="0" bIns="0" anchor="t">
-            <a:spAutoFit/>
-          </a:bodyPr>
-          <a:lstStyle/>
-          <a:p>
-            <a:pPr algn="ctr">
-              <a:spcBef>
-                <a:spcPts val="0"/>
-              </a:spcBef>
-              <a:spcAft>
-                <a:spcPts val="0"/>
-              </a:spcAft>
-            </a:pPr>
-            <a:r>
-              <a:rPr sz="830" b="0" i="1">
-                <a:solidFill>
-                  <a:srgbClr val="555555"/>
-                </a:solidFill>
-                <a:latin typeface="微软雅黑" panose="020B0503020204020204" charset="-122"/>
-              </a:rPr>
-              <a:t>«component»</a:t>
-            </a:r>
-            <a:endParaRPr sz="830" b="0" i="1">
-              <a:solidFill>
-                <a:srgbClr val="555555"/>
-              </a:solidFill>
-              <a:latin typeface="微软雅黑" panose="020B0503020204020204" charset="-122"/>
-            </a:endParaRPr>
-          </a:p>
-        </p:txBody>
-      </p:sp>
-      <p:sp>
-        <p:nvSpPr>
-          <p:cNvPr id="89" name="TextBox 88"/>
-          <p:cNvSpPr txBox="1"/>
-          <p:nvPr/>
-        </p:nvSpPr>
-        <p:spPr>
-          <a:xfrm>
-            <a:off x="6248243" y="4535054"/>
-            <a:ext cx="1582017" cy="149629"/>
-          </a:xfrm>
-          <a:prstGeom prst="rect">
-            <a:avLst/>
-          </a:prstGeom>
-          <a:noFill/>
-          <a:ln>
-            <a:noFill/>
-          </a:ln>
-        </p:spPr>
-        <p:txBody>
-          <a:bodyPr wrap="square" lIns="0" tIns="0" rIns="0" bIns="0" anchor="ctr">
-            <a:spAutoFit/>
-          </a:bodyPr>
-          <a:lstStyle/>
-          <a:p>
-            <a:pPr algn="ctr">
-              <a:spcBef>
-                <a:spcPts val="0"/>
-              </a:spcBef>
-              <a:spcAft>
-                <a:spcPts val="0"/>
-              </a:spcAft>
-            </a:pPr>
-            <a:r>
-              <a:rPr sz="1240" b="1" i="0">
-                <a:solidFill>
-                  <a:srgbClr val="1A1A2E"/>
-                </a:solidFill>
-                <a:latin typeface="微软雅黑" panose="020B0503020204020204" charset="-122"/>
-              </a:rPr>
-              <a:t>CoT 推理机</a:t>
-            </a:r>
-            <a:endParaRPr sz="1240" b="1" i="0">
-              <a:solidFill>
-                <a:srgbClr val="1A1A2E"/>
-              </a:solidFill>
-              <a:latin typeface="微软雅黑" panose="020B0503020204020204" charset="-122"/>
-            </a:endParaRPr>
-          </a:p>
-        </p:txBody>
-      </p:sp>
-      <p:sp>
-        <p:nvSpPr>
-          <p:cNvPr id="90" name="TextBox 89"/>
-          <p:cNvSpPr txBox="1"/>
-          <p:nvPr/>
-        </p:nvSpPr>
-        <p:spPr>
-          <a:xfrm>
-            <a:off x="6262757" y="4734559"/>
-            <a:ext cx="1552989" cy="99752"/>
-          </a:xfrm>
-          <a:prstGeom prst="rect">
-            <a:avLst/>
-          </a:prstGeom>
-          <a:noFill/>
-          <a:ln>
-            <a:noFill/>
-          </a:ln>
-        </p:spPr>
-        <p:txBody>
-          <a:bodyPr wrap="square" lIns="0" tIns="0" rIns="0" bIns="0" anchor="ctr">
-            <a:spAutoFit/>
-          </a:bodyPr>
-          <a:lstStyle/>
-          <a:p>
-            <a:pPr algn="ctr">
-              <a:spcBef>
-                <a:spcPts val="0"/>
-              </a:spcBef>
-              <a:spcAft>
-                <a:spcPts val="0"/>
-              </a:spcAft>
-            </a:pPr>
-            <a:r>
-              <a:rPr sz="950" b="0" i="0">
-                <a:solidFill>
-                  <a:srgbClr val="555555"/>
-                </a:solidFill>
-                <a:latin typeface="微软雅黑" panose="020B0503020204020204" charset="-122"/>
-              </a:rPr>
-              <a:t>漏洞分析</a:t>
-            </a:r>
-            <a:endParaRPr sz="950" b="0" i="0">
-              <a:solidFill>
-                <a:srgbClr val="555555"/>
-              </a:solidFill>
-              <a:latin typeface="微软雅黑" panose="020B0503020204020204" charset="-122"/>
-            </a:endParaRPr>
-          </a:p>
-        </p:txBody>
-      </p:sp>
-      <p:sp>
-        <p:nvSpPr>
-          <p:cNvPr id="91" name="Rectangle 90"/>
-          <p:cNvSpPr/>
-          <p:nvPr/>
-        </p:nvSpPr>
-        <p:spPr>
-          <a:xfrm>
-            <a:off x="8164081" y="4348018"/>
-            <a:ext cx="1814240" cy="561109"/>
-          </a:xfrm>
-          <a:prstGeom prst="rect">
-            <a:avLst/>
-          </a:prstGeom>
-          <a:solidFill>
-            <a:srgbClr val="FFFFFF"/>
-          </a:solidFill>
-          <a:ln w="13970">
-            <a:solidFill>
-              <a:srgbClr val="546E7A"/>
-            </a:solidFill>
-          </a:ln>
-        </p:spPr>
-        <p:style>
-          <a:lnRef idx="1">
-            <a:schemeClr val="accent1"/>
-          </a:lnRef>
-          <a:fillRef idx="3">
-            <a:schemeClr val="accent1"/>
-          </a:fillRef>
-          <a:effectRef idx="2">
-            <a:schemeClr val="accent1"/>
-          </a:effectRef>
-          <a:fontRef idx="minor">
-            <a:schemeClr val="lt1"/>
-          </a:fontRef>
-        </p:style>
-        <p:txBody>
-          <a:bodyPr rtlCol="0" anchor="ctr"/>
-          <a:lstStyle/>
-          <a:p>
-            <a:pPr algn="ctr"/>
-          </a:p>
-        </p:txBody>
-      </p:sp>
-      <p:sp>
-        <p:nvSpPr>
-          <p:cNvPr id="92" name="Rectangle 91"/>
-          <p:cNvSpPr/>
-          <p:nvPr/>
-        </p:nvSpPr>
-        <p:spPr>
-          <a:xfrm>
-            <a:off x="9782384" y="4385425"/>
-            <a:ext cx="137882" cy="143394"/>
-          </a:xfrm>
-          <a:prstGeom prst="rect">
-            <a:avLst/>
-          </a:prstGeom>
-          <a:solidFill>
-            <a:srgbClr val="FFFFFF"/>
-          </a:solidFill>
-          <a:ln w="10160">
-            <a:solidFill>
-              <a:srgbClr val="546E7A"/>
-            </a:solidFill>
-          </a:ln>
-        </p:spPr>
-        <p:style>
-          <a:lnRef idx="1">
-            <a:schemeClr val="accent1"/>
-          </a:lnRef>
-          <a:fillRef idx="3">
-            <a:schemeClr val="accent1"/>
-          </a:fillRef>
-          <a:effectRef idx="2">
-            <a:schemeClr val="accent1"/>
-          </a:effectRef>
-          <a:fontRef idx="minor">
-            <a:schemeClr val="lt1"/>
-          </a:fontRef>
-        </p:style>
-        <p:txBody>
-          <a:bodyPr rtlCol="0" anchor="ctr"/>
-          <a:lstStyle/>
-          <a:p>
-            <a:pPr algn="ctr"/>
-          </a:p>
-        </p:txBody>
-      </p:sp>
-      <p:sp>
-        <p:nvSpPr>
-          <p:cNvPr id="93" name="Rectangle 92"/>
-          <p:cNvSpPr/>
-          <p:nvPr/>
-        </p:nvSpPr>
-        <p:spPr>
-          <a:xfrm>
-            <a:off x="9753356" y="4397894"/>
-            <a:ext cx="58055" cy="41148"/>
-          </a:xfrm>
-          <a:prstGeom prst="rect">
-            <a:avLst/>
-          </a:prstGeom>
-          <a:solidFill>
-            <a:srgbClr val="FFFFFF"/>
-          </a:solidFill>
-          <a:ln w="10160">
-            <a:solidFill>
-              <a:srgbClr val="546E7A"/>
-            </a:solidFill>
-          </a:ln>
-        </p:spPr>
-        <p:style>
-          <a:lnRef idx="1">
-            <a:schemeClr val="accent1"/>
-          </a:lnRef>
-          <a:fillRef idx="3">
-            <a:schemeClr val="accent1"/>
-          </a:fillRef>
-          <a:effectRef idx="2">
-            <a:schemeClr val="accent1"/>
-          </a:effectRef>
-          <a:fontRef idx="minor">
-            <a:schemeClr val="lt1"/>
-          </a:fontRef>
-        </p:style>
-        <p:txBody>
-          <a:bodyPr rtlCol="0" anchor="ctr"/>
-          <a:lstStyle/>
-          <a:p>
-            <a:pPr algn="ctr"/>
-          </a:p>
-        </p:txBody>
-      </p:sp>
-      <p:sp>
-        <p:nvSpPr>
-          <p:cNvPr id="94" name="Rectangle 93"/>
-          <p:cNvSpPr/>
-          <p:nvPr/>
-        </p:nvSpPr>
-        <p:spPr>
-          <a:xfrm>
-            <a:off x="9753356" y="4452758"/>
-            <a:ext cx="58055" cy="41148"/>
-          </a:xfrm>
-          <a:prstGeom prst="rect">
-            <a:avLst/>
-          </a:prstGeom>
-          <a:solidFill>
-            <a:srgbClr val="FFFFFF"/>
-          </a:solidFill>
-          <a:ln w="10160">
-            <a:solidFill>
-              <a:srgbClr val="546E7A"/>
-            </a:solidFill>
-          </a:ln>
-        </p:spPr>
-        <p:style>
-          <a:lnRef idx="1">
-            <a:schemeClr val="accent1"/>
-          </a:lnRef>
-          <a:fillRef idx="3">
-            <a:schemeClr val="accent1"/>
-          </a:fillRef>
-          <a:effectRef idx="2">
-            <a:schemeClr val="accent1"/>
-          </a:effectRef>
-          <a:fontRef idx="minor">
-            <a:schemeClr val="lt1"/>
-          </a:fontRef>
-        </p:style>
-        <p:txBody>
-          <a:bodyPr rtlCol="0" anchor="ctr"/>
-          <a:lstStyle/>
-          <a:p>
-            <a:pPr algn="ctr"/>
-          </a:p>
-        </p:txBody>
-      </p:sp>
-      <p:sp>
-        <p:nvSpPr>
-          <p:cNvPr id="95" name="TextBox 94"/>
-          <p:cNvSpPr txBox="1"/>
-          <p:nvPr/>
-        </p:nvSpPr>
-        <p:spPr>
-          <a:xfrm>
-            <a:off x="8280192" y="4397894"/>
-            <a:ext cx="1451392" cy="99752"/>
-          </a:xfrm>
-          <a:prstGeom prst="rect">
-            <a:avLst/>
-          </a:prstGeom>
-          <a:noFill/>
-          <a:ln>
-            <a:noFill/>
-          </a:ln>
-        </p:spPr>
-        <p:txBody>
-          <a:bodyPr wrap="square" lIns="0" tIns="0" rIns="0" bIns="0" anchor="t">
-            <a:spAutoFit/>
-          </a:bodyPr>
-          <a:lstStyle/>
-          <a:p>
-            <a:pPr algn="ctr">
-              <a:spcBef>
-                <a:spcPts val="0"/>
-              </a:spcBef>
-              <a:spcAft>
-                <a:spcPts val="0"/>
-              </a:spcAft>
-            </a:pPr>
-            <a:r>
-              <a:rPr sz="830" b="0" i="1">
-                <a:solidFill>
-                  <a:srgbClr val="555555"/>
-                </a:solidFill>
-                <a:latin typeface="微软雅黑" panose="020B0503020204020204" charset="-122"/>
-              </a:rPr>
-              <a:t>«component»</a:t>
-            </a:r>
-            <a:endParaRPr sz="830" b="0" i="1">
-              <a:solidFill>
-                <a:srgbClr val="555555"/>
-              </a:solidFill>
-              <a:latin typeface="微软雅黑" panose="020B0503020204020204" charset="-122"/>
-            </a:endParaRPr>
-          </a:p>
-        </p:txBody>
-      </p:sp>
-      <p:sp>
-        <p:nvSpPr>
-          <p:cNvPr id="96" name="TextBox 95"/>
-          <p:cNvSpPr txBox="1"/>
-          <p:nvPr/>
-        </p:nvSpPr>
-        <p:spPr>
-          <a:xfrm>
-            <a:off x="8280192" y="4535054"/>
-            <a:ext cx="1582017" cy="149629"/>
-          </a:xfrm>
-          <a:prstGeom prst="rect">
-            <a:avLst/>
-          </a:prstGeom>
-          <a:noFill/>
-          <a:ln>
-            <a:noFill/>
-          </a:ln>
-        </p:spPr>
-        <p:txBody>
-          <a:bodyPr wrap="square" lIns="0" tIns="0" rIns="0" bIns="0" anchor="ctr">
-            <a:spAutoFit/>
-          </a:bodyPr>
-          <a:lstStyle/>
-          <a:p>
-            <a:pPr algn="ctr">
-              <a:spcBef>
-                <a:spcPts val="0"/>
-              </a:spcBef>
-              <a:spcAft>
-                <a:spcPts val="0"/>
-              </a:spcAft>
-            </a:pPr>
-            <a:r>
-              <a:rPr sz="1240" b="1" i="0">
-                <a:solidFill>
-                  <a:srgbClr val="1A1A2E"/>
-                </a:solidFill>
-                <a:latin typeface="微软雅黑" panose="020B0503020204020204" charset="-122"/>
-              </a:rPr>
-              <a:t>反馈优化器</a:t>
-            </a:r>
-            <a:endParaRPr sz="1240" b="1" i="0">
-              <a:solidFill>
-                <a:srgbClr val="1A1A2E"/>
-              </a:solidFill>
-              <a:latin typeface="微软雅黑" panose="020B0503020204020204" charset="-122"/>
-            </a:endParaRPr>
-          </a:p>
-        </p:txBody>
-      </p:sp>
-      <p:sp>
-        <p:nvSpPr>
-          <p:cNvPr id="97" name="TextBox 96"/>
-          <p:cNvSpPr txBox="1"/>
-          <p:nvPr/>
-        </p:nvSpPr>
-        <p:spPr>
-          <a:xfrm>
-            <a:off x="8294706" y="4734559"/>
-            <a:ext cx="1552989" cy="99752"/>
-          </a:xfrm>
-          <a:prstGeom prst="rect">
-            <a:avLst/>
-          </a:prstGeom>
-          <a:noFill/>
-          <a:ln>
-            <a:noFill/>
-          </a:ln>
-        </p:spPr>
-        <p:txBody>
-          <a:bodyPr wrap="square" lIns="0" tIns="0" rIns="0" bIns="0" anchor="ctr">
-            <a:spAutoFit/>
-          </a:bodyPr>
-          <a:lstStyle/>
-          <a:p>
-            <a:pPr algn="ctr">
-              <a:spcBef>
-                <a:spcPts val="0"/>
-              </a:spcBef>
-              <a:spcAft>
-                <a:spcPts val="0"/>
-              </a:spcAft>
-            </a:pPr>
-            <a:r>
-              <a:rPr sz="950" b="0" i="0">
-                <a:solidFill>
-                  <a:srgbClr val="555555"/>
-                </a:solidFill>
-                <a:latin typeface="微软雅黑" panose="020B0503020204020204" charset="-122"/>
-              </a:rPr>
-              <a:t>反馈修正</a:t>
-            </a:r>
-            <a:endParaRPr sz="950" b="0" i="0">
-              <a:solidFill>
-                <a:srgbClr val="555555"/>
-              </a:solidFill>
-              <a:latin typeface="微软雅黑" panose="020B0503020204020204" charset="-122"/>
-            </a:endParaRPr>
-          </a:p>
-        </p:txBody>
-      </p:sp>
-      <p:sp>
-        <p:nvSpPr>
-          <p:cNvPr id="98" name="Rectangle 97"/>
-          <p:cNvSpPr/>
-          <p:nvPr/>
-        </p:nvSpPr>
-        <p:spPr>
-          <a:xfrm>
-            <a:off x="2322227" y="5806901"/>
-            <a:ext cx="2322227" cy="698269"/>
-          </a:xfrm>
-          <a:prstGeom prst="rect">
-            <a:avLst/>
-          </a:prstGeom>
-          <a:solidFill>
-            <a:srgbClr val="E8F5E9"/>
-          </a:solidFill>
-          <a:ln w="15240">
-            <a:solidFill>
-              <a:srgbClr val="2E7D32"/>
-            </a:solidFill>
-          </a:ln>
-        </p:spPr>
-        <p:style>
-          <a:lnRef idx="1">
-            <a:schemeClr val="accent1"/>
-          </a:lnRef>
-          <a:fillRef idx="3">
-            <a:schemeClr val="accent1"/>
-          </a:fillRef>
-          <a:effectRef idx="2">
-            <a:schemeClr val="accent1"/>
-          </a:effectRef>
-          <a:fontRef idx="minor">
-            <a:schemeClr val="lt1"/>
-          </a:fontRef>
-        </p:style>
-        <p:txBody>
-          <a:bodyPr rtlCol="0" anchor="ctr"/>
-          <a:lstStyle/>
-          <a:p>
-            <a:pPr algn="ctr"/>
-          </a:p>
-        </p:txBody>
-      </p:sp>
-      <p:sp>
-        <p:nvSpPr>
-          <p:cNvPr id="99" name="TextBox 98"/>
-          <p:cNvSpPr txBox="1"/>
-          <p:nvPr/>
-        </p:nvSpPr>
-        <p:spPr>
-          <a:xfrm>
-            <a:off x="2452852" y="5869247"/>
-            <a:ext cx="2060977" cy="112221"/>
-          </a:xfrm>
-          <a:prstGeom prst="rect">
-            <a:avLst/>
-          </a:prstGeom>
-          <a:noFill/>
-          <a:ln>
-            <a:noFill/>
-          </a:ln>
-        </p:spPr>
-        <p:txBody>
-          <a:bodyPr wrap="square" lIns="0" tIns="0" rIns="0" bIns="0" anchor="t">
-            <a:spAutoFit/>
-          </a:bodyPr>
-          <a:lstStyle/>
-          <a:p>
-            <a:pPr algn="ctr">
-              <a:spcBef>
-                <a:spcPts val="0"/>
-              </a:spcBef>
-              <a:spcAft>
-                <a:spcPts val="0"/>
-              </a:spcAft>
-            </a:pPr>
-            <a:r>
-              <a:rPr sz="840" b="0" i="1">
-                <a:solidFill>
-                  <a:srgbClr val="2E7D32"/>
-                </a:solidFill>
-                <a:latin typeface="微软雅黑" panose="020B0503020204020204" charset="-122"/>
-              </a:rPr>
-              <a:t>«artifact»</a:t>
-            </a:r>
-            <a:endParaRPr sz="840" b="0" i="1">
-              <a:solidFill>
-                <a:srgbClr val="2E7D32"/>
-              </a:solidFill>
-              <a:latin typeface="微软雅黑" panose="020B0503020204020204" charset="-122"/>
-            </a:endParaRPr>
-          </a:p>
-        </p:txBody>
-      </p:sp>
-      <p:sp>
-        <p:nvSpPr>
-          <p:cNvPr id="100" name="TextBox 99"/>
-          <p:cNvSpPr txBox="1"/>
-          <p:nvPr/>
-        </p:nvSpPr>
-        <p:spPr>
-          <a:xfrm>
-            <a:off x="2452852" y="6125036"/>
-            <a:ext cx="2060977" cy="186690"/>
-          </a:xfrm>
-          <a:prstGeom prst="rect">
-            <a:avLst/>
-          </a:prstGeom>
-          <a:noFill/>
-          <a:ln>
-            <a:noFill/>
-          </a:ln>
-        </p:spPr>
-        <p:txBody>
-          <a:bodyPr wrap="square" lIns="0" tIns="0" rIns="0" bIns="0" anchor="ctr">
-            <a:spAutoFit/>
-          </a:bodyPr>
-          <a:lstStyle/>
-          <a:p>
-            <a:pPr algn="ctr">
-              <a:spcBef>
-                <a:spcPts val="0"/>
-              </a:spcBef>
-              <a:spcAft>
-                <a:spcPts val="0"/>
-              </a:spcAft>
-            </a:pPr>
-            <a:r>
-              <a:rPr lang="zh-CN" sz="1220" b="1" i="0">
-                <a:solidFill>
-                  <a:srgbClr val="1A1A2E"/>
-                </a:solidFill>
-                <a:latin typeface="微软雅黑" panose="020B0503020204020204" charset="-122"/>
-              </a:rPr>
-              <a:t>数据库</a:t>
-            </a:r>
-            <a:r>
-              <a:rPr sz="1220" b="1" i="0">
-                <a:solidFill>
-                  <a:srgbClr val="1A1A2E"/>
-                </a:solidFill>
-                <a:latin typeface="微软雅黑" panose="020B0503020204020204" charset="-122"/>
-              </a:rPr>
-              <a:t>存储</a:t>
-            </a:r>
-            <a:endParaRPr sz="1220" b="1" i="0">
-              <a:solidFill>
-                <a:srgbClr val="1A1A2E"/>
-              </a:solidFill>
-              <a:latin typeface="微软雅黑" panose="020B0503020204020204" charset="-122"/>
-            </a:endParaRPr>
-          </a:p>
-        </p:txBody>
-      </p:sp>
-      <p:sp>
-        <p:nvSpPr>
-          <p:cNvPr id="101" name="TextBox 100"/>
-          <p:cNvSpPr txBox="1"/>
-          <p:nvPr/>
-        </p:nvSpPr>
-        <p:spPr>
-          <a:xfrm>
-            <a:off x="2452852" y="6324369"/>
-            <a:ext cx="2060977" cy="99752"/>
-          </a:xfrm>
-          <a:prstGeom prst="rect">
-            <a:avLst/>
-          </a:prstGeom>
-          <a:noFill/>
-          <a:ln>
-            <a:noFill/>
-          </a:ln>
-        </p:spPr>
-        <p:txBody>
-          <a:bodyPr wrap="square" lIns="0" tIns="0" rIns="0" bIns="0" anchor="ctr">
-            <a:spAutoFit/>
-          </a:bodyPr>
-          <a:lstStyle/>
-          <a:p>
-            <a:pPr algn="ctr">
-              <a:spcBef>
-                <a:spcPts val="0"/>
-              </a:spcBef>
-              <a:spcAft>
-                <a:spcPts val="0"/>
-              </a:spcAft>
-            </a:pPr>
-            <a:r>
-              <a:rPr sz="940" b="0" i="0">
-                <a:solidFill>
-                  <a:srgbClr val="555555"/>
-                </a:solidFill>
-                <a:latin typeface="微软雅黑" panose="020B0503020204020204" charset="-122"/>
-              </a:rPr>
-              <a:t>CVE / 策略结果</a:t>
-            </a:r>
-            <a:endParaRPr sz="940" b="0" i="0">
-              <a:solidFill>
-                <a:srgbClr val="555555"/>
-              </a:solidFill>
-              <a:latin typeface="微软雅黑" panose="020B0503020204020204" charset="-122"/>
-            </a:endParaRPr>
-          </a:p>
-        </p:txBody>
-      </p:sp>
-      <p:sp>
-        <p:nvSpPr>
-          <p:cNvPr id="102" name="Rectangle 101"/>
-          <p:cNvSpPr/>
-          <p:nvPr/>
-        </p:nvSpPr>
-        <p:spPr>
-          <a:xfrm>
-            <a:off x="5950708" y="5806901"/>
-            <a:ext cx="2322227" cy="698269"/>
-          </a:xfrm>
-          <a:prstGeom prst="rect">
-            <a:avLst/>
-          </a:prstGeom>
-          <a:solidFill>
-            <a:srgbClr val="E8F5E9"/>
-          </a:solidFill>
-          <a:ln w="15240">
-            <a:solidFill>
-              <a:srgbClr val="2E7D32"/>
-            </a:solidFill>
-          </a:ln>
-        </p:spPr>
-        <p:style>
-          <a:lnRef idx="1">
-            <a:schemeClr val="accent1"/>
-          </a:lnRef>
-          <a:fillRef idx="3">
-            <a:schemeClr val="accent1"/>
-          </a:fillRef>
-          <a:effectRef idx="2">
-            <a:schemeClr val="accent1"/>
-          </a:effectRef>
-          <a:fontRef idx="minor">
-            <a:schemeClr val="lt1"/>
-          </a:fontRef>
-        </p:style>
-        <p:txBody>
-          <a:bodyPr rtlCol="0" anchor="ctr"/>
-          <a:lstStyle/>
-          <a:p>
-            <a:pPr algn="ctr"/>
-          </a:p>
-        </p:txBody>
-      </p:sp>
-      <p:sp>
-        <p:nvSpPr>
-          <p:cNvPr id="103" name="TextBox 102"/>
-          <p:cNvSpPr txBox="1"/>
-          <p:nvPr/>
-        </p:nvSpPr>
-        <p:spPr>
-          <a:xfrm>
-            <a:off x="6081333" y="5869247"/>
-            <a:ext cx="2060977" cy="112221"/>
-          </a:xfrm>
-          <a:prstGeom prst="rect">
-            <a:avLst/>
-          </a:prstGeom>
-          <a:noFill/>
-          <a:ln>
-            <a:noFill/>
-          </a:ln>
-        </p:spPr>
-        <p:txBody>
-          <a:bodyPr wrap="square" lIns="0" tIns="0" rIns="0" bIns="0" anchor="t">
-            <a:spAutoFit/>
-          </a:bodyPr>
-          <a:lstStyle/>
-          <a:p>
-            <a:pPr algn="ctr">
-              <a:spcBef>
-                <a:spcPts val="0"/>
-              </a:spcBef>
-              <a:spcAft>
-                <a:spcPts val="0"/>
-              </a:spcAft>
-            </a:pPr>
-            <a:r>
-              <a:rPr sz="840" b="0" i="1">
-                <a:solidFill>
-                  <a:srgbClr val="2E7D32"/>
-                </a:solidFill>
-                <a:latin typeface="微软雅黑" panose="020B0503020204020204" charset="-122"/>
-              </a:rPr>
-              <a:t>«artifact»</a:t>
-            </a:r>
-            <a:endParaRPr sz="840" b="0" i="1">
-              <a:solidFill>
-                <a:srgbClr val="2E7D32"/>
-              </a:solidFill>
-              <a:latin typeface="微软雅黑" panose="020B0503020204020204" charset="-122"/>
-            </a:endParaRPr>
-          </a:p>
-        </p:txBody>
-      </p:sp>
-      <p:sp>
-        <p:nvSpPr>
-          <p:cNvPr id="104" name="TextBox 103"/>
-          <p:cNvSpPr txBox="1"/>
-          <p:nvPr/>
-        </p:nvSpPr>
-        <p:spPr>
-          <a:xfrm>
-            <a:off x="6081333" y="6143567"/>
-            <a:ext cx="2060977" cy="149629"/>
-          </a:xfrm>
-          <a:prstGeom prst="rect">
-            <a:avLst/>
-          </a:prstGeom>
-          <a:noFill/>
-          <a:ln>
-            <a:noFill/>
-          </a:ln>
-        </p:spPr>
-        <p:txBody>
-          <a:bodyPr wrap="square" lIns="0" tIns="0" rIns="0" bIns="0" anchor="ctr">
-            <a:spAutoFit/>
-          </a:bodyPr>
-          <a:lstStyle/>
-          <a:p>
-            <a:pPr algn="ctr">
-              <a:spcBef>
-                <a:spcPts val="0"/>
-              </a:spcBef>
-              <a:spcAft>
-                <a:spcPts val="0"/>
-              </a:spcAft>
-            </a:pPr>
-            <a:r>
-              <a:rPr sz="1220" b="1" i="0">
-                <a:solidFill>
-                  <a:srgbClr val="1A1A2E"/>
-                </a:solidFill>
-                <a:latin typeface="微软雅黑" panose="020B0503020204020204" charset="-122"/>
-              </a:rPr>
-              <a:t>向量索引</a:t>
-            </a:r>
-            <a:endParaRPr sz="1220" b="1" i="0">
-              <a:solidFill>
-                <a:srgbClr val="1A1A2E"/>
-              </a:solidFill>
-              <a:latin typeface="微软雅黑" panose="020B0503020204020204" charset="-122"/>
-            </a:endParaRPr>
-          </a:p>
-        </p:txBody>
-      </p:sp>
-      <p:sp>
-        <p:nvSpPr>
-          <p:cNvPr id="105" name="TextBox 104"/>
-          <p:cNvSpPr txBox="1"/>
-          <p:nvPr/>
-        </p:nvSpPr>
-        <p:spPr>
-          <a:xfrm>
-            <a:off x="6081333" y="6324369"/>
-            <a:ext cx="2060977" cy="99752"/>
-          </a:xfrm>
-          <a:prstGeom prst="rect">
-            <a:avLst/>
-          </a:prstGeom>
-          <a:noFill/>
-          <a:ln>
-            <a:noFill/>
-          </a:ln>
-        </p:spPr>
-        <p:txBody>
-          <a:bodyPr wrap="square" lIns="0" tIns="0" rIns="0" bIns="0" anchor="ctr">
-            <a:spAutoFit/>
-          </a:bodyPr>
-          <a:lstStyle/>
-          <a:p>
-            <a:pPr algn="ctr">
-              <a:spcBef>
-                <a:spcPts val="0"/>
-              </a:spcBef>
-              <a:spcAft>
-                <a:spcPts val="0"/>
-              </a:spcAft>
-            </a:pPr>
-            <a:r>
-              <a:rPr sz="940" b="0" i="0">
-                <a:solidFill>
-                  <a:srgbClr val="555555"/>
-                </a:solidFill>
-                <a:latin typeface="微软雅黑" panose="020B0503020204020204" charset="-122"/>
-              </a:rPr>
-              <a:t>语义检索</a:t>
-            </a:r>
-            <a:endParaRPr sz="940" b="0" i="0">
-              <a:solidFill>
-                <a:srgbClr val="555555"/>
-              </a:solidFill>
-              <a:latin typeface="微软雅黑" panose="020B0503020204020204" charset="-122"/>
+              <a:latin typeface="宋体" panose="02010600030101010101" pitchFamily="2" charset="-122"/>
+              <a:ea typeface="宋体" panose="02010600030101010101" pitchFamily="2" charset="-122"/>
             </a:endParaRPr>
           </a:p>
         </p:txBody>
@@ -7917,7 +4676,7 @@
         </p:nvSpPr>
         <p:spPr>
           <a:xfrm>
-            <a:off x="10032749" y="2840297"/>
+            <a:off x="10401342" y="2840297"/>
             <a:ext cx="1705385" cy="698269"/>
           </a:xfrm>
           <a:prstGeom prst="rect">
@@ -7951,19 +4710,23 @@
           <a:lstStyle/>
           <a:p>
             <a:pPr algn="ctr"/>
-          </a:p>
-        </p:txBody>
-      </p:sp>
-      <p:sp>
-        <p:nvSpPr>
-          <p:cNvPr id="107" name="TextBox 106"/>
+            <a:endParaRPr sz="3200" b="1">
+              <a:latin typeface="宋体" panose="02010600030101010101" pitchFamily="2" charset="-122"/>
+              <a:ea typeface="宋体" panose="02010600030101010101" pitchFamily="2" charset="-122"/>
+            </a:endParaRPr>
+          </a:p>
+        </p:txBody>
+      </p:sp>
+      <p:sp>
+        <p:nvSpPr>
+          <p:cNvPr id="108" name="TextBox 107"/>
           <p:cNvSpPr txBox="1"/>
           <p:nvPr/>
         </p:nvSpPr>
         <p:spPr>
           <a:xfrm>
-            <a:off x="10134346" y="2877704"/>
-            <a:ext cx="1502191" cy="99752"/>
+            <a:off x="10502939" y="2881654"/>
+            <a:ext cx="1502191" cy="615553"/>
           </a:xfrm>
           <a:prstGeom prst="rect">
             <a:avLst/>
@@ -7974,7 +4737,7 @@
           </a:ln>
         </p:spPr>
         <p:txBody>
-          <a:bodyPr wrap="square" lIns="0" tIns="0" rIns="0" bIns="0" anchor="t">
+          <a:bodyPr wrap="square" lIns="0" tIns="0" rIns="0" bIns="0" anchor="ctr">
             <a:spAutoFit/>
           </a:bodyPr>
           <a:lstStyle/>
@@ -7988,231 +4751,35 @@
               </a:spcAft>
             </a:pPr>
             <a:r>
-              <a:rPr sz="810" b="0" i="1">
-                <a:solidFill>
-                  <a:srgbClr val="78909C"/>
-                </a:solidFill>
-                <a:latin typeface="微软雅黑" panose="020B0503020204020204" charset="-122"/>
-              </a:rPr>
-              <a:t>«node»</a:t>
-            </a:r>
-            <a:endParaRPr sz="810" b="0" i="1">
-              <a:solidFill>
-                <a:srgbClr val="78909C"/>
-              </a:solidFill>
-              <a:latin typeface="微软雅黑" panose="020B0503020204020204" charset="-122"/>
-            </a:endParaRPr>
-          </a:p>
-        </p:txBody>
-      </p:sp>
-      <p:sp>
-        <p:nvSpPr>
-          <p:cNvPr id="108" name="TextBox 107"/>
-          <p:cNvSpPr txBox="1"/>
-          <p:nvPr/>
-        </p:nvSpPr>
-        <p:spPr>
-          <a:xfrm>
-            <a:off x="10134346" y="3189431"/>
-            <a:ext cx="1502191" cy="137160"/>
-          </a:xfrm>
-          <a:prstGeom prst="rect">
-            <a:avLst/>
-          </a:prstGeom>
-          <a:noFill/>
-          <a:ln>
-            <a:noFill/>
-          </a:ln>
-        </p:spPr>
-        <p:txBody>
-          <a:bodyPr wrap="square" lIns="0" tIns="0" rIns="0" bIns="0" anchor="ctr">
-            <a:spAutoFit/>
-          </a:bodyPr>
-          <a:lstStyle/>
-          <a:p>
-            <a:pPr algn="ctr">
-              <a:spcBef>
-                <a:spcPts val="0"/>
-              </a:spcBef>
-              <a:spcAft>
-                <a:spcPts val="0"/>
-              </a:spcAft>
-            </a:pPr>
-            <a:r>
-              <a:rPr sz="1160" b="1" i="0">
+              <a:rPr lang="en-US" altLang="zh-CN" sz="2000" b="1" i="0" dirty="0" err="1">
                 <a:solidFill>
                   <a:srgbClr val="1A1A2E"/>
                 </a:solidFill>
-                <a:latin typeface="微软雅黑" panose="020B0503020204020204" charset="-122"/>
+                <a:latin typeface="宋体" panose="02010600030101010101" pitchFamily="2" charset="-122"/>
+                <a:ea typeface="宋体" panose="02010600030101010101" pitchFamily="2" charset="-122"/>
               </a:rPr>
-              <a:t>目标集群</a:t>
+              <a:t>Kubernetes</a:t>
             </a:r>
-            <a:endParaRPr sz="1160" b="1" i="0">
+            <a:r>
+              <a:rPr sz="2000" b="1" i="0" dirty="0" err="1">
+                <a:solidFill>
+                  <a:srgbClr val="1A1A2E"/>
+                </a:solidFill>
+                <a:latin typeface="宋体" panose="02010600030101010101" pitchFamily="2" charset="-122"/>
+                <a:ea typeface="宋体" panose="02010600030101010101" pitchFamily="2" charset="-122"/>
+              </a:rPr>
+              <a:t>集群</a:t>
+            </a:r>
+            <a:endParaRPr sz="2000" b="1" i="0" dirty="0">
               <a:solidFill>
                 <a:srgbClr val="1A1A2E"/>
               </a:solidFill>
-              <a:latin typeface="微软雅黑" panose="020B0503020204020204" charset="-122"/>
+              <a:latin typeface="宋体" panose="02010600030101010101" pitchFamily="2" charset="-122"/>
+              <a:ea typeface="宋体" panose="02010600030101010101" pitchFamily="2" charset="-122"/>
             </a:endParaRPr>
           </a:p>
         </p:txBody>
       </p:sp>
-      <p:sp>
-        <p:nvSpPr>
-          <p:cNvPr id="109" name="TextBox 108"/>
-          <p:cNvSpPr txBox="1"/>
-          <p:nvPr/>
-        </p:nvSpPr>
-        <p:spPr>
-          <a:xfrm>
-            <a:off x="10134346" y="3363999"/>
-            <a:ext cx="1502191" cy="99752"/>
-          </a:xfrm>
-          <a:prstGeom prst="rect">
-            <a:avLst/>
-          </a:prstGeom>
-          <a:noFill/>
-          <a:ln>
-            <a:noFill/>
-          </a:ln>
-        </p:spPr>
-        <p:txBody>
-          <a:bodyPr wrap="square" lIns="0" tIns="0" rIns="0" bIns="0" anchor="ctr">
-            <a:spAutoFit/>
-          </a:bodyPr>
-          <a:lstStyle/>
-          <a:p>
-            <a:pPr algn="ctr">
-              <a:spcBef>
-                <a:spcPts val="0"/>
-              </a:spcBef>
-              <a:spcAft>
-                <a:spcPts val="0"/>
-              </a:spcAft>
-            </a:pPr>
-            <a:r>
-              <a:rPr sz="900" b="0" i="0">
-                <a:solidFill>
-                  <a:srgbClr val="555555"/>
-                </a:solidFill>
-                <a:latin typeface="微软雅黑" panose="020B0503020204020204" charset="-122"/>
-              </a:rPr>
-              <a:t>/ 主机</a:t>
-            </a:r>
-            <a:endParaRPr sz="900" b="0" i="0">
-              <a:solidFill>
-                <a:srgbClr val="555555"/>
-              </a:solidFill>
-              <a:latin typeface="微软雅黑" panose="020B0503020204020204" charset="-122"/>
-            </a:endParaRPr>
-          </a:p>
-        </p:txBody>
-      </p:sp>
-      <p:cxnSp>
-        <p:nvCxnSpPr>
-          <p:cNvPr id="110" name="Connector 109"/>
-          <p:cNvCxnSpPr/>
-          <p:nvPr/>
-        </p:nvCxnSpPr>
-        <p:spPr>
-          <a:xfrm>
-            <a:off x="1886809" y="1115983"/>
-            <a:ext cx="0" cy="411480"/>
-          </a:xfrm>
-          <a:prstGeom prst="line">
-            <a:avLst/>
-          </a:prstGeom>
-          <a:ln w="19050">
-            <a:solidFill>
-              <a:srgbClr val="263238"/>
-            </a:solidFill>
-          </a:ln>
-        </p:spPr>
-        <p:style>
-          <a:lnRef idx="2">
-            <a:schemeClr val="accent1"/>
-          </a:lnRef>
-          <a:fillRef idx="0">
-            <a:schemeClr val="accent1"/>
-          </a:fillRef>
-          <a:effectRef idx="1">
-            <a:schemeClr val="accent1"/>
-          </a:effectRef>
-          <a:fontRef idx="minor">
-            <a:schemeClr val="tx1"/>
-          </a:fontRef>
-        </p:style>
-      </p:cxnSp>
-      <p:cxnSp>
-        <p:nvCxnSpPr>
-          <p:cNvPr id="111" name="Connector 110"/>
-          <p:cNvCxnSpPr/>
-          <p:nvPr/>
-        </p:nvCxnSpPr>
-        <p:spPr>
-          <a:xfrm>
-            <a:off x="1886809" y="1527463"/>
-            <a:ext cx="1451393" cy="0"/>
-          </a:xfrm>
-          <a:prstGeom prst="line">
-            <a:avLst/>
-          </a:prstGeom>
-          <a:ln w="19050">
-            <a:solidFill>
-              <a:srgbClr val="263238"/>
-            </a:solidFill>
-          </a:ln>
-        </p:spPr>
-        <p:style>
-          <a:lnRef idx="2">
-            <a:schemeClr val="accent1"/>
-          </a:lnRef>
-          <a:fillRef idx="0">
-            <a:schemeClr val="accent1"/>
-          </a:fillRef>
-          <a:effectRef idx="1">
-            <a:schemeClr val="accent1"/>
-          </a:effectRef>
-          <a:fontRef idx="minor">
-            <a:schemeClr val="tx1"/>
-          </a:fontRef>
-        </p:style>
-      </p:cxnSp>
-      <p:cxnSp>
-        <p:nvCxnSpPr>
-          <p:cNvPr id="112" name="Connector 111"/>
-          <p:cNvCxnSpPr/>
-          <p:nvPr/>
-        </p:nvCxnSpPr>
-        <p:spPr>
-          <a:xfrm>
-            <a:off x="3338202" y="1527463"/>
-            <a:ext cx="0" cy="205740"/>
-          </a:xfrm>
-          <a:prstGeom prst="line">
-            <a:avLst/>
-          </a:prstGeom>
-          <a:ln w="19050">
-            <a:solidFill>
-              <a:srgbClr val="263238"/>
-            </a:solidFill>
-            <a:tailEnd type="arrow"/>
-          </a:ln>
-        </p:spPr>
-        <p:style>
-          <a:lnRef idx="2">
-            <a:schemeClr val="accent1"/>
-          </a:lnRef>
-          <a:fillRef idx="0">
-            <a:schemeClr val="accent1"/>
-          </a:fillRef>
-          <a:effectRef idx="1">
-            <a:schemeClr val="accent1"/>
-          </a:effectRef>
-          <a:fontRef idx="minor">
-            <a:schemeClr val="tx1"/>
-          </a:fontRef>
-        </p:style>
-      </p:cxnSp>
       <p:cxnSp>
         <p:nvCxnSpPr>
           <p:cNvPr id="114" name="Connector 113"/>
@@ -8405,58 +4972,18 @@
               </a:spcAft>
             </a:pPr>
             <a:r>
-              <a:rPr sz="840" b="0" i="0">
+              <a:rPr sz="1100" b="1" i="0">
                 <a:solidFill>
                   <a:srgbClr val="37474F"/>
                 </a:solidFill>
-                <a:latin typeface="微软雅黑" panose="020B0503020204020204" charset="-122"/>
+                <a:latin typeface="宋体" panose="02010600030101010101" pitchFamily="2" charset="-122"/>
+                <a:ea typeface="宋体" panose="02010600030101010101" pitchFamily="2" charset="-122"/>
               </a:rPr>
               <a:t>任务分发</a:t>
             </a:r>
-            <a:endParaRPr sz="840" b="0" i="0">
-              <a:solidFill>
-                <a:srgbClr val="37474F"/>
-              </a:solidFill>
-              <a:latin typeface="微软雅黑" panose="020B0503020204020204" charset="-122"/>
-            </a:endParaRPr>
-          </a:p>
-        </p:txBody>
-      </p:sp>
-      <p:cxnSp>
-        <p:nvCxnSpPr>
-          <p:cNvPr id="119" name="Connector 118"/>
-          <p:cNvCxnSpPr/>
-          <p:nvPr/>
-        </p:nvCxnSpPr>
-        <p:spPr>
-          <a:xfrm>
-            <a:off x="3628480" y="3469986"/>
-            <a:ext cx="0" cy="360045"/>
-          </a:xfrm>
-          <a:prstGeom prst="line">
-            <a:avLst/>
-          </a:prstGeom>
-          <a:ln w="19050">
-            <a:solidFill>
-              <a:srgbClr val="263238"/>
-            </a:solidFill>
-          </a:ln>
-        </p:spPr>
-        <p:style>
-          <a:lnRef idx="2">
-            <a:schemeClr val="accent1"/>
-          </a:lnRef>
-          <a:fillRef idx="0">
-            <a:schemeClr val="accent1"/>
-          </a:fillRef>
-          <a:effectRef idx="1">
-            <a:schemeClr val="accent1"/>
-          </a:effectRef>
-          <a:fontRef idx="minor">
-            <a:schemeClr val="tx1"/>
-          </a:fontRef>
-        </p:style>
-      </p:cxnSp>
+          </a:p>
+        </p:txBody>
+      </p:sp>
       <p:cxnSp>
         <p:nvCxnSpPr>
           <p:cNvPr id="120" name="Connector 119"/>
@@ -8494,14 +5021,17 @@
       </p:cxnSp>
       <p:cxnSp>
         <p:nvCxnSpPr>
-          <p:cNvPr id="121" name="Connector 120"/>
-          <p:cNvCxnSpPr/>
+          <p:cNvPr id="132" name="Connector 131"/>
+          <p:cNvCxnSpPr>
+            <a:cxnSpLocks/>
+            <a:endCxn id="106" idx="1"/>
+          </p:cNvCxnSpPr>
           <p:nvPr/>
         </p:nvCxnSpPr>
         <p:spPr>
           <a:xfrm>
-            <a:off x="2031949" y="3830550"/>
-            <a:ext cx="0" cy="461357"/>
+            <a:off x="8962347" y="3189431"/>
+            <a:ext cx="1438995" cy="1"/>
           </a:xfrm>
           <a:prstGeom prst="line">
             <a:avLst/>
@@ -8528,122 +5058,16 @@
           </a:fontRef>
         </p:style>
       </p:cxnSp>
-      <p:cxnSp>
-        <p:nvCxnSpPr>
-          <p:cNvPr id="123" name="Connector 122"/>
-          <p:cNvCxnSpPr/>
+      <p:sp>
+        <p:nvSpPr>
+          <p:cNvPr id="133" name="Rounded Rectangle 132"/>
+          <p:cNvSpPr/>
           <p:nvPr/>
-        </p:nvCxnSpPr>
+        </p:nvSpPr>
         <p:spPr>
           <a:xfrm>
-            <a:off x="9071201" y="4909127"/>
-            <a:ext cx="0" cy="405245"/>
-          </a:xfrm>
-          <a:prstGeom prst="line">
-            <a:avLst/>
-          </a:prstGeom>
-          <a:ln w="19050">
-            <a:solidFill>
-              <a:srgbClr val="263238"/>
-            </a:solidFill>
-          </a:ln>
-        </p:spPr>
-        <p:style>
-          <a:lnRef idx="2">
-            <a:schemeClr val="accent1"/>
-          </a:lnRef>
-          <a:fillRef idx="0">
-            <a:schemeClr val="accent1"/>
-          </a:fillRef>
-          <a:effectRef idx="1">
-            <a:schemeClr val="accent1"/>
-          </a:effectRef>
-          <a:fontRef idx="minor">
-            <a:schemeClr val="tx1"/>
-          </a:fontRef>
-        </p:style>
-      </p:cxnSp>
-      <p:cxnSp>
-        <p:nvCxnSpPr>
-          <p:cNvPr id="124" name="Connector 123"/>
-          <p:cNvCxnSpPr/>
-          <p:nvPr/>
-        </p:nvCxnSpPr>
-        <p:spPr>
-          <a:xfrm flipH="1">
-            <a:off x="3483341" y="5314372"/>
-            <a:ext cx="5587860" cy="0"/>
-          </a:xfrm>
-          <a:prstGeom prst="line">
-            <a:avLst/>
-          </a:prstGeom>
-          <a:ln w="19050">
-            <a:solidFill>
-              <a:srgbClr val="263238"/>
-            </a:solidFill>
-          </a:ln>
-        </p:spPr>
-        <p:style>
-          <a:lnRef idx="2">
-            <a:schemeClr val="accent1"/>
-          </a:lnRef>
-          <a:fillRef idx="0">
-            <a:schemeClr val="accent1"/>
-          </a:fillRef>
-          <a:effectRef idx="1">
-            <a:schemeClr val="accent1"/>
-          </a:effectRef>
-          <a:fontRef idx="minor">
-            <a:schemeClr val="tx1"/>
-          </a:fontRef>
-        </p:style>
-      </p:cxnSp>
-      <p:cxnSp>
-        <p:nvCxnSpPr>
-          <p:cNvPr id="125" name="Connector 124"/>
-          <p:cNvCxnSpPr/>
-          <p:nvPr/>
-        </p:nvCxnSpPr>
-        <p:spPr>
-          <a:xfrm>
-            <a:off x="3483341" y="5314372"/>
-            <a:ext cx="0" cy="492529"/>
-          </a:xfrm>
-          <a:prstGeom prst="line">
-            <a:avLst/>
-          </a:prstGeom>
-          <a:ln w="19050">
-            <a:solidFill>
-              <a:srgbClr val="263238"/>
-            </a:solidFill>
-            <a:tailEnd type="arrow"/>
-          </a:ln>
-        </p:spPr>
-        <p:style>
-          <a:lnRef idx="2">
-            <a:schemeClr val="accent1"/>
-          </a:lnRef>
-          <a:fillRef idx="0">
-            <a:schemeClr val="accent1"/>
-          </a:fillRef>
-          <a:effectRef idx="1">
-            <a:schemeClr val="accent1"/>
-          </a:effectRef>
-          <a:fontRef idx="minor">
-            <a:schemeClr val="tx1"/>
-          </a:fontRef>
-        </p:style>
-      </p:cxnSp>
-      <p:sp>
-        <p:nvSpPr>
-          <p:cNvPr id="126" name="Rounded Rectangle 125"/>
-          <p:cNvSpPr/>
-          <p:nvPr/>
-        </p:nvSpPr>
-        <p:spPr>
-          <a:xfrm>
-            <a:off x="8737906" y="5005820"/>
-            <a:ext cx="834550" cy="211974"/>
+            <a:off x="9052465" y="2847385"/>
+            <a:ext cx="1288705" cy="249381"/>
           </a:xfrm>
           <a:prstGeom prst="roundRect">
             <a:avLst/>
@@ -8684,338 +5108,3553 @@
               </a:spcAft>
             </a:pPr>
             <a:r>
-              <a:rPr sz="840" b="0" i="0">
+              <a:rPr sz="1100" b="1" i="0" dirty="0">
                 <a:solidFill>
                   <a:srgbClr val="37474F"/>
                 </a:solidFill>
-                <a:latin typeface="微软雅黑" panose="020B0503020204020204" charset="-122"/>
-              </a:rPr>
-              <a:t>持久化</a:t>
-            </a:r>
-            <a:endParaRPr sz="840" b="0" i="0">
-              <a:solidFill>
-                <a:srgbClr val="37474F"/>
-              </a:solidFill>
-              <a:latin typeface="微软雅黑" panose="020B0503020204020204" charset="-122"/>
-            </a:endParaRPr>
-          </a:p>
-        </p:txBody>
-      </p:sp>
-      <p:cxnSp>
-        <p:nvCxnSpPr>
-          <p:cNvPr id="127" name="Connector 126"/>
-          <p:cNvCxnSpPr/>
-          <p:nvPr/>
-        </p:nvCxnSpPr>
-        <p:spPr>
-          <a:xfrm>
-            <a:off x="5914423" y="4690918"/>
-            <a:ext cx="290279" cy="0"/>
-          </a:xfrm>
-          <a:prstGeom prst="line">
-            <a:avLst/>
-          </a:prstGeom>
-          <a:ln w="19050">
-            <a:solidFill>
-              <a:srgbClr val="263238"/>
-            </a:solidFill>
-            <a:prstDash val="dash"/>
-          </a:ln>
-        </p:spPr>
-        <p:style>
-          <a:lnRef idx="2">
-            <a:schemeClr val="accent1"/>
-          </a:lnRef>
-          <a:fillRef idx="0">
-            <a:schemeClr val="accent1"/>
-          </a:fillRef>
-          <a:effectRef idx="1">
-            <a:schemeClr val="accent1"/>
-          </a:effectRef>
-          <a:fontRef idx="minor">
-            <a:schemeClr val="tx1"/>
-          </a:fontRef>
-        </p:style>
-      </p:cxnSp>
-      <p:cxnSp>
-        <p:nvCxnSpPr>
-          <p:cNvPr id="128" name="Connector 127"/>
-          <p:cNvCxnSpPr/>
-          <p:nvPr/>
-        </p:nvCxnSpPr>
-        <p:spPr>
-          <a:xfrm>
-            <a:off x="6204702" y="4690918"/>
-            <a:ext cx="0" cy="760614"/>
-          </a:xfrm>
-          <a:prstGeom prst="line">
-            <a:avLst/>
-          </a:prstGeom>
-          <a:ln w="19050">
-            <a:solidFill>
-              <a:srgbClr val="263238"/>
-            </a:solidFill>
-            <a:prstDash val="dash"/>
-          </a:ln>
-        </p:spPr>
-        <p:style>
-          <a:lnRef idx="2">
-            <a:schemeClr val="accent1"/>
-          </a:lnRef>
-          <a:fillRef idx="0">
-            <a:schemeClr val="accent1"/>
-          </a:fillRef>
-          <a:effectRef idx="1">
-            <a:schemeClr val="accent1"/>
-          </a:effectRef>
-          <a:fontRef idx="minor">
-            <a:schemeClr val="tx1"/>
-          </a:fontRef>
-        </p:style>
-      </p:cxnSp>
-      <p:cxnSp>
-        <p:nvCxnSpPr>
-          <p:cNvPr id="129" name="Connector 128"/>
-          <p:cNvCxnSpPr/>
-          <p:nvPr/>
-        </p:nvCxnSpPr>
-        <p:spPr>
-          <a:xfrm>
-            <a:off x="6204702" y="5451532"/>
-            <a:ext cx="907120" cy="0"/>
-          </a:xfrm>
-          <a:prstGeom prst="line">
-            <a:avLst/>
-          </a:prstGeom>
-          <a:ln w="19050">
-            <a:solidFill>
-              <a:srgbClr val="263238"/>
-            </a:solidFill>
-            <a:prstDash val="dash"/>
-          </a:ln>
-        </p:spPr>
-        <p:style>
-          <a:lnRef idx="2">
-            <a:schemeClr val="accent1"/>
-          </a:lnRef>
-          <a:fillRef idx="0">
-            <a:schemeClr val="accent1"/>
-          </a:fillRef>
-          <a:effectRef idx="1">
-            <a:schemeClr val="accent1"/>
-          </a:effectRef>
-          <a:fontRef idx="minor">
-            <a:schemeClr val="tx1"/>
-          </a:fontRef>
-        </p:style>
-      </p:cxnSp>
-      <p:cxnSp>
-        <p:nvCxnSpPr>
-          <p:cNvPr id="130" name="Connector 129"/>
-          <p:cNvCxnSpPr/>
-          <p:nvPr/>
-        </p:nvCxnSpPr>
-        <p:spPr>
-          <a:xfrm>
-            <a:off x="7111822" y="5451532"/>
-            <a:ext cx="0" cy="355369"/>
-          </a:xfrm>
-          <a:prstGeom prst="line">
-            <a:avLst/>
-          </a:prstGeom>
-          <a:ln w="19050">
-            <a:solidFill>
-              <a:srgbClr val="263238"/>
-            </a:solidFill>
-            <a:prstDash val="dash"/>
-            <a:tailEnd type="arrow"/>
-          </a:ln>
-        </p:spPr>
-        <p:style>
-          <a:lnRef idx="2">
-            <a:schemeClr val="accent1"/>
-          </a:lnRef>
-          <a:fillRef idx="0">
-            <a:schemeClr val="accent1"/>
-          </a:fillRef>
-          <a:effectRef idx="1">
-            <a:schemeClr val="accent1"/>
-          </a:effectRef>
-          <a:fontRef idx="minor">
-            <a:schemeClr val="tx1"/>
-          </a:fontRef>
-        </p:style>
-      </p:cxnSp>
-      <p:sp>
-        <p:nvSpPr>
-          <p:cNvPr id="131" name="Rounded Rectangle 130"/>
-          <p:cNvSpPr/>
-          <p:nvPr/>
-        </p:nvSpPr>
-        <p:spPr>
-          <a:xfrm>
-            <a:off x="6549407" y="5345545"/>
-            <a:ext cx="834550" cy="211974"/>
-          </a:xfrm>
-          <a:prstGeom prst="roundRect">
-            <a:avLst/>
-          </a:prstGeom>
-          <a:solidFill>
-            <a:srgbClr val="FFFFFF"/>
-          </a:solidFill>
-          <a:ln w="10160">
-            <a:solidFill>
-              <a:srgbClr val="BDBDBD"/>
-            </a:solidFill>
-          </a:ln>
-        </p:spPr>
-        <p:style>
-          <a:lnRef idx="1">
-            <a:schemeClr val="accent1"/>
-          </a:lnRef>
-          <a:fillRef idx="3">
-            <a:schemeClr val="accent1"/>
-          </a:fillRef>
-          <a:effectRef idx="2">
-            <a:schemeClr val="accent1"/>
-          </a:effectRef>
-          <a:fontRef idx="minor">
-            <a:schemeClr val="lt1"/>
-          </a:fontRef>
-        </p:style>
-        <p:txBody>
-          <a:bodyPr wrap="square" lIns="0" tIns="0" rIns="0" bIns="0" rtlCol="0" anchor="ctr"/>
-          <a:lstStyle/>
-          <a:p>
-            <a:pPr algn="ctr">
-              <a:spcBef>
-                <a:spcPts val="0"/>
-              </a:spcBef>
-              <a:spcAft>
-                <a:spcPts val="0"/>
-              </a:spcAft>
-            </a:pPr>
-            <a:r>
-              <a:rPr sz="840" b="0" i="0">
-                <a:solidFill>
-                  <a:srgbClr val="37474F"/>
-                </a:solidFill>
-                <a:latin typeface="微软雅黑" panose="020B0503020204020204" charset="-122"/>
-              </a:rPr>
-              <a:t>语义检索</a:t>
-            </a:r>
-            <a:endParaRPr sz="840" b="0" i="0">
-              <a:solidFill>
-                <a:srgbClr val="37474F"/>
-              </a:solidFill>
-              <a:latin typeface="微软雅黑" panose="020B0503020204020204" charset="-122"/>
-            </a:endParaRPr>
-          </a:p>
-        </p:txBody>
-      </p:sp>
-      <p:cxnSp>
-        <p:nvCxnSpPr>
-          <p:cNvPr id="132" name="Connector 131"/>
-          <p:cNvCxnSpPr/>
-          <p:nvPr/>
-        </p:nvCxnSpPr>
-        <p:spPr>
-          <a:xfrm>
-            <a:off x="8962347" y="3189431"/>
-            <a:ext cx="1070402" cy="0"/>
-          </a:xfrm>
-          <a:prstGeom prst="line">
-            <a:avLst/>
-          </a:prstGeom>
-          <a:ln w="19050">
-            <a:solidFill>
-              <a:srgbClr val="263238"/>
-            </a:solidFill>
-            <a:tailEnd type="arrow"/>
-          </a:ln>
-        </p:spPr>
-        <p:style>
-          <a:lnRef idx="2">
-            <a:schemeClr val="accent1"/>
-          </a:lnRef>
-          <a:fillRef idx="0">
-            <a:schemeClr val="accent1"/>
-          </a:fillRef>
-          <a:effectRef idx="1">
-            <a:schemeClr val="accent1"/>
-          </a:effectRef>
-          <a:fontRef idx="minor">
-            <a:schemeClr val="tx1"/>
-          </a:fontRef>
-        </p:style>
-      </p:cxnSp>
-      <p:sp>
-        <p:nvSpPr>
-          <p:cNvPr id="133" name="Rounded Rectangle 132"/>
-          <p:cNvSpPr/>
-          <p:nvPr/>
-        </p:nvSpPr>
-        <p:spPr>
-          <a:xfrm>
-            <a:off x="8817208" y="2940050"/>
-            <a:ext cx="1523961" cy="211974"/>
-          </a:xfrm>
-          <a:prstGeom prst="roundRect">
-            <a:avLst/>
-          </a:prstGeom>
-          <a:solidFill>
-            <a:srgbClr val="FFFFFF"/>
-          </a:solidFill>
-          <a:ln w="10160">
-            <a:solidFill>
-              <a:srgbClr val="BDBDBD"/>
-            </a:solidFill>
-          </a:ln>
-        </p:spPr>
-        <p:style>
-          <a:lnRef idx="1">
-            <a:schemeClr val="accent1"/>
-          </a:lnRef>
-          <a:fillRef idx="3">
-            <a:schemeClr val="accent1"/>
-          </a:fillRef>
-          <a:effectRef idx="2">
-            <a:schemeClr val="accent1"/>
-          </a:effectRef>
-          <a:fontRef idx="minor">
-            <a:schemeClr val="lt1"/>
-          </a:fontRef>
-        </p:style>
-        <p:txBody>
-          <a:bodyPr wrap="square" lIns="0" tIns="0" rIns="0" bIns="0" rtlCol="0" anchor="ctr"/>
-          <a:lstStyle/>
-          <a:p>
-            <a:pPr algn="ctr">
-              <a:spcBef>
-                <a:spcPts val="0"/>
-              </a:spcBef>
-              <a:spcAft>
-                <a:spcPts val="0"/>
-              </a:spcAft>
-            </a:pPr>
-            <a:r>
-              <a:rPr sz="840" b="0" i="0">
-                <a:solidFill>
-                  <a:srgbClr val="37474F"/>
-                </a:solidFill>
-                <a:latin typeface="微软雅黑" panose="020B0503020204020204" charset="-122"/>
+                <a:latin typeface="宋体" panose="02010600030101010101" pitchFamily="2" charset="-122"/>
+                <a:ea typeface="宋体" panose="02010600030101010101" pitchFamily="2" charset="-122"/>
               </a:rPr>
               <a:t>K8s API / SSH</a:t>
             </a:r>
-            <a:endParaRPr sz="840" b="0" i="0">
+          </a:p>
+        </p:txBody>
+      </p:sp>
+      <p:grpSp>
+        <p:nvGrpSpPr>
+          <p:cNvPr id="147" name="组合 146">
+            <a:extLst>
+              <a:ext uri="{FF2B5EF4-FFF2-40B4-BE49-F238E27FC236}">
+                <a16:creationId xmlns:a16="http://schemas.microsoft.com/office/drawing/2014/main" id="{2A7A4564-8E59-D1D4-7E64-2D49E931991E}"/>
+              </a:ext>
+            </a:extLst>
+          </p:cNvPr>
+          <p:cNvGrpSpPr/>
+          <p:nvPr/>
+        </p:nvGrpSpPr>
+        <p:grpSpPr>
+          <a:xfrm>
+            <a:off x="3301918" y="4378748"/>
+            <a:ext cx="1814240" cy="561109"/>
+            <a:chOff x="10502939" y="6072707"/>
+            <a:chExt cx="1814240" cy="561109"/>
+          </a:xfrm>
+        </p:grpSpPr>
+        <p:grpSp>
+          <p:nvGrpSpPr>
+            <p:cNvPr id="146" name="组合 145">
+              <a:extLst>
+                <a:ext uri="{FF2B5EF4-FFF2-40B4-BE49-F238E27FC236}">
+                  <a16:creationId xmlns:a16="http://schemas.microsoft.com/office/drawing/2014/main" id="{219625C5-21BB-493D-CD6B-C7216B29D225}"/>
+                </a:ext>
+              </a:extLst>
+            </p:cNvPr>
+            <p:cNvGrpSpPr/>
+            <p:nvPr/>
+          </p:nvGrpSpPr>
+          <p:grpSpPr>
+            <a:xfrm>
+              <a:off x="10502939" y="6072707"/>
+              <a:ext cx="1814240" cy="561109"/>
+              <a:chOff x="1249250" y="4369987"/>
+              <a:chExt cx="1814240" cy="561109"/>
+            </a:xfrm>
+          </p:grpSpPr>
+          <p:sp>
+            <p:nvSpPr>
+              <p:cNvPr id="72" name="Rectangle 76">
+                <a:extLst>
+                  <a:ext uri="{FF2B5EF4-FFF2-40B4-BE49-F238E27FC236}">
+                    <a16:creationId xmlns:a16="http://schemas.microsoft.com/office/drawing/2014/main" id="{914FA448-16C4-5D89-FA09-FEF8EE96A8A2}"/>
+                  </a:ext>
+                </a:extLst>
+              </p:cNvPr>
+              <p:cNvSpPr/>
+              <p:nvPr/>
+            </p:nvSpPr>
+            <p:spPr>
+              <a:xfrm>
+                <a:off x="1249250" y="4369987"/>
+                <a:ext cx="1814240" cy="561109"/>
+              </a:xfrm>
+              <a:prstGeom prst="rect">
+                <a:avLst/>
+              </a:prstGeom>
               <a:solidFill>
-                <a:srgbClr val="37474F"/>
+                <a:srgbClr val="FFFFFF"/>
               </a:solidFill>
-              <a:latin typeface="微软雅黑" panose="020B0503020204020204" charset="-122"/>
-            </a:endParaRPr>
-          </a:p>
-        </p:txBody>
-      </p:sp>
+              <a:ln w="13970">
+                <a:solidFill>
+                  <a:schemeClr val="tx1">
+                    <a:lumMod val="65000"/>
+                    <a:lumOff val="35000"/>
+                  </a:schemeClr>
+                </a:solidFill>
+              </a:ln>
+            </p:spPr>
+            <p:style>
+              <a:lnRef idx="1">
+                <a:schemeClr val="accent1"/>
+              </a:lnRef>
+              <a:fillRef idx="3">
+                <a:schemeClr val="accent1"/>
+              </a:fillRef>
+              <a:effectRef idx="2">
+                <a:schemeClr val="accent1"/>
+              </a:effectRef>
+              <a:fontRef idx="minor">
+                <a:schemeClr val="lt1"/>
+              </a:fontRef>
+            </p:style>
+            <p:txBody>
+              <a:bodyPr rtlCol="0" anchor="ctr"/>
+              <a:lstStyle/>
+              <a:p>
+                <a:pPr algn="ctr"/>
+                <a:endParaRPr sz="3200" b="1">
+                  <a:latin typeface="宋体" panose="02010600030101010101" pitchFamily="2" charset="-122"/>
+                  <a:ea typeface="宋体" panose="02010600030101010101" pitchFamily="2" charset="-122"/>
+                </a:endParaRPr>
+              </a:p>
+            </p:txBody>
+          </p:sp>
+          <p:grpSp>
+            <p:nvGrpSpPr>
+              <p:cNvPr id="142" name="组合 141">
+                <a:extLst>
+                  <a:ext uri="{FF2B5EF4-FFF2-40B4-BE49-F238E27FC236}">
+                    <a16:creationId xmlns:a16="http://schemas.microsoft.com/office/drawing/2014/main" id="{044774A4-9BC0-1CD2-1C3A-1E1C745532C2}"/>
+                  </a:ext>
+                </a:extLst>
+              </p:cNvPr>
+              <p:cNvGrpSpPr/>
+              <p:nvPr/>
+            </p:nvGrpSpPr>
+            <p:grpSpPr>
+              <a:xfrm>
+                <a:off x="2791063" y="4407913"/>
+                <a:ext cx="166910" cy="143394"/>
+                <a:chOff x="10916798" y="4537825"/>
+                <a:chExt cx="166910" cy="143394"/>
+              </a:xfrm>
+            </p:grpSpPr>
+            <p:sp>
+              <p:nvSpPr>
+                <p:cNvPr id="143" name="Rectangle 91">
+                  <a:extLst>
+                    <a:ext uri="{FF2B5EF4-FFF2-40B4-BE49-F238E27FC236}">
+                      <a16:creationId xmlns:a16="http://schemas.microsoft.com/office/drawing/2014/main" id="{59BC87D9-F8D4-CA1C-985F-9185AAC0946F}"/>
+                    </a:ext>
+                  </a:extLst>
+                </p:cNvPr>
+                <p:cNvSpPr/>
+                <p:nvPr/>
+              </p:nvSpPr>
+              <p:spPr>
+                <a:xfrm>
+                  <a:off x="10945826" y="4537825"/>
+                  <a:ext cx="137882" cy="143394"/>
+                </a:xfrm>
+                <a:prstGeom prst="rect">
+                  <a:avLst/>
+                </a:prstGeom>
+                <a:solidFill>
+                  <a:srgbClr val="FFFFFF"/>
+                </a:solidFill>
+                <a:ln w="10160">
+                  <a:solidFill>
+                    <a:schemeClr val="tx1"/>
+                  </a:solidFill>
+                </a:ln>
+              </p:spPr>
+              <p:style>
+                <a:lnRef idx="1">
+                  <a:schemeClr val="accent1"/>
+                </a:lnRef>
+                <a:fillRef idx="3">
+                  <a:schemeClr val="accent1"/>
+                </a:fillRef>
+                <a:effectRef idx="2">
+                  <a:schemeClr val="accent1"/>
+                </a:effectRef>
+                <a:fontRef idx="minor">
+                  <a:schemeClr val="lt1"/>
+                </a:fontRef>
+              </p:style>
+              <p:txBody>
+                <a:bodyPr rtlCol="0" anchor="ctr"/>
+                <a:lstStyle/>
+                <a:p>
+                  <a:pPr algn="ctr"/>
+                  <a:endParaRPr sz="3200" b="1">
+                    <a:solidFill>
+                      <a:schemeClr val="tx1"/>
+                    </a:solidFill>
+                    <a:latin typeface="宋体" panose="02010600030101010101" pitchFamily="2" charset="-122"/>
+                    <a:ea typeface="宋体" panose="02010600030101010101" pitchFamily="2" charset="-122"/>
+                  </a:endParaRPr>
+                </a:p>
+              </p:txBody>
+            </p:sp>
+            <p:sp>
+              <p:nvSpPr>
+                <p:cNvPr id="144" name="Rectangle 92">
+                  <a:extLst>
+                    <a:ext uri="{FF2B5EF4-FFF2-40B4-BE49-F238E27FC236}">
+                      <a16:creationId xmlns:a16="http://schemas.microsoft.com/office/drawing/2014/main" id="{76E62264-A359-AB2C-C648-ED5E49CAC074}"/>
+                    </a:ext>
+                  </a:extLst>
+                </p:cNvPr>
+                <p:cNvSpPr/>
+                <p:nvPr/>
+              </p:nvSpPr>
+              <p:spPr>
+                <a:xfrm>
+                  <a:off x="10916798" y="4550294"/>
+                  <a:ext cx="58055" cy="41148"/>
+                </a:xfrm>
+                <a:prstGeom prst="rect">
+                  <a:avLst/>
+                </a:prstGeom>
+                <a:solidFill>
+                  <a:srgbClr val="FFFFFF"/>
+                </a:solidFill>
+                <a:ln w="10160">
+                  <a:solidFill>
+                    <a:schemeClr val="tx1"/>
+                  </a:solidFill>
+                </a:ln>
+              </p:spPr>
+              <p:style>
+                <a:lnRef idx="1">
+                  <a:schemeClr val="accent1"/>
+                </a:lnRef>
+                <a:fillRef idx="3">
+                  <a:schemeClr val="accent1"/>
+                </a:fillRef>
+                <a:effectRef idx="2">
+                  <a:schemeClr val="accent1"/>
+                </a:effectRef>
+                <a:fontRef idx="minor">
+                  <a:schemeClr val="lt1"/>
+                </a:fontRef>
+              </p:style>
+              <p:txBody>
+                <a:bodyPr rtlCol="0" anchor="ctr"/>
+                <a:lstStyle/>
+                <a:p>
+                  <a:pPr algn="ctr"/>
+                  <a:endParaRPr sz="3200" b="1">
+                    <a:solidFill>
+                      <a:schemeClr val="tx1"/>
+                    </a:solidFill>
+                    <a:latin typeface="宋体" panose="02010600030101010101" pitchFamily="2" charset="-122"/>
+                    <a:ea typeface="宋体" panose="02010600030101010101" pitchFamily="2" charset="-122"/>
+                  </a:endParaRPr>
+                </a:p>
+              </p:txBody>
+            </p:sp>
+            <p:sp>
+              <p:nvSpPr>
+                <p:cNvPr id="145" name="Rectangle 93">
+                  <a:extLst>
+                    <a:ext uri="{FF2B5EF4-FFF2-40B4-BE49-F238E27FC236}">
+                      <a16:creationId xmlns:a16="http://schemas.microsoft.com/office/drawing/2014/main" id="{C5ACF2D1-2B81-575E-A61C-1AA68232AE69}"/>
+                    </a:ext>
+                  </a:extLst>
+                </p:cNvPr>
+                <p:cNvSpPr/>
+                <p:nvPr/>
+              </p:nvSpPr>
+              <p:spPr>
+                <a:xfrm>
+                  <a:off x="10916798" y="4605158"/>
+                  <a:ext cx="58055" cy="41148"/>
+                </a:xfrm>
+                <a:prstGeom prst="rect">
+                  <a:avLst/>
+                </a:prstGeom>
+                <a:solidFill>
+                  <a:srgbClr val="FFFFFF"/>
+                </a:solidFill>
+                <a:ln w="10160">
+                  <a:solidFill>
+                    <a:schemeClr val="tx1"/>
+                  </a:solidFill>
+                </a:ln>
+              </p:spPr>
+              <p:style>
+                <a:lnRef idx="1">
+                  <a:schemeClr val="accent1"/>
+                </a:lnRef>
+                <a:fillRef idx="3">
+                  <a:schemeClr val="accent1"/>
+                </a:fillRef>
+                <a:effectRef idx="2">
+                  <a:schemeClr val="accent1"/>
+                </a:effectRef>
+                <a:fontRef idx="minor">
+                  <a:schemeClr val="lt1"/>
+                </a:fontRef>
+              </p:style>
+              <p:txBody>
+                <a:bodyPr rtlCol="0" anchor="ctr"/>
+                <a:lstStyle/>
+                <a:p>
+                  <a:pPr algn="ctr"/>
+                  <a:endParaRPr sz="3200" b="1">
+                    <a:solidFill>
+                      <a:schemeClr val="tx1"/>
+                    </a:solidFill>
+                    <a:latin typeface="宋体" panose="02010600030101010101" pitchFamily="2" charset="-122"/>
+                    <a:ea typeface="宋体" panose="02010600030101010101" pitchFamily="2" charset="-122"/>
+                  </a:endParaRPr>
+                </a:p>
+              </p:txBody>
+            </p:sp>
+          </p:grpSp>
+        </p:grpSp>
+        <p:sp>
+          <p:nvSpPr>
+            <p:cNvPr id="136" name="TextBox 81">
+              <a:extLst>
+                <a:ext uri="{FF2B5EF4-FFF2-40B4-BE49-F238E27FC236}">
+                  <a16:creationId xmlns:a16="http://schemas.microsoft.com/office/drawing/2014/main" id="{6AA78E17-7C1F-DDA6-C7EB-BBD9E2C3A6D5}"/>
+                </a:ext>
+              </a:extLst>
+            </p:cNvPr>
+            <p:cNvSpPr txBox="1"/>
+            <p:nvPr/>
+          </p:nvSpPr>
+          <p:spPr>
+            <a:xfrm>
+              <a:off x="10609983" y="6187518"/>
+              <a:ext cx="1582017" cy="307777"/>
+            </a:xfrm>
+            <a:prstGeom prst="rect">
+              <a:avLst/>
+            </a:prstGeom>
+            <a:noFill/>
+            <a:ln>
+              <a:noFill/>
+            </a:ln>
+          </p:spPr>
+          <p:txBody>
+            <a:bodyPr wrap="square" lIns="0" tIns="0" rIns="0" bIns="0" anchor="ctr">
+              <a:spAutoFit/>
+            </a:bodyPr>
+            <a:lstStyle/>
+            <a:p>
+              <a:pPr algn="ctr">
+                <a:spcBef>
+                  <a:spcPts val="0"/>
+                </a:spcBef>
+                <a:spcAft>
+                  <a:spcPts val="0"/>
+                </a:spcAft>
+              </a:pPr>
+              <a:r>
+                <a:rPr lang="en-US" altLang="zh-CN" sz="2000" b="1" dirty="0">
+                  <a:solidFill>
+                    <a:srgbClr val="1A1A2E"/>
+                  </a:solidFill>
+                  <a:latin typeface="宋体" panose="02010600030101010101" pitchFamily="2" charset="-122"/>
+                </a:rPr>
+                <a:t>RAG </a:t>
+              </a:r>
+              <a:r>
+                <a:rPr lang="zh-CN" altLang="en-US" sz="2000" b="1" dirty="0">
+                  <a:solidFill>
+                    <a:srgbClr val="1A1A2E"/>
+                  </a:solidFill>
+                  <a:latin typeface="宋体" panose="02010600030101010101" pitchFamily="2" charset="-122"/>
+                </a:rPr>
+                <a:t>检索器</a:t>
+              </a:r>
+            </a:p>
+          </p:txBody>
+        </p:sp>
+      </p:grpSp>
+      <p:grpSp>
+        <p:nvGrpSpPr>
+          <p:cNvPr id="148" name="组合 147">
+            <a:extLst>
+              <a:ext uri="{FF2B5EF4-FFF2-40B4-BE49-F238E27FC236}">
+                <a16:creationId xmlns:a16="http://schemas.microsoft.com/office/drawing/2014/main" id="{83F8000B-3B3F-0ED8-1467-074BCE2C78D9}"/>
+              </a:ext>
+            </a:extLst>
+          </p:cNvPr>
+          <p:cNvGrpSpPr/>
+          <p:nvPr/>
+        </p:nvGrpSpPr>
+        <p:grpSpPr>
+          <a:xfrm>
+            <a:off x="989141" y="4378748"/>
+            <a:ext cx="1814240" cy="561109"/>
+            <a:chOff x="10502939" y="6072707"/>
+            <a:chExt cx="1814240" cy="561109"/>
+          </a:xfrm>
+        </p:grpSpPr>
+        <p:grpSp>
+          <p:nvGrpSpPr>
+            <p:cNvPr id="149" name="组合 148">
+              <a:extLst>
+                <a:ext uri="{FF2B5EF4-FFF2-40B4-BE49-F238E27FC236}">
+                  <a16:creationId xmlns:a16="http://schemas.microsoft.com/office/drawing/2014/main" id="{24D3B050-5E76-6E12-D76D-0D5FE0106662}"/>
+                </a:ext>
+              </a:extLst>
+            </p:cNvPr>
+            <p:cNvGrpSpPr/>
+            <p:nvPr/>
+          </p:nvGrpSpPr>
+          <p:grpSpPr>
+            <a:xfrm>
+              <a:off x="10502939" y="6072707"/>
+              <a:ext cx="1814240" cy="561109"/>
+              <a:chOff x="1249250" y="4369987"/>
+              <a:chExt cx="1814240" cy="561109"/>
+            </a:xfrm>
+          </p:grpSpPr>
+          <p:sp>
+            <p:nvSpPr>
+              <p:cNvPr id="151" name="Rectangle 76">
+                <a:extLst>
+                  <a:ext uri="{FF2B5EF4-FFF2-40B4-BE49-F238E27FC236}">
+                    <a16:creationId xmlns:a16="http://schemas.microsoft.com/office/drawing/2014/main" id="{9B1F5BB1-387F-E0B5-328D-B0A8D2C64FB5}"/>
+                  </a:ext>
+                </a:extLst>
+              </p:cNvPr>
+              <p:cNvSpPr/>
+              <p:nvPr/>
+            </p:nvSpPr>
+            <p:spPr>
+              <a:xfrm>
+                <a:off x="1249250" y="4369987"/>
+                <a:ext cx="1814240" cy="561109"/>
+              </a:xfrm>
+              <a:prstGeom prst="rect">
+                <a:avLst/>
+              </a:prstGeom>
+              <a:solidFill>
+                <a:srgbClr val="FFFFFF"/>
+              </a:solidFill>
+              <a:ln w="13970">
+                <a:solidFill>
+                  <a:schemeClr val="tx1">
+                    <a:lumMod val="65000"/>
+                    <a:lumOff val="35000"/>
+                  </a:schemeClr>
+                </a:solidFill>
+              </a:ln>
+            </p:spPr>
+            <p:style>
+              <a:lnRef idx="1">
+                <a:schemeClr val="accent1"/>
+              </a:lnRef>
+              <a:fillRef idx="3">
+                <a:schemeClr val="accent1"/>
+              </a:fillRef>
+              <a:effectRef idx="2">
+                <a:schemeClr val="accent1"/>
+              </a:effectRef>
+              <a:fontRef idx="minor">
+                <a:schemeClr val="lt1"/>
+              </a:fontRef>
+            </p:style>
+            <p:txBody>
+              <a:bodyPr rtlCol="0" anchor="ctr"/>
+              <a:lstStyle/>
+              <a:p>
+                <a:pPr algn="ctr"/>
+                <a:endParaRPr sz="3200" b="1">
+                  <a:latin typeface="宋体" panose="02010600030101010101" pitchFamily="2" charset="-122"/>
+                  <a:ea typeface="宋体" panose="02010600030101010101" pitchFamily="2" charset="-122"/>
+                </a:endParaRPr>
+              </a:p>
+            </p:txBody>
+          </p:sp>
+          <p:grpSp>
+            <p:nvGrpSpPr>
+              <p:cNvPr id="152" name="组合 151">
+                <a:extLst>
+                  <a:ext uri="{FF2B5EF4-FFF2-40B4-BE49-F238E27FC236}">
+                    <a16:creationId xmlns:a16="http://schemas.microsoft.com/office/drawing/2014/main" id="{A536543F-0198-443C-3C16-AFAB703AEFC0}"/>
+                  </a:ext>
+                </a:extLst>
+              </p:cNvPr>
+              <p:cNvGrpSpPr/>
+              <p:nvPr/>
+            </p:nvGrpSpPr>
+            <p:grpSpPr>
+              <a:xfrm>
+                <a:off x="2791063" y="4407913"/>
+                <a:ext cx="166910" cy="143394"/>
+                <a:chOff x="10916798" y="4537825"/>
+                <a:chExt cx="166910" cy="143394"/>
+              </a:xfrm>
+            </p:grpSpPr>
+            <p:sp>
+              <p:nvSpPr>
+                <p:cNvPr id="153" name="Rectangle 91">
+                  <a:extLst>
+                    <a:ext uri="{FF2B5EF4-FFF2-40B4-BE49-F238E27FC236}">
+                      <a16:creationId xmlns:a16="http://schemas.microsoft.com/office/drawing/2014/main" id="{A143BD04-7D68-625C-0971-702509204B36}"/>
+                    </a:ext>
+                  </a:extLst>
+                </p:cNvPr>
+                <p:cNvSpPr/>
+                <p:nvPr/>
+              </p:nvSpPr>
+              <p:spPr>
+                <a:xfrm>
+                  <a:off x="10945826" y="4537825"/>
+                  <a:ext cx="137882" cy="143394"/>
+                </a:xfrm>
+                <a:prstGeom prst="rect">
+                  <a:avLst/>
+                </a:prstGeom>
+                <a:solidFill>
+                  <a:srgbClr val="FFFFFF"/>
+                </a:solidFill>
+                <a:ln w="10160">
+                  <a:solidFill>
+                    <a:schemeClr val="tx1"/>
+                  </a:solidFill>
+                </a:ln>
+              </p:spPr>
+              <p:style>
+                <a:lnRef idx="1">
+                  <a:schemeClr val="accent1"/>
+                </a:lnRef>
+                <a:fillRef idx="3">
+                  <a:schemeClr val="accent1"/>
+                </a:fillRef>
+                <a:effectRef idx="2">
+                  <a:schemeClr val="accent1"/>
+                </a:effectRef>
+                <a:fontRef idx="minor">
+                  <a:schemeClr val="lt1"/>
+                </a:fontRef>
+              </p:style>
+              <p:txBody>
+                <a:bodyPr rtlCol="0" anchor="ctr"/>
+                <a:lstStyle/>
+                <a:p>
+                  <a:pPr algn="ctr"/>
+                  <a:endParaRPr sz="3200" b="1">
+                    <a:solidFill>
+                      <a:schemeClr val="tx1"/>
+                    </a:solidFill>
+                    <a:latin typeface="宋体" panose="02010600030101010101" pitchFamily="2" charset="-122"/>
+                    <a:ea typeface="宋体" panose="02010600030101010101" pitchFamily="2" charset="-122"/>
+                  </a:endParaRPr>
+                </a:p>
+              </p:txBody>
+            </p:sp>
+            <p:sp>
+              <p:nvSpPr>
+                <p:cNvPr id="154" name="Rectangle 92">
+                  <a:extLst>
+                    <a:ext uri="{FF2B5EF4-FFF2-40B4-BE49-F238E27FC236}">
+                      <a16:creationId xmlns:a16="http://schemas.microsoft.com/office/drawing/2014/main" id="{2F549C2B-10F8-DB19-BF00-EDA23B564320}"/>
+                    </a:ext>
+                  </a:extLst>
+                </p:cNvPr>
+                <p:cNvSpPr/>
+                <p:nvPr/>
+              </p:nvSpPr>
+              <p:spPr>
+                <a:xfrm>
+                  <a:off x="10916798" y="4550294"/>
+                  <a:ext cx="58055" cy="41148"/>
+                </a:xfrm>
+                <a:prstGeom prst="rect">
+                  <a:avLst/>
+                </a:prstGeom>
+                <a:solidFill>
+                  <a:srgbClr val="FFFFFF"/>
+                </a:solidFill>
+                <a:ln w="10160">
+                  <a:solidFill>
+                    <a:schemeClr val="tx1"/>
+                  </a:solidFill>
+                </a:ln>
+              </p:spPr>
+              <p:style>
+                <a:lnRef idx="1">
+                  <a:schemeClr val="accent1"/>
+                </a:lnRef>
+                <a:fillRef idx="3">
+                  <a:schemeClr val="accent1"/>
+                </a:fillRef>
+                <a:effectRef idx="2">
+                  <a:schemeClr val="accent1"/>
+                </a:effectRef>
+                <a:fontRef idx="minor">
+                  <a:schemeClr val="lt1"/>
+                </a:fontRef>
+              </p:style>
+              <p:txBody>
+                <a:bodyPr rtlCol="0" anchor="ctr"/>
+                <a:lstStyle/>
+                <a:p>
+                  <a:pPr algn="ctr"/>
+                  <a:endParaRPr sz="3200" b="1">
+                    <a:solidFill>
+                      <a:schemeClr val="tx1"/>
+                    </a:solidFill>
+                    <a:latin typeface="宋体" panose="02010600030101010101" pitchFamily="2" charset="-122"/>
+                    <a:ea typeface="宋体" panose="02010600030101010101" pitchFamily="2" charset="-122"/>
+                  </a:endParaRPr>
+                </a:p>
+              </p:txBody>
+            </p:sp>
+            <p:sp>
+              <p:nvSpPr>
+                <p:cNvPr id="155" name="Rectangle 93">
+                  <a:extLst>
+                    <a:ext uri="{FF2B5EF4-FFF2-40B4-BE49-F238E27FC236}">
+                      <a16:creationId xmlns:a16="http://schemas.microsoft.com/office/drawing/2014/main" id="{4E53258B-DBB6-EB5F-4930-961896DBFEAE}"/>
+                    </a:ext>
+                  </a:extLst>
+                </p:cNvPr>
+                <p:cNvSpPr/>
+                <p:nvPr/>
+              </p:nvSpPr>
+              <p:spPr>
+                <a:xfrm>
+                  <a:off x="10916798" y="4605158"/>
+                  <a:ext cx="58055" cy="41148"/>
+                </a:xfrm>
+                <a:prstGeom prst="rect">
+                  <a:avLst/>
+                </a:prstGeom>
+                <a:solidFill>
+                  <a:srgbClr val="FFFFFF"/>
+                </a:solidFill>
+                <a:ln w="10160">
+                  <a:solidFill>
+                    <a:schemeClr val="tx1"/>
+                  </a:solidFill>
+                </a:ln>
+              </p:spPr>
+              <p:style>
+                <a:lnRef idx="1">
+                  <a:schemeClr val="accent1"/>
+                </a:lnRef>
+                <a:fillRef idx="3">
+                  <a:schemeClr val="accent1"/>
+                </a:fillRef>
+                <a:effectRef idx="2">
+                  <a:schemeClr val="accent1"/>
+                </a:effectRef>
+                <a:fontRef idx="minor">
+                  <a:schemeClr val="lt1"/>
+                </a:fontRef>
+              </p:style>
+              <p:txBody>
+                <a:bodyPr rtlCol="0" anchor="ctr"/>
+                <a:lstStyle/>
+                <a:p>
+                  <a:pPr algn="ctr"/>
+                  <a:endParaRPr sz="3200" b="1">
+                    <a:solidFill>
+                      <a:schemeClr val="tx1"/>
+                    </a:solidFill>
+                    <a:latin typeface="宋体" panose="02010600030101010101" pitchFamily="2" charset="-122"/>
+                    <a:ea typeface="宋体" panose="02010600030101010101" pitchFamily="2" charset="-122"/>
+                  </a:endParaRPr>
+                </a:p>
+              </p:txBody>
+            </p:sp>
+          </p:grpSp>
+        </p:grpSp>
+        <p:sp>
+          <p:nvSpPr>
+            <p:cNvPr id="150" name="TextBox 81">
+              <a:extLst>
+                <a:ext uri="{FF2B5EF4-FFF2-40B4-BE49-F238E27FC236}">
+                  <a16:creationId xmlns:a16="http://schemas.microsoft.com/office/drawing/2014/main" id="{BD6038A3-5EE3-DF70-64A3-FEF744300620}"/>
+                </a:ext>
+              </a:extLst>
+            </p:cNvPr>
+            <p:cNvSpPr txBox="1"/>
+            <p:nvPr/>
+          </p:nvSpPr>
+          <p:spPr>
+            <a:xfrm>
+              <a:off x="10609983" y="6187518"/>
+              <a:ext cx="1582017" cy="307777"/>
+            </a:xfrm>
+            <a:prstGeom prst="rect">
+              <a:avLst/>
+            </a:prstGeom>
+            <a:noFill/>
+            <a:ln>
+              <a:noFill/>
+            </a:ln>
+          </p:spPr>
+          <p:txBody>
+            <a:bodyPr wrap="square" lIns="0" tIns="0" rIns="0" bIns="0" anchor="ctr">
+              <a:spAutoFit/>
+            </a:bodyPr>
+            <a:lstStyle/>
+            <a:p>
+              <a:pPr algn="ctr">
+                <a:spcBef>
+                  <a:spcPts val="0"/>
+                </a:spcBef>
+                <a:spcAft>
+                  <a:spcPts val="0"/>
+                </a:spcAft>
+              </a:pPr>
+              <a:r>
+                <a:rPr lang="zh-CN" altLang="en-US" sz="2000" b="1" i="0" dirty="0">
+                  <a:solidFill>
+                    <a:srgbClr val="1A1A2E"/>
+                  </a:solidFill>
+                  <a:latin typeface="宋体" panose="02010600030101010101" pitchFamily="2" charset="-122"/>
+                  <a:ea typeface="宋体" panose="02010600030101010101" pitchFamily="2" charset="-122"/>
+                </a:rPr>
+                <a:t>大模型接口</a:t>
+              </a:r>
+              <a:endParaRPr sz="2000" b="1" i="0" dirty="0">
+                <a:solidFill>
+                  <a:srgbClr val="1A1A2E"/>
+                </a:solidFill>
+                <a:latin typeface="宋体" panose="02010600030101010101" pitchFamily="2" charset="-122"/>
+                <a:ea typeface="宋体" panose="02010600030101010101" pitchFamily="2" charset="-122"/>
+              </a:endParaRPr>
+            </a:p>
+          </p:txBody>
+        </p:sp>
+      </p:grpSp>
+      <p:grpSp>
+        <p:nvGrpSpPr>
+          <p:cNvPr id="156" name="组合 155">
+            <a:extLst>
+              <a:ext uri="{FF2B5EF4-FFF2-40B4-BE49-F238E27FC236}">
+                <a16:creationId xmlns:a16="http://schemas.microsoft.com/office/drawing/2014/main" id="{252FBDE4-3814-0A65-2BFB-3F1A99BF22AA}"/>
+              </a:ext>
+            </a:extLst>
+          </p:cNvPr>
+          <p:cNvGrpSpPr/>
+          <p:nvPr/>
+        </p:nvGrpSpPr>
+        <p:grpSpPr>
+          <a:xfrm>
+            <a:off x="5701439" y="4378748"/>
+            <a:ext cx="1814240" cy="561109"/>
+            <a:chOff x="10502939" y="6072707"/>
+            <a:chExt cx="1814240" cy="561109"/>
+          </a:xfrm>
+        </p:grpSpPr>
+        <p:grpSp>
+          <p:nvGrpSpPr>
+            <p:cNvPr id="157" name="组合 156">
+              <a:extLst>
+                <a:ext uri="{FF2B5EF4-FFF2-40B4-BE49-F238E27FC236}">
+                  <a16:creationId xmlns:a16="http://schemas.microsoft.com/office/drawing/2014/main" id="{A79E7D21-7703-7FB1-ABBF-FA3F5BE53F60}"/>
+                </a:ext>
+              </a:extLst>
+            </p:cNvPr>
+            <p:cNvGrpSpPr/>
+            <p:nvPr/>
+          </p:nvGrpSpPr>
+          <p:grpSpPr>
+            <a:xfrm>
+              <a:off x="10502939" y="6072707"/>
+              <a:ext cx="1814240" cy="561109"/>
+              <a:chOff x="1249250" y="4369987"/>
+              <a:chExt cx="1814240" cy="561109"/>
+            </a:xfrm>
+          </p:grpSpPr>
+          <p:sp>
+            <p:nvSpPr>
+              <p:cNvPr id="159" name="Rectangle 76">
+                <a:extLst>
+                  <a:ext uri="{FF2B5EF4-FFF2-40B4-BE49-F238E27FC236}">
+                    <a16:creationId xmlns:a16="http://schemas.microsoft.com/office/drawing/2014/main" id="{A6D56859-EE52-2856-C283-810379A2D2D4}"/>
+                  </a:ext>
+                </a:extLst>
+              </p:cNvPr>
+              <p:cNvSpPr/>
+              <p:nvPr/>
+            </p:nvSpPr>
+            <p:spPr>
+              <a:xfrm>
+                <a:off x="1249250" y="4369987"/>
+                <a:ext cx="1814240" cy="561109"/>
+              </a:xfrm>
+              <a:prstGeom prst="rect">
+                <a:avLst/>
+              </a:prstGeom>
+              <a:solidFill>
+                <a:srgbClr val="FFFFFF"/>
+              </a:solidFill>
+              <a:ln w="13970">
+                <a:solidFill>
+                  <a:schemeClr val="tx1">
+                    <a:lumMod val="65000"/>
+                    <a:lumOff val="35000"/>
+                  </a:schemeClr>
+                </a:solidFill>
+              </a:ln>
+            </p:spPr>
+            <p:style>
+              <a:lnRef idx="1">
+                <a:schemeClr val="accent1"/>
+              </a:lnRef>
+              <a:fillRef idx="3">
+                <a:schemeClr val="accent1"/>
+              </a:fillRef>
+              <a:effectRef idx="2">
+                <a:schemeClr val="accent1"/>
+              </a:effectRef>
+              <a:fontRef idx="minor">
+                <a:schemeClr val="lt1"/>
+              </a:fontRef>
+            </p:style>
+            <p:txBody>
+              <a:bodyPr rtlCol="0" anchor="ctr"/>
+              <a:lstStyle/>
+              <a:p>
+                <a:pPr algn="ctr"/>
+                <a:endParaRPr sz="3200" b="1">
+                  <a:latin typeface="宋体" panose="02010600030101010101" pitchFamily="2" charset="-122"/>
+                  <a:ea typeface="宋体" panose="02010600030101010101" pitchFamily="2" charset="-122"/>
+                </a:endParaRPr>
+              </a:p>
+            </p:txBody>
+          </p:sp>
+          <p:grpSp>
+            <p:nvGrpSpPr>
+              <p:cNvPr id="160" name="组合 159">
+                <a:extLst>
+                  <a:ext uri="{FF2B5EF4-FFF2-40B4-BE49-F238E27FC236}">
+                    <a16:creationId xmlns:a16="http://schemas.microsoft.com/office/drawing/2014/main" id="{D3243099-1D67-82F1-A7CD-D8E0FE032069}"/>
+                  </a:ext>
+                </a:extLst>
+              </p:cNvPr>
+              <p:cNvGrpSpPr/>
+              <p:nvPr/>
+            </p:nvGrpSpPr>
+            <p:grpSpPr>
+              <a:xfrm>
+                <a:off x="2791063" y="4407913"/>
+                <a:ext cx="166910" cy="143394"/>
+                <a:chOff x="10916798" y="4537825"/>
+                <a:chExt cx="166910" cy="143394"/>
+              </a:xfrm>
+            </p:grpSpPr>
+            <p:sp>
+              <p:nvSpPr>
+                <p:cNvPr id="161" name="Rectangle 91">
+                  <a:extLst>
+                    <a:ext uri="{FF2B5EF4-FFF2-40B4-BE49-F238E27FC236}">
+                      <a16:creationId xmlns:a16="http://schemas.microsoft.com/office/drawing/2014/main" id="{1A7767E9-B2D2-AC86-B4FF-4606027489F9}"/>
+                    </a:ext>
+                  </a:extLst>
+                </p:cNvPr>
+                <p:cNvSpPr/>
+                <p:nvPr/>
+              </p:nvSpPr>
+              <p:spPr>
+                <a:xfrm>
+                  <a:off x="10945826" y="4537825"/>
+                  <a:ext cx="137882" cy="143394"/>
+                </a:xfrm>
+                <a:prstGeom prst="rect">
+                  <a:avLst/>
+                </a:prstGeom>
+                <a:solidFill>
+                  <a:srgbClr val="FFFFFF"/>
+                </a:solidFill>
+                <a:ln w="10160">
+                  <a:solidFill>
+                    <a:schemeClr val="tx1"/>
+                  </a:solidFill>
+                </a:ln>
+              </p:spPr>
+              <p:style>
+                <a:lnRef idx="1">
+                  <a:schemeClr val="accent1"/>
+                </a:lnRef>
+                <a:fillRef idx="3">
+                  <a:schemeClr val="accent1"/>
+                </a:fillRef>
+                <a:effectRef idx="2">
+                  <a:schemeClr val="accent1"/>
+                </a:effectRef>
+                <a:fontRef idx="minor">
+                  <a:schemeClr val="lt1"/>
+                </a:fontRef>
+              </p:style>
+              <p:txBody>
+                <a:bodyPr rtlCol="0" anchor="ctr"/>
+                <a:lstStyle/>
+                <a:p>
+                  <a:pPr algn="ctr"/>
+                  <a:endParaRPr sz="3200" b="1">
+                    <a:solidFill>
+                      <a:schemeClr val="tx1"/>
+                    </a:solidFill>
+                    <a:latin typeface="宋体" panose="02010600030101010101" pitchFamily="2" charset="-122"/>
+                    <a:ea typeface="宋体" panose="02010600030101010101" pitchFamily="2" charset="-122"/>
+                  </a:endParaRPr>
+                </a:p>
+              </p:txBody>
+            </p:sp>
+            <p:sp>
+              <p:nvSpPr>
+                <p:cNvPr id="162" name="Rectangle 92">
+                  <a:extLst>
+                    <a:ext uri="{FF2B5EF4-FFF2-40B4-BE49-F238E27FC236}">
+                      <a16:creationId xmlns:a16="http://schemas.microsoft.com/office/drawing/2014/main" id="{7332336B-0BF2-0367-B1A6-8D434FABA0FD}"/>
+                    </a:ext>
+                  </a:extLst>
+                </p:cNvPr>
+                <p:cNvSpPr/>
+                <p:nvPr/>
+              </p:nvSpPr>
+              <p:spPr>
+                <a:xfrm>
+                  <a:off x="10916798" y="4550294"/>
+                  <a:ext cx="58055" cy="41148"/>
+                </a:xfrm>
+                <a:prstGeom prst="rect">
+                  <a:avLst/>
+                </a:prstGeom>
+                <a:solidFill>
+                  <a:srgbClr val="FFFFFF"/>
+                </a:solidFill>
+                <a:ln w="10160">
+                  <a:solidFill>
+                    <a:schemeClr val="tx1"/>
+                  </a:solidFill>
+                </a:ln>
+              </p:spPr>
+              <p:style>
+                <a:lnRef idx="1">
+                  <a:schemeClr val="accent1"/>
+                </a:lnRef>
+                <a:fillRef idx="3">
+                  <a:schemeClr val="accent1"/>
+                </a:fillRef>
+                <a:effectRef idx="2">
+                  <a:schemeClr val="accent1"/>
+                </a:effectRef>
+                <a:fontRef idx="minor">
+                  <a:schemeClr val="lt1"/>
+                </a:fontRef>
+              </p:style>
+              <p:txBody>
+                <a:bodyPr rtlCol="0" anchor="ctr"/>
+                <a:lstStyle/>
+                <a:p>
+                  <a:pPr algn="ctr"/>
+                  <a:endParaRPr sz="3200" b="1">
+                    <a:solidFill>
+                      <a:schemeClr val="tx1"/>
+                    </a:solidFill>
+                    <a:latin typeface="宋体" panose="02010600030101010101" pitchFamily="2" charset="-122"/>
+                    <a:ea typeface="宋体" panose="02010600030101010101" pitchFamily="2" charset="-122"/>
+                  </a:endParaRPr>
+                </a:p>
+              </p:txBody>
+            </p:sp>
+            <p:sp>
+              <p:nvSpPr>
+                <p:cNvPr id="163" name="Rectangle 93">
+                  <a:extLst>
+                    <a:ext uri="{FF2B5EF4-FFF2-40B4-BE49-F238E27FC236}">
+                      <a16:creationId xmlns:a16="http://schemas.microsoft.com/office/drawing/2014/main" id="{9B1CC008-A8D4-868E-6837-F93292B4D148}"/>
+                    </a:ext>
+                  </a:extLst>
+                </p:cNvPr>
+                <p:cNvSpPr/>
+                <p:nvPr/>
+              </p:nvSpPr>
+              <p:spPr>
+                <a:xfrm>
+                  <a:off x="10916798" y="4605158"/>
+                  <a:ext cx="58055" cy="41148"/>
+                </a:xfrm>
+                <a:prstGeom prst="rect">
+                  <a:avLst/>
+                </a:prstGeom>
+                <a:solidFill>
+                  <a:srgbClr val="FFFFFF"/>
+                </a:solidFill>
+                <a:ln w="10160">
+                  <a:solidFill>
+                    <a:schemeClr val="tx1"/>
+                  </a:solidFill>
+                </a:ln>
+              </p:spPr>
+              <p:style>
+                <a:lnRef idx="1">
+                  <a:schemeClr val="accent1"/>
+                </a:lnRef>
+                <a:fillRef idx="3">
+                  <a:schemeClr val="accent1"/>
+                </a:fillRef>
+                <a:effectRef idx="2">
+                  <a:schemeClr val="accent1"/>
+                </a:effectRef>
+                <a:fontRef idx="minor">
+                  <a:schemeClr val="lt1"/>
+                </a:fontRef>
+              </p:style>
+              <p:txBody>
+                <a:bodyPr rtlCol="0" anchor="ctr"/>
+                <a:lstStyle/>
+                <a:p>
+                  <a:pPr algn="ctr"/>
+                  <a:endParaRPr sz="3200" b="1">
+                    <a:solidFill>
+                      <a:schemeClr val="tx1"/>
+                    </a:solidFill>
+                    <a:latin typeface="宋体" panose="02010600030101010101" pitchFamily="2" charset="-122"/>
+                    <a:ea typeface="宋体" panose="02010600030101010101" pitchFamily="2" charset="-122"/>
+                  </a:endParaRPr>
+                </a:p>
+              </p:txBody>
+            </p:sp>
+          </p:grpSp>
+        </p:grpSp>
+        <p:sp>
+          <p:nvSpPr>
+            <p:cNvPr id="158" name="TextBox 81">
+              <a:extLst>
+                <a:ext uri="{FF2B5EF4-FFF2-40B4-BE49-F238E27FC236}">
+                  <a16:creationId xmlns:a16="http://schemas.microsoft.com/office/drawing/2014/main" id="{E9F8475C-96C0-D0ED-423F-1D664676DE07}"/>
+                </a:ext>
+              </a:extLst>
+            </p:cNvPr>
+            <p:cNvSpPr txBox="1"/>
+            <p:nvPr/>
+          </p:nvSpPr>
+          <p:spPr>
+            <a:xfrm>
+              <a:off x="10609983" y="6187518"/>
+              <a:ext cx="1582017" cy="307777"/>
+            </a:xfrm>
+            <a:prstGeom prst="rect">
+              <a:avLst/>
+            </a:prstGeom>
+            <a:noFill/>
+            <a:ln>
+              <a:noFill/>
+            </a:ln>
+          </p:spPr>
+          <p:txBody>
+            <a:bodyPr wrap="square" lIns="0" tIns="0" rIns="0" bIns="0" anchor="ctr">
+              <a:spAutoFit/>
+            </a:bodyPr>
+            <a:lstStyle/>
+            <a:p>
+              <a:pPr algn="ctr">
+                <a:spcBef>
+                  <a:spcPts val="0"/>
+                </a:spcBef>
+                <a:spcAft>
+                  <a:spcPts val="0"/>
+                </a:spcAft>
+              </a:pPr>
+              <a:r>
+                <a:rPr lang="zh-CN" altLang="en-US" sz="2000" b="1" dirty="0">
+                  <a:solidFill>
+                    <a:srgbClr val="1A1A2E"/>
+                  </a:solidFill>
+                  <a:latin typeface="宋体" panose="02010600030101010101" pitchFamily="2" charset="-122"/>
+                </a:rPr>
+                <a:t>工作流管理</a:t>
+              </a:r>
+            </a:p>
+          </p:txBody>
+        </p:sp>
+      </p:grpSp>
+      <p:grpSp>
+        <p:nvGrpSpPr>
+          <p:cNvPr id="164" name="组合 163">
+            <a:extLst>
+              <a:ext uri="{FF2B5EF4-FFF2-40B4-BE49-F238E27FC236}">
+                <a16:creationId xmlns:a16="http://schemas.microsoft.com/office/drawing/2014/main" id="{8BE53EEE-5D6A-4AA2-F329-3DC8950E026E}"/>
+              </a:ext>
+            </a:extLst>
+          </p:cNvPr>
+          <p:cNvGrpSpPr/>
+          <p:nvPr/>
+        </p:nvGrpSpPr>
+        <p:grpSpPr>
+          <a:xfrm>
+            <a:off x="8036344" y="4378748"/>
+            <a:ext cx="1814240" cy="561109"/>
+            <a:chOff x="10502939" y="6072707"/>
+            <a:chExt cx="1814240" cy="561109"/>
+          </a:xfrm>
+        </p:grpSpPr>
+        <p:grpSp>
+          <p:nvGrpSpPr>
+            <p:cNvPr id="165" name="组合 164">
+              <a:extLst>
+                <a:ext uri="{FF2B5EF4-FFF2-40B4-BE49-F238E27FC236}">
+                  <a16:creationId xmlns:a16="http://schemas.microsoft.com/office/drawing/2014/main" id="{2C7925DF-936E-3578-3EC9-8EC6DAC33F3C}"/>
+                </a:ext>
+              </a:extLst>
+            </p:cNvPr>
+            <p:cNvGrpSpPr/>
+            <p:nvPr/>
+          </p:nvGrpSpPr>
+          <p:grpSpPr>
+            <a:xfrm>
+              <a:off x="10502939" y="6072707"/>
+              <a:ext cx="1814240" cy="561109"/>
+              <a:chOff x="1249250" y="4369987"/>
+              <a:chExt cx="1814240" cy="561109"/>
+            </a:xfrm>
+          </p:grpSpPr>
+          <p:sp>
+            <p:nvSpPr>
+              <p:cNvPr id="167" name="Rectangle 76">
+                <a:extLst>
+                  <a:ext uri="{FF2B5EF4-FFF2-40B4-BE49-F238E27FC236}">
+                    <a16:creationId xmlns:a16="http://schemas.microsoft.com/office/drawing/2014/main" id="{920A93E3-F95D-961D-4C56-989CA2E9B6F5}"/>
+                  </a:ext>
+                </a:extLst>
+              </p:cNvPr>
+              <p:cNvSpPr/>
+              <p:nvPr/>
+            </p:nvSpPr>
+            <p:spPr>
+              <a:xfrm>
+                <a:off x="1249250" y="4369987"/>
+                <a:ext cx="1814240" cy="561109"/>
+              </a:xfrm>
+              <a:prstGeom prst="rect">
+                <a:avLst/>
+              </a:prstGeom>
+              <a:solidFill>
+                <a:srgbClr val="FFFFFF"/>
+              </a:solidFill>
+              <a:ln w="13970">
+                <a:solidFill>
+                  <a:schemeClr val="tx1">
+                    <a:lumMod val="65000"/>
+                    <a:lumOff val="35000"/>
+                  </a:schemeClr>
+                </a:solidFill>
+              </a:ln>
+            </p:spPr>
+            <p:style>
+              <a:lnRef idx="1">
+                <a:schemeClr val="accent1"/>
+              </a:lnRef>
+              <a:fillRef idx="3">
+                <a:schemeClr val="accent1"/>
+              </a:fillRef>
+              <a:effectRef idx="2">
+                <a:schemeClr val="accent1"/>
+              </a:effectRef>
+              <a:fontRef idx="minor">
+                <a:schemeClr val="lt1"/>
+              </a:fontRef>
+            </p:style>
+            <p:txBody>
+              <a:bodyPr rtlCol="0" anchor="ctr"/>
+              <a:lstStyle/>
+              <a:p>
+                <a:pPr algn="ctr"/>
+                <a:endParaRPr sz="3200" b="1">
+                  <a:latin typeface="宋体" panose="02010600030101010101" pitchFamily="2" charset="-122"/>
+                  <a:ea typeface="宋体" panose="02010600030101010101" pitchFamily="2" charset="-122"/>
+                </a:endParaRPr>
+              </a:p>
+            </p:txBody>
+          </p:sp>
+          <p:grpSp>
+            <p:nvGrpSpPr>
+              <p:cNvPr id="168" name="组合 167">
+                <a:extLst>
+                  <a:ext uri="{FF2B5EF4-FFF2-40B4-BE49-F238E27FC236}">
+                    <a16:creationId xmlns:a16="http://schemas.microsoft.com/office/drawing/2014/main" id="{8E7BDABB-0309-D200-1256-1148901B14D2}"/>
+                  </a:ext>
+                </a:extLst>
+              </p:cNvPr>
+              <p:cNvGrpSpPr/>
+              <p:nvPr/>
+            </p:nvGrpSpPr>
+            <p:grpSpPr>
+              <a:xfrm>
+                <a:off x="2791063" y="4407913"/>
+                <a:ext cx="166910" cy="143394"/>
+                <a:chOff x="10916798" y="4537825"/>
+                <a:chExt cx="166910" cy="143394"/>
+              </a:xfrm>
+            </p:grpSpPr>
+            <p:sp>
+              <p:nvSpPr>
+                <p:cNvPr id="169" name="Rectangle 91">
+                  <a:extLst>
+                    <a:ext uri="{FF2B5EF4-FFF2-40B4-BE49-F238E27FC236}">
+                      <a16:creationId xmlns:a16="http://schemas.microsoft.com/office/drawing/2014/main" id="{92E741AC-90CD-261D-AE38-229880A73EA7}"/>
+                    </a:ext>
+                  </a:extLst>
+                </p:cNvPr>
+                <p:cNvSpPr/>
+                <p:nvPr/>
+              </p:nvSpPr>
+              <p:spPr>
+                <a:xfrm>
+                  <a:off x="10945826" y="4537825"/>
+                  <a:ext cx="137882" cy="143394"/>
+                </a:xfrm>
+                <a:prstGeom prst="rect">
+                  <a:avLst/>
+                </a:prstGeom>
+                <a:solidFill>
+                  <a:srgbClr val="FFFFFF"/>
+                </a:solidFill>
+                <a:ln w="10160">
+                  <a:solidFill>
+                    <a:schemeClr val="tx1"/>
+                  </a:solidFill>
+                </a:ln>
+              </p:spPr>
+              <p:style>
+                <a:lnRef idx="1">
+                  <a:schemeClr val="accent1"/>
+                </a:lnRef>
+                <a:fillRef idx="3">
+                  <a:schemeClr val="accent1"/>
+                </a:fillRef>
+                <a:effectRef idx="2">
+                  <a:schemeClr val="accent1"/>
+                </a:effectRef>
+                <a:fontRef idx="minor">
+                  <a:schemeClr val="lt1"/>
+                </a:fontRef>
+              </p:style>
+              <p:txBody>
+                <a:bodyPr rtlCol="0" anchor="ctr"/>
+                <a:lstStyle/>
+                <a:p>
+                  <a:pPr algn="ctr"/>
+                  <a:endParaRPr sz="3200" b="1">
+                    <a:solidFill>
+                      <a:schemeClr val="tx1"/>
+                    </a:solidFill>
+                    <a:latin typeface="宋体" panose="02010600030101010101" pitchFamily="2" charset="-122"/>
+                    <a:ea typeface="宋体" panose="02010600030101010101" pitchFamily="2" charset="-122"/>
+                  </a:endParaRPr>
+                </a:p>
+              </p:txBody>
+            </p:sp>
+            <p:sp>
+              <p:nvSpPr>
+                <p:cNvPr id="170" name="Rectangle 92">
+                  <a:extLst>
+                    <a:ext uri="{FF2B5EF4-FFF2-40B4-BE49-F238E27FC236}">
+                      <a16:creationId xmlns:a16="http://schemas.microsoft.com/office/drawing/2014/main" id="{5720B63F-3DB2-902B-923E-329312886D29}"/>
+                    </a:ext>
+                  </a:extLst>
+                </p:cNvPr>
+                <p:cNvSpPr/>
+                <p:nvPr/>
+              </p:nvSpPr>
+              <p:spPr>
+                <a:xfrm>
+                  <a:off x="10916798" y="4550294"/>
+                  <a:ext cx="58055" cy="41148"/>
+                </a:xfrm>
+                <a:prstGeom prst="rect">
+                  <a:avLst/>
+                </a:prstGeom>
+                <a:solidFill>
+                  <a:srgbClr val="FFFFFF"/>
+                </a:solidFill>
+                <a:ln w="10160">
+                  <a:solidFill>
+                    <a:schemeClr val="tx1"/>
+                  </a:solidFill>
+                </a:ln>
+              </p:spPr>
+              <p:style>
+                <a:lnRef idx="1">
+                  <a:schemeClr val="accent1"/>
+                </a:lnRef>
+                <a:fillRef idx="3">
+                  <a:schemeClr val="accent1"/>
+                </a:fillRef>
+                <a:effectRef idx="2">
+                  <a:schemeClr val="accent1"/>
+                </a:effectRef>
+                <a:fontRef idx="minor">
+                  <a:schemeClr val="lt1"/>
+                </a:fontRef>
+              </p:style>
+              <p:txBody>
+                <a:bodyPr rtlCol="0" anchor="ctr"/>
+                <a:lstStyle/>
+                <a:p>
+                  <a:pPr algn="ctr"/>
+                  <a:endParaRPr sz="3200" b="1">
+                    <a:solidFill>
+                      <a:schemeClr val="tx1"/>
+                    </a:solidFill>
+                    <a:latin typeface="宋体" panose="02010600030101010101" pitchFamily="2" charset="-122"/>
+                    <a:ea typeface="宋体" panose="02010600030101010101" pitchFamily="2" charset="-122"/>
+                  </a:endParaRPr>
+                </a:p>
+              </p:txBody>
+            </p:sp>
+            <p:sp>
+              <p:nvSpPr>
+                <p:cNvPr id="171" name="Rectangle 93">
+                  <a:extLst>
+                    <a:ext uri="{FF2B5EF4-FFF2-40B4-BE49-F238E27FC236}">
+                      <a16:creationId xmlns:a16="http://schemas.microsoft.com/office/drawing/2014/main" id="{5C19589A-4A03-148C-3CF9-2E75672F4DE8}"/>
+                    </a:ext>
+                  </a:extLst>
+                </p:cNvPr>
+                <p:cNvSpPr/>
+                <p:nvPr/>
+              </p:nvSpPr>
+              <p:spPr>
+                <a:xfrm>
+                  <a:off x="10916798" y="4605158"/>
+                  <a:ext cx="58055" cy="41148"/>
+                </a:xfrm>
+                <a:prstGeom prst="rect">
+                  <a:avLst/>
+                </a:prstGeom>
+                <a:solidFill>
+                  <a:srgbClr val="FFFFFF"/>
+                </a:solidFill>
+                <a:ln w="10160">
+                  <a:solidFill>
+                    <a:schemeClr val="tx1"/>
+                  </a:solidFill>
+                </a:ln>
+              </p:spPr>
+              <p:style>
+                <a:lnRef idx="1">
+                  <a:schemeClr val="accent1"/>
+                </a:lnRef>
+                <a:fillRef idx="3">
+                  <a:schemeClr val="accent1"/>
+                </a:fillRef>
+                <a:effectRef idx="2">
+                  <a:schemeClr val="accent1"/>
+                </a:effectRef>
+                <a:fontRef idx="minor">
+                  <a:schemeClr val="lt1"/>
+                </a:fontRef>
+              </p:style>
+              <p:txBody>
+                <a:bodyPr rtlCol="0" anchor="ctr"/>
+                <a:lstStyle/>
+                <a:p>
+                  <a:pPr algn="ctr"/>
+                  <a:endParaRPr sz="3200" b="1">
+                    <a:solidFill>
+                      <a:schemeClr val="tx1"/>
+                    </a:solidFill>
+                    <a:latin typeface="宋体" panose="02010600030101010101" pitchFamily="2" charset="-122"/>
+                    <a:ea typeface="宋体" panose="02010600030101010101" pitchFamily="2" charset="-122"/>
+                  </a:endParaRPr>
+                </a:p>
+              </p:txBody>
+            </p:sp>
+          </p:grpSp>
+        </p:grpSp>
+        <p:sp>
+          <p:nvSpPr>
+            <p:cNvPr id="166" name="TextBox 81">
+              <a:extLst>
+                <a:ext uri="{FF2B5EF4-FFF2-40B4-BE49-F238E27FC236}">
+                  <a16:creationId xmlns:a16="http://schemas.microsoft.com/office/drawing/2014/main" id="{0C947B41-A997-32CB-DA60-7E9A76A7A7CB}"/>
+                </a:ext>
+              </a:extLst>
+            </p:cNvPr>
+            <p:cNvSpPr txBox="1"/>
+            <p:nvPr/>
+          </p:nvSpPr>
+          <p:spPr>
+            <a:xfrm>
+              <a:off x="10609983" y="6187518"/>
+              <a:ext cx="1582017" cy="307777"/>
+            </a:xfrm>
+            <a:prstGeom prst="rect">
+              <a:avLst/>
+            </a:prstGeom>
+            <a:noFill/>
+            <a:ln>
+              <a:noFill/>
+            </a:ln>
+          </p:spPr>
+          <p:txBody>
+            <a:bodyPr wrap="square" lIns="0" tIns="0" rIns="0" bIns="0" anchor="ctr">
+              <a:spAutoFit/>
+            </a:bodyPr>
+            <a:lstStyle/>
+            <a:p>
+              <a:pPr algn="ctr">
+                <a:spcBef>
+                  <a:spcPts val="0"/>
+                </a:spcBef>
+                <a:spcAft>
+                  <a:spcPts val="0"/>
+                </a:spcAft>
+              </a:pPr>
+              <a:r>
+                <a:rPr lang="zh-CN" altLang="en-US" sz="2000" b="1" dirty="0">
+                  <a:solidFill>
+                    <a:srgbClr val="1A1A2E"/>
+                  </a:solidFill>
+                  <a:latin typeface="宋体" panose="02010600030101010101" pitchFamily="2" charset="-122"/>
+                </a:rPr>
+                <a:t>智能体管理</a:t>
+              </a:r>
+            </a:p>
+          </p:txBody>
+        </p:sp>
+      </p:grpSp>
+      <p:grpSp>
+        <p:nvGrpSpPr>
+          <p:cNvPr id="172" name="组合 171">
+            <a:extLst>
+              <a:ext uri="{FF2B5EF4-FFF2-40B4-BE49-F238E27FC236}">
+                <a16:creationId xmlns:a16="http://schemas.microsoft.com/office/drawing/2014/main" id="{5B8F9056-0792-F0EB-7676-50C5AC1C549C}"/>
+              </a:ext>
+            </a:extLst>
+          </p:cNvPr>
+          <p:cNvGrpSpPr/>
+          <p:nvPr/>
+        </p:nvGrpSpPr>
+        <p:grpSpPr>
+          <a:xfrm>
+            <a:off x="2274052" y="5835373"/>
+            <a:ext cx="2276062" cy="561109"/>
+            <a:chOff x="10041117" y="6072707"/>
+            <a:chExt cx="2276062" cy="561109"/>
+          </a:xfrm>
+        </p:grpSpPr>
+        <p:grpSp>
+          <p:nvGrpSpPr>
+            <p:cNvPr id="173" name="组合 172">
+              <a:extLst>
+                <a:ext uri="{FF2B5EF4-FFF2-40B4-BE49-F238E27FC236}">
+                  <a16:creationId xmlns:a16="http://schemas.microsoft.com/office/drawing/2014/main" id="{11DF7DC0-A225-1FB3-B9E8-DC652024AA22}"/>
+                </a:ext>
+              </a:extLst>
+            </p:cNvPr>
+            <p:cNvGrpSpPr/>
+            <p:nvPr/>
+          </p:nvGrpSpPr>
+          <p:grpSpPr>
+            <a:xfrm>
+              <a:off x="10041117" y="6072707"/>
+              <a:ext cx="2276062" cy="561109"/>
+              <a:chOff x="787428" y="4369987"/>
+              <a:chExt cx="2276062" cy="561109"/>
+            </a:xfrm>
+          </p:grpSpPr>
+          <p:sp>
+            <p:nvSpPr>
+              <p:cNvPr id="175" name="Rectangle 76">
+                <a:extLst>
+                  <a:ext uri="{FF2B5EF4-FFF2-40B4-BE49-F238E27FC236}">
+                    <a16:creationId xmlns:a16="http://schemas.microsoft.com/office/drawing/2014/main" id="{8BB01156-F85D-531D-7F2F-2F22CA2D5BA6}"/>
+                  </a:ext>
+                </a:extLst>
+              </p:cNvPr>
+              <p:cNvSpPr/>
+              <p:nvPr/>
+            </p:nvSpPr>
+            <p:spPr>
+              <a:xfrm>
+                <a:off x="787428" y="4369987"/>
+                <a:ext cx="2276062" cy="561109"/>
+              </a:xfrm>
+              <a:prstGeom prst="rect">
+                <a:avLst/>
+              </a:prstGeom>
+              <a:solidFill>
+                <a:srgbClr val="FFFFFF"/>
+              </a:solidFill>
+              <a:ln w="13970">
+                <a:solidFill>
+                  <a:schemeClr val="tx1">
+                    <a:lumMod val="65000"/>
+                    <a:lumOff val="35000"/>
+                  </a:schemeClr>
+                </a:solidFill>
+              </a:ln>
+            </p:spPr>
+            <p:style>
+              <a:lnRef idx="1">
+                <a:schemeClr val="accent1"/>
+              </a:lnRef>
+              <a:fillRef idx="3">
+                <a:schemeClr val="accent1"/>
+              </a:fillRef>
+              <a:effectRef idx="2">
+                <a:schemeClr val="accent1"/>
+              </a:effectRef>
+              <a:fontRef idx="minor">
+                <a:schemeClr val="lt1"/>
+              </a:fontRef>
+            </p:style>
+            <p:txBody>
+              <a:bodyPr rtlCol="0" anchor="ctr"/>
+              <a:lstStyle/>
+              <a:p>
+                <a:pPr algn="ctr"/>
+                <a:endParaRPr sz="3200" b="1" dirty="0">
+                  <a:latin typeface="宋体" panose="02010600030101010101" pitchFamily="2" charset="-122"/>
+                  <a:ea typeface="宋体" panose="02010600030101010101" pitchFamily="2" charset="-122"/>
+                </a:endParaRPr>
+              </a:p>
+            </p:txBody>
+          </p:sp>
+          <p:grpSp>
+            <p:nvGrpSpPr>
+              <p:cNvPr id="176" name="组合 175">
+                <a:extLst>
+                  <a:ext uri="{FF2B5EF4-FFF2-40B4-BE49-F238E27FC236}">
+                    <a16:creationId xmlns:a16="http://schemas.microsoft.com/office/drawing/2014/main" id="{779C5AF7-80D5-F73D-6D62-DC0D4027A1C3}"/>
+                  </a:ext>
+                </a:extLst>
+              </p:cNvPr>
+              <p:cNvGrpSpPr/>
+              <p:nvPr/>
+            </p:nvGrpSpPr>
+            <p:grpSpPr>
+              <a:xfrm>
+                <a:off x="2791063" y="4407913"/>
+                <a:ext cx="166910" cy="143394"/>
+                <a:chOff x="10916798" y="4537825"/>
+                <a:chExt cx="166910" cy="143394"/>
+              </a:xfrm>
+            </p:grpSpPr>
+            <p:sp>
+              <p:nvSpPr>
+                <p:cNvPr id="177" name="Rectangle 91">
+                  <a:extLst>
+                    <a:ext uri="{FF2B5EF4-FFF2-40B4-BE49-F238E27FC236}">
+                      <a16:creationId xmlns:a16="http://schemas.microsoft.com/office/drawing/2014/main" id="{B540752F-7DF6-4ECA-45F9-C12A930AFFB8}"/>
+                    </a:ext>
+                  </a:extLst>
+                </p:cNvPr>
+                <p:cNvSpPr/>
+                <p:nvPr/>
+              </p:nvSpPr>
+              <p:spPr>
+                <a:xfrm>
+                  <a:off x="10945826" y="4537825"/>
+                  <a:ext cx="137882" cy="143394"/>
+                </a:xfrm>
+                <a:prstGeom prst="rect">
+                  <a:avLst/>
+                </a:prstGeom>
+                <a:solidFill>
+                  <a:srgbClr val="FFFFFF"/>
+                </a:solidFill>
+                <a:ln w="10160">
+                  <a:solidFill>
+                    <a:schemeClr val="tx1"/>
+                  </a:solidFill>
+                </a:ln>
+              </p:spPr>
+              <p:style>
+                <a:lnRef idx="1">
+                  <a:schemeClr val="accent1"/>
+                </a:lnRef>
+                <a:fillRef idx="3">
+                  <a:schemeClr val="accent1"/>
+                </a:fillRef>
+                <a:effectRef idx="2">
+                  <a:schemeClr val="accent1"/>
+                </a:effectRef>
+                <a:fontRef idx="minor">
+                  <a:schemeClr val="lt1"/>
+                </a:fontRef>
+              </p:style>
+              <p:txBody>
+                <a:bodyPr rtlCol="0" anchor="ctr"/>
+                <a:lstStyle/>
+                <a:p>
+                  <a:pPr algn="ctr"/>
+                  <a:endParaRPr sz="3200" b="1">
+                    <a:solidFill>
+                      <a:schemeClr val="tx1"/>
+                    </a:solidFill>
+                    <a:latin typeface="宋体" panose="02010600030101010101" pitchFamily="2" charset="-122"/>
+                    <a:ea typeface="宋体" panose="02010600030101010101" pitchFamily="2" charset="-122"/>
+                  </a:endParaRPr>
+                </a:p>
+              </p:txBody>
+            </p:sp>
+            <p:sp>
+              <p:nvSpPr>
+                <p:cNvPr id="178" name="Rectangle 92">
+                  <a:extLst>
+                    <a:ext uri="{FF2B5EF4-FFF2-40B4-BE49-F238E27FC236}">
+                      <a16:creationId xmlns:a16="http://schemas.microsoft.com/office/drawing/2014/main" id="{3C5227E6-6BEB-1BD1-5A89-B6180784ED25}"/>
+                    </a:ext>
+                  </a:extLst>
+                </p:cNvPr>
+                <p:cNvSpPr/>
+                <p:nvPr/>
+              </p:nvSpPr>
+              <p:spPr>
+                <a:xfrm>
+                  <a:off x="10916798" y="4550294"/>
+                  <a:ext cx="58055" cy="41148"/>
+                </a:xfrm>
+                <a:prstGeom prst="rect">
+                  <a:avLst/>
+                </a:prstGeom>
+                <a:solidFill>
+                  <a:srgbClr val="FFFFFF"/>
+                </a:solidFill>
+                <a:ln w="10160">
+                  <a:solidFill>
+                    <a:schemeClr val="tx1"/>
+                  </a:solidFill>
+                </a:ln>
+              </p:spPr>
+              <p:style>
+                <a:lnRef idx="1">
+                  <a:schemeClr val="accent1"/>
+                </a:lnRef>
+                <a:fillRef idx="3">
+                  <a:schemeClr val="accent1"/>
+                </a:fillRef>
+                <a:effectRef idx="2">
+                  <a:schemeClr val="accent1"/>
+                </a:effectRef>
+                <a:fontRef idx="minor">
+                  <a:schemeClr val="lt1"/>
+                </a:fontRef>
+              </p:style>
+              <p:txBody>
+                <a:bodyPr rtlCol="0" anchor="ctr"/>
+                <a:lstStyle/>
+                <a:p>
+                  <a:pPr algn="ctr"/>
+                  <a:endParaRPr sz="3200" b="1">
+                    <a:solidFill>
+                      <a:schemeClr val="tx1"/>
+                    </a:solidFill>
+                    <a:latin typeface="宋体" panose="02010600030101010101" pitchFamily="2" charset="-122"/>
+                    <a:ea typeface="宋体" panose="02010600030101010101" pitchFamily="2" charset="-122"/>
+                  </a:endParaRPr>
+                </a:p>
+              </p:txBody>
+            </p:sp>
+            <p:sp>
+              <p:nvSpPr>
+                <p:cNvPr id="179" name="Rectangle 93">
+                  <a:extLst>
+                    <a:ext uri="{FF2B5EF4-FFF2-40B4-BE49-F238E27FC236}">
+                      <a16:creationId xmlns:a16="http://schemas.microsoft.com/office/drawing/2014/main" id="{94149542-2CAD-540A-CFDD-27EA1386D583}"/>
+                    </a:ext>
+                  </a:extLst>
+                </p:cNvPr>
+                <p:cNvSpPr/>
+                <p:nvPr/>
+              </p:nvSpPr>
+              <p:spPr>
+                <a:xfrm>
+                  <a:off x="10916798" y="4605158"/>
+                  <a:ext cx="58055" cy="41148"/>
+                </a:xfrm>
+                <a:prstGeom prst="rect">
+                  <a:avLst/>
+                </a:prstGeom>
+                <a:solidFill>
+                  <a:srgbClr val="FFFFFF"/>
+                </a:solidFill>
+                <a:ln w="10160">
+                  <a:solidFill>
+                    <a:schemeClr val="tx1"/>
+                  </a:solidFill>
+                </a:ln>
+              </p:spPr>
+              <p:style>
+                <a:lnRef idx="1">
+                  <a:schemeClr val="accent1"/>
+                </a:lnRef>
+                <a:fillRef idx="3">
+                  <a:schemeClr val="accent1"/>
+                </a:fillRef>
+                <a:effectRef idx="2">
+                  <a:schemeClr val="accent1"/>
+                </a:effectRef>
+                <a:fontRef idx="minor">
+                  <a:schemeClr val="lt1"/>
+                </a:fontRef>
+              </p:style>
+              <p:txBody>
+                <a:bodyPr rtlCol="0" anchor="ctr"/>
+                <a:lstStyle/>
+                <a:p>
+                  <a:pPr algn="ctr"/>
+                  <a:endParaRPr sz="3200" b="1">
+                    <a:solidFill>
+                      <a:schemeClr val="tx1"/>
+                    </a:solidFill>
+                    <a:latin typeface="宋体" panose="02010600030101010101" pitchFamily="2" charset="-122"/>
+                    <a:ea typeface="宋体" panose="02010600030101010101" pitchFamily="2" charset="-122"/>
+                  </a:endParaRPr>
+                </a:p>
+              </p:txBody>
+            </p:sp>
+          </p:grpSp>
+        </p:grpSp>
+        <p:sp>
+          <p:nvSpPr>
+            <p:cNvPr id="174" name="TextBox 81">
+              <a:extLst>
+                <a:ext uri="{FF2B5EF4-FFF2-40B4-BE49-F238E27FC236}">
+                  <a16:creationId xmlns:a16="http://schemas.microsoft.com/office/drawing/2014/main" id="{812D02F1-4201-541A-E082-4E74CFD8724A}"/>
+                </a:ext>
+              </a:extLst>
+            </p:cNvPr>
+            <p:cNvSpPr txBox="1"/>
+            <p:nvPr/>
+          </p:nvSpPr>
+          <p:spPr>
+            <a:xfrm>
+              <a:off x="10376068" y="6192580"/>
+              <a:ext cx="1582017" cy="307777"/>
+            </a:xfrm>
+            <a:prstGeom prst="rect">
+              <a:avLst/>
+            </a:prstGeom>
+            <a:noFill/>
+            <a:ln>
+              <a:noFill/>
+            </a:ln>
+          </p:spPr>
+          <p:txBody>
+            <a:bodyPr wrap="square" lIns="0" tIns="0" rIns="0" bIns="0" anchor="ctr">
+              <a:spAutoFit/>
+            </a:bodyPr>
+            <a:lstStyle/>
+            <a:p>
+              <a:pPr algn="ctr">
+                <a:spcBef>
+                  <a:spcPts val="0"/>
+                </a:spcBef>
+                <a:spcAft>
+                  <a:spcPts val="0"/>
+                </a:spcAft>
+              </a:pPr>
+              <a:r>
+                <a:rPr lang="zh-CN" altLang="en-US" sz="2000" b="1" dirty="0">
+                  <a:solidFill>
+                    <a:srgbClr val="1A1A2E"/>
+                  </a:solidFill>
+                  <a:latin typeface="宋体" panose="02010600030101010101" pitchFamily="2" charset="-122"/>
+                  <a:ea typeface="宋体" panose="02010600030101010101" pitchFamily="2" charset="-122"/>
+                </a:rPr>
+                <a:t>会话</a:t>
+              </a:r>
+              <a:r>
+                <a:rPr lang="zh-CN" altLang="en-US" sz="2000" b="1" i="0" dirty="0">
+                  <a:solidFill>
+                    <a:srgbClr val="1A1A2E"/>
+                  </a:solidFill>
+                  <a:latin typeface="宋体" panose="02010600030101010101" pitchFamily="2" charset="-122"/>
+                  <a:ea typeface="宋体" panose="02010600030101010101" pitchFamily="2" charset="-122"/>
+                </a:rPr>
+                <a:t>数据库</a:t>
+              </a:r>
+              <a:endParaRPr sz="2000" b="1" i="0" dirty="0">
+                <a:solidFill>
+                  <a:srgbClr val="1A1A2E"/>
+                </a:solidFill>
+                <a:latin typeface="宋体" panose="02010600030101010101" pitchFamily="2" charset="-122"/>
+                <a:ea typeface="宋体" panose="02010600030101010101" pitchFamily="2" charset="-122"/>
+              </a:endParaRPr>
+            </a:p>
+          </p:txBody>
+        </p:sp>
+      </p:grpSp>
+      <p:grpSp>
+        <p:nvGrpSpPr>
+          <p:cNvPr id="180" name="组合 179">
+            <a:extLst>
+              <a:ext uri="{FF2B5EF4-FFF2-40B4-BE49-F238E27FC236}">
+                <a16:creationId xmlns:a16="http://schemas.microsoft.com/office/drawing/2014/main" id="{06AD7465-91AC-D320-5267-F241F4CA1800}"/>
+              </a:ext>
+            </a:extLst>
+          </p:cNvPr>
+          <p:cNvGrpSpPr/>
+          <p:nvPr/>
+        </p:nvGrpSpPr>
+        <p:grpSpPr>
+          <a:xfrm>
+            <a:off x="1279849" y="598949"/>
+            <a:ext cx="2276062" cy="561109"/>
+            <a:chOff x="10041117" y="6072707"/>
+            <a:chExt cx="2276062" cy="561109"/>
+          </a:xfrm>
+        </p:grpSpPr>
+        <p:grpSp>
+          <p:nvGrpSpPr>
+            <p:cNvPr id="181" name="组合 180">
+              <a:extLst>
+                <a:ext uri="{FF2B5EF4-FFF2-40B4-BE49-F238E27FC236}">
+                  <a16:creationId xmlns:a16="http://schemas.microsoft.com/office/drawing/2014/main" id="{EC2A9ED1-9F38-AE15-29B4-E5E60F50927D}"/>
+                </a:ext>
+              </a:extLst>
+            </p:cNvPr>
+            <p:cNvGrpSpPr/>
+            <p:nvPr/>
+          </p:nvGrpSpPr>
+          <p:grpSpPr>
+            <a:xfrm>
+              <a:off x="10041117" y="6072707"/>
+              <a:ext cx="2276062" cy="561109"/>
+              <a:chOff x="787428" y="4369987"/>
+              <a:chExt cx="2276062" cy="561109"/>
+            </a:xfrm>
+          </p:grpSpPr>
+          <p:sp>
+            <p:nvSpPr>
+              <p:cNvPr id="183" name="Rectangle 76">
+                <a:extLst>
+                  <a:ext uri="{FF2B5EF4-FFF2-40B4-BE49-F238E27FC236}">
+                    <a16:creationId xmlns:a16="http://schemas.microsoft.com/office/drawing/2014/main" id="{27E65F54-3F22-9739-FE3E-81A9C2222C05}"/>
+                  </a:ext>
+                </a:extLst>
+              </p:cNvPr>
+              <p:cNvSpPr/>
+              <p:nvPr/>
+            </p:nvSpPr>
+            <p:spPr>
+              <a:xfrm>
+                <a:off x="787428" y="4369987"/>
+                <a:ext cx="2276062" cy="561109"/>
+              </a:xfrm>
+              <a:prstGeom prst="rect">
+                <a:avLst/>
+              </a:prstGeom>
+              <a:solidFill>
+                <a:srgbClr val="FFFFFF"/>
+              </a:solidFill>
+              <a:ln w="13970">
+                <a:solidFill>
+                  <a:schemeClr val="tx1">
+                    <a:lumMod val="65000"/>
+                    <a:lumOff val="35000"/>
+                  </a:schemeClr>
+                </a:solidFill>
+              </a:ln>
+            </p:spPr>
+            <p:style>
+              <a:lnRef idx="1">
+                <a:schemeClr val="accent1"/>
+              </a:lnRef>
+              <a:fillRef idx="3">
+                <a:schemeClr val="accent1"/>
+              </a:fillRef>
+              <a:effectRef idx="2">
+                <a:schemeClr val="accent1"/>
+              </a:effectRef>
+              <a:fontRef idx="minor">
+                <a:schemeClr val="lt1"/>
+              </a:fontRef>
+            </p:style>
+            <p:txBody>
+              <a:bodyPr rtlCol="0" anchor="ctr"/>
+              <a:lstStyle/>
+              <a:p>
+                <a:pPr algn="ctr"/>
+                <a:endParaRPr sz="3200" b="1">
+                  <a:latin typeface="宋体" panose="02010600030101010101" pitchFamily="2" charset="-122"/>
+                  <a:ea typeface="宋体" panose="02010600030101010101" pitchFamily="2" charset="-122"/>
+                </a:endParaRPr>
+              </a:p>
+            </p:txBody>
+          </p:sp>
+          <p:grpSp>
+            <p:nvGrpSpPr>
+              <p:cNvPr id="184" name="组合 183">
+                <a:extLst>
+                  <a:ext uri="{FF2B5EF4-FFF2-40B4-BE49-F238E27FC236}">
+                    <a16:creationId xmlns:a16="http://schemas.microsoft.com/office/drawing/2014/main" id="{BEEE6D1B-C021-CE61-265E-A5682D416612}"/>
+                  </a:ext>
+                </a:extLst>
+              </p:cNvPr>
+              <p:cNvGrpSpPr/>
+              <p:nvPr/>
+            </p:nvGrpSpPr>
+            <p:grpSpPr>
+              <a:xfrm>
+                <a:off x="2791063" y="4407913"/>
+                <a:ext cx="166910" cy="143394"/>
+                <a:chOff x="10916798" y="4537825"/>
+                <a:chExt cx="166910" cy="143394"/>
+              </a:xfrm>
+            </p:grpSpPr>
+            <p:sp>
+              <p:nvSpPr>
+                <p:cNvPr id="185" name="Rectangle 91">
+                  <a:extLst>
+                    <a:ext uri="{FF2B5EF4-FFF2-40B4-BE49-F238E27FC236}">
+                      <a16:creationId xmlns:a16="http://schemas.microsoft.com/office/drawing/2014/main" id="{6FDDFA09-4C12-D269-3FC9-B6A0A787B4C2}"/>
+                    </a:ext>
+                  </a:extLst>
+                </p:cNvPr>
+                <p:cNvSpPr/>
+                <p:nvPr/>
+              </p:nvSpPr>
+              <p:spPr>
+                <a:xfrm>
+                  <a:off x="10945826" y="4537825"/>
+                  <a:ext cx="137882" cy="143394"/>
+                </a:xfrm>
+                <a:prstGeom prst="rect">
+                  <a:avLst/>
+                </a:prstGeom>
+                <a:solidFill>
+                  <a:srgbClr val="FFFFFF"/>
+                </a:solidFill>
+                <a:ln w="10160">
+                  <a:solidFill>
+                    <a:schemeClr val="tx1"/>
+                  </a:solidFill>
+                </a:ln>
+              </p:spPr>
+              <p:style>
+                <a:lnRef idx="1">
+                  <a:schemeClr val="accent1"/>
+                </a:lnRef>
+                <a:fillRef idx="3">
+                  <a:schemeClr val="accent1"/>
+                </a:fillRef>
+                <a:effectRef idx="2">
+                  <a:schemeClr val="accent1"/>
+                </a:effectRef>
+                <a:fontRef idx="minor">
+                  <a:schemeClr val="lt1"/>
+                </a:fontRef>
+              </p:style>
+              <p:txBody>
+                <a:bodyPr rtlCol="0" anchor="ctr"/>
+                <a:lstStyle/>
+                <a:p>
+                  <a:pPr algn="ctr"/>
+                  <a:endParaRPr sz="3200" b="1">
+                    <a:solidFill>
+                      <a:schemeClr val="tx1"/>
+                    </a:solidFill>
+                    <a:latin typeface="宋体" panose="02010600030101010101" pitchFamily="2" charset="-122"/>
+                    <a:ea typeface="宋体" panose="02010600030101010101" pitchFamily="2" charset="-122"/>
+                  </a:endParaRPr>
+                </a:p>
+              </p:txBody>
+            </p:sp>
+            <p:sp>
+              <p:nvSpPr>
+                <p:cNvPr id="186" name="Rectangle 92">
+                  <a:extLst>
+                    <a:ext uri="{FF2B5EF4-FFF2-40B4-BE49-F238E27FC236}">
+                      <a16:creationId xmlns:a16="http://schemas.microsoft.com/office/drawing/2014/main" id="{8F312806-7DAE-BCCB-BA44-3578786AC69D}"/>
+                    </a:ext>
+                  </a:extLst>
+                </p:cNvPr>
+                <p:cNvSpPr/>
+                <p:nvPr/>
+              </p:nvSpPr>
+              <p:spPr>
+                <a:xfrm>
+                  <a:off x="10916798" y="4550294"/>
+                  <a:ext cx="58055" cy="41148"/>
+                </a:xfrm>
+                <a:prstGeom prst="rect">
+                  <a:avLst/>
+                </a:prstGeom>
+                <a:solidFill>
+                  <a:srgbClr val="FFFFFF"/>
+                </a:solidFill>
+                <a:ln w="10160">
+                  <a:solidFill>
+                    <a:schemeClr val="tx1"/>
+                  </a:solidFill>
+                </a:ln>
+              </p:spPr>
+              <p:style>
+                <a:lnRef idx="1">
+                  <a:schemeClr val="accent1"/>
+                </a:lnRef>
+                <a:fillRef idx="3">
+                  <a:schemeClr val="accent1"/>
+                </a:fillRef>
+                <a:effectRef idx="2">
+                  <a:schemeClr val="accent1"/>
+                </a:effectRef>
+                <a:fontRef idx="minor">
+                  <a:schemeClr val="lt1"/>
+                </a:fontRef>
+              </p:style>
+              <p:txBody>
+                <a:bodyPr rtlCol="0" anchor="ctr"/>
+                <a:lstStyle/>
+                <a:p>
+                  <a:pPr algn="ctr"/>
+                  <a:endParaRPr sz="3200" b="1">
+                    <a:solidFill>
+                      <a:schemeClr val="tx1"/>
+                    </a:solidFill>
+                    <a:latin typeface="宋体" panose="02010600030101010101" pitchFamily="2" charset="-122"/>
+                    <a:ea typeface="宋体" panose="02010600030101010101" pitchFamily="2" charset="-122"/>
+                  </a:endParaRPr>
+                </a:p>
+              </p:txBody>
+            </p:sp>
+            <p:sp>
+              <p:nvSpPr>
+                <p:cNvPr id="187" name="Rectangle 93">
+                  <a:extLst>
+                    <a:ext uri="{FF2B5EF4-FFF2-40B4-BE49-F238E27FC236}">
+                      <a16:creationId xmlns:a16="http://schemas.microsoft.com/office/drawing/2014/main" id="{2FC63862-0B1E-D857-C008-7C6321810CE9}"/>
+                    </a:ext>
+                  </a:extLst>
+                </p:cNvPr>
+                <p:cNvSpPr/>
+                <p:nvPr/>
+              </p:nvSpPr>
+              <p:spPr>
+                <a:xfrm>
+                  <a:off x="10916798" y="4605158"/>
+                  <a:ext cx="58055" cy="41148"/>
+                </a:xfrm>
+                <a:prstGeom prst="rect">
+                  <a:avLst/>
+                </a:prstGeom>
+                <a:solidFill>
+                  <a:srgbClr val="FFFFFF"/>
+                </a:solidFill>
+                <a:ln w="10160">
+                  <a:solidFill>
+                    <a:schemeClr val="tx1"/>
+                  </a:solidFill>
+                </a:ln>
+              </p:spPr>
+              <p:style>
+                <a:lnRef idx="1">
+                  <a:schemeClr val="accent1"/>
+                </a:lnRef>
+                <a:fillRef idx="3">
+                  <a:schemeClr val="accent1"/>
+                </a:fillRef>
+                <a:effectRef idx="2">
+                  <a:schemeClr val="accent1"/>
+                </a:effectRef>
+                <a:fontRef idx="minor">
+                  <a:schemeClr val="lt1"/>
+                </a:fontRef>
+              </p:style>
+              <p:txBody>
+                <a:bodyPr rtlCol="0" anchor="ctr"/>
+                <a:lstStyle/>
+                <a:p>
+                  <a:pPr algn="ctr"/>
+                  <a:endParaRPr sz="3200" b="1">
+                    <a:solidFill>
+                      <a:schemeClr val="tx1"/>
+                    </a:solidFill>
+                    <a:latin typeface="宋体" panose="02010600030101010101" pitchFamily="2" charset="-122"/>
+                    <a:ea typeface="宋体" panose="02010600030101010101" pitchFamily="2" charset="-122"/>
+                  </a:endParaRPr>
+                </a:p>
+              </p:txBody>
+            </p:sp>
+          </p:grpSp>
+        </p:grpSp>
+        <p:sp>
+          <p:nvSpPr>
+            <p:cNvPr id="182" name="TextBox 81">
+              <a:extLst>
+                <a:ext uri="{FF2B5EF4-FFF2-40B4-BE49-F238E27FC236}">
+                  <a16:creationId xmlns:a16="http://schemas.microsoft.com/office/drawing/2014/main" id="{EF3BEB34-9A2E-F43C-E364-3C2CE63444FD}"/>
+                </a:ext>
+              </a:extLst>
+            </p:cNvPr>
+            <p:cNvSpPr txBox="1"/>
+            <p:nvPr/>
+          </p:nvSpPr>
+          <p:spPr>
+            <a:xfrm>
+              <a:off x="10376068" y="6192580"/>
+              <a:ext cx="1582017" cy="307777"/>
+            </a:xfrm>
+            <a:prstGeom prst="rect">
+              <a:avLst/>
+            </a:prstGeom>
+            <a:noFill/>
+            <a:ln>
+              <a:noFill/>
+            </a:ln>
+          </p:spPr>
+          <p:txBody>
+            <a:bodyPr wrap="square" lIns="0" tIns="0" rIns="0" bIns="0" anchor="ctr">
+              <a:spAutoFit/>
+            </a:bodyPr>
+            <a:lstStyle/>
+            <a:p>
+              <a:pPr algn="ctr">
+                <a:spcBef>
+                  <a:spcPts val="0"/>
+                </a:spcBef>
+                <a:spcAft>
+                  <a:spcPts val="0"/>
+                </a:spcAft>
+              </a:pPr>
+              <a:r>
+                <a:rPr lang="zh-CN" altLang="en-US" sz="2000" b="1" i="0" dirty="0">
+                  <a:solidFill>
+                    <a:srgbClr val="1A1A2E"/>
+                  </a:solidFill>
+                  <a:latin typeface="宋体" panose="02010600030101010101" pitchFamily="2" charset="-122"/>
+                  <a:ea typeface="宋体" panose="02010600030101010101" pitchFamily="2" charset="-122"/>
+                </a:rPr>
+                <a:t>策略代码生成</a:t>
+              </a:r>
+              <a:endParaRPr sz="2000" b="1" i="0" dirty="0">
+                <a:solidFill>
+                  <a:srgbClr val="1A1A2E"/>
+                </a:solidFill>
+                <a:latin typeface="宋体" panose="02010600030101010101" pitchFamily="2" charset="-122"/>
+                <a:ea typeface="宋体" panose="02010600030101010101" pitchFamily="2" charset="-122"/>
+              </a:endParaRPr>
+            </a:p>
+          </p:txBody>
+        </p:sp>
+      </p:grpSp>
+      <p:grpSp>
+        <p:nvGrpSpPr>
+          <p:cNvPr id="188" name="组合 187">
+            <a:extLst>
+              <a:ext uri="{FF2B5EF4-FFF2-40B4-BE49-F238E27FC236}">
+                <a16:creationId xmlns:a16="http://schemas.microsoft.com/office/drawing/2014/main" id="{A54FC7AE-DDAC-F3B9-E3FB-732879FBEA4E}"/>
+              </a:ext>
+            </a:extLst>
+          </p:cNvPr>
+          <p:cNvGrpSpPr/>
+          <p:nvPr/>
+        </p:nvGrpSpPr>
+        <p:grpSpPr>
+          <a:xfrm>
+            <a:off x="4123265" y="604750"/>
+            <a:ext cx="2276062" cy="561109"/>
+            <a:chOff x="10041117" y="6072707"/>
+            <a:chExt cx="2276062" cy="561109"/>
+          </a:xfrm>
+        </p:grpSpPr>
+        <p:grpSp>
+          <p:nvGrpSpPr>
+            <p:cNvPr id="189" name="组合 188">
+              <a:extLst>
+                <a:ext uri="{FF2B5EF4-FFF2-40B4-BE49-F238E27FC236}">
+                  <a16:creationId xmlns:a16="http://schemas.microsoft.com/office/drawing/2014/main" id="{538E4576-D539-0AE5-10B1-BF068FC8F1E8}"/>
+                </a:ext>
+              </a:extLst>
+            </p:cNvPr>
+            <p:cNvGrpSpPr/>
+            <p:nvPr/>
+          </p:nvGrpSpPr>
+          <p:grpSpPr>
+            <a:xfrm>
+              <a:off x="10041117" y="6072707"/>
+              <a:ext cx="2276062" cy="561109"/>
+              <a:chOff x="787428" y="4369987"/>
+              <a:chExt cx="2276062" cy="561109"/>
+            </a:xfrm>
+          </p:grpSpPr>
+          <p:sp>
+            <p:nvSpPr>
+              <p:cNvPr id="191" name="Rectangle 76">
+                <a:extLst>
+                  <a:ext uri="{FF2B5EF4-FFF2-40B4-BE49-F238E27FC236}">
+                    <a16:creationId xmlns:a16="http://schemas.microsoft.com/office/drawing/2014/main" id="{81FDD6C1-EF0C-10CB-0B76-D7793159A745}"/>
+                  </a:ext>
+                </a:extLst>
+              </p:cNvPr>
+              <p:cNvSpPr/>
+              <p:nvPr/>
+            </p:nvSpPr>
+            <p:spPr>
+              <a:xfrm>
+                <a:off x="787428" y="4369987"/>
+                <a:ext cx="2276062" cy="561109"/>
+              </a:xfrm>
+              <a:prstGeom prst="rect">
+                <a:avLst/>
+              </a:prstGeom>
+              <a:solidFill>
+                <a:srgbClr val="FFFFFF"/>
+              </a:solidFill>
+              <a:ln w="13970">
+                <a:solidFill>
+                  <a:schemeClr val="tx1">
+                    <a:lumMod val="65000"/>
+                    <a:lumOff val="35000"/>
+                  </a:schemeClr>
+                </a:solidFill>
+              </a:ln>
+            </p:spPr>
+            <p:style>
+              <a:lnRef idx="1">
+                <a:schemeClr val="accent1"/>
+              </a:lnRef>
+              <a:fillRef idx="3">
+                <a:schemeClr val="accent1"/>
+              </a:fillRef>
+              <a:effectRef idx="2">
+                <a:schemeClr val="accent1"/>
+              </a:effectRef>
+              <a:fontRef idx="minor">
+                <a:schemeClr val="lt1"/>
+              </a:fontRef>
+            </p:style>
+            <p:txBody>
+              <a:bodyPr rtlCol="0" anchor="ctr"/>
+              <a:lstStyle/>
+              <a:p>
+                <a:pPr algn="ctr"/>
+                <a:endParaRPr sz="3200" b="1">
+                  <a:latin typeface="宋体" panose="02010600030101010101" pitchFamily="2" charset="-122"/>
+                  <a:ea typeface="宋体" panose="02010600030101010101" pitchFamily="2" charset="-122"/>
+                </a:endParaRPr>
+              </a:p>
+            </p:txBody>
+          </p:sp>
+          <p:grpSp>
+            <p:nvGrpSpPr>
+              <p:cNvPr id="192" name="组合 191">
+                <a:extLst>
+                  <a:ext uri="{FF2B5EF4-FFF2-40B4-BE49-F238E27FC236}">
+                    <a16:creationId xmlns:a16="http://schemas.microsoft.com/office/drawing/2014/main" id="{222A27E7-EB72-2BB9-5E65-49EA3E0EF888}"/>
+                  </a:ext>
+                </a:extLst>
+              </p:cNvPr>
+              <p:cNvGrpSpPr/>
+              <p:nvPr/>
+            </p:nvGrpSpPr>
+            <p:grpSpPr>
+              <a:xfrm>
+                <a:off x="2791063" y="4407913"/>
+                <a:ext cx="166910" cy="143394"/>
+                <a:chOff x="10916798" y="4537825"/>
+                <a:chExt cx="166910" cy="143394"/>
+              </a:xfrm>
+            </p:grpSpPr>
+            <p:sp>
+              <p:nvSpPr>
+                <p:cNvPr id="193" name="Rectangle 91">
+                  <a:extLst>
+                    <a:ext uri="{FF2B5EF4-FFF2-40B4-BE49-F238E27FC236}">
+                      <a16:creationId xmlns:a16="http://schemas.microsoft.com/office/drawing/2014/main" id="{1920C06E-2176-C1AC-4E94-376BC5F30AD5}"/>
+                    </a:ext>
+                  </a:extLst>
+                </p:cNvPr>
+                <p:cNvSpPr/>
+                <p:nvPr/>
+              </p:nvSpPr>
+              <p:spPr>
+                <a:xfrm>
+                  <a:off x="10945826" y="4537825"/>
+                  <a:ext cx="137882" cy="143394"/>
+                </a:xfrm>
+                <a:prstGeom prst="rect">
+                  <a:avLst/>
+                </a:prstGeom>
+                <a:solidFill>
+                  <a:srgbClr val="FFFFFF"/>
+                </a:solidFill>
+                <a:ln w="10160">
+                  <a:solidFill>
+                    <a:schemeClr val="tx1"/>
+                  </a:solidFill>
+                </a:ln>
+              </p:spPr>
+              <p:style>
+                <a:lnRef idx="1">
+                  <a:schemeClr val="accent1"/>
+                </a:lnRef>
+                <a:fillRef idx="3">
+                  <a:schemeClr val="accent1"/>
+                </a:fillRef>
+                <a:effectRef idx="2">
+                  <a:schemeClr val="accent1"/>
+                </a:effectRef>
+                <a:fontRef idx="minor">
+                  <a:schemeClr val="lt1"/>
+                </a:fontRef>
+              </p:style>
+              <p:txBody>
+                <a:bodyPr rtlCol="0" anchor="ctr"/>
+                <a:lstStyle/>
+                <a:p>
+                  <a:pPr algn="ctr"/>
+                  <a:endParaRPr sz="3200" b="1">
+                    <a:solidFill>
+                      <a:schemeClr val="tx1"/>
+                    </a:solidFill>
+                    <a:latin typeface="宋体" panose="02010600030101010101" pitchFamily="2" charset="-122"/>
+                    <a:ea typeface="宋体" panose="02010600030101010101" pitchFamily="2" charset="-122"/>
+                  </a:endParaRPr>
+                </a:p>
+              </p:txBody>
+            </p:sp>
+            <p:sp>
+              <p:nvSpPr>
+                <p:cNvPr id="194" name="Rectangle 92">
+                  <a:extLst>
+                    <a:ext uri="{FF2B5EF4-FFF2-40B4-BE49-F238E27FC236}">
+                      <a16:creationId xmlns:a16="http://schemas.microsoft.com/office/drawing/2014/main" id="{42A74A64-C5FC-1256-2B53-C93D488D7DD9}"/>
+                    </a:ext>
+                  </a:extLst>
+                </p:cNvPr>
+                <p:cNvSpPr/>
+                <p:nvPr/>
+              </p:nvSpPr>
+              <p:spPr>
+                <a:xfrm>
+                  <a:off x="10916798" y="4550294"/>
+                  <a:ext cx="58055" cy="41148"/>
+                </a:xfrm>
+                <a:prstGeom prst="rect">
+                  <a:avLst/>
+                </a:prstGeom>
+                <a:solidFill>
+                  <a:srgbClr val="FFFFFF"/>
+                </a:solidFill>
+                <a:ln w="10160">
+                  <a:solidFill>
+                    <a:schemeClr val="tx1"/>
+                  </a:solidFill>
+                </a:ln>
+              </p:spPr>
+              <p:style>
+                <a:lnRef idx="1">
+                  <a:schemeClr val="accent1"/>
+                </a:lnRef>
+                <a:fillRef idx="3">
+                  <a:schemeClr val="accent1"/>
+                </a:fillRef>
+                <a:effectRef idx="2">
+                  <a:schemeClr val="accent1"/>
+                </a:effectRef>
+                <a:fontRef idx="minor">
+                  <a:schemeClr val="lt1"/>
+                </a:fontRef>
+              </p:style>
+              <p:txBody>
+                <a:bodyPr rtlCol="0" anchor="ctr"/>
+                <a:lstStyle/>
+                <a:p>
+                  <a:pPr algn="ctr"/>
+                  <a:endParaRPr sz="3200" b="1">
+                    <a:solidFill>
+                      <a:schemeClr val="tx1"/>
+                    </a:solidFill>
+                    <a:latin typeface="宋体" panose="02010600030101010101" pitchFamily="2" charset="-122"/>
+                    <a:ea typeface="宋体" panose="02010600030101010101" pitchFamily="2" charset="-122"/>
+                  </a:endParaRPr>
+                </a:p>
+              </p:txBody>
+            </p:sp>
+            <p:sp>
+              <p:nvSpPr>
+                <p:cNvPr id="195" name="Rectangle 93">
+                  <a:extLst>
+                    <a:ext uri="{FF2B5EF4-FFF2-40B4-BE49-F238E27FC236}">
+                      <a16:creationId xmlns:a16="http://schemas.microsoft.com/office/drawing/2014/main" id="{9C69FA34-F285-F766-48D1-5D4842262444}"/>
+                    </a:ext>
+                  </a:extLst>
+                </p:cNvPr>
+                <p:cNvSpPr/>
+                <p:nvPr/>
+              </p:nvSpPr>
+              <p:spPr>
+                <a:xfrm>
+                  <a:off x="10916798" y="4605158"/>
+                  <a:ext cx="58055" cy="41148"/>
+                </a:xfrm>
+                <a:prstGeom prst="rect">
+                  <a:avLst/>
+                </a:prstGeom>
+                <a:solidFill>
+                  <a:srgbClr val="FFFFFF"/>
+                </a:solidFill>
+                <a:ln w="10160">
+                  <a:solidFill>
+                    <a:schemeClr val="tx1"/>
+                  </a:solidFill>
+                </a:ln>
+              </p:spPr>
+              <p:style>
+                <a:lnRef idx="1">
+                  <a:schemeClr val="accent1"/>
+                </a:lnRef>
+                <a:fillRef idx="3">
+                  <a:schemeClr val="accent1"/>
+                </a:fillRef>
+                <a:effectRef idx="2">
+                  <a:schemeClr val="accent1"/>
+                </a:effectRef>
+                <a:fontRef idx="minor">
+                  <a:schemeClr val="lt1"/>
+                </a:fontRef>
+              </p:style>
+              <p:txBody>
+                <a:bodyPr rtlCol="0" anchor="ctr"/>
+                <a:lstStyle/>
+                <a:p>
+                  <a:pPr algn="ctr"/>
+                  <a:endParaRPr sz="3200" b="1">
+                    <a:solidFill>
+                      <a:schemeClr val="tx1"/>
+                    </a:solidFill>
+                    <a:latin typeface="宋体" panose="02010600030101010101" pitchFamily="2" charset="-122"/>
+                    <a:ea typeface="宋体" panose="02010600030101010101" pitchFamily="2" charset="-122"/>
+                  </a:endParaRPr>
+                </a:p>
+              </p:txBody>
+            </p:sp>
+          </p:grpSp>
+        </p:grpSp>
+        <p:sp>
+          <p:nvSpPr>
+            <p:cNvPr id="190" name="TextBox 81">
+              <a:extLst>
+                <a:ext uri="{FF2B5EF4-FFF2-40B4-BE49-F238E27FC236}">
+                  <a16:creationId xmlns:a16="http://schemas.microsoft.com/office/drawing/2014/main" id="{8AE54614-E735-12CB-F85D-DD4ED80861E9}"/>
+                </a:ext>
+              </a:extLst>
+            </p:cNvPr>
+            <p:cNvSpPr txBox="1"/>
+            <p:nvPr/>
+          </p:nvSpPr>
+          <p:spPr>
+            <a:xfrm>
+              <a:off x="10376068" y="6192580"/>
+              <a:ext cx="1582017" cy="307777"/>
+            </a:xfrm>
+            <a:prstGeom prst="rect">
+              <a:avLst/>
+            </a:prstGeom>
+            <a:noFill/>
+            <a:ln>
+              <a:noFill/>
+            </a:ln>
+          </p:spPr>
+          <p:txBody>
+            <a:bodyPr wrap="square" lIns="0" tIns="0" rIns="0" bIns="0" anchor="ctr">
+              <a:spAutoFit/>
+            </a:bodyPr>
+            <a:lstStyle/>
+            <a:p>
+              <a:pPr algn="ctr">
+                <a:spcBef>
+                  <a:spcPts val="0"/>
+                </a:spcBef>
+                <a:spcAft>
+                  <a:spcPts val="0"/>
+                </a:spcAft>
+              </a:pPr>
+              <a:r>
+                <a:rPr lang="zh-CN" altLang="en-US" sz="2000" b="1" i="0" dirty="0">
+                  <a:solidFill>
+                    <a:srgbClr val="1A1A2E"/>
+                  </a:solidFill>
+                  <a:latin typeface="宋体" panose="02010600030101010101" pitchFamily="2" charset="-122"/>
+                  <a:ea typeface="宋体" panose="02010600030101010101" pitchFamily="2" charset="-122"/>
+                </a:rPr>
+                <a:t>策略代码评估</a:t>
+              </a:r>
+              <a:endParaRPr sz="2000" b="1" i="0" dirty="0">
+                <a:solidFill>
+                  <a:srgbClr val="1A1A2E"/>
+                </a:solidFill>
+                <a:latin typeface="宋体" panose="02010600030101010101" pitchFamily="2" charset="-122"/>
+                <a:ea typeface="宋体" panose="02010600030101010101" pitchFamily="2" charset="-122"/>
+              </a:endParaRPr>
+            </a:p>
+          </p:txBody>
+        </p:sp>
+      </p:grpSp>
+      <p:grpSp>
+        <p:nvGrpSpPr>
+          <p:cNvPr id="196" name="组合 195">
+            <a:extLst>
+              <a:ext uri="{FF2B5EF4-FFF2-40B4-BE49-F238E27FC236}">
+                <a16:creationId xmlns:a16="http://schemas.microsoft.com/office/drawing/2014/main" id="{F4A7CB99-71BA-3CB2-223C-FD1DD7C03C8A}"/>
+              </a:ext>
+            </a:extLst>
+          </p:cNvPr>
+          <p:cNvGrpSpPr/>
+          <p:nvPr/>
+        </p:nvGrpSpPr>
+        <p:grpSpPr>
+          <a:xfrm>
+            <a:off x="6966681" y="616597"/>
+            <a:ext cx="2276062" cy="561109"/>
+            <a:chOff x="10041117" y="6072707"/>
+            <a:chExt cx="2276062" cy="561109"/>
+          </a:xfrm>
+        </p:grpSpPr>
+        <p:grpSp>
+          <p:nvGrpSpPr>
+            <p:cNvPr id="197" name="组合 196">
+              <a:extLst>
+                <a:ext uri="{FF2B5EF4-FFF2-40B4-BE49-F238E27FC236}">
+                  <a16:creationId xmlns:a16="http://schemas.microsoft.com/office/drawing/2014/main" id="{BD7183CA-1A77-A04A-D989-2E242206419E}"/>
+                </a:ext>
+              </a:extLst>
+            </p:cNvPr>
+            <p:cNvGrpSpPr/>
+            <p:nvPr/>
+          </p:nvGrpSpPr>
+          <p:grpSpPr>
+            <a:xfrm>
+              <a:off x="10041117" y="6072707"/>
+              <a:ext cx="2276062" cy="561109"/>
+              <a:chOff x="787428" y="4369987"/>
+              <a:chExt cx="2276062" cy="561109"/>
+            </a:xfrm>
+          </p:grpSpPr>
+          <p:sp>
+            <p:nvSpPr>
+              <p:cNvPr id="199" name="Rectangle 76">
+                <a:extLst>
+                  <a:ext uri="{FF2B5EF4-FFF2-40B4-BE49-F238E27FC236}">
+                    <a16:creationId xmlns:a16="http://schemas.microsoft.com/office/drawing/2014/main" id="{5F8C338D-95F3-E1D0-EC0D-E75D17EBDA48}"/>
+                  </a:ext>
+                </a:extLst>
+              </p:cNvPr>
+              <p:cNvSpPr/>
+              <p:nvPr/>
+            </p:nvSpPr>
+            <p:spPr>
+              <a:xfrm>
+                <a:off x="787428" y="4369987"/>
+                <a:ext cx="2276062" cy="561109"/>
+              </a:xfrm>
+              <a:prstGeom prst="rect">
+                <a:avLst/>
+              </a:prstGeom>
+              <a:solidFill>
+                <a:srgbClr val="FFFFFF"/>
+              </a:solidFill>
+              <a:ln w="13970">
+                <a:solidFill>
+                  <a:schemeClr val="tx1">
+                    <a:lumMod val="65000"/>
+                    <a:lumOff val="35000"/>
+                  </a:schemeClr>
+                </a:solidFill>
+              </a:ln>
+            </p:spPr>
+            <p:style>
+              <a:lnRef idx="1">
+                <a:schemeClr val="accent1"/>
+              </a:lnRef>
+              <a:fillRef idx="3">
+                <a:schemeClr val="accent1"/>
+              </a:fillRef>
+              <a:effectRef idx="2">
+                <a:schemeClr val="accent1"/>
+              </a:effectRef>
+              <a:fontRef idx="minor">
+                <a:schemeClr val="lt1"/>
+              </a:fontRef>
+            </p:style>
+            <p:txBody>
+              <a:bodyPr rtlCol="0" anchor="ctr"/>
+              <a:lstStyle/>
+              <a:p>
+                <a:pPr algn="ctr"/>
+                <a:endParaRPr sz="3200" b="1">
+                  <a:latin typeface="宋体" panose="02010600030101010101" pitchFamily="2" charset="-122"/>
+                  <a:ea typeface="宋体" panose="02010600030101010101" pitchFamily="2" charset="-122"/>
+                </a:endParaRPr>
+              </a:p>
+            </p:txBody>
+          </p:sp>
+          <p:grpSp>
+            <p:nvGrpSpPr>
+              <p:cNvPr id="200" name="组合 199">
+                <a:extLst>
+                  <a:ext uri="{FF2B5EF4-FFF2-40B4-BE49-F238E27FC236}">
+                    <a16:creationId xmlns:a16="http://schemas.microsoft.com/office/drawing/2014/main" id="{83EDD26F-8691-38B8-B8DB-C69703566B95}"/>
+                  </a:ext>
+                </a:extLst>
+              </p:cNvPr>
+              <p:cNvGrpSpPr/>
+              <p:nvPr/>
+            </p:nvGrpSpPr>
+            <p:grpSpPr>
+              <a:xfrm>
+                <a:off x="2791063" y="4407913"/>
+                <a:ext cx="166910" cy="143394"/>
+                <a:chOff x="10916798" y="4537825"/>
+                <a:chExt cx="166910" cy="143394"/>
+              </a:xfrm>
+            </p:grpSpPr>
+            <p:sp>
+              <p:nvSpPr>
+                <p:cNvPr id="201" name="Rectangle 91">
+                  <a:extLst>
+                    <a:ext uri="{FF2B5EF4-FFF2-40B4-BE49-F238E27FC236}">
+                      <a16:creationId xmlns:a16="http://schemas.microsoft.com/office/drawing/2014/main" id="{C962B2A3-1318-EDAB-F175-98235C1D0EAF}"/>
+                    </a:ext>
+                  </a:extLst>
+                </p:cNvPr>
+                <p:cNvSpPr/>
+                <p:nvPr/>
+              </p:nvSpPr>
+              <p:spPr>
+                <a:xfrm>
+                  <a:off x="10945826" y="4537825"/>
+                  <a:ext cx="137882" cy="143394"/>
+                </a:xfrm>
+                <a:prstGeom prst="rect">
+                  <a:avLst/>
+                </a:prstGeom>
+                <a:solidFill>
+                  <a:srgbClr val="FFFFFF"/>
+                </a:solidFill>
+                <a:ln w="10160">
+                  <a:solidFill>
+                    <a:schemeClr val="tx1"/>
+                  </a:solidFill>
+                </a:ln>
+              </p:spPr>
+              <p:style>
+                <a:lnRef idx="1">
+                  <a:schemeClr val="accent1"/>
+                </a:lnRef>
+                <a:fillRef idx="3">
+                  <a:schemeClr val="accent1"/>
+                </a:fillRef>
+                <a:effectRef idx="2">
+                  <a:schemeClr val="accent1"/>
+                </a:effectRef>
+                <a:fontRef idx="minor">
+                  <a:schemeClr val="lt1"/>
+                </a:fontRef>
+              </p:style>
+              <p:txBody>
+                <a:bodyPr rtlCol="0" anchor="ctr"/>
+                <a:lstStyle/>
+                <a:p>
+                  <a:pPr algn="ctr"/>
+                  <a:endParaRPr sz="3200" b="1">
+                    <a:solidFill>
+                      <a:schemeClr val="tx1"/>
+                    </a:solidFill>
+                    <a:latin typeface="宋体" panose="02010600030101010101" pitchFamily="2" charset="-122"/>
+                    <a:ea typeface="宋体" panose="02010600030101010101" pitchFamily="2" charset="-122"/>
+                  </a:endParaRPr>
+                </a:p>
+              </p:txBody>
+            </p:sp>
+            <p:sp>
+              <p:nvSpPr>
+                <p:cNvPr id="202" name="Rectangle 92">
+                  <a:extLst>
+                    <a:ext uri="{FF2B5EF4-FFF2-40B4-BE49-F238E27FC236}">
+                      <a16:creationId xmlns:a16="http://schemas.microsoft.com/office/drawing/2014/main" id="{A0814D1D-EF70-CB77-C83A-B8ACF1C980BA}"/>
+                    </a:ext>
+                  </a:extLst>
+                </p:cNvPr>
+                <p:cNvSpPr/>
+                <p:nvPr/>
+              </p:nvSpPr>
+              <p:spPr>
+                <a:xfrm>
+                  <a:off x="10916798" y="4550294"/>
+                  <a:ext cx="58055" cy="41148"/>
+                </a:xfrm>
+                <a:prstGeom prst="rect">
+                  <a:avLst/>
+                </a:prstGeom>
+                <a:solidFill>
+                  <a:srgbClr val="FFFFFF"/>
+                </a:solidFill>
+                <a:ln w="10160">
+                  <a:solidFill>
+                    <a:schemeClr val="tx1"/>
+                  </a:solidFill>
+                </a:ln>
+              </p:spPr>
+              <p:style>
+                <a:lnRef idx="1">
+                  <a:schemeClr val="accent1"/>
+                </a:lnRef>
+                <a:fillRef idx="3">
+                  <a:schemeClr val="accent1"/>
+                </a:fillRef>
+                <a:effectRef idx="2">
+                  <a:schemeClr val="accent1"/>
+                </a:effectRef>
+                <a:fontRef idx="minor">
+                  <a:schemeClr val="lt1"/>
+                </a:fontRef>
+              </p:style>
+              <p:txBody>
+                <a:bodyPr rtlCol="0" anchor="ctr"/>
+                <a:lstStyle/>
+                <a:p>
+                  <a:pPr algn="ctr"/>
+                  <a:endParaRPr sz="3200" b="1">
+                    <a:solidFill>
+                      <a:schemeClr val="tx1"/>
+                    </a:solidFill>
+                    <a:latin typeface="宋体" panose="02010600030101010101" pitchFamily="2" charset="-122"/>
+                    <a:ea typeface="宋体" panose="02010600030101010101" pitchFamily="2" charset="-122"/>
+                  </a:endParaRPr>
+                </a:p>
+              </p:txBody>
+            </p:sp>
+            <p:sp>
+              <p:nvSpPr>
+                <p:cNvPr id="203" name="Rectangle 93">
+                  <a:extLst>
+                    <a:ext uri="{FF2B5EF4-FFF2-40B4-BE49-F238E27FC236}">
+                      <a16:creationId xmlns:a16="http://schemas.microsoft.com/office/drawing/2014/main" id="{D56E0EF9-2FCD-04FF-77F1-DE5F0E071B2A}"/>
+                    </a:ext>
+                  </a:extLst>
+                </p:cNvPr>
+                <p:cNvSpPr/>
+                <p:nvPr/>
+              </p:nvSpPr>
+              <p:spPr>
+                <a:xfrm>
+                  <a:off x="10916798" y="4605158"/>
+                  <a:ext cx="58055" cy="41148"/>
+                </a:xfrm>
+                <a:prstGeom prst="rect">
+                  <a:avLst/>
+                </a:prstGeom>
+                <a:solidFill>
+                  <a:srgbClr val="FFFFFF"/>
+                </a:solidFill>
+                <a:ln w="10160">
+                  <a:solidFill>
+                    <a:schemeClr val="tx1"/>
+                  </a:solidFill>
+                </a:ln>
+              </p:spPr>
+              <p:style>
+                <a:lnRef idx="1">
+                  <a:schemeClr val="accent1"/>
+                </a:lnRef>
+                <a:fillRef idx="3">
+                  <a:schemeClr val="accent1"/>
+                </a:fillRef>
+                <a:effectRef idx="2">
+                  <a:schemeClr val="accent1"/>
+                </a:effectRef>
+                <a:fontRef idx="minor">
+                  <a:schemeClr val="lt1"/>
+                </a:fontRef>
+              </p:style>
+              <p:txBody>
+                <a:bodyPr rtlCol="0" anchor="ctr"/>
+                <a:lstStyle/>
+                <a:p>
+                  <a:pPr algn="ctr"/>
+                  <a:endParaRPr sz="3200" b="1">
+                    <a:solidFill>
+                      <a:schemeClr val="tx1"/>
+                    </a:solidFill>
+                    <a:latin typeface="宋体" panose="02010600030101010101" pitchFamily="2" charset="-122"/>
+                    <a:ea typeface="宋体" panose="02010600030101010101" pitchFamily="2" charset="-122"/>
+                  </a:endParaRPr>
+                </a:p>
+              </p:txBody>
+            </p:sp>
+          </p:grpSp>
+        </p:grpSp>
+        <p:sp>
+          <p:nvSpPr>
+            <p:cNvPr id="198" name="TextBox 81">
+              <a:extLst>
+                <a:ext uri="{FF2B5EF4-FFF2-40B4-BE49-F238E27FC236}">
+                  <a16:creationId xmlns:a16="http://schemas.microsoft.com/office/drawing/2014/main" id="{DC894A40-9377-F082-7B7E-2C9C1AD2007C}"/>
+                </a:ext>
+              </a:extLst>
+            </p:cNvPr>
+            <p:cNvSpPr txBox="1"/>
+            <p:nvPr/>
+          </p:nvSpPr>
+          <p:spPr>
+            <a:xfrm>
+              <a:off x="10376068" y="6192580"/>
+              <a:ext cx="1582017" cy="307777"/>
+            </a:xfrm>
+            <a:prstGeom prst="rect">
+              <a:avLst/>
+            </a:prstGeom>
+            <a:noFill/>
+            <a:ln>
+              <a:noFill/>
+            </a:ln>
+          </p:spPr>
+          <p:txBody>
+            <a:bodyPr wrap="square" lIns="0" tIns="0" rIns="0" bIns="0" anchor="ctr">
+              <a:spAutoFit/>
+            </a:bodyPr>
+            <a:lstStyle/>
+            <a:p>
+              <a:pPr algn="ctr">
+                <a:spcBef>
+                  <a:spcPts val="0"/>
+                </a:spcBef>
+                <a:spcAft>
+                  <a:spcPts val="0"/>
+                </a:spcAft>
+              </a:pPr>
+              <a:r>
+                <a:rPr lang="zh-CN" altLang="en-US" sz="2000" b="1" i="0" dirty="0">
+                  <a:solidFill>
+                    <a:srgbClr val="1A1A2E"/>
+                  </a:solidFill>
+                  <a:latin typeface="宋体" panose="02010600030101010101" pitchFamily="2" charset="-122"/>
+                  <a:ea typeface="宋体" panose="02010600030101010101" pitchFamily="2" charset="-122"/>
+                </a:rPr>
+                <a:t>安全策略部署</a:t>
+              </a:r>
+              <a:endParaRPr sz="2000" b="1" i="0" dirty="0">
+                <a:solidFill>
+                  <a:srgbClr val="1A1A2E"/>
+                </a:solidFill>
+                <a:latin typeface="宋体" panose="02010600030101010101" pitchFamily="2" charset="-122"/>
+                <a:ea typeface="宋体" panose="02010600030101010101" pitchFamily="2" charset="-122"/>
+              </a:endParaRPr>
+            </a:p>
+          </p:txBody>
+        </p:sp>
+      </p:grpSp>
+      <p:grpSp>
+        <p:nvGrpSpPr>
+          <p:cNvPr id="212" name="组合 211">
+            <a:extLst>
+              <a:ext uri="{FF2B5EF4-FFF2-40B4-BE49-F238E27FC236}">
+                <a16:creationId xmlns:a16="http://schemas.microsoft.com/office/drawing/2014/main" id="{C38463C9-126F-DB8B-32E4-E1E788E0D60D}"/>
+              </a:ext>
+            </a:extLst>
+          </p:cNvPr>
+          <p:cNvGrpSpPr/>
+          <p:nvPr/>
+        </p:nvGrpSpPr>
+        <p:grpSpPr>
+          <a:xfrm>
+            <a:off x="525940" y="2915479"/>
+            <a:ext cx="1814240" cy="561109"/>
+            <a:chOff x="10502939" y="6072707"/>
+            <a:chExt cx="1814240" cy="561109"/>
+          </a:xfrm>
+        </p:grpSpPr>
+        <p:grpSp>
+          <p:nvGrpSpPr>
+            <p:cNvPr id="213" name="组合 212">
+              <a:extLst>
+                <a:ext uri="{FF2B5EF4-FFF2-40B4-BE49-F238E27FC236}">
+                  <a16:creationId xmlns:a16="http://schemas.microsoft.com/office/drawing/2014/main" id="{33FCCED9-2C67-CD6C-864C-025FE537875D}"/>
+                </a:ext>
+              </a:extLst>
+            </p:cNvPr>
+            <p:cNvGrpSpPr/>
+            <p:nvPr/>
+          </p:nvGrpSpPr>
+          <p:grpSpPr>
+            <a:xfrm>
+              <a:off x="10502939" y="6072707"/>
+              <a:ext cx="1814240" cy="561109"/>
+              <a:chOff x="1249250" y="4369987"/>
+              <a:chExt cx="1814240" cy="561109"/>
+            </a:xfrm>
+          </p:grpSpPr>
+          <p:sp>
+            <p:nvSpPr>
+              <p:cNvPr id="215" name="Rectangle 76">
+                <a:extLst>
+                  <a:ext uri="{FF2B5EF4-FFF2-40B4-BE49-F238E27FC236}">
+                    <a16:creationId xmlns:a16="http://schemas.microsoft.com/office/drawing/2014/main" id="{D6B45455-4559-198F-A257-5DA717A2A9A8}"/>
+                  </a:ext>
+                </a:extLst>
+              </p:cNvPr>
+              <p:cNvSpPr/>
+              <p:nvPr/>
+            </p:nvSpPr>
+            <p:spPr>
+              <a:xfrm>
+                <a:off x="1249250" y="4369987"/>
+                <a:ext cx="1814240" cy="561109"/>
+              </a:xfrm>
+              <a:prstGeom prst="rect">
+                <a:avLst/>
+              </a:prstGeom>
+              <a:solidFill>
+                <a:srgbClr val="FFFFFF"/>
+              </a:solidFill>
+              <a:ln w="13970">
+                <a:solidFill>
+                  <a:schemeClr val="tx1">
+                    <a:lumMod val="65000"/>
+                    <a:lumOff val="35000"/>
+                  </a:schemeClr>
+                </a:solidFill>
+              </a:ln>
+            </p:spPr>
+            <p:style>
+              <a:lnRef idx="1">
+                <a:schemeClr val="accent1"/>
+              </a:lnRef>
+              <a:fillRef idx="3">
+                <a:schemeClr val="accent1"/>
+              </a:fillRef>
+              <a:effectRef idx="2">
+                <a:schemeClr val="accent1"/>
+              </a:effectRef>
+              <a:fontRef idx="minor">
+                <a:schemeClr val="lt1"/>
+              </a:fontRef>
+            </p:style>
+            <p:txBody>
+              <a:bodyPr rtlCol="0" anchor="ctr"/>
+              <a:lstStyle/>
+              <a:p>
+                <a:pPr algn="ctr"/>
+                <a:endParaRPr sz="3200" b="1">
+                  <a:latin typeface="宋体" panose="02010600030101010101" pitchFamily="2" charset="-122"/>
+                  <a:ea typeface="宋体" panose="02010600030101010101" pitchFamily="2" charset="-122"/>
+                </a:endParaRPr>
+              </a:p>
+            </p:txBody>
+          </p:sp>
+          <p:grpSp>
+            <p:nvGrpSpPr>
+              <p:cNvPr id="216" name="组合 215">
+                <a:extLst>
+                  <a:ext uri="{FF2B5EF4-FFF2-40B4-BE49-F238E27FC236}">
+                    <a16:creationId xmlns:a16="http://schemas.microsoft.com/office/drawing/2014/main" id="{34D60608-7233-2DDD-15DA-94A2AAAB2297}"/>
+                  </a:ext>
+                </a:extLst>
+              </p:cNvPr>
+              <p:cNvGrpSpPr/>
+              <p:nvPr/>
+            </p:nvGrpSpPr>
+            <p:grpSpPr>
+              <a:xfrm>
+                <a:off x="2791063" y="4407913"/>
+                <a:ext cx="166910" cy="143394"/>
+                <a:chOff x="10916798" y="4537825"/>
+                <a:chExt cx="166910" cy="143394"/>
+              </a:xfrm>
+            </p:grpSpPr>
+            <p:sp>
+              <p:nvSpPr>
+                <p:cNvPr id="217" name="Rectangle 91">
+                  <a:extLst>
+                    <a:ext uri="{FF2B5EF4-FFF2-40B4-BE49-F238E27FC236}">
+                      <a16:creationId xmlns:a16="http://schemas.microsoft.com/office/drawing/2014/main" id="{9E8C6463-DCDB-274C-7B18-10DFF52674C9}"/>
+                    </a:ext>
+                  </a:extLst>
+                </p:cNvPr>
+                <p:cNvSpPr/>
+                <p:nvPr/>
+              </p:nvSpPr>
+              <p:spPr>
+                <a:xfrm>
+                  <a:off x="10945826" y="4537825"/>
+                  <a:ext cx="137882" cy="143394"/>
+                </a:xfrm>
+                <a:prstGeom prst="rect">
+                  <a:avLst/>
+                </a:prstGeom>
+                <a:solidFill>
+                  <a:srgbClr val="FFFFFF"/>
+                </a:solidFill>
+                <a:ln w="10160">
+                  <a:solidFill>
+                    <a:schemeClr val="tx1"/>
+                  </a:solidFill>
+                </a:ln>
+              </p:spPr>
+              <p:style>
+                <a:lnRef idx="1">
+                  <a:schemeClr val="accent1"/>
+                </a:lnRef>
+                <a:fillRef idx="3">
+                  <a:schemeClr val="accent1"/>
+                </a:fillRef>
+                <a:effectRef idx="2">
+                  <a:schemeClr val="accent1"/>
+                </a:effectRef>
+                <a:fontRef idx="minor">
+                  <a:schemeClr val="lt1"/>
+                </a:fontRef>
+              </p:style>
+              <p:txBody>
+                <a:bodyPr rtlCol="0" anchor="ctr"/>
+                <a:lstStyle/>
+                <a:p>
+                  <a:pPr algn="ctr"/>
+                  <a:endParaRPr sz="3200" b="1">
+                    <a:solidFill>
+                      <a:schemeClr val="tx1"/>
+                    </a:solidFill>
+                    <a:latin typeface="宋体" panose="02010600030101010101" pitchFamily="2" charset="-122"/>
+                    <a:ea typeface="宋体" panose="02010600030101010101" pitchFamily="2" charset="-122"/>
+                  </a:endParaRPr>
+                </a:p>
+              </p:txBody>
+            </p:sp>
+            <p:sp>
+              <p:nvSpPr>
+                <p:cNvPr id="218" name="Rectangle 92">
+                  <a:extLst>
+                    <a:ext uri="{FF2B5EF4-FFF2-40B4-BE49-F238E27FC236}">
+                      <a16:creationId xmlns:a16="http://schemas.microsoft.com/office/drawing/2014/main" id="{22C3F85C-EC0F-5501-4F9C-18CE43E51D3F}"/>
+                    </a:ext>
+                  </a:extLst>
+                </p:cNvPr>
+                <p:cNvSpPr/>
+                <p:nvPr/>
+              </p:nvSpPr>
+              <p:spPr>
+                <a:xfrm>
+                  <a:off x="10916798" y="4550294"/>
+                  <a:ext cx="58055" cy="41148"/>
+                </a:xfrm>
+                <a:prstGeom prst="rect">
+                  <a:avLst/>
+                </a:prstGeom>
+                <a:solidFill>
+                  <a:srgbClr val="FFFFFF"/>
+                </a:solidFill>
+                <a:ln w="10160">
+                  <a:solidFill>
+                    <a:schemeClr val="tx1"/>
+                  </a:solidFill>
+                </a:ln>
+              </p:spPr>
+              <p:style>
+                <a:lnRef idx="1">
+                  <a:schemeClr val="accent1"/>
+                </a:lnRef>
+                <a:fillRef idx="3">
+                  <a:schemeClr val="accent1"/>
+                </a:fillRef>
+                <a:effectRef idx="2">
+                  <a:schemeClr val="accent1"/>
+                </a:effectRef>
+                <a:fontRef idx="minor">
+                  <a:schemeClr val="lt1"/>
+                </a:fontRef>
+              </p:style>
+              <p:txBody>
+                <a:bodyPr rtlCol="0" anchor="ctr"/>
+                <a:lstStyle/>
+                <a:p>
+                  <a:pPr algn="ctr"/>
+                  <a:endParaRPr sz="3200" b="1">
+                    <a:solidFill>
+                      <a:schemeClr val="tx1"/>
+                    </a:solidFill>
+                    <a:latin typeface="宋体" panose="02010600030101010101" pitchFamily="2" charset="-122"/>
+                    <a:ea typeface="宋体" panose="02010600030101010101" pitchFamily="2" charset="-122"/>
+                  </a:endParaRPr>
+                </a:p>
+              </p:txBody>
+            </p:sp>
+            <p:sp>
+              <p:nvSpPr>
+                <p:cNvPr id="219" name="Rectangle 93">
+                  <a:extLst>
+                    <a:ext uri="{FF2B5EF4-FFF2-40B4-BE49-F238E27FC236}">
+                      <a16:creationId xmlns:a16="http://schemas.microsoft.com/office/drawing/2014/main" id="{D8EAD353-DE30-89CF-2DB9-AB92296E558B}"/>
+                    </a:ext>
+                  </a:extLst>
+                </p:cNvPr>
+                <p:cNvSpPr/>
+                <p:nvPr/>
+              </p:nvSpPr>
+              <p:spPr>
+                <a:xfrm>
+                  <a:off x="10916798" y="4605158"/>
+                  <a:ext cx="58055" cy="41148"/>
+                </a:xfrm>
+                <a:prstGeom prst="rect">
+                  <a:avLst/>
+                </a:prstGeom>
+                <a:solidFill>
+                  <a:srgbClr val="FFFFFF"/>
+                </a:solidFill>
+                <a:ln w="10160">
+                  <a:solidFill>
+                    <a:schemeClr val="tx1"/>
+                  </a:solidFill>
+                </a:ln>
+              </p:spPr>
+              <p:style>
+                <a:lnRef idx="1">
+                  <a:schemeClr val="accent1"/>
+                </a:lnRef>
+                <a:fillRef idx="3">
+                  <a:schemeClr val="accent1"/>
+                </a:fillRef>
+                <a:effectRef idx="2">
+                  <a:schemeClr val="accent1"/>
+                </a:effectRef>
+                <a:fontRef idx="minor">
+                  <a:schemeClr val="lt1"/>
+                </a:fontRef>
+              </p:style>
+              <p:txBody>
+                <a:bodyPr rtlCol="0" anchor="ctr"/>
+                <a:lstStyle/>
+                <a:p>
+                  <a:pPr algn="ctr"/>
+                  <a:endParaRPr sz="3200" b="1">
+                    <a:solidFill>
+                      <a:schemeClr val="tx1"/>
+                    </a:solidFill>
+                    <a:latin typeface="宋体" panose="02010600030101010101" pitchFamily="2" charset="-122"/>
+                    <a:ea typeface="宋体" panose="02010600030101010101" pitchFamily="2" charset="-122"/>
+                  </a:endParaRPr>
+                </a:p>
+              </p:txBody>
+            </p:sp>
+          </p:grpSp>
+        </p:grpSp>
+        <p:sp>
+          <p:nvSpPr>
+            <p:cNvPr id="214" name="TextBox 81">
+              <a:extLst>
+                <a:ext uri="{FF2B5EF4-FFF2-40B4-BE49-F238E27FC236}">
+                  <a16:creationId xmlns:a16="http://schemas.microsoft.com/office/drawing/2014/main" id="{46D0D569-834E-B75C-38C0-60B4FA69480C}"/>
+                </a:ext>
+              </a:extLst>
+            </p:cNvPr>
+            <p:cNvSpPr txBox="1"/>
+            <p:nvPr/>
+          </p:nvSpPr>
+          <p:spPr>
+            <a:xfrm>
+              <a:off x="10609983" y="6187518"/>
+              <a:ext cx="1582017" cy="307777"/>
+            </a:xfrm>
+            <a:prstGeom prst="rect">
+              <a:avLst/>
+            </a:prstGeom>
+            <a:noFill/>
+            <a:ln>
+              <a:noFill/>
+            </a:ln>
+          </p:spPr>
+          <p:txBody>
+            <a:bodyPr wrap="square" lIns="0" tIns="0" rIns="0" bIns="0" anchor="ctr">
+              <a:spAutoFit/>
+            </a:bodyPr>
+            <a:lstStyle/>
+            <a:p>
+              <a:pPr algn="ctr">
+                <a:spcBef>
+                  <a:spcPts val="0"/>
+                </a:spcBef>
+                <a:spcAft>
+                  <a:spcPts val="0"/>
+                </a:spcAft>
+              </a:pPr>
+              <a:r>
+                <a:rPr lang="zh-CN" altLang="en-US" sz="2000" b="1" i="0" dirty="0">
+                  <a:solidFill>
+                    <a:srgbClr val="1A1A2E"/>
+                  </a:solidFill>
+                  <a:latin typeface="宋体" panose="02010600030101010101" pitchFamily="2" charset="-122"/>
+                  <a:ea typeface="宋体" panose="02010600030101010101" pitchFamily="2" charset="-122"/>
+                </a:rPr>
+                <a:t>知识库构建</a:t>
+              </a:r>
+              <a:endParaRPr sz="2000" b="1" i="0" dirty="0">
+                <a:solidFill>
+                  <a:srgbClr val="1A1A2E"/>
+                </a:solidFill>
+                <a:latin typeface="宋体" panose="02010600030101010101" pitchFamily="2" charset="-122"/>
+                <a:ea typeface="宋体" panose="02010600030101010101" pitchFamily="2" charset="-122"/>
+              </a:endParaRPr>
+            </a:p>
+          </p:txBody>
+        </p:sp>
+      </p:grpSp>
+      <p:grpSp>
+        <p:nvGrpSpPr>
+          <p:cNvPr id="220" name="组合 219">
+            <a:extLst>
+              <a:ext uri="{FF2B5EF4-FFF2-40B4-BE49-F238E27FC236}">
+                <a16:creationId xmlns:a16="http://schemas.microsoft.com/office/drawing/2014/main" id="{D05DC38A-DE5E-A214-9461-20C33F32A3A7}"/>
+              </a:ext>
+            </a:extLst>
+          </p:cNvPr>
+          <p:cNvGrpSpPr/>
+          <p:nvPr/>
+        </p:nvGrpSpPr>
+        <p:grpSpPr>
+          <a:xfrm>
+            <a:off x="5589171" y="5844947"/>
+            <a:ext cx="2276062" cy="561109"/>
+            <a:chOff x="10041117" y="6072707"/>
+            <a:chExt cx="2276062" cy="561109"/>
+          </a:xfrm>
+        </p:grpSpPr>
+        <p:grpSp>
+          <p:nvGrpSpPr>
+            <p:cNvPr id="221" name="组合 220">
+              <a:extLst>
+                <a:ext uri="{FF2B5EF4-FFF2-40B4-BE49-F238E27FC236}">
+                  <a16:creationId xmlns:a16="http://schemas.microsoft.com/office/drawing/2014/main" id="{E379BCA5-2D37-445F-0250-97787FA3CA58}"/>
+                </a:ext>
+              </a:extLst>
+            </p:cNvPr>
+            <p:cNvGrpSpPr/>
+            <p:nvPr/>
+          </p:nvGrpSpPr>
+          <p:grpSpPr>
+            <a:xfrm>
+              <a:off x="10041117" y="6072707"/>
+              <a:ext cx="2276062" cy="561109"/>
+              <a:chOff x="787428" y="4369987"/>
+              <a:chExt cx="2276062" cy="561109"/>
+            </a:xfrm>
+          </p:grpSpPr>
+          <p:sp>
+            <p:nvSpPr>
+              <p:cNvPr id="223" name="Rectangle 76">
+                <a:extLst>
+                  <a:ext uri="{FF2B5EF4-FFF2-40B4-BE49-F238E27FC236}">
+                    <a16:creationId xmlns:a16="http://schemas.microsoft.com/office/drawing/2014/main" id="{7B3D639F-EC2A-6623-8C0A-141CBFDEAA5A}"/>
+                  </a:ext>
+                </a:extLst>
+              </p:cNvPr>
+              <p:cNvSpPr/>
+              <p:nvPr/>
+            </p:nvSpPr>
+            <p:spPr>
+              <a:xfrm>
+                <a:off x="787428" y="4369987"/>
+                <a:ext cx="2276062" cy="561109"/>
+              </a:xfrm>
+              <a:prstGeom prst="rect">
+                <a:avLst/>
+              </a:prstGeom>
+              <a:solidFill>
+                <a:srgbClr val="FFFFFF"/>
+              </a:solidFill>
+              <a:ln w="13970">
+                <a:solidFill>
+                  <a:schemeClr val="tx1">
+                    <a:lumMod val="65000"/>
+                    <a:lumOff val="35000"/>
+                  </a:schemeClr>
+                </a:solidFill>
+              </a:ln>
+            </p:spPr>
+            <p:style>
+              <a:lnRef idx="1">
+                <a:schemeClr val="accent1"/>
+              </a:lnRef>
+              <a:fillRef idx="3">
+                <a:schemeClr val="accent1"/>
+              </a:fillRef>
+              <a:effectRef idx="2">
+                <a:schemeClr val="accent1"/>
+              </a:effectRef>
+              <a:fontRef idx="minor">
+                <a:schemeClr val="lt1"/>
+              </a:fontRef>
+            </p:style>
+            <p:txBody>
+              <a:bodyPr rtlCol="0" anchor="ctr"/>
+              <a:lstStyle/>
+              <a:p>
+                <a:pPr algn="ctr"/>
+                <a:endParaRPr sz="3200" b="1" dirty="0">
+                  <a:latin typeface="宋体" panose="02010600030101010101" pitchFamily="2" charset="-122"/>
+                  <a:ea typeface="宋体" panose="02010600030101010101" pitchFamily="2" charset="-122"/>
+                </a:endParaRPr>
+              </a:p>
+            </p:txBody>
+          </p:sp>
+          <p:grpSp>
+            <p:nvGrpSpPr>
+              <p:cNvPr id="224" name="组合 223">
+                <a:extLst>
+                  <a:ext uri="{FF2B5EF4-FFF2-40B4-BE49-F238E27FC236}">
+                    <a16:creationId xmlns:a16="http://schemas.microsoft.com/office/drawing/2014/main" id="{19E95F28-3BBF-D50D-EAFF-6903814D81AC}"/>
+                  </a:ext>
+                </a:extLst>
+              </p:cNvPr>
+              <p:cNvGrpSpPr/>
+              <p:nvPr/>
+            </p:nvGrpSpPr>
+            <p:grpSpPr>
+              <a:xfrm>
+                <a:off x="2791063" y="4407913"/>
+                <a:ext cx="166910" cy="143394"/>
+                <a:chOff x="10916798" y="4537825"/>
+                <a:chExt cx="166910" cy="143394"/>
+              </a:xfrm>
+            </p:grpSpPr>
+            <p:sp>
+              <p:nvSpPr>
+                <p:cNvPr id="225" name="Rectangle 91">
+                  <a:extLst>
+                    <a:ext uri="{FF2B5EF4-FFF2-40B4-BE49-F238E27FC236}">
+                      <a16:creationId xmlns:a16="http://schemas.microsoft.com/office/drawing/2014/main" id="{8C612528-B755-35AF-41C7-8E3CD3C340A8}"/>
+                    </a:ext>
+                  </a:extLst>
+                </p:cNvPr>
+                <p:cNvSpPr/>
+                <p:nvPr/>
+              </p:nvSpPr>
+              <p:spPr>
+                <a:xfrm>
+                  <a:off x="10945826" y="4537825"/>
+                  <a:ext cx="137882" cy="143394"/>
+                </a:xfrm>
+                <a:prstGeom prst="rect">
+                  <a:avLst/>
+                </a:prstGeom>
+                <a:solidFill>
+                  <a:srgbClr val="FFFFFF"/>
+                </a:solidFill>
+                <a:ln w="10160">
+                  <a:solidFill>
+                    <a:schemeClr val="tx1"/>
+                  </a:solidFill>
+                </a:ln>
+              </p:spPr>
+              <p:style>
+                <a:lnRef idx="1">
+                  <a:schemeClr val="accent1"/>
+                </a:lnRef>
+                <a:fillRef idx="3">
+                  <a:schemeClr val="accent1"/>
+                </a:fillRef>
+                <a:effectRef idx="2">
+                  <a:schemeClr val="accent1"/>
+                </a:effectRef>
+                <a:fontRef idx="minor">
+                  <a:schemeClr val="lt1"/>
+                </a:fontRef>
+              </p:style>
+              <p:txBody>
+                <a:bodyPr rtlCol="0" anchor="ctr"/>
+                <a:lstStyle/>
+                <a:p>
+                  <a:pPr algn="ctr"/>
+                  <a:endParaRPr sz="3200" b="1">
+                    <a:solidFill>
+                      <a:schemeClr val="tx1"/>
+                    </a:solidFill>
+                    <a:latin typeface="宋体" panose="02010600030101010101" pitchFamily="2" charset="-122"/>
+                    <a:ea typeface="宋体" panose="02010600030101010101" pitchFamily="2" charset="-122"/>
+                  </a:endParaRPr>
+                </a:p>
+              </p:txBody>
+            </p:sp>
+            <p:sp>
+              <p:nvSpPr>
+                <p:cNvPr id="226" name="Rectangle 92">
+                  <a:extLst>
+                    <a:ext uri="{FF2B5EF4-FFF2-40B4-BE49-F238E27FC236}">
+                      <a16:creationId xmlns:a16="http://schemas.microsoft.com/office/drawing/2014/main" id="{8B843C37-044B-2426-3E8F-2EB8600BC411}"/>
+                    </a:ext>
+                  </a:extLst>
+                </p:cNvPr>
+                <p:cNvSpPr/>
+                <p:nvPr/>
+              </p:nvSpPr>
+              <p:spPr>
+                <a:xfrm>
+                  <a:off x="10916798" y="4550294"/>
+                  <a:ext cx="58055" cy="41148"/>
+                </a:xfrm>
+                <a:prstGeom prst="rect">
+                  <a:avLst/>
+                </a:prstGeom>
+                <a:solidFill>
+                  <a:srgbClr val="FFFFFF"/>
+                </a:solidFill>
+                <a:ln w="10160">
+                  <a:solidFill>
+                    <a:schemeClr val="tx1"/>
+                  </a:solidFill>
+                </a:ln>
+              </p:spPr>
+              <p:style>
+                <a:lnRef idx="1">
+                  <a:schemeClr val="accent1"/>
+                </a:lnRef>
+                <a:fillRef idx="3">
+                  <a:schemeClr val="accent1"/>
+                </a:fillRef>
+                <a:effectRef idx="2">
+                  <a:schemeClr val="accent1"/>
+                </a:effectRef>
+                <a:fontRef idx="minor">
+                  <a:schemeClr val="lt1"/>
+                </a:fontRef>
+              </p:style>
+              <p:txBody>
+                <a:bodyPr rtlCol="0" anchor="ctr"/>
+                <a:lstStyle/>
+                <a:p>
+                  <a:pPr algn="ctr"/>
+                  <a:endParaRPr sz="3200" b="1">
+                    <a:solidFill>
+                      <a:schemeClr val="tx1"/>
+                    </a:solidFill>
+                    <a:latin typeface="宋体" panose="02010600030101010101" pitchFamily="2" charset="-122"/>
+                    <a:ea typeface="宋体" panose="02010600030101010101" pitchFamily="2" charset="-122"/>
+                  </a:endParaRPr>
+                </a:p>
+              </p:txBody>
+            </p:sp>
+            <p:sp>
+              <p:nvSpPr>
+                <p:cNvPr id="227" name="Rectangle 93">
+                  <a:extLst>
+                    <a:ext uri="{FF2B5EF4-FFF2-40B4-BE49-F238E27FC236}">
+                      <a16:creationId xmlns:a16="http://schemas.microsoft.com/office/drawing/2014/main" id="{061B2ED9-E218-AE5D-5E4B-CA131B329430}"/>
+                    </a:ext>
+                  </a:extLst>
+                </p:cNvPr>
+                <p:cNvSpPr/>
+                <p:nvPr/>
+              </p:nvSpPr>
+              <p:spPr>
+                <a:xfrm>
+                  <a:off x="10916798" y="4605158"/>
+                  <a:ext cx="58055" cy="41148"/>
+                </a:xfrm>
+                <a:prstGeom prst="rect">
+                  <a:avLst/>
+                </a:prstGeom>
+                <a:solidFill>
+                  <a:srgbClr val="FFFFFF"/>
+                </a:solidFill>
+                <a:ln w="10160">
+                  <a:solidFill>
+                    <a:schemeClr val="tx1"/>
+                  </a:solidFill>
+                </a:ln>
+              </p:spPr>
+              <p:style>
+                <a:lnRef idx="1">
+                  <a:schemeClr val="accent1"/>
+                </a:lnRef>
+                <a:fillRef idx="3">
+                  <a:schemeClr val="accent1"/>
+                </a:fillRef>
+                <a:effectRef idx="2">
+                  <a:schemeClr val="accent1"/>
+                </a:effectRef>
+                <a:fontRef idx="minor">
+                  <a:schemeClr val="lt1"/>
+                </a:fontRef>
+              </p:style>
+              <p:txBody>
+                <a:bodyPr rtlCol="0" anchor="ctr"/>
+                <a:lstStyle/>
+                <a:p>
+                  <a:pPr algn="ctr"/>
+                  <a:endParaRPr sz="3200" b="1">
+                    <a:solidFill>
+                      <a:schemeClr val="tx1"/>
+                    </a:solidFill>
+                    <a:latin typeface="宋体" panose="02010600030101010101" pitchFamily="2" charset="-122"/>
+                    <a:ea typeface="宋体" panose="02010600030101010101" pitchFamily="2" charset="-122"/>
+                  </a:endParaRPr>
+                </a:p>
+              </p:txBody>
+            </p:sp>
+          </p:grpSp>
+        </p:grpSp>
+        <p:sp>
+          <p:nvSpPr>
+            <p:cNvPr id="222" name="TextBox 81">
+              <a:extLst>
+                <a:ext uri="{FF2B5EF4-FFF2-40B4-BE49-F238E27FC236}">
+                  <a16:creationId xmlns:a16="http://schemas.microsoft.com/office/drawing/2014/main" id="{26805522-A694-8C4B-F123-13E951631E9B}"/>
+                </a:ext>
+              </a:extLst>
+            </p:cNvPr>
+            <p:cNvSpPr txBox="1"/>
+            <p:nvPr/>
+          </p:nvSpPr>
+          <p:spPr>
+            <a:xfrm>
+              <a:off x="10376068" y="6192580"/>
+              <a:ext cx="1582017" cy="307777"/>
+            </a:xfrm>
+            <a:prstGeom prst="rect">
+              <a:avLst/>
+            </a:prstGeom>
+            <a:noFill/>
+            <a:ln>
+              <a:noFill/>
+            </a:ln>
+          </p:spPr>
+          <p:txBody>
+            <a:bodyPr wrap="square" lIns="0" tIns="0" rIns="0" bIns="0" anchor="ctr">
+              <a:spAutoFit/>
+            </a:bodyPr>
+            <a:lstStyle/>
+            <a:p>
+              <a:pPr algn="ctr">
+                <a:spcBef>
+                  <a:spcPts val="0"/>
+                </a:spcBef>
+                <a:spcAft>
+                  <a:spcPts val="0"/>
+                </a:spcAft>
+              </a:pPr>
+              <a:r>
+                <a:rPr lang="zh-CN" altLang="en-US" sz="2000" b="1" i="0" dirty="0">
+                  <a:solidFill>
+                    <a:srgbClr val="1A1A2E"/>
+                  </a:solidFill>
+                  <a:latin typeface="宋体" panose="02010600030101010101" pitchFamily="2" charset="-122"/>
+                  <a:ea typeface="宋体" panose="02010600030101010101" pitchFamily="2" charset="-122"/>
+                </a:rPr>
+                <a:t>向量数据库</a:t>
+              </a:r>
+              <a:endParaRPr sz="2000" b="1" i="0" dirty="0">
+                <a:solidFill>
+                  <a:srgbClr val="1A1A2E"/>
+                </a:solidFill>
+                <a:latin typeface="宋体" panose="02010600030101010101" pitchFamily="2" charset="-122"/>
+                <a:ea typeface="宋体" panose="02010600030101010101" pitchFamily="2" charset="-122"/>
+              </a:endParaRPr>
+            </a:p>
+          </p:txBody>
+        </p:sp>
+      </p:grpSp>
     </p:spTree>
   </p:cSld>
   <p:clrMapOvr>
@@ -9340,6 +8979,7 @@
       </a:style>
     </a:lnDef>
   </a:objectDefaults>
+  <a:extraClrSchemeLst/>
   <a:extLst>
     <a:ext uri="{05A4C25C-085E-4340-85A3-A5531E510DB2}">
       <thm15:themeFamily xmlns:thm15="http://schemas.microsoft.com/office/thememl/2012/main" name="Office Theme" id="{62F939B6-93AF-4DB8-9C6B-D6C7DFDC589F}" vid="{4A3C46E8-61CC-4603-A589-7422A47A8E4A}"/>

--- a/images/chap4/system_architecture.pptx
+++ b/images/chap4/system_architecture.pptx
@@ -1,13 +1,13 @@
 
 <file path=ppt/presentation.xml><?xml version="1.0" encoding="utf-8"?>
-<p:presentation xmlns:a="http://schemas.openxmlformats.org/drawingml/2006/main" xmlns:r="http://schemas.openxmlformats.org/officeDocument/2006/relationships" xmlns:p="http://schemas.openxmlformats.org/presentationml/2006/main" autoCompressPictures="0">
+<p:presentation xmlns:a="http://schemas.openxmlformats.org/drawingml/2006/main" xmlns:r="http://schemas.openxmlformats.org/officeDocument/2006/relationships" xmlns:p="http://schemas.openxmlformats.org/presentationml/2006/main" saveSubsetFonts="1" autoCompressPictures="0">
   <p:sldMasterIdLst>
     <p:sldMasterId id="2147483648" r:id="rId1"/>
   </p:sldMasterIdLst>
   <p:sldIdLst>
-    <p:sldId id="256" r:id="rId2"/>
+    <p:sldId id="256" r:id="rId7"/>
   </p:sldIdLst>
-  <p:sldSz cx="12192000" cy="6858000"/>
+  <p:sldSz cx="12191695" cy="6858000" type="screen4x3"/>
   <p:notesSz cx="6858000" cy="9144000"/>
   <p:defaultTextStyle>
     <a:defPPr>
@@ -104,22 +104,6 @@
       </a:defRPr>
     </a:lvl9pPr>
   </p:defaultTextStyle>
-  <p:extLst>
-    <p:ext uri="{EFAFB233-063F-42B5-8137-9DF3F51BA10A}">
-      <p15:sldGuideLst xmlns:p15="http://schemas.microsoft.com/office/powerpoint/2012/main">
-        <p15:guide id="1" orient="horz" pos="2160" userDrawn="1">
-          <p15:clr>
-            <a:srgbClr val="A4A3A4"/>
-          </p15:clr>
-        </p15:guide>
-        <p15:guide id="2" pos="2880" userDrawn="1">
-          <p15:clr>
-            <a:srgbClr val="A4A3A4"/>
-          </p15:clr>
-        </p15:guide>
-      </p15:sldGuideLst>
-    </p:ext>
-  </p:extLst>
 </p:presentation>
 </file>
 
@@ -161,9 +145,10 @@
           <a:lstStyle/>
           <a:p>
             <a:r>
-              <a:rPr lang="en-US"/>
+              <a:rPr lang="en-US" smtClean="0"/>
               <a:t>Click to edit Master title style</a:t>
             </a:r>
+            <a:endParaRPr lang="en-US"/>
           </a:p>
         </p:txBody>
       </p:sp>
@@ -279,9 +264,10 @@
           </a:lstStyle>
           <a:p>
             <a:r>
-              <a:rPr lang="en-US"/>
+              <a:rPr lang="en-US" smtClean="0"/>
               <a:t>Click to edit Master subtitle style</a:t>
             </a:r>
+            <a:endParaRPr lang="en-US"/>
           </a:p>
         </p:txBody>
       </p:sp>
@@ -302,7 +288,7 @@
           <a:p>
             <a:fld id="{5BCAD085-E8A6-8845-BD4E-CB4CCA059FC4}" type="datetimeFigureOut">
               <a:rPr lang="en-US" smtClean="0"/>
-              <a:t>4/17/2026</a:t>
+              <a:t>1/27/13</a:t>
             </a:fld>
             <a:endParaRPr lang="en-US"/>
           </a:p>
@@ -351,6 +337,11 @@
         </p:txBody>
       </p:sp>
     </p:spTree>
+    <p:extLst>
+      <p:ext uri="{BB962C8B-B14F-4D97-AF65-F5344CB8AC3E}">
+        <p14:creationId xmlns:p14="http://schemas.microsoft.com/office/powerpoint/2010/main" val="3168075583"/>
+      </p:ext>
+    </p:extLst>
   </p:cSld>
   <p:clrMapOvr>
     <a:masterClrMapping/>
@@ -391,9 +382,10 @@
           <a:lstStyle/>
           <a:p>
             <a:r>
-              <a:rPr lang="en-US"/>
+              <a:rPr lang="en-US" smtClean="0"/>
               <a:t>Click to edit Master title style</a:t>
             </a:r>
+            <a:endParaRPr lang="en-US"/>
           </a:p>
         </p:txBody>
       </p:sp>
@@ -414,37 +406,38 @@
           <a:p>
             <a:pPr lvl="0"/>
             <a:r>
-              <a:rPr lang="en-US"/>
+              <a:rPr lang="en-US" smtClean="0"/>
               <a:t>Click to edit Master text styles</a:t>
             </a:r>
           </a:p>
           <a:p>
             <a:pPr lvl="1"/>
             <a:r>
-              <a:rPr lang="en-US"/>
+              <a:rPr lang="en-US" smtClean="0"/>
               <a:t>Second level</a:t>
             </a:r>
           </a:p>
           <a:p>
             <a:pPr lvl="2"/>
             <a:r>
-              <a:rPr lang="en-US"/>
+              <a:rPr lang="en-US" smtClean="0"/>
               <a:t>Third level</a:t>
             </a:r>
           </a:p>
           <a:p>
             <a:pPr lvl="3"/>
             <a:r>
-              <a:rPr lang="en-US"/>
+              <a:rPr lang="en-US" smtClean="0"/>
               <a:t>Fourth level</a:t>
             </a:r>
           </a:p>
           <a:p>
             <a:pPr lvl="4"/>
             <a:r>
-              <a:rPr lang="en-US"/>
+              <a:rPr lang="en-US" smtClean="0"/>
               <a:t>Fifth level</a:t>
             </a:r>
+            <a:endParaRPr lang="en-US"/>
           </a:p>
         </p:txBody>
       </p:sp>
@@ -465,7 +458,7 @@
           <a:p>
             <a:fld id="{5BCAD085-E8A6-8845-BD4E-CB4CCA059FC4}" type="datetimeFigureOut">
               <a:rPr lang="en-US" smtClean="0"/>
-              <a:t>4/17/2026</a:t>
+              <a:t>1/27/13</a:t>
             </a:fld>
             <a:endParaRPr lang="en-US"/>
           </a:p>
@@ -514,6 +507,11 @@
         </p:txBody>
       </p:sp>
     </p:spTree>
+    <p:extLst>
+      <p:ext uri="{BB962C8B-B14F-4D97-AF65-F5344CB8AC3E}">
+        <p14:creationId xmlns:p14="http://schemas.microsoft.com/office/powerpoint/2010/main" val="2910927964"/>
+      </p:ext>
+    </p:extLst>
   </p:cSld>
   <p:clrMapOvr>
     <a:masterClrMapping/>
@@ -559,9 +557,10 @@
           <a:lstStyle/>
           <a:p>
             <a:r>
-              <a:rPr lang="en-US"/>
+              <a:rPr lang="en-US" smtClean="0"/>
               <a:t>Click to edit Master title style</a:t>
             </a:r>
+            <a:endParaRPr lang="en-US"/>
           </a:p>
         </p:txBody>
       </p:sp>
@@ -587,37 +586,38 @@
           <a:p>
             <a:pPr lvl="0"/>
             <a:r>
-              <a:rPr lang="en-US"/>
+              <a:rPr lang="en-US" smtClean="0"/>
               <a:t>Click to edit Master text styles</a:t>
             </a:r>
           </a:p>
           <a:p>
             <a:pPr lvl="1"/>
             <a:r>
-              <a:rPr lang="en-US"/>
+              <a:rPr lang="en-US" smtClean="0"/>
               <a:t>Second level</a:t>
             </a:r>
           </a:p>
           <a:p>
             <a:pPr lvl="2"/>
             <a:r>
-              <a:rPr lang="en-US"/>
+              <a:rPr lang="en-US" smtClean="0"/>
               <a:t>Third level</a:t>
             </a:r>
           </a:p>
           <a:p>
             <a:pPr lvl="3"/>
             <a:r>
-              <a:rPr lang="en-US"/>
+              <a:rPr lang="en-US" smtClean="0"/>
               <a:t>Fourth level</a:t>
             </a:r>
           </a:p>
           <a:p>
             <a:pPr lvl="4"/>
             <a:r>
-              <a:rPr lang="en-US"/>
+              <a:rPr lang="en-US" smtClean="0"/>
               <a:t>Fifth level</a:t>
             </a:r>
+            <a:endParaRPr lang="en-US"/>
           </a:p>
         </p:txBody>
       </p:sp>
@@ -638,7 +638,7 @@
           <a:p>
             <a:fld id="{5BCAD085-E8A6-8845-BD4E-CB4CCA059FC4}" type="datetimeFigureOut">
               <a:rPr lang="en-US" smtClean="0"/>
-              <a:t>4/17/2026</a:t>
+              <a:t>1/27/13</a:t>
             </a:fld>
             <a:endParaRPr lang="en-US"/>
           </a:p>
@@ -687,6 +687,11 @@
         </p:txBody>
       </p:sp>
     </p:spTree>
+    <p:extLst>
+      <p:ext uri="{BB962C8B-B14F-4D97-AF65-F5344CB8AC3E}">
+        <p14:creationId xmlns:p14="http://schemas.microsoft.com/office/powerpoint/2010/main" val="3612223792"/>
+      </p:ext>
+    </p:extLst>
   </p:cSld>
   <p:clrMapOvr>
     <a:masterClrMapping/>
@@ -727,9 +732,10 @@
           <a:lstStyle/>
           <a:p>
             <a:r>
-              <a:rPr lang="en-US"/>
+              <a:rPr lang="en-US" smtClean="0"/>
               <a:t>Click to edit Master title style</a:t>
             </a:r>
+            <a:endParaRPr lang="en-US"/>
           </a:p>
         </p:txBody>
       </p:sp>
@@ -750,37 +756,38 @@
           <a:p>
             <a:pPr lvl="0"/>
             <a:r>
-              <a:rPr lang="en-US"/>
+              <a:rPr lang="en-US" smtClean="0"/>
               <a:t>Click to edit Master text styles</a:t>
             </a:r>
           </a:p>
           <a:p>
             <a:pPr lvl="1"/>
             <a:r>
-              <a:rPr lang="en-US"/>
+              <a:rPr lang="en-US" smtClean="0"/>
               <a:t>Second level</a:t>
             </a:r>
           </a:p>
           <a:p>
             <a:pPr lvl="2"/>
             <a:r>
-              <a:rPr lang="en-US"/>
+              <a:rPr lang="en-US" smtClean="0"/>
               <a:t>Third level</a:t>
             </a:r>
           </a:p>
           <a:p>
             <a:pPr lvl="3"/>
             <a:r>
-              <a:rPr lang="en-US"/>
+              <a:rPr lang="en-US" smtClean="0"/>
               <a:t>Fourth level</a:t>
             </a:r>
           </a:p>
           <a:p>
             <a:pPr lvl="4"/>
             <a:r>
-              <a:rPr lang="en-US"/>
+              <a:rPr lang="en-US" smtClean="0"/>
               <a:t>Fifth level</a:t>
             </a:r>
+            <a:endParaRPr lang="en-US"/>
           </a:p>
         </p:txBody>
       </p:sp>
@@ -801,7 +808,7 @@
           <a:p>
             <a:fld id="{5BCAD085-E8A6-8845-BD4E-CB4CCA059FC4}" type="datetimeFigureOut">
               <a:rPr lang="en-US" smtClean="0"/>
-              <a:t>4/17/2026</a:t>
+              <a:t>1/27/13</a:t>
             </a:fld>
             <a:endParaRPr lang="en-US"/>
           </a:p>
@@ -850,6 +857,11 @@
         </p:txBody>
       </p:sp>
     </p:spTree>
+    <p:extLst>
+      <p:ext uri="{BB962C8B-B14F-4D97-AF65-F5344CB8AC3E}">
+        <p14:creationId xmlns:p14="http://schemas.microsoft.com/office/powerpoint/2010/main" val="2614314258"/>
+      </p:ext>
+    </p:extLst>
   </p:cSld>
   <p:clrMapOvr>
     <a:masterClrMapping/>
@@ -899,9 +911,10 @@
           </a:lstStyle>
           <a:p>
             <a:r>
-              <a:rPr lang="en-US"/>
+              <a:rPr lang="en-US" smtClean="0"/>
               <a:t>Click to edit Master title style</a:t>
             </a:r>
+            <a:endParaRPr lang="en-US"/>
           </a:p>
         </p:txBody>
       </p:sp>
@@ -1018,7 +1031,7 @@
           <a:p>
             <a:pPr lvl="0"/>
             <a:r>
-              <a:rPr lang="en-US"/>
+              <a:rPr lang="en-US" smtClean="0"/>
               <a:t>Click to edit Master text styles</a:t>
             </a:r>
           </a:p>
@@ -1041,7 +1054,7 @@
           <a:p>
             <a:fld id="{5BCAD085-E8A6-8845-BD4E-CB4CCA059FC4}" type="datetimeFigureOut">
               <a:rPr lang="en-US" smtClean="0"/>
-              <a:t>4/17/2026</a:t>
+              <a:t>1/27/13</a:t>
             </a:fld>
             <a:endParaRPr lang="en-US"/>
           </a:p>
@@ -1090,6 +1103,11 @@
         </p:txBody>
       </p:sp>
     </p:spTree>
+    <p:extLst>
+      <p:ext uri="{BB962C8B-B14F-4D97-AF65-F5344CB8AC3E}">
+        <p14:creationId xmlns:p14="http://schemas.microsoft.com/office/powerpoint/2010/main" val="960648375"/>
+      </p:ext>
+    </p:extLst>
   </p:cSld>
   <p:clrMapOvr>
     <a:masterClrMapping/>
@@ -1130,9 +1148,10 @@
           <a:lstStyle/>
           <a:p>
             <a:r>
-              <a:rPr lang="en-US"/>
+              <a:rPr lang="en-US" smtClean="0"/>
               <a:t>Click to edit Master title style</a:t>
             </a:r>
+            <a:endParaRPr lang="en-US"/>
           </a:p>
         </p:txBody>
       </p:sp>
@@ -1186,37 +1205,38 @@
           <a:p>
             <a:pPr lvl="0"/>
             <a:r>
-              <a:rPr lang="en-US"/>
+              <a:rPr lang="en-US" smtClean="0"/>
               <a:t>Click to edit Master text styles</a:t>
             </a:r>
           </a:p>
           <a:p>
             <a:pPr lvl="1"/>
             <a:r>
-              <a:rPr lang="en-US"/>
+              <a:rPr lang="en-US" smtClean="0"/>
               <a:t>Second level</a:t>
             </a:r>
           </a:p>
           <a:p>
             <a:pPr lvl="2"/>
             <a:r>
-              <a:rPr lang="en-US"/>
+              <a:rPr lang="en-US" smtClean="0"/>
               <a:t>Third level</a:t>
             </a:r>
           </a:p>
           <a:p>
             <a:pPr lvl="3"/>
             <a:r>
-              <a:rPr lang="en-US"/>
+              <a:rPr lang="en-US" smtClean="0"/>
               <a:t>Fourth level</a:t>
             </a:r>
           </a:p>
           <a:p>
             <a:pPr lvl="4"/>
             <a:r>
-              <a:rPr lang="en-US"/>
+              <a:rPr lang="en-US" smtClean="0"/>
               <a:t>Fifth level</a:t>
             </a:r>
+            <a:endParaRPr lang="en-US"/>
           </a:p>
         </p:txBody>
       </p:sp>
@@ -1270,37 +1290,38 @@
           <a:p>
             <a:pPr lvl="0"/>
             <a:r>
-              <a:rPr lang="en-US"/>
+              <a:rPr lang="en-US" smtClean="0"/>
               <a:t>Click to edit Master text styles</a:t>
             </a:r>
           </a:p>
           <a:p>
             <a:pPr lvl="1"/>
             <a:r>
-              <a:rPr lang="en-US"/>
+              <a:rPr lang="en-US" smtClean="0"/>
               <a:t>Second level</a:t>
             </a:r>
           </a:p>
           <a:p>
             <a:pPr lvl="2"/>
             <a:r>
-              <a:rPr lang="en-US"/>
+              <a:rPr lang="en-US" smtClean="0"/>
               <a:t>Third level</a:t>
             </a:r>
           </a:p>
           <a:p>
             <a:pPr lvl="3"/>
             <a:r>
-              <a:rPr lang="en-US"/>
+              <a:rPr lang="en-US" smtClean="0"/>
               <a:t>Fourth level</a:t>
             </a:r>
           </a:p>
           <a:p>
             <a:pPr lvl="4"/>
             <a:r>
-              <a:rPr lang="en-US"/>
+              <a:rPr lang="en-US" smtClean="0"/>
               <a:t>Fifth level</a:t>
             </a:r>
+            <a:endParaRPr lang="en-US"/>
           </a:p>
         </p:txBody>
       </p:sp>
@@ -1321,7 +1342,7 @@
           <a:p>
             <a:fld id="{5BCAD085-E8A6-8845-BD4E-CB4CCA059FC4}" type="datetimeFigureOut">
               <a:rPr lang="en-US" smtClean="0"/>
-              <a:t>4/17/2026</a:t>
+              <a:t>1/27/13</a:t>
             </a:fld>
             <a:endParaRPr lang="en-US"/>
           </a:p>
@@ -1370,6 +1391,11 @@
         </p:txBody>
       </p:sp>
     </p:spTree>
+    <p:extLst>
+      <p:ext uri="{BB962C8B-B14F-4D97-AF65-F5344CB8AC3E}">
+        <p14:creationId xmlns:p14="http://schemas.microsoft.com/office/powerpoint/2010/main" val="2782244947"/>
+      </p:ext>
+    </p:extLst>
   </p:cSld>
   <p:clrMapOvr>
     <a:masterClrMapping/>
@@ -1414,9 +1440,10 @@
           </a:lstStyle>
           <a:p>
             <a:r>
-              <a:rPr lang="en-US"/>
+              <a:rPr lang="en-US" smtClean="0"/>
               <a:t>Click to edit Master title style</a:t>
             </a:r>
+            <a:endParaRPr lang="en-US"/>
           </a:p>
         </p:txBody>
       </p:sp>
@@ -1479,7 +1506,7 @@
           <a:p>
             <a:pPr lvl="0"/>
             <a:r>
-              <a:rPr lang="en-US"/>
+              <a:rPr lang="en-US" smtClean="0"/>
               <a:t>Click to edit Master text styles</a:t>
             </a:r>
           </a:p>
@@ -1535,37 +1562,38 @@
           <a:p>
             <a:pPr lvl="0"/>
             <a:r>
-              <a:rPr lang="en-US"/>
+              <a:rPr lang="en-US" smtClean="0"/>
               <a:t>Click to edit Master text styles</a:t>
             </a:r>
           </a:p>
           <a:p>
             <a:pPr lvl="1"/>
             <a:r>
-              <a:rPr lang="en-US"/>
+              <a:rPr lang="en-US" smtClean="0"/>
               <a:t>Second level</a:t>
             </a:r>
           </a:p>
           <a:p>
             <a:pPr lvl="2"/>
             <a:r>
-              <a:rPr lang="en-US"/>
+              <a:rPr lang="en-US" smtClean="0"/>
               <a:t>Third level</a:t>
             </a:r>
           </a:p>
           <a:p>
             <a:pPr lvl="3"/>
             <a:r>
-              <a:rPr lang="en-US"/>
+              <a:rPr lang="en-US" smtClean="0"/>
               <a:t>Fourth level</a:t>
             </a:r>
           </a:p>
           <a:p>
             <a:pPr lvl="4"/>
             <a:r>
-              <a:rPr lang="en-US"/>
+              <a:rPr lang="en-US" smtClean="0"/>
               <a:t>Fifth level</a:t>
             </a:r>
+            <a:endParaRPr lang="en-US"/>
           </a:p>
         </p:txBody>
       </p:sp>
@@ -1628,7 +1656,7 @@
           <a:p>
             <a:pPr lvl="0"/>
             <a:r>
-              <a:rPr lang="en-US"/>
+              <a:rPr lang="en-US" smtClean="0"/>
               <a:t>Click to edit Master text styles</a:t>
             </a:r>
           </a:p>
@@ -1684,37 +1712,38 @@
           <a:p>
             <a:pPr lvl="0"/>
             <a:r>
-              <a:rPr lang="en-US"/>
+              <a:rPr lang="en-US" smtClean="0"/>
               <a:t>Click to edit Master text styles</a:t>
             </a:r>
           </a:p>
           <a:p>
             <a:pPr lvl="1"/>
             <a:r>
-              <a:rPr lang="en-US"/>
+              <a:rPr lang="en-US" smtClean="0"/>
               <a:t>Second level</a:t>
             </a:r>
           </a:p>
           <a:p>
             <a:pPr lvl="2"/>
             <a:r>
-              <a:rPr lang="en-US"/>
+              <a:rPr lang="en-US" smtClean="0"/>
               <a:t>Third level</a:t>
             </a:r>
           </a:p>
           <a:p>
             <a:pPr lvl="3"/>
             <a:r>
-              <a:rPr lang="en-US"/>
+              <a:rPr lang="en-US" smtClean="0"/>
               <a:t>Fourth level</a:t>
             </a:r>
           </a:p>
           <a:p>
             <a:pPr lvl="4"/>
             <a:r>
-              <a:rPr lang="en-US"/>
+              <a:rPr lang="en-US" smtClean="0"/>
               <a:t>Fifth level</a:t>
             </a:r>
+            <a:endParaRPr lang="en-US"/>
           </a:p>
         </p:txBody>
       </p:sp>
@@ -1735,7 +1764,7 @@
           <a:p>
             <a:fld id="{5BCAD085-E8A6-8845-BD4E-CB4CCA059FC4}" type="datetimeFigureOut">
               <a:rPr lang="en-US" smtClean="0"/>
-              <a:t>4/17/2026</a:t>
+              <a:t>1/27/13</a:t>
             </a:fld>
             <a:endParaRPr lang="en-US"/>
           </a:p>
@@ -1784,6 +1813,11 @@
         </p:txBody>
       </p:sp>
     </p:spTree>
+    <p:extLst>
+      <p:ext uri="{BB962C8B-B14F-4D97-AF65-F5344CB8AC3E}">
+        <p14:creationId xmlns:p14="http://schemas.microsoft.com/office/powerpoint/2010/main" val="990158736"/>
+      </p:ext>
+    </p:extLst>
   </p:cSld>
   <p:clrMapOvr>
     <a:masterClrMapping/>
@@ -1824,9 +1858,10 @@
           <a:lstStyle/>
           <a:p>
             <a:r>
-              <a:rPr lang="en-US"/>
+              <a:rPr lang="en-US" smtClean="0"/>
               <a:t>Click to edit Master title style</a:t>
             </a:r>
+            <a:endParaRPr lang="en-US"/>
           </a:p>
         </p:txBody>
       </p:sp>
@@ -1847,7 +1882,7 @@
           <a:p>
             <a:fld id="{5BCAD085-E8A6-8845-BD4E-CB4CCA059FC4}" type="datetimeFigureOut">
               <a:rPr lang="en-US" smtClean="0"/>
-              <a:t>4/17/2026</a:t>
+              <a:t>1/27/13</a:t>
             </a:fld>
             <a:endParaRPr lang="en-US"/>
           </a:p>
@@ -1896,6 +1931,11 @@
         </p:txBody>
       </p:sp>
     </p:spTree>
+    <p:extLst>
+      <p:ext uri="{BB962C8B-B14F-4D97-AF65-F5344CB8AC3E}">
+        <p14:creationId xmlns:p14="http://schemas.microsoft.com/office/powerpoint/2010/main" val="727027711"/>
+      </p:ext>
+    </p:extLst>
   </p:cSld>
   <p:clrMapOvr>
     <a:masterClrMapping/>
@@ -1937,7 +1977,7 @@
           <a:p>
             <a:fld id="{5BCAD085-E8A6-8845-BD4E-CB4CCA059FC4}" type="datetimeFigureOut">
               <a:rPr lang="en-US" smtClean="0"/>
-              <a:t>4/17/2026</a:t>
+              <a:t>1/27/13</a:t>
             </a:fld>
             <a:endParaRPr lang="en-US"/>
           </a:p>
@@ -1986,6 +2026,11 @@
         </p:txBody>
       </p:sp>
     </p:spTree>
+    <p:extLst>
+      <p:ext uri="{BB962C8B-B14F-4D97-AF65-F5344CB8AC3E}">
+        <p14:creationId xmlns:p14="http://schemas.microsoft.com/office/powerpoint/2010/main" val="1212999818"/>
+      </p:ext>
+    </p:extLst>
   </p:cSld>
   <p:clrMapOvr>
     <a:masterClrMapping/>
@@ -2035,9 +2080,10 @@
           </a:lstStyle>
           <a:p>
             <a:r>
-              <a:rPr lang="en-US"/>
+              <a:rPr lang="en-US" smtClean="0"/>
               <a:t>Click to edit Master title style</a:t>
             </a:r>
+            <a:endParaRPr lang="en-US"/>
           </a:p>
         </p:txBody>
       </p:sp>
@@ -2091,37 +2137,38 @@
           <a:p>
             <a:pPr lvl="0"/>
             <a:r>
-              <a:rPr lang="en-US"/>
+              <a:rPr lang="en-US" smtClean="0"/>
               <a:t>Click to edit Master text styles</a:t>
             </a:r>
           </a:p>
           <a:p>
             <a:pPr lvl="1"/>
             <a:r>
-              <a:rPr lang="en-US"/>
+              <a:rPr lang="en-US" smtClean="0"/>
               <a:t>Second level</a:t>
             </a:r>
           </a:p>
           <a:p>
             <a:pPr lvl="2"/>
             <a:r>
-              <a:rPr lang="en-US"/>
+              <a:rPr lang="en-US" smtClean="0"/>
               <a:t>Third level</a:t>
             </a:r>
           </a:p>
           <a:p>
             <a:pPr lvl="3"/>
             <a:r>
-              <a:rPr lang="en-US"/>
+              <a:rPr lang="en-US" smtClean="0"/>
               <a:t>Fourth level</a:t>
             </a:r>
           </a:p>
           <a:p>
             <a:pPr lvl="4"/>
             <a:r>
-              <a:rPr lang="en-US"/>
+              <a:rPr lang="en-US" smtClean="0"/>
               <a:t>Fifth level</a:t>
             </a:r>
+            <a:endParaRPr lang="en-US"/>
           </a:p>
         </p:txBody>
       </p:sp>
@@ -2184,7 +2231,7 @@
           <a:p>
             <a:pPr lvl="0"/>
             <a:r>
-              <a:rPr lang="en-US"/>
+              <a:rPr lang="en-US" smtClean="0"/>
               <a:t>Click to edit Master text styles</a:t>
             </a:r>
           </a:p>
@@ -2207,7 +2254,7 @@
           <a:p>
             <a:fld id="{5BCAD085-E8A6-8845-BD4E-CB4CCA059FC4}" type="datetimeFigureOut">
               <a:rPr lang="en-US" smtClean="0"/>
-              <a:t>4/17/2026</a:t>
+              <a:t>1/27/13</a:t>
             </a:fld>
             <a:endParaRPr lang="en-US"/>
           </a:p>
@@ -2256,6 +2303,11 @@
         </p:txBody>
       </p:sp>
     </p:spTree>
+    <p:extLst>
+      <p:ext uri="{BB962C8B-B14F-4D97-AF65-F5344CB8AC3E}">
+        <p14:creationId xmlns:p14="http://schemas.microsoft.com/office/powerpoint/2010/main" val="1840726560"/>
+      </p:ext>
+    </p:extLst>
   </p:cSld>
   <p:clrMapOvr>
     <a:masterClrMapping/>
@@ -2305,9 +2357,10 @@
           </a:lstStyle>
           <a:p>
             <a:r>
-              <a:rPr lang="en-US"/>
+              <a:rPr lang="en-US" smtClean="0"/>
               <a:t>Click to edit Master title style</a:t>
             </a:r>
+            <a:endParaRPr lang="en-US"/>
           </a:p>
         </p:txBody>
       </p:sp>
@@ -2431,7 +2484,7 @@
           <a:p>
             <a:pPr lvl="0"/>
             <a:r>
-              <a:rPr lang="en-US"/>
+              <a:rPr lang="en-US" smtClean="0"/>
               <a:t>Click to edit Master text styles</a:t>
             </a:r>
           </a:p>
@@ -2454,7 +2507,7 @@
           <a:p>
             <a:fld id="{5BCAD085-E8A6-8845-BD4E-CB4CCA059FC4}" type="datetimeFigureOut">
               <a:rPr lang="en-US" smtClean="0"/>
-              <a:t>4/17/2026</a:t>
+              <a:t>1/27/13</a:t>
             </a:fld>
             <a:endParaRPr lang="en-US"/>
           </a:p>
@@ -2503,6 +2556,11 @@
         </p:txBody>
       </p:sp>
     </p:spTree>
+    <p:extLst>
+      <p:ext uri="{BB962C8B-B14F-4D97-AF65-F5344CB8AC3E}">
+        <p14:creationId xmlns:p14="http://schemas.microsoft.com/office/powerpoint/2010/main" val="3889236939"/>
+      </p:ext>
+    </p:extLst>
   </p:cSld>
   <p:clrMapOvr>
     <a:masterClrMapping/>
@@ -2558,9 +2616,10 @@
           <a:lstStyle/>
           <a:p>
             <a:r>
-              <a:rPr lang="en-US"/>
+              <a:rPr lang="en-US" smtClean="0"/>
               <a:t>Click to edit Master title style</a:t>
             </a:r>
+            <a:endParaRPr lang="en-US"/>
           </a:p>
         </p:txBody>
       </p:sp>
@@ -2591,37 +2650,38 @@
           <a:p>
             <a:pPr lvl="0"/>
             <a:r>
-              <a:rPr lang="en-US"/>
+              <a:rPr lang="en-US" smtClean="0"/>
               <a:t>Click to edit Master text styles</a:t>
             </a:r>
           </a:p>
           <a:p>
             <a:pPr lvl="1"/>
             <a:r>
-              <a:rPr lang="en-US"/>
+              <a:rPr lang="en-US" smtClean="0"/>
               <a:t>Second level</a:t>
             </a:r>
           </a:p>
           <a:p>
             <a:pPr lvl="2"/>
             <a:r>
-              <a:rPr lang="en-US"/>
+              <a:rPr lang="en-US" smtClean="0"/>
               <a:t>Third level</a:t>
             </a:r>
           </a:p>
           <a:p>
             <a:pPr lvl="3"/>
             <a:r>
-              <a:rPr lang="en-US"/>
+              <a:rPr lang="en-US" smtClean="0"/>
               <a:t>Fourth level</a:t>
             </a:r>
           </a:p>
           <a:p>
             <a:pPr lvl="4"/>
             <a:r>
-              <a:rPr lang="en-US"/>
+              <a:rPr lang="en-US" smtClean="0"/>
               <a:t>Fifth level</a:t>
             </a:r>
+            <a:endParaRPr lang="en-US"/>
           </a:p>
         </p:txBody>
       </p:sp>
@@ -2660,7 +2720,7 @@
           <a:p>
             <a:fld id="{5BCAD085-E8A6-8845-BD4E-CB4CCA059FC4}" type="datetimeFigureOut">
               <a:rPr lang="en-US" smtClean="0"/>
-              <a:t>4/17/2026</a:t>
+              <a:t>1/27/13</a:t>
             </a:fld>
             <a:endParaRPr lang="en-US"/>
           </a:p>
@@ -2745,6 +2805,11 @@
         </p:txBody>
       </p:sp>
     </p:spTree>
+    <p:extLst>
+      <p:ext uri="{BB962C8B-B14F-4D97-AF65-F5344CB8AC3E}">
+        <p14:creationId xmlns:p14="http://schemas.microsoft.com/office/powerpoint/2010/main" val="2209977519"/>
+      </p:ext>
+    </p:extLst>
   </p:cSld>
   <p:clrMap bg1="lt1" tx1="dk1" bg2="lt2" tx2="dk2" accent1="accent1" accent2="accent2" accent3="accent3" accent4="accent4" accent5="accent5" accent6="accent6" hlink="hlink" folHlink="folHlink"/>
   <p:sldLayoutIdLst>
@@ -2782,7 +2847,7 @@
         <a:spcBef>
           <a:spcPct val="20000"/>
         </a:spcBef>
-        <a:buFont typeface="Arial" panose="020B0604020202020204"/>
+        <a:buFont typeface="Arial"/>
         <a:buChar char="•"/>
         <a:defRPr sz="3200" kern="1200">
           <a:solidFill>
@@ -2797,7 +2862,7 @@
         <a:spcBef>
           <a:spcPct val="20000"/>
         </a:spcBef>
-        <a:buFont typeface="Arial" panose="020B0604020202020204"/>
+        <a:buFont typeface="Arial"/>
         <a:buChar char="–"/>
         <a:defRPr sz="2800" kern="1200">
           <a:solidFill>
@@ -2812,7 +2877,7 @@
         <a:spcBef>
           <a:spcPct val="20000"/>
         </a:spcBef>
-        <a:buFont typeface="Arial" panose="020B0604020202020204"/>
+        <a:buFont typeface="Arial"/>
         <a:buChar char="•"/>
         <a:defRPr sz="2400" kern="1200">
           <a:solidFill>
@@ -2827,7 +2892,7 @@
         <a:spcBef>
           <a:spcPct val="20000"/>
         </a:spcBef>
-        <a:buFont typeface="Arial" panose="020B0604020202020204"/>
+        <a:buFont typeface="Arial"/>
         <a:buChar char="–"/>
         <a:defRPr sz="2000" kern="1200">
           <a:solidFill>
@@ -2842,7 +2907,7 @@
         <a:spcBef>
           <a:spcPct val="20000"/>
         </a:spcBef>
-        <a:buFont typeface="Arial" panose="020B0604020202020204"/>
+        <a:buFont typeface="Arial"/>
         <a:buChar char="»"/>
         <a:defRPr sz="2000" kern="1200">
           <a:solidFill>
@@ -2857,7 +2922,7 @@
         <a:spcBef>
           <a:spcPct val="20000"/>
         </a:spcBef>
-        <a:buFont typeface="Arial" panose="020B0604020202020204"/>
+        <a:buFont typeface="Arial"/>
         <a:buChar char="•"/>
         <a:defRPr sz="2000" kern="1200">
           <a:solidFill>
@@ -2872,7 +2937,7 @@
         <a:spcBef>
           <a:spcPct val="20000"/>
         </a:spcBef>
-        <a:buFont typeface="Arial" panose="020B0604020202020204"/>
+        <a:buFont typeface="Arial"/>
         <a:buChar char="•"/>
         <a:defRPr sz="2000" kern="1200">
           <a:solidFill>
@@ -2887,7 +2952,7 @@
         <a:spcBef>
           <a:spcPct val="20000"/>
         </a:spcBef>
-        <a:buFont typeface="Arial" panose="020B0604020202020204"/>
+        <a:buFont typeface="Arial"/>
         <a:buChar char="•"/>
         <a:defRPr sz="2000" kern="1200">
           <a:solidFill>
@@ -2902,7 +2967,7 @@
         <a:spcBef>
           <a:spcPct val="20000"/>
         </a:spcBef>
-        <a:buFont typeface="Arial" panose="020B0604020202020204"/>
+        <a:buFont typeface="Arial"/>
         <a:buChar char="•"/>
         <a:defRPr sz="2000" kern="1200">
           <a:solidFill>
@@ -3014,7 +3079,7 @@
 </file>
 
 <file path=ppt/slides/slide1.xml><?xml version="1.0" encoding="utf-8"?>
-<p:sld xmlns:a="http://schemas.openxmlformats.org/drawingml/2006/main" xmlns:r="http://schemas.openxmlformats.org/officeDocument/2006/relationships" xmlns:p="http://schemas.openxmlformats.org/presentationml/2006/main">
+<p:sld xmlns:a="http://schemas.openxmlformats.org/drawingml/2006/main" xmlns:p="http://schemas.openxmlformats.org/presentationml/2006/main" xmlns:r="http://schemas.openxmlformats.org/officeDocument/2006/relationships">
   <p:cSld>
     <p:spTree>
       <p:nvGrpSpPr>
@@ -3022,14 +3087,7 @@
         <p:cNvGrpSpPr/>
         <p:nvPr/>
       </p:nvGrpSpPr>
-      <p:grpSpPr>
-        <a:xfrm>
-          <a:off x="0" y="0"/>
-          <a:ext cx="0" cy="0"/>
-          <a:chOff x="0" y="0"/>
-          <a:chExt cx="0" cy="0"/>
-        </a:xfrm>
-      </p:grpSpPr>
+      <p:grpSpPr/>
       <p:sp>
         <p:nvSpPr>
           <p:cNvPr id="2" name="Rounded Rectangle 1"/>
@@ -3049,7 +3107,7 @@
           </a:solidFill>
           <a:ln w="22860">
             <a:solidFill>
-              <a:schemeClr val="tx1"/>
+              <a:srgbClr val="1565C0"/>
             </a:solidFill>
           </a:ln>
         </p:spPr>
@@ -3072,10 +3130,6 @@
           <a:lstStyle/>
           <a:p>
             <a:pPr algn="ctr"/>
-            <a:endParaRPr sz="3200" b="1" dirty="0">
-              <a:latin typeface="宋体" panose="02010600030101010101" pitchFamily="2" charset="-122"/>
-              <a:ea typeface="宋体" panose="02010600030101010101" pitchFamily="2" charset="-122"/>
-            </a:endParaRPr>
           </a:p>
         </p:txBody>
       </p:sp>
@@ -3088,7 +3142,7 @@
         <p:spPr>
           <a:xfrm>
             <a:off x="391875" y="311727"/>
-            <a:ext cx="3338202" cy="307777"/>
+            <a:ext cx="3338202" cy="211974"/>
           </a:xfrm>
           <a:prstGeom prst="rect">
             <a:avLst/>
@@ -3099,7 +3153,7 @@
           </a:ln>
         </p:spPr>
         <p:txBody>
-          <a:bodyPr wrap="square" lIns="0" tIns="0" rIns="0" bIns="0" anchor="t">
+          <a:bodyPr wrap="square" anchor="t" lIns="0" rIns="0" tIns="0" bIns="0">
             <a:spAutoFit/>
           </a:bodyPr>
           <a:lstStyle/>
@@ -3113,11 +3167,13 @@
               </a:spcAft>
             </a:pPr>
             <a:r>
-              <a:rPr lang="zh-CN" altLang="en-US" sz="2000" b="1" i="0" dirty="0">
-                <a:latin typeface="宋体" panose="02010600030101010101" pitchFamily="2" charset="-122"/>
-                <a:ea typeface="宋体" panose="02010600030101010101" pitchFamily="2" charset="-122"/>
+              <a:rPr sz="1200" b="1" i="0">
+                <a:solidFill>
+                  <a:srgbClr val="1565C0"/>
+                </a:solidFill>
+                <a:latin typeface="Microsoft YaHei"/>
               </a:rPr>
-              <a:t>界面层</a:t>
+              <a:t>«layer»  展现层  Presentation Layer</a:t>
             </a:r>
           </a:p>
         </p:txBody>
@@ -3130,8 +3186,8 @@
         </p:nvSpPr>
         <p:spPr>
           <a:xfrm>
-            <a:off x="217805" y="1590040"/>
-            <a:ext cx="10232390" cy="2233295"/>
+            <a:off x="217708" y="1589809"/>
+            <a:ext cx="10232315" cy="2026227"/>
           </a:xfrm>
           <a:prstGeom prst="roundRect">
             <a:avLst/>
@@ -3141,7 +3197,7 @@
           </a:solidFill>
           <a:ln w="22860">
             <a:solidFill>
-              <a:schemeClr val="tx1"/>
+              <a:srgbClr val="E65100"/>
             </a:solidFill>
           </a:ln>
         </p:spPr>
@@ -3164,10 +3220,6 @@
           <a:lstStyle/>
           <a:p>
             <a:pPr algn="ctr"/>
-            <a:endParaRPr sz="3200" b="1">
-              <a:latin typeface="宋体" panose="02010600030101010101" pitchFamily="2" charset="-122"/>
-              <a:ea typeface="宋体" panose="02010600030101010101" pitchFamily="2" charset="-122"/>
-            </a:endParaRPr>
           </a:p>
         </p:txBody>
       </p:sp>
@@ -3179,8 +3231,8 @@
         </p:nvSpPr>
         <p:spPr>
           <a:xfrm>
-            <a:off x="471702" y="1726488"/>
-            <a:ext cx="3338202" cy="307777"/>
+            <a:off x="391875" y="1652154"/>
+            <a:ext cx="3338202" cy="211974"/>
           </a:xfrm>
           <a:prstGeom prst="rect">
             <a:avLst/>
@@ -3191,7 +3243,7 @@
           </a:ln>
         </p:spPr>
         <p:txBody>
-          <a:bodyPr wrap="square" lIns="0" tIns="0" rIns="0" bIns="0" anchor="t">
+          <a:bodyPr wrap="square" anchor="t" lIns="0" rIns="0" tIns="0" bIns="0">
             <a:spAutoFit/>
           </a:bodyPr>
           <a:lstStyle/>
@@ -3205,16 +3257,14 @@
               </a:spcAft>
             </a:pPr>
             <a:r>
-              <a:rPr lang="zh-CN" altLang="en-US" sz="2000" b="1" i="0" dirty="0">
-                <a:latin typeface="宋体" panose="02010600030101010101" pitchFamily="2" charset="-122"/>
-                <a:ea typeface="宋体" panose="02010600030101010101" pitchFamily="2" charset="-122"/>
+              <a:rPr sz="1200" b="1" i="0">
+                <a:solidFill>
+                  <a:srgbClr val="E65100"/>
+                </a:solidFill>
+                <a:latin typeface="Microsoft YaHei"/>
               </a:rPr>
-              <a:t>服务层</a:t>
-            </a:r>
-            <a:endParaRPr sz="2000" b="1" i="0" dirty="0">
-              <a:latin typeface="宋体" panose="02010600030101010101" pitchFamily="2" charset="-122"/>
-              <a:ea typeface="宋体" panose="02010600030101010101" pitchFamily="2" charset="-122"/>
-            </a:endParaRPr>
+              <a:t>«layer»  服务层  Service Layer</a:t>
+            </a:r>
           </a:p>
         </p:txBody>
       </p:sp>
@@ -3226,7 +3276,7 @@
         </p:nvSpPr>
         <p:spPr>
           <a:xfrm>
-            <a:off x="181423" y="3924473"/>
+            <a:off x="217708" y="3771900"/>
             <a:ext cx="10232315" cy="1433945"/>
           </a:xfrm>
           <a:prstGeom prst="roundRect">
@@ -3237,7 +3287,7 @@
           </a:solidFill>
           <a:ln w="22860">
             <a:solidFill>
-              <a:schemeClr val="tx1"/>
+              <a:srgbClr val="6A1B9A"/>
             </a:solidFill>
           </a:ln>
         </p:spPr>
@@ -3260,10 +3310,6 @@
           <a:lstStyle/>
           <a:p>
             <a:pPr algn="ctr"/>
-            <a:endParaRPr sz="3200" b="1">
-              <a:latin typeface="宋体" panose="02010600030101010101" pitchFamily="2" charset="-122"/>
-              <a:ea typeface="宋体" panose="02010600030101010101" pitchFamily="2" charset="-122"/>
-            </a:endParaRPr>
           </a:p>
         </p:txBody>
       </p:sp>
@@ -3275,8 +3321,8 @@
         </p:nvSpPr>
         <p:spPr>
           <a:xfrm>
-            <a:off x="391875" y="3973945"/>
-            <a:ext cx="3338202" cy="307777"/>
+            <a:off x="391875" y="3834245"/>
+            <a:ext cx="3338202" cy="211974"/>
           </a:xfrm>
           <a:prstGeom prst="rect">
             <a:avLst/>
@@ -3287,7 +3333,7 @@
           </a:ln>
         </p:spPr>
         <p:txBody>
-          <a:bodyPr wrap="square" lIns="0" tIns="0" rIns="0" bIns="0" anchor="t">
+          <a:bodyPr wrap="square" anchor="t" lIns="0" rIns="0" tIns="0" bIns="0">
             <a:spAutoFit/>
           </a:bodyPr>
           <a:lstStyle/>
@@ -3301,18 +3347,13 @@
               </a:spcAft>
             </a:pPr>
             <a:r>
-              <a:rPr sz="2000" b="1" i="0" dirty="0" err="1">
-                <a:latin typeface="宋体" panose="02010600030101010101" pitchFamily="2" charset="-122"/>
-                <a:ea typeface="宋体" panose="02010600030101010101" pitchFamily="2" charset="-122"/>
+              <a:rPr sz="1200" b="1" i="0">
+                <a:solidFill>
+                  <a:srgbClr val="6A1B9A"/>
+                </a:solidFill>
+                <a:latin typeface="Microsoft YaHei"/>
               </a:rPr>
-              <a:t>智能引擎层</a:t>
-            </a:r>
-            <a:r>
-              <a:rPr sz="2000" b="1" i="0" dirty="0">
-                <a:latin typeface="宋体" panose="02010600030101010101" pitchFamily="2" charset="-122"/>
-                <a:ea typeface="宋体" panose="02010600030101010101" pitchFamily="2" charset="-122"/>
-              </a:rPr>
-              <a:t>  </a:t>
+              <a:t>«layer»  智能引擎层  Intelligence Layer</a:t>
             </a:r>
           </a:p>
         </p:txBody>
@@ -3325,7 +3366,7 @@
         </p:nvSpPr>
         <p:spPr>
           <a:xfrm>
-            <a:off x="217708" y="5501409"/>
+            <a:off x="217708" y="5361709"/>
             <a:ext cx="10232315" cy="1246909"/>
           </a:xfrm>
           <a:prstGeom prst="roundRect">
@@ -3336,7 +3377,7 @@
           </a:solidFill>
           <a:ln w="22860">
             <a:solidFill>
-              <a:schemeClr val="tx1"/>
+              <a:srgbClr val="2E7D32"/>
             </a:solidFill>
           </a:ln>
         </p:spPr>
@@ -3359,10 +3400,6 @@
           <a:lstStyle/>
           <a:p>
             <a:pPr algn="ctr"/>
-            <a:endParaRPr sz="3200" b="1">
-              <a:latin typeface="宋体" panose="02010600030101010101" pitchFamily="2" charset="-122"/>
-              <a:ea typeface="宋体" panose="02010600030101010101" pitchFamily="2" charset="-122"/>
-            </a:endParaRPr>
           </a:p>
         </p:txBody>
       </p:sp>
@@ -3374,8 +3411,8 @@
         </p:nvSpPr>
         <p:spPr>
           <a:xfrm>
-            <a:off x="391875" y="5563754"/>
-            <a:ext cx="3338202" cy="307777"/>
+            <a:off x="391875" y="5424054"/>
+            <a:ext cx="3338202" cy="211974"/>
           </a:xfrm>
           <a:prstGeom prst="rect">
             <a:avLst/>
@@ -3386,7 +3423,7 @@
           </a:ln>
         </p:spPr>
         <p:txBody>
-          <a:bodyPr wrap="square" lIns="0" tIns="0" rIns="0" bIns="0" anchor="t">
+          <a:bodyPr wrap="square" anchor="t" lIns="0" rIns="0" tIns="0" bIns="0">
             <a:spAutoFit/>
           </a:bodyPr>
           <a:lstStyle/>
@@ -3400,29 +3437,27 @@
               </a:spcAft>
             </a:pPr>
             <a:r>
-              <a:rPr lang="zh-CN" altLang="en-US" sz="2000" b="1" i="0" dirty="0">
-                <a:latin typeface="宋体" panose="02010600030101010101" pitchFamily="2" charset="-122"/>
-                <a:ea typeface="宋体" panose="02010600030101010101" pitchFamily="2" charset="-122"/>
+              <a:rPr sz="1200" b="1" i="0">
+                <a:solidFill>
+                  <a:srgbClr val="2E7D32"/>
+                </a:solidFill>
+                <a:latin typeface="Microsoft YaHei"/>
               </a:rPr>
-              <a:t>数据层</a:t>
-            </a:r>
-            <a:endParaRPr sz="2000" b="1" i="0" dirty="0">
-              <a:latin typeface="宋体" panose="02010600030101010101" pitchFamily="2" charset="-122"/>
-              <a:ea typeface="宋体" panose="02010600030101010101" pitchFamily="2" charset="-122"/>
-            </a:endParaRPr>
-          </a:p>
-        </p:txBody>
-      </p:sp>
-      <p:sp>
-        <p:nvSpPr>
-          <p:cNvPr id="28" name="Rectangle 27"/>
+              <a:t>«layer»  数据层  Data Layer</a:t>
+            </a:r>
+          </a:p>
+        </p:txBody>
+      </p:sp>
+      <p:sp>
+        <p:nvSpPr>
+          <p:cNvPr id="10" name="Rectangle 9"/>
           <p:cNvSpPr/>
           <p:nvPr/>
         </p:nvSpPr>
         <p:spPr>
           <a:xfrm>
-            <a:off x="1959379" y="1930053"/>
-            <a:ext cx="2757645" cy="586047"/>
+            <a:off x="798265" y="567343"/>
+            <a:ext cx="2177088" cy="548640"/>
           </a:xfrm>
           <a:prstGeom prst="rect">
             <a:avLst/>
@@ -3455,22 +3490,18 @@
           <a:lstStyle/>
           <a:p>
             <a:pPr algn="ctr"/>
-            <a:endParaRPr sz="3200" b="1">
-              <a:latin typeface="宋体" panose="02010600030101010101" pitchFamily="2" charset="-122"/>
-              <a:ea typeface="宋体" panose="02010600030101010101" pitchFamily="2" charset="-122"/>
-            </a:endParaRPr>
-          </a:p>
-        </p:txBody>
-      </p:sp>
-      <p:sp>
-        <p:nvSpPr>
-          <p:cNvPr id="29" name="Rectangle 28"/>
+          </a:p>
+        </p:txBody>
+      </p:sp>
+      <p:sp>
+        <p:nvSpPr>
+          <p:cNvPr id="11" name="Rectangle 10"/>
           <p:cNvSpPr/>
           <p:nvPr/>
         </p:nvSpPr>
         <p:spPr>
           <a:xfrm>
-            <a:off x="4521086" y="1967460"/>
+            <a:off x="2779416" y="604750"/>
             <a:ext cx="137882" cy="143394"/>
           </a:xfrm>
           <a:prstGeom prst="rect">
@@ -3504,22 +3535,18 @@
           <a:lstStyle/>
           <a:p>
             <a:pPr algn="ctr"/>
-            <a:endParaRPr sz="3200" b="1">
-              <a:latin typeface="宋体" panose="02010600030101010101" pitchFamily="2" charset="-122"/>
-              <a:ea typeface="宋体" panose="02010600030101010101" pitchFamily="2" charset="-122"/>
-            </a:endParaRPr>
-          </a:p>
-        </p:txBody>
-      </p:sp>
-      <p:sp>
-        <p:nvSpPr>
-          <p:cNvPr id="30" name="Rectangle 29"/>
+          </a:p>
+        </p:txBody>
+      </p:sp>
+      <p:sp>
+        <p:nvSpPr>
+          <p:cNvPr id="12" name="Rectangle 11"/>
           <p:cNvSpPr/>
           <p:nvPr/>
         </p:nvSpPr>
         <p:spPr>
           <a:xfrm>
-            <a:off x="4492059" y="1979929"/>
+            <a:off x="2750388" y="617219"/>
             <a:ext cx="58055" cy="41148"/>
           </a:xfrm>
           <a:prstGeom prst="rect">
@@ -3553,22 +3580,18 @@
           <a:lstStyle/>
           <a:p>
             <a:pPr algn="ctr"/>
-            <a:endParaRPr sz="3200" b="1">
-              <a:latin typeface="宋体" panose="02010600030101010101" pitchFamily="2" charset="-122"/>
-              <a:ea typeface="宋体" panose="02010600030101010101" pitchFamily="2" charset="-122"/>
-            </a:endParaRPr>
-          </a:p>
-        </p:txBody>
-      </p:sp>
-      <p:sp>
-        <p:nvSpPr>
-          <p:cNvPr id="31" name="Rectangle 30"/>
+          </a:p>
+        </p:txBody>
+      </p:sp>
+      <p:sp>
+        <p:nvSpPr>
+          <p:cNvPr id="13" name="Rectangle 12"/>
           <p:cNvSpPr/>
           <p:nvPr/>
         </p:nvSpPr>
         <p:spPr>
           <a:xfrm>
-            <a:off x="4492059" y="2034793"/>
+            <a:off x="2750388" y="672083"/>
             <a:ext cx="58055" cy="41148"/>
           </a:xfrm>
           <a:prstGeom prst="rect">
@@ -3602,23 +3625,19 @@
           <a:lstStyle/>
           <a:p>
             <a:pPr algn="ctr"/>
-            <a:endParaRPr sz="3200" b="1">
-              <a:latin typeface="宋体" panose="02010600030101010101" pitchFamily="2" charset="-122"/>
-              <a:ea typeface="宋体" panose="02010600030101010101" pitchFamily="2" charset="-122"/>
-            </a:endParaRPr>
-          </a:p>
-        </p:txBody>
-      </p:sp>
-      <p:sp>
-        <p:nvSpPr>
-          <p:cNvPr id="33" name="TextBox 32"/>
+          </a:p>
+        </p:txBody>
+      </p:sp>
+      <p:sp>
+        <p:nvSpPr>
+          <p:cNvPr id="14" name="TextBox 13"/>
           <p:cNvSpPr txBox="1"/>
           <p:nvPr/>
         </p:nvSpPr>
         <p:spPr>
           <a:xfrm>
-            <a:off x="2075490" y="2062955"/>
-            <a:ext cx="2525422" cy="307777"/>
+            <a:off x="914377" y="617219"/>
+            <a:ext cx="1814240" cy="99752"/>
           </a:xfrm>
           <a:prstGeom prst="rect">
             <a:avLst/>
@@ -3629,7 +3648,7 @@
           </a:ln>
         </p:spPr>
         <p:txBody>
-          <a:bodyPr wrap="square" lIns="0" tIns="0" rIns="0" bIns="0" anchor="ctr">
+          <a:bodyPr wrap="square" anchor="t" lIns="0" rIns="0" tIns="0" bIns="0">
             <a:spAutoFit/>
           </a:bodyPr>
           <a:lstStyle/>
@@ -3643,45 +3662,72 @@
               </a:spcAft>
             </a:pPr>
             <a:r>
-              <a:rPr sz="2000" b="1" i="0" dirty="0">
+              <a:rPr sz="830" b="0" i="1">
+                <a:solidFill>
+                  <a:srgbClr val="555555"/>
+                </a:solidFill>
+                <a:latin typeface="Microsoft YaHei"/>
+              </a:rPr>
+              <a:t>«component»</a:t>
+            </a:r>
+          </a:p>
+        </p:txBody>
+      </p:sp>
+      <p:sp>
+        <p:nvSpPr>
+          <p:cNvPr id="15" name="TextBox 14"/>
+          <p:cNvSpPr txBox="1"/>
+          <p:nvPr/>
+        </p:nvSpPr>
+        <p:spPr>
+          <a:xfrm>
+            <a:off x="914377" y="791787"/>
+            <a:ext cx="1944865" cy="149629"/>
+          </a:xfrm>
+          <a:prstGeom prst="rect">
+            <a:avLst/>
+          </a:prstGeom>
+          <a:noFill/>
+          <a:ln>
+            <a:noFill/>
+          </a:ln>
+        </p:spPr>
+        <p:txBody>
+          <a:bodyPr wrap="square" anchor="ctr" lIns="0" rIns="0" tIns="0" bIns="0">
+            <a:spAutoFit/>
+          </a:bodyPr>
+          <a:lstStyle/>
+          <a:p>
+            <a:pPr algn="ctr">
+              <a:spcBef>
+                <a:spcPts val="0"/>
+              </a:spcBef>
+              <a:spcAft>
+                <a:spcPts val="0"/>
+              </a:spcAft>
+            </a:pPr>
+            <a:r>
+              <a:rPr sz="1240" b="1" i="0">
                 <a:solidFill>
                   <a:srgbClr val="1A1A2E"/>
                 </a:solidFill>
-                <a:latin typeface="宋体" panose="02010600030101010101" pitchFamily="2" charset="-122"/>
-                <a:ea typeface="宋体" panose="02010600030101010101" pitchFamily="2" charset="-122"/>
+                <a:latin typeface="Microsoft YaHei"/>
               </a:rPr>
-              <a:t>REST API </a:t>
-            </a:r>
-            <a:r>
-              <a:rPr sz="2000" b="1" i="0" dirty="0" err="1">
-                <a:solidFill>
-                  <a:srgbClr val="1A1A2E"/>
-                </a:solidFill>
-                <a:latin typeface="宋体" panose="02010600030101010101" pitchFamily="2" charset="-122"/>
-                <a:ea typeface="宋体" panose="02010600030101010101" pitchFamily="2" charset="-122"/>
-              </a:rPr>
-              <a:t>网关</a:t>
-            </a:r>
-            <a:endParaRPr sz="2000" b="1" i="0" dirty="0">
-              <a:solidFill>
-                <a:srgbClr val="1A1A2E"/>
-              </a:solidFill>
-              <a:latin typeface="宋体" panose="02010600030101010101" pitchFamily="2" charset="-122"/>
-              <a:ea typeface="宋体" panose="02010600030101010101" pitchFamily="2" charset="-122"/>
-            </a:endParaRPr>
-          </a:p>
-        </p:txBody>
-      </p:sp>
-      <p:sp>
-        <p:nvSpPr>
-          <p:cNvPr id="35" name="Rectangle 34"/>
+              <a:t>Vue3 视图组件</a:t>
+            </a:r>
+          </a:p>
+        </p:txBody>
+      </p:sp>
+      <p:sp>
+        <p:nvSpPr>
+          <p:cNvPr id="16" name="Rectangle 15"/>
           <p:cNvSpPr/>
           <p:nvPr/>
         </p:nvSpPr>
         <p:spPr>
           <a:xfrm>
-            <a:off x="5805569" y="1930053"/>
-            <a:ext cx="2322227" cy="586047"/>
+            <a:off x="4136468" y="567343"/>
+            <a:ext cx="2177088" cy="548640"/>
           </a:xfrm>
           <a:prstGeom prst="rect">
             <a:avLst/>
@@ -3714,22 +3760,18 @@
           <a:lstStyle/>
           <a:p>
             <a:pPr algn="ctr"/>
-            <a:endParaRPr sz="3200" b="1">
-              <a:latin typeface="宋体" panose="02010600030101010101" pitchFamily="2" charset="-122"/>
-              <a:ea typeface="宋体" panose="02010600030101010101" pitchFamily="2" charset="-122"/>
-            </a:endParaRPr>
-          </a:p>
-        </p:txBody>
-      </p:sp>
-      <p:sp>
-        <p:nvSpPr>
-          <p:cNvPr id="36" name="Rectangle 35"/>
+          </a:p>
+        </p:txBody>
+      </p:sp>
+      <p:sp>
+        <p:nvSpPr>
+          <p:cNvPr id="17" name="Rectangle 16"/>
           <p:cNvSpPr/>
           <p:nvPr/>
         </p:nvSpPr>
         <p:spPr>
           <a:xfrm>
-            <a:off x="7931858" y="1967460"/>
+            <a:off x="6117618" y="604750"/>
             <a:ext cx="137882" cy="143394"/>
           </a:xfrm>
           <a:prstGeom prst="rect">
@@ -3763,22 +3805,18 @@
           <a:lstStyle/>
           <a:p>
             <a:pPr algn="ctr"/>
-            <a:endParaRPr sz="3200" b="1">
-              <a:latin typeface="宋体" panose="02010600030101010101" pitchFamily="2" charset="-122"/>
-              <a:ea typeface="宋体" panose="02010600030101010101" pitchFamily="2" charset="-122"/>
-            </a:endParaRPr>
-          </a:p>
-        </p:txBody>
-      </p:sp>
-      <p:sp>
-        <p:nvSpPr>
-          <p:cNvPr id="37" name="Rectangle 36"/>
+          </a:p>
+        </p:txBody>
+      </p:sp>
+      <p:sp>
+        <p:nvSpPr>
+          <p:cNvPr id="18" name="Rectangle 17"/>
           <p:cNvSpPr/>
           <p:nvPr/>
         </p:nvSpPr>
         <p:spPr>
           <a:xfrm>
-            <a:off x="7902830" y="1979929"/>
+            <a:off x="6088590" y="617219"/>
             <a:ext cx="58055" cy="41148"/>
           </a:xfrm>
           <a:prstGeom prst="rect">
@@ -3812,22 +3850,18 @@
           <a:lstStyle/>
           <a:p>
             <a:pPr algn="ctr"/>
-            <a:endParaRPr sz="3200" b="1">
-              <a:latin typeface="宋体" panose="02010600030101010101" pitchFamily="2" charset="-122"/>
-              <a:ea typeface="宋体" panose="02010600030101010101" pitchFamily="2" charset="-122"/>
-            </a:endParaRPr>
-          </a:p>
-        </p:txBody>
-      </p:sp>
-      <p:sp>
-        <p:nvSpPr>
-          <p:cNvPr id="38" name="Rectangle 37"/>
+          </a:p>
+        </p:txBody>
+      </p:sp>
+      <p:sp>
+        <p:nvSpPr>
+          <p:cNvPr id="19" name="Rectangle 18"/>
           <p:cNvSpPr/>
           <p:nvPr/>
         </p:nvSpPr>
         <p:spPr>
           <a:xfrm>
-            <a:off x="7902830" y="2034793"/>
+            <a:off x="6088590" y="672083"/>
             <a:ext cx="58055" cy="41148"/>
           </a:xfrm>
           <a:prstGeom prst="rect">
@@ -3861,23 +3895,19 @@
           <a:lstStyle/>
           <a:p>
             <a:pPr algn="ctr"/>
-            <a:endParaRPr sz="3200" b="1">
-              <a:latin typeface="宋体" panose="02010600030101010101" pitchFamily="2" charset="-122"/>
-              <a:ea typeface="宋体" panose="02010600030101010101" pitchFamily="2" charset="-122"/>
-            </a:endParaRPr>
-          </a:p>
-        </p:txBody>
-      </p:sp>
-      <p:sp>
-        <p:nvSpPr>
-          <p:cNvPr id="40" name="TextBox 39"/>
+          </a:p>
+        </p:txBody>
+      </p:sp>
+      <p:sp>
+        <p:nvSpPr>
+          <p:cNvPr id="20" name="TextBox 19"/>
           <p:cNvSpPr txBox="1"/>
           <p:nvPr/>
         </p:nvSpPr>
         <p:spPr>
           <a:xfrm>
-            <a:off x="5921680" y="2062955"/>
-            <a:ext cx="2090004" cy="307777"/>
+            <a:off x="4252579" y="617219"/>
+            <a:ext cx="1814240" cy="99752"/>
           </a:xfrm>
           <a:prstGeom prst="rect">
             <a:avLst/>
@@ -3888,7 +3918,7 @@
           </a:ln>
         </p:spPr>
         <p:txBody>
-          <a:bodyPr wrap="square" lIns="0" tIns="0" rIns="0" bIns="0" anchor="ctr">
+          <a:bodyPr wrap="square" anchor="t" lIns="0" rIns="0" tIns="0" bIns="0">
             <a:spAutoFit/>
           </a:bodyPr>
           <a:lstStyle/>
@@ -3902,35 +3932,72 @@
               </a:spcAft>
             </a:pPr>
             <a:r>
-              <a:rPr sz="2000" b="1" i="0" dirty="0" err="1">
+              <a:rPr sz="830" b="0" i="1">
+                <a:solidFill>
+                  <a:srgbClr val="555555"/>
+                </a:solidFill>
+                <a:latin typeface="Microsoft YaHei"/>
+              </a:rPr>
+              <a:t>«component»</a:t>
+            </a:r>
+          </a:p>
+        </p:txBody>
+      </p:sp>
+      <p:sp>
+        <p:nvSpPr>
+          <p:cNvPr id="21" name="TextBox 20"/>
+          <p:cNvSpPr txBox="1"/>
+          <p:nvPr/>
+        </p:nvSpPr>
+        <p:spPr>
+          <a:xfrm>
+            <a:off x="4252579" y="791787"/>
+            <a:ext cx="1944865" cy="149629"/>
+          </a:xfrm>
+          <a:prstGeom prst="rect">
+            <a:avLst/>
+          </a:prstGeom>
+          <a:noFill/>
+          <a:ln>
+            <a:noFill/>
+          </a:ln>
+        </p:spPr>
+        <p:txBody>
+          <a:bodyPr wrap="square" anchor="ctr" lIns="0" rIns="0" tIns="0" bIns="0">
+            <a:spAutoFit/>
+          </a:bodyPr>
+          <a:lstStyle/>
+          <a:p>
+            <a:pPr algn="ctr">
+              <a:spcBef>
+                <a:spcPts val="0"/>
+              </a:spcBef>
+              <a:spcAft>
+                <a:spcPts val="0"/>
+              </a:spcAft>
+            </a:pPr>
+            <a:r>
+              <a:rPr sz="1240" b="1" i="0">
                 <a:solidFill>
                   <a:srgbClr val="1A1A2E"/>
                 </a:solidFill>
-                <a:latin typeface="宋体" panose="02010600030101010101" pitchFamily="2" charset="-122"/>
-                <a:ea typeface="宋体" panose="02010600030101010101" pitchFamily="2" charset="-122"/>
+                <a:latin typeface="Microsoft YaHei"/>
               </a:rPr>
-              <a:t>任务调度器</a:t>
-            </a:r>
-            <a:endParaRPr sz="2000" b="1" i="0" dirty="0">
-              <a:solidFill>
-                <a:srgbClr val="1A1A2E"/>
-              </a:solidFill>
-              <a:latin typeface="宋体" panose="02010600030101010101" pitchFamily="2" charset="-122"/>
-              <a:ea typeface="宋体" panose="02010600030101010101" pitchFamily="2" charset="-122"/>
-            </a:endParaRPr>
-          </a:p>
-        </p:txBody>
-      </p:sp>
-      <p:sp>
-        <p:nvSpPr>
-          <p:cNvPr id="49" name="Rectangle 48"/>
+              <a:t>Pinia 状态管理</a:t>
+            </a:r>
+          </a:p>
+        </p:txBody>
+      </p:sp>
+      <p:sp>
+        <p:nvSpPr>
+          <p:cNvPr id="22" name="Rectangle 21"/>
           <p:cNvSpPr/>
           <p:nvPr/>
         </p:nvSpPr>
         <p:spPr>
           <a:xfrm>
-            <a:off x="2648790" y="2908877"/>
-            <a:ext cx="1959379" cy="561109"/>
+            <a:off x="7474670" y="567343"/>
+            <a:ext cx="2177088" cy="548640"/>
           </a:xfrm>
           <a:prstGeom prst="rect">
             <a:avLst/>
@@ -3963,22 +4030,18 @@
           <a:lstStyle/>
           <a:p>
             <a:pPr algn="ctr"/>
-            <a:endParaRPr sz="3200" b="1">
-              <a:latin typeface="宋体" panose="02010600030101010101" pitchFamily="2" charset="-122"/>
-              <a:ea typeface="宋体" panose="02010600030101010101" pitchFamily="2" charset="-122"/>
-            </a:endParaRPr>
-          </a:p>
-        </p:txBody>
-      </p:sp>
-      <p:sp>
-        <p:nvSpPr>
-          <p:cNvPr id="50" name="Rectangle 49"/>
+          </a:p>
+        </p:txBody>
+      </p:sp>
+      <p:sp>
+        <p:nvSpPr>
+          <p:cNvPr id="23" name="Rectangle 22"/>
           <p:cNvSpPr/>
           <p:nvPr/>
         </p:nvSpPr>
         <p:spPr>
           <a:xfrm>
-            <a:off x="4412232" y="2946284"/>
+            <a:off x="9455820" y="604750"/>
             <a:ext cx="137882" cy="143394"/>
           </a:xfrm>
           <a:prstGeom prst="rect">
@@ -4012,22 +4075,18 @@
           <a:lstStyle/>
           <a:p>
             <a:pPr algn="ctr"/>
-            <a:endParaRPr sz="3200" b="1">
-              <a:latin typeface="宋体" panose="02010600030101010101" pitchFamily="2" charset="-122"/>
-              <a:ea typeface="宋体" panose="02010600030101010101" pitchFamily="2" charset="-122"/>
-            </a:endParaRPr>
-          </a:p>
-        </p:txBody>
-      </p:sp>
-      <p:sp>
-        <p:nvSpPr>
-          <p:cNvPr id="51" name="Rectangle 50"/>
+          </a:p>
+        </p:txBody>
+      </p:sp>
+      <p:sp>
+        <p:nvSpPr>
+          <p:cNvPr id="24" name="Rectangle 23"/>
           <p:cNvSpPr/>
           <p:nvPr/>
         </p:nvSpPr>
         <p:spPr>
           <a:xfrm>
-            <a:off x="4383204" y="2958753"/>
+            <a:off x="9426792" y="617219"/>
             <a:ext cx="58055" cy="41148"/>
           </a:xfrm>
           <a:prstGeom prst="rect">
@@ -4061,22 +4120,18 @@
           <a:lstStyle/>
           <a:p>
             <a:pPr algn="ctr"/>
-            <a:endParaRPr sz="3200" b="1">
-              <a:latin typeface="宋体" panose="02010600030101010101" pitchFamily="2" charset="-122"/>
-              <a:ea typeface="宋体" panose="02010600030101010101" pitchFamily="2" charset="-122"/>
-            </a:endParaRPr>
-          </a:p>
-        </p:txBody>
-      </p:sp>
-      <p:sp>
-        <p:nvSpPr>
-          <p:cNvPr id="52" name="Rectangle 51"/>
+          </a:p>
+        </p:txBody>
+      </p:sp>
+      <p:sp>
+        <p:nvSpPr>
+          <p:cNvPr id="25" name="Rectangle 24"/>
           <p:cNvSpPr/>
           <p:nvPr/>
         </p:nvSpPr>
         <p:spPr>
           <a:xfrm>
-            <a:off x="4383204" y="3013617"/>
+            <a:off x="9426792" y="672083"/>
             <a:ext cx="58055" cy="41148"/>
           </a:xfrm>
           <a:prstGeom prst="rect">
@@ -4110,23 +4165,19 @@
           <a:lstStyle/>
           <a:p>
             <a:pPr algn="ctr"/>
-            <a:endParaRPr sz="3200" b="1">
-              <a:latin typeface="宋体" panose="02010600030101010101" pitchFamily="2" charset="-122"/>
-              <a:ea typeface="宋体" panose="02010600030101010101" pitchFamily="2" charset="-122"/>
-            </a:endParaRPr>
-          </a:p>
-        </p:txBody>
-      </p:sp>
-      <p:sp>
-        <p:nvSpPr>
-          <p:cNvPr id="54" name="TextBox 53"/>
+          </a:p>
+        </p:txBody>
+      </p:sp>
+      <p:sp>
+        <p:nvSpPr>
+          <p:cNvPr id="26" name="TextBox 25"/>
           <p:cNvSpPr txBox="1"/>
           <p:nvPr/>
         </p:nvSpPr>
         <p:spPr>
           <a:xfrm>
-            <a:off x="2764902" y="3016840"/>
-            <a:ext cx="1727156" cy="307777"/>
+            <a:off x="7590781" y="617219"/>
+            <a:ext cx="1814240" cy="99752"/>
           </a:xfrm>
           <a:prstGeom prst="rect">
             <a:avLst/>
@@ -4137,7 +4188,7 @@
           </a:ln>
         </p:spPr>
         <p:txBody>
-          <a:bodyPr wrap="square" lIns="0" tIns="0" rIns="0" bIns="0" anchor="ctr">
+          <a:bodyPr wrap="square" anchor="t" lIns="0" rIns="0" tIns="0" bIns="0">
             <a:spAutoFit/>
           </a:bodyPr>
           <a:lstStyle/>
@@ -4151,35 +4202,72 @@
               </a:spcAft>
             </a:pPr>
             <a:r>
-              <a:rPr sz="2000" b="1" i="0" dirty="0" err="1">
+              <a:rPr sz="830" b="0" i="1">
+                <a:solidFill>
+                  <a:srgbClr val="555555"/>
+                </a:solidFill>
+                <a:latin typeface="Microsoft YaHei"/>
+              </a:rPr>
+              <a:t>«component»</a:t>
+            </a:r>
+          </a:p>
+        </p:txBody>
+      </p:sp>
+      <p:sp>
+        <p:nvSpPr>
+          <p:cNvPr id="27" name="TextBox 26"/>
+          <p:cNvSpPr txBox="1"/>
+          <p:nvPr/>
+        </p:nvSpPr>
+        <p:spPr>
+          <a:xfrm>
+            <a:off x="7590781" y="791787"/>
+            <a:ext cx="1944865" cy="149629"/>
+          </a:xfrm>
+          <a:prstGeom prst="rect">
+            <a:avLst/>
+          </a:prstGeom>
+          <a:noFill/>
+          <a:ln>
+            <a:noFill/>
+          </a:ln>
+        </p:spPr>
+        <p:txBody>
+          <a:bodyPr wrap="square" anchor="ctr" lIns="0" rIns="0" tIns="0" bIns="0">
+            <a:spAutoFit/>
+          </a:bodyPr>
+          <a:lstStyle/>
+          <a:p>
+            <a:pPr algn="ctr">
+              <a:spcBef>
+                <a:spcPts val="0"/>
+              </a:spcBef>
+              <a:spcAft>
+                <a:spcPts val="0"/>
+              </a:spcAft>
+            </a:pPr>
+            <a:r>
+              <a:rPr sz="1240" b="1" i="0">
                 <a:solidFill>
                   <a:srgbClr val="1A1A2E"/>
                 </a:solidFill>
-                <a:latin typeface="宋体" panose="02010600030101010101" pitchFamily="2" charset="-122"/>
-                <a:ea typeface="宋体" panose="02010600030101010101" pitchFamily="2" charset="-122"/>
+                <a:latin typeface="Microsoft YaHei"/>
               </a:rPr>
-              <a:t>策略生成</a:t>
-            </a:r>
-            <a:endParaRPr sz="2000" b="1" i="0" dirty="0">
-              <a:solidFill>
-                <a:srgbClr val="1A1A2E"/>
-              </a:solidFill>
-              <a:latin typeface="宋体" panose="02010600030101010101" pitchFamily="2" charset="-122"/>
-              <a:ea typeface="宋体" panose="02010600030101010101" pitchFamily="2" charset="-122"/>
-            </a:endParaRPr>
-          </a:p>
-        </p:txBody>
-      </p:sp>
-      <p:sp>
-        <p:nvSpPr>
-          <p:cNvPr id="56" name="Rectangle 55"/>
+              <a:t>ECharts 可视化图表</a:t>
+            </a:r>
+          </a:p>
+        </p:txBody>
+      </p:sp>
+      <p:sp>
+        <p:nvSpPr>
+          <p:cNvPr id="28" name="Rectangle 27"/>
           <p:cNvSpPr/>
           <p:nvPr/>
         </p:nvSpPr>
         <p:spPr>
           <a:xfrm>
-            <a:off x="4825879" y="2908877"/>
-            <a:ext cx="1959379" cy="561109"/>
+            <a:off x="1959379" y="1733203"/>
+            <a:ext cx="2757645" cy="586047"/>
           </a:xfrm>
           <a:prstGeom prst="rect">
             <a:avLst/>
@@ -4212,22 +4300,18 @@
           <a:lstStyle/>
           <a:p>
             <a:pPr algn="ctr"/>
-            <a:endParaRPr sz="3200" b="1">
-              <a:latin typeface="宋体" panose="02010600030101010101" pitchFamily="2" charset="-122"/>
-              <a:ea typeface="宋体" panose="02010600030101010101" pitchFamily="2" charset="-122"/>
-            </a:endParaRPr>
-          </a:p>
-        </p:txBody>
-      </p:sp>
-      <p:sp>
-        <p:nvSpPr>
-          <p:cNvPr id="57" name="Rectangle 56"/>
+          </a:p>
+        </p:txBody>
+      </p:sp>
+      <p:sp>
+        <p:nvSpPr>
+          <p:cNvPr id="29" name="Rectangle 28"/>
           <p:cNvSpPr/>
           <p:nvPr/>
         </p:nvSpPr>
         <p:spPr>
           <a:xfrm>
-            <a:off x="6589320" y="2946284"/>
+            <a:off x="4521086" y="1770610"/>
             <a:ext cx="137882" cy="143394"/>
           </a:xfrm>
           <a:prstGeom prst="rect">
@@ -4261,22 +4345,18 @@
           <a:lstStyle/>
           <a:p>
             <a:pPr algn="ctr"/>
-            <a:endParaRPr sz="3200" b="1">
-              <a:latin typeface="宋体" panose="02010600030101010101" pitchFamily="2" charset="-122"/>
-              <a:ea typeface="宋体" panose="02010600030101010101" pitchFamily="2" charset="-122"/>
-            </a:endParaRPr>
-          </a:p>
-        </p:txBody>
-      </p:sp>
-      <p:sp>
-        <p:nvSpPr>
-          <p:cNvPr id="58" name="Rectangle 57"/>
+          </a:p>
+        </p:txBody>
+      </p:sp>
+      <p:sp>
+        <p:nvSpPr>
+          <p:cNvPr id="30" name="Rectangle 29"/>
           <p:cNvSpPr/>
           <p:nvPr/>
         </p:nvSpPr>
         <p:spPr>
           <a:xfrm>
-            <a:off x="6560293" y="2958753"/>
+            <a:off x="4492059" y="1783079"/>
             <a:ext cx="58055" cy="41148"/>
           </a:xfrm>
           <a:prstGeom prst="rect">
@@ -4310,22 +4390,18 @@
           <a:lstStyle/>
           <a:p>
             <a:pPr algn="ctr"/>
-            <a:endParaRPr sz="3200" b="1">
-              <a:latin typeface="宋体" panose="02010600030101010101" pitchFamily="2" charset="-122"/>
-              <a:ea typeface="宋体" panose="02010600030101010101" pitchFamily="2" charset="-122"/>
-            </a:endParaRPr>
-          </a:p>
-        </p:txBody>
-      </p:sp>
-      <p:sp>
-        <p:nvSpPr>
-          <p:cNvPr id="59" name="Rectangle 58"/>
+          </a:p>
+        </p:txBody>
+      </p:sp>
+      <p:sp>
+        <p:nvSpPr>
+          <p:cNvPr id="31" name="Rectangle 30"/>
           <p:cNvSpPr/>
           <p:nvPr/>
         </p:nvSpPr>
         <p:spPr>
           <a:xfrm>
-            <a:off x="6560293" y="3013617"/>
+            <a:off x="4492059" y="1837943"/>
             <a:ext cx="58055" cy="41148"/>
           </a:xfrm>
           <a:prstGeom prst="rect">
@@ -4359,23 +4435,19 @@
           <a:lstStyle/>
           <a:p>
             <a:pPr algn="ctr"/>
-            <a:endParaRPr sz="3200" b="1">
-              <a:latin typeface="宋体" panose="02010600030101010101" pitchFamily="2" charset="-122"/>
-              <a:ea typeface="宋体" panose="02010600030101010101" pitchFamily="2" charset="-122"/>
-            </a:endParaRPr>
-          </a:p>
-        </p:txBody>
-      </p:sp>
-      <p:sp>
-        <p:nvSpPr>
-          <p:cNvPr id="61" name="TextBox 60"/>
+          </a:p>
+        </p:txBody>
+      </p:sp>
+      <p:sp>
+        <p:nvSpPr>
+          <p:cNvPr id="32" name="TextBox 31"/>
           <p:cNvSpPr txBox="1"/>
           <p:nvPr/>
         </p:nvSpPr>
         <p:spPr>
           <a:xfrm>
-            <a:off x="4941990" y="3016840"/>
-            <a:ext cx="1727156" cy="307777"/>
+            <a:off x="2075490" y="1783079"/>
+            <a:ext cx="2394797" cy="99752"/>
           </a:xfrm>
           <a:prstGeom prst="rect">
             <a:avLst/>
@@ -4386,7 +4458,7 @@
           </a:ln>
         </p:spPr>
         <p:txBody>
-          <a:bodyPr wrap="square" lIns="0" tIns="0" rIns="0" bIns="0" anchor="ctr">
+          <a:bodyPr wrap="square" anchor="t" lIns="0" rIns="0" tIns="0" bIns="0">
             <a:spAutoFit/>
           </a:bodyPr>
           <a:lstStyle/>
@@ -4400,35 +4472,117 @@
               </a:spcAft>
             </a:pPr>
             <a:r>
-              <a:rPr sz="2000" b="1" i="0" dirty="0" err="1">
+              <a:rPr sz="830" b="0" i="1">
+                <a:solidFill>
+                  <a:srgbClr val="555555"/>
+                </a:solidFill>
+                <a:latin typeface="Microsoft YaHei"/>
+              </a:rPr>
+              <a:t>«component»</a:t>
+            </a:r>
+          </a:p>
+        </p:txBody>
+      </p:sp>
+      <p:sp>
+        <p:nvSpPr>
+          <p:cNvPr id="33" name="TextBox 32"/>
+          <p:cNvSpPr txBox="1"/>
+          <p:nvPr/>
+        </p:nvSpPr>
+        <p:spPr>
+          <a:xfrm>
+            <a:off x="2075490" y="1945178"/>
+            <a:ext cx="2525422" cy="149629"/>
+          </a:xfrm>
+          <a:prstGeom prst="rect">
+            <a:avLst/>
+          </a:prstGeom>
+          <a:noFill/>
+          <a:ln>
+            <a:noFill/>
+          </a:ln>
+        </p:spPr>
+        <p:txBody>
+          <a:bodyPr wrap="square" anchor="ctr" lIns="0" rIns="0" tIns="0" bIns="0">
+            <a:spAutoFit/>
+          </a:bodyPr>
+          <a:lstStyle/>
+          <a:p>
+            <a:pPr algn="ctr">
+              <a:spcBef>
+                <a:spcPts val="0"/>
+              </a:spcBef>
+              <a:spcAft>
+                <a:spcPts val="0"/>
+              </a:spcAft>
+            </a:pPr>
+            <a:r>
+              <a:rPr sz="1240" b="1" i="0">
                 <a:solidFill>
                   <a:srgbClr val="1A1A2E"/>
                 </a:solidFill>
-                <a:latin typeface="宋体" panose="02010600030101010101" pitchFamily="2" charset="-122"/>
-                <a:ea typeface="宋体" panose="02010600030101010101" pitchFamily="2" charset="-122"/>
+                <a:latin typeface="Microsoft YaHei"/>
               </a:rPr>
-              <a:t>评审与排序</a:t>
-            </a:r>
-            <a:endParaRPr sz="2000" b="1" i="0" dirty="0">
-              <a:solidFill>
-                <a:srgbClr val="1A1A2E"/>
-              </a:solidFill>
-              <a:latin typeface="宋体" panose="02010600030101010101" pitchFamily="2" charset="-122"/>
-              <a:ea typeface="宋体" panose="02010600030101010101" pitchFamily="2" charset="-122"/>
-            </a:endParaRPr>
-          </a:p>
-        </p:txBody>
-      </p:sp>
-      <p:sp>
-        <p:nvSpPr>
-          <p:cNvPr id="63" name="Rectangle 62"/>
+              <a:t>REST API 网关</a:t>
+            </a:r>
+          </a:p>
+        </p:txBody>
+      </p:sp>
+      <p:sp>
+        <p:nvSpPr>
+          <p:cNvPr id="34" name="TextBox 33"/>
+          <p:cNvSpPr txBox="1"/>
+          <p:nvPr/>
+        </p:nvSpPr>
+        <p:spPr>
+          <a:xfrm>
+            <a:off x="2090004" y="2144683"/>
+            <a:ext cx="2496394" cy="99752"/>
+          </a:xfrm>
+          <a:prstGeom prst="rect">
+            <a:avLst/>
+          </a:prstGeom>
+          <a:noFill/>
+          <a:ln>
+            <a:noFill/>
+          </a:ln>
+        </p:spPr>
+        <p:txBody>
+          <a:bodyPr wrap="square" anchor="ctr" lIns="0" rIns="0" tIns="0" bIns="0">
+            <a:spAutoFit/>
+          </a:bodyPr>
+          <a:lstStyle/>
+          <a:p>
+            <a:pPr algn="ctr">
+              <a:spcBef>
+                <a:spcPts val="0"/>
+              </a:spcBef>
+              <a:spcAft>
+                <a:spcPts val="0"/>
+              </a:spcAft>
+            </a:pPr>
+            <a:r>
+              <a:rPr sz="950" b="0" i="0">
+                <a:solidFill>
+                  <a:srgbClr val="555555"/>
+                </a:solidFill>
+                <a:latin typeface="Microsoft YaHei"/>
+              </a:rPr>
+              <a:t>Flask / 鉴权</a:t>
+            </a:r>
+          </a:p>
+        </p:txBody>
+      </p:sp>
+      <p:sp>
+        <p:nvSpPr>
+          <p:cNvPr id="35" name="Rectangle 34"/>
           <p:cNvSpPr/>
           <p:nvPr/>
         </p:nvSpPr>
         <p:spPr>
           <a:xfrm>
-            <a:off x="7002967" y="2908877"/>
-            <a:ext cx="1959379" cy="561109"/>
+            <a:off x="5805569" y="1733203"/>
+            <a:ext cx="2322227" cy="586047"/>
           </a:xfrm>
           <a:prstGeom prst="rect">
             <a:avLst/>
@@ -4461,22 +4615,18 @@
           <a:lstStyle/>
           <a:p>
             <a:pPr algn="ctr"/>
-            <a:endParaRPr sz="3200" b="1">
-              <a:latin typeface="宋体" panose="02010600030101010101" pitchFamily="2" charset="-122"/>
-              <a:ea typeface="宋体" panose="02010600030101010101" pitchFamily="2" charset="-122"/>
-            </a:endParaRPr>
-          </a:p>
-        </p:txBody>
-      </p:sp>
-      <p:sp>
-        <p:nvSpPr>
-          <p:cNvPr id="64" name="Rectangle 63"/>
+          </a:p>
+        </p:txBody>
+      </p:sp>
+      <p:sp>
+        <p:nvSpPr>
+          <p:cNvPr id="36" name="Rectangle 35"/>
           <p:cNvSpPr/>
           <p:nvPr/>
         </p:nvSpPr>
         <p:spPr>
           <a:xfrm>
-            <a:off x="8766409" y="2946284"/>
+            <a:off x="7931858" y="1770610"/>
             <a:ext cx="137882" cy="143394"/>
           </a:xfrm>
           <a:prstGeom prst="rect">
@@ -4510,22 +4660,18 @@
           <a:lstStyle/>
           <a:p>
             <a:pPr algn="ctr"/>
-            <a:endParaRPr sz="3200" b="1">
-              <a:latin typeface="宋体" panose="02010600030101010101" pitchFamily="2" charset="-122"/>
-              <a:ea typeface="宋体" panose="02010600030101010101" pitchFamily="2" charset="-122"/>
-            </a:endParaRPr>
-          </a:p>
-        </p:txBody>
-      </p:sp>
-      <p:sp>
-        <p:nvSpPr>
-          <p:cNvPr id="65" name="Rectangle 64"/>
+          </a:p>
+        </p:txBody>
+      </p:sp>
+      <p:sp>
+        <p:nvSpPr>
+          <p:cNvPr id="37" name="Rectangle 36"/>
           <p:cNvSpPr/>
           <p:nvPr/>
         </p:nvSpPr>
         <p:spPr>
           <a:xfrm>
-            <a:off x="8737381" y="2958753"/>
+            <a:off x="7902830" y="1783079"/>
             <a:ext cx="58055" cy="41148"/>
           </a:xfrm>
           <a:prstGeom prst="rect">
@@ -4559,22 +4705,18 @@
           <a:lstStyle/>
           <a:p>
             <a:pPr algn="ctr"/>
-            <a:endParaRPr sz="3200" b="1">
-              <a:latin typeface="宋体" panose="02010600030101010101" pitchFamily="2" charset="-122"/>
-              <a:ea typeface="宋体" panose="02010600030101010101" pitchFamily="2" charset="-122"/>
-            </a:endParaRPr>
-          </a:p>
-        </p:txBody>
-      </p:sp>
-      <p:sp>
-        <p:nvSpPr>
-          <p:cNvPr id="66" name="Rectangle 65"/>
+          </a:p>
+        </p:txBody>
+      </p:sp>
+      <p:sp>
+        <p:nvSpPr>
+          <p:cNvPr id="38" name="Rectangle 37"/>
           <p:cNvSpPr/>
           <p:nvPr/>
         </p:nvSpPr>
         <p:spPr>
           <a:xfrm>
-            <a:off x="8737381" y="3013617"/>
+            <a:off x="7902830" y="1837943"/>
             <a:ext cx="58055" cy="41148"/>
           </a:xfrm>
           <a:prstGeom prst="rect">
@@ -4608,23 +4750,19 @@
           <a:lstStyle/>
           <a:p>
             <a:pPr algn="ctr"/>
-            <a:endParaRPr sz="3200" b="1">
-              <a:latin typeface="宋体" panose="02010600030101010101" pitchFamily="2" charset="-122"/>
-              <a:ea typeface="宋体" panose="02010600030101010101" pitchFamily="2" charset="-122"/>
-            </a:endParaRPr>
-          </a:p>
-        </p:txBody>
-      </p:sp>
-      <p:sp>
-        <p:nvSpPr>
-          <p:cNvPr id="68" name="TextBox 67"/>
+          </a:p>
+        </p:txBody>
+      </p:sp>
+      <p:sp>
+        <p:nvSpPr>
+          <p:cNvPr id="39" name="TextBox 38"/>
           <p:cNvSpPr txBox="1"/>
           <p:nvPr/>
         </p:nvSpPr>
         <p:spPr>
           <a:xfrm>
-            <a:off x="7119079" y="3016840"/>
-            <a:ext cx="1727156" cy="307777"/>
+            <a:off x="5921680" y="1783079"/>
+            <a:ext cx="1959379" cy="99752"/>
           </a:xfrm>
           <a:prstGeom prst="rect">
             <a:avLst/>
@@ -4635,7 +4773,7 @@
           </a:ln>
         </p:spPr>
         <p:txBody>
-          <a:bodyPr wrap="square" lIns="0" tIns="0" rIns="0" bIns="0" anchor="ctr">
+          <a:bodyPr wrap="square" anchor="t" lIns="0" rIns="0" tIns="0" bIns="0">
             <a:spAutoFit/>
           </a:bodyPr>
           <a:lstStyle/>
@@ -4649,22 +4787,2984 @@
               </a:spcAft>
             </a:pPr>
             <a:r>
-              <a:rPr sz="2000" b="1" i="0" dirty="0" err="1">
+              <a:rPr sz="830" b="0" i="1">
+                <a:solidFill>
+                  <a:srgbClr val="555555"/>
+                </a:solidFill>
+                <a:latin typeface="Microsoft YaHei"/>
+              </a:rPr>
+              <a:t>«component»</a:t>
+            </a:r>
+          </a:p>
+        </p:txBody>
+      </p:sp>
+      <p:sp>
+        <p:nvSpPr>
+          <p:cNvPr id="40" name="TextBox 39"/>
+          <p:cNvSpPr txBox="1"/>
+          <p:nvPr/>
+        </p:nvSpPr>
+        <p:spPr>
+          <a:xfrm>
+            <a:off x="5921680" y="1945178"/>
+            <a:ext cx="2090004" cy="149629"/>
+          </a:xfrm>
+          <a:prstGeom prst="rect">
+            <a:avLst/>
+          </a:prstGeom>
+          <a:noFill/>
+          <a:ln>
+            <a:noFill/>
+          </a:ln>
+        </p:spPr>
+        <p:txBody>
+          <a:bodyPr wrap="square" anchor="ctr" lIns="0" rIns="0" tIns="0" bIns="0">
+            <a:spAutoFit/>
+          </a:bodyPr>
+          <a:lstStyle/>
+          <a:p>
+            <a:pPr algn="ctr">
+              <a:spcBef>
+                <a:spcPts val="0"/>
+              </a:spcBef>
+              <a:spcAft>
+                <a:spcPts val="0"/>
+              </a:spcAft>
+            </a:pPr>
+            <a:r>
+              <a:rPr sz="1240" b="1" i="0">
                 <a:solidFill>
                   <a:srgbClr val="1A1A2E"/>
                 </a:solidFill>
-                <a:latin typeface="宋体" panose="02010600030101010101" pitchFamily="2" charset="-122"/>
-                <a:ea typeface="宋体" panose="02010600030101010101" pitchFamily="2" charset="-122"/>
+                <a:latin typeface="Microsoft YaHei"/>
+              </a:rPr>
+              <a:t>任务调度器</a:t>
+            </a:r>
+          </a:p>
+        </p:txBody>
+      </p:sp>
+      <p:sp>
+        <p:nvSpPr>
+          <p:cNvPr id="41" name="TextBox 40"/>
+          <p:cNvSpPr txBox="1"/>
+          <p:nvPr/>
+        </p:nvSpPr>
+        <p:spPr>
+          <a:xfrm>
+            <a:off x="5936194" y="2144683"/>
+            <a:ext cx="2060977" cy="99752"/>
+          </a:xfrm>
+          <a:prstGeom prst="rect">
+            <a:avLst/>
+          </a:prstGeom>
+          <a:noFill/>
+          <a:ln>
+            <a:noFill/>
+          </a:ln>
+        </p:spPr>
+        <p:txBody>
+          <a:bodyPr wrap="square" anchor="ctr" lIns="0" rIns="0" tIns="0" bIns="0">
+            <a:spAutoFit/>
+          </a:bodyPr>
+          <a:lstStyle/>
+          <a:p>
+            <a:pPr algn="ctr">
+              <a:spcBef>
+                <a:spcPts val="0"/>
+              </a:spcBef>
+              <a:spcAft>
+                <a:spcPts val="0"/>
+              </a:spcAft>
+            </a:pPr>
+            <a:r>
+              <a:rPr sz="950" b="0" i="0">
+                <a:solidFill>
+                  <a:srgbClr val="555555"/>
+                </a:solidFill>
+                <a:latin typeface="Microsoft YaHei"/>
+              </a:rPr>
+              <a:t>异步调度</a:t>
+            </a:r>
+          </a:p>
+        </p:txBody>
+      </p:sp>
+      <p:sp>
+        <p:nvSpPr>
+          <p:cNvPr id="42" name="Rectangle 41"/>
+          <p:cNvSpPr/>
+          <p:nvPr/>
+        </p:nvSpPr>
+        <p:spPr>
+          <a:xfrm>
+            <a:off x="471702" y="2712027"/>
+            <a:ext cx="1959379" cy="561109"/>
+          </a:xfrm>
+          <a:prstGeom prst="rect">
+            <a:avLst/>
+          </a:prstGeom>
+          <a:solidFill>
+            <a:srgbClr val="FFFFFF"/>
+          </a:solidFill>
+          <a:ln w="13970">
+            <a:solidFill>
+              <a:srgbClr val="546E7A"/>
+            </a:solidFill>
+          </a:ln>
+        </p:spPr>
+        <p:style>
+          <a:lnRef idx="1">
+            <a:schemeClr val="accent1"/>
+          </a:lnRef>
+          <a:fillRef idx="3">
+            <a:schemeClr val="accent1"/>
+          </a:fillRef>
+          <a:effectRef idx="2">
+            <a:schemeClr val="accent1"/>
+          </a:effectRef>
+          <a:fontRef idx="minor">
+            <a:schemeClr val="lt1"/>
+          </a:fontRef>
+        </p:style>
+        <p:txBody>
+          <a:bodyPr rtlCol="0" anchor="ctr"/>
+          <a:lstStyle/>
+          <a:p>
+            <a:pPr algn="ctr"/>
+          </a:p>
+        </p:txBody>
+      </p:sp>
+      <p:sp>
+        <p:nvSpPr>
+          <p:cNvPr id="43" name="Rectangle 42"/>
+          <p:cNvSpPr/>
+          <p:nvPr/>
+        </p:nvSpPr>
+        <p:spPr>
+          <a:xfrm>
+            <a:off x="2235144" y="2749434"/>
+            <a:ext cx="137882" cy="143394"/>
+          </a:xfrm>
+          <a:prstGeom prst="rect">
+            <a:avLst/>
+          </a:prstGeom>
+          <a:solidFill>
+            <a:srgbClr val="FFFFFF"/>
+          </a:solidFill>
+          <a:ln w="10160">
+            <a:solidFill>
+              <a:srgbClr val="546E7A"/>
+            </a:solidFill>
+          </a:ln>
+        </p:spPr>
+        <p:style>
+          <a:lnRef idx="1">
+            <a:schemeClr val="accent1"/>
+          </a:lnRef>
+          <a:fillRef idx="3">
+            <a:schemeClr val="accent1"/>
+          </a:fillRef>
+          <a:effectRef idx="2">
+            <a:schemeClr val="accent1"/>
+          </a:effectRef>
+          <a:fontRef idx="minor">
+            <a:schemeClr val="lt1"/>
+          </a:fontRef>
+        </p:style>
+        <p:txBody>
+          <a:bodyPr rtlCol="0" anchor="ctr"/>
+          <a:lstStyle/>
+          <a:p>
+            <a:pPr algn="ctr"/>
+          </a:p>
+        </p:txBody>
+      </p:sp>
+      <p:sp>
+        <p:nvSpPr>
+          <p:cNvPr id="44" name="Rectangle 43"/>
+          <p:cNvSpPr/>
+          <p:nvPr/>
+        </p:nvSpPr>
+        <p:spPr>
+          <a:xfrm>
+            <a:off x="2206116" y="2761903"/>
+            <a:ext cx="58055" cy="41148"/>
+          </a:xfrm>
+          <a:prstGeom prst="rect">
+            <a:avLst/>
+          </a:prstGeom>
+          <a:solidFill>
+            <a:srgbClr val="FFFFFF"/>
+          </a:solidFill>
+          <a:ln w="10160">
+            <a:solidFill>
+              <a:srgbClr val="546E7A"/>
+            </a:solidFill>
+          </a:ln>
+        </p:spPr>
+        <p:style>
+          <a:lnRef idx="1">
+            <a:schemeClr val="accent1"/>
+          </a:lnRef>
+          <a:fillRef idx="3">
+            <a:schemeClr val="accent1"/>
+          </a:fillRef>
+          <a:effectRef idx="2">
+            <a:schemeClr val="accent1"/>
+          </a:effectRef>
+          <a:fontRef idx="minor">
+            <a:schemeClr val="lt1"/>
+          </a:fontRef>
+        </p:style>
+        <p:txBody>
+          <a:bodyPr rtlCol="0" anchor="ctr"/>
+          <a:lstStyle/>
+          <a:p>
+            <a:pPr algn="ctr"/>
+          </a:p>
+        </p:txBody>
+      </p:sp>
+      <p:sp>
+        <p:nvSpPr>
+          <p:cNvPr id="45" name="Rectangle 44"/>
+          <p:cNvSpPr/>
+          <p:nvPr/>
+        </p:nvSpPr>
+        <p:spPr>
+          <a:xfrm>
+            <a:off x="2206116" y="2816767"/>
+            <a:ext cx="58055" cy="41148"/>
+          </a:xfrm>
+          <a:prstGeom prst="rect">
+            <a:avLst/>
+          </a:prstGeom>
+          <a:solidFill>
+            <a:srgbClr val="FFFFFF"/>
+          </a:solidFill>
+          <a:ln w="10160">
+            <a:solidFill>
+              <a:srgbClr val="546E7A"/>
+            </a:solidFill>
+          </a:ln>
+        </p:spPr>
+        <p:style>
+          <a:lnRef idx="1">
+            <a:schemeClr val="accent1"/>
+          </a:lnRef>
+          <a:fillRef idx="3">
+            <a:schemeClr val="accent1"/>
+          </a:fillRef>
+          <a:effectRef idx="2">
+            <a:schemeClr val="accent1"/>
+          </a:effectRef>
+          <a:fontRef idx="minor">
+            <a:schemeClr val="lt1"/>
+          </a:fontRef>
+        </p:style>
+        <p:txBody>
+          <a:bodyPr rtlCol="0" anchor="ctr"/>
+          <a:lstStyle/>
+          <a:p>
+            <a:pPr algn="ctr"/>
+          </a:p>
+        </p:txBody>
+      </p:sp>
+      <p:sp>
+        <p:nvSpPr>
+          <p:cNvPr id="46" name="TextBox 45"/>
+          <p:cNvSpPr txBox="1"/>
+          <p:nvPr/>
+        </p:nvSpPr>
+        <p:spPr>
+          <a:xfrm>
+            <a:off x="587813" y="2761903"/>
+            <a:ext cx="1596531" cy="99752"/>
+          </a:xfrm>
+          <a:prstGeom prst="rect">
+            <a:avLst/>
+          </a:prstGeom>
+          <a:noFill/>
+          <a:ln>
+            <a:noFill/>
+          </a:ln>
+        </p:spPr>
+        <p:txBody>
+          <a:bodyPr wrap="square" anchor="t" lIns="0" rIns="0" tIns="0" bIns="0">
+            <a:spAutoFit/>
+          </a:bodyPr>
+          <a:lstStyle/>
+          <a:p>
+            <a:pPr algn="ctr">
+              <a:spcBef>
+                <a:spcPts val="0"/>
+              </a:spcBef>
+              <a:spcAft>
+                <a:spcPts val="0"/>
+              </a:spcAft>
+            </a:pPr>
+            <a:r>
+              <a:rPr sz="830" b="0" i="1">
+                <a:solidFill>
+                  <a:srgbClr val="555555"/>
+                </a:solidFill>
+                <a:latin typeface="Microsoft YaHei"/>
+              </a:rPr>
+              <a:t>«component»</a:t>
+            </a:r>
+          </a:p>
+        </p:txBody>
+      </p:sp>
+      <p:sp>
+        <p:nvSpPr>
+          <p:cNvPr id="47" name="TextBox 46"/>
+          <p:cNvSpPr txBox="1"/>
+          <p:nvPr/>
+        </p:nvSpPr>
+        <p:spPr>
+          <a:xfrm>
+            <a:off x="587813" y="2899063"/>
+            <a:ext cx="1727156" cy="149629"/>
+          </a:xfrm>
+          <a:prstGeom prst="rect">
+            <a:avLst/>
+          </a:prstGeom>
+          <a:noFill/>
+          <a:ln>
+            <a:noFill/>
+          </a:ln>
+        </p:spPr>
+        <p:txBody>
+          <a:bodyPr wrap="square" anchor="ctr" lIns="0" rIns="0" tIns="0" bIns="0">
+            <a:spAutoFit/>
+          </a:bodyPr>
+          <a:lstStyle/>
+          <a:p>
+            <a:pPr algn="ctr">
+              <a:spcBef>
+                <a:spcPts val="0"/>
+              </a:spcBef>
+              <a:spcAft>
+                <a:spcPts val="0"/>
+              </a:spcAft>
+            </a:pPr>
+            <a:r>
+              <a:rPr sz="1240" b="1" i="0">
+                <a:solidFill>
+                  <a:srgbClr val="1A1A2E"/>
+                </a:solidFill>
+                <a:latin typeface="Microsoft YaHei"/>
+              </a:rPr>
+              <a:t>CVE 知识库</a:t>
+            </a:r>
+          </a:p>
+        </p:txBody>
+      </p:sp>
+      <p:sp>
+        <p:nvSpPr>
+          <p:cNvPr id="48" name="TextBox 47"/>
+          <p:cNvSpPr txBox="1"/>
+          <p:nvPr/>
+        </p:nvSpPr>
+        <p:spPr>
+          <a:xfrm>
+            <a:off x="602327" y="3098569"/>
+            <a:ext cx="1698128" cy="99752"/>
+          </a:xfrm>
+          <a:prstGeom prst="rect">
+            <a:avLst/>
+          </a:prstGeom>
+          <a:noFill/>
+          <a:ln>
+            <a:noFill/>
+          </a:ln>
+        </p:spPr>
+        <p:txBody>
+          <a:bodyPr wrap="square" anchor="ctr" lIns="0" rIns="0" tIns="0" bIns="0">
+            <a:spAutoFit/>
+          </a:bodyPr>
+          <a:lstStyle/>
+          <a:p>
+            <a:pPr algn="ctr">
+              <a:spcBef>
+                <a:spcPts val="0"/>
+              </a:spcBef>
+              <a:spcAft>
+                <a:spcPts val="0"/>
+              </a:spcAft>
+            </a:pPr>
+            <a:r>
+              <a:rPr sz="950" b="0" i="0">
+                <a:solidFill>
+                  <a:srgbClr val="555555"/>
+                </a:solidFill>
+                <a:latin typeface="Microsoft YaHei"/>
+              </a:rPr>
+              <a:t>导入 / 检索</a:t>
+            </a:r>
+          </a:p>
+        </p:txBody>
+      </p:sp>
+      <p:sp>
+        <p:nvSpPr>
+          <p:cNvPr id="49" name="Rectangle 48"/>
+          <p:cNvSpPr/>
+          <p:nvPr/>
+        </p:nvSpPr>
+        <p:spPr>
+          <a:xfrm>
+            <a:off x="2648790" y="2712027"/>
+            <a:ext cx="1959379" cy="561109"/>
+          </a:xfrm>
+          <a:prstGeom prst="rect">
+            <a:avLst/>
+          </a:prstGeom>
+          <a:solidFill>
+            <a:srgbClr val="FFFFFF"/>
+          </a:solidFill>
+          <a:ln w="13970">
+            <a:solidFill>
+              <a:srgbClr val="546E7A"/>
+            </a:solidFill>
+          </a:ln>
+        </p:spPr>
+        <p:style>
+          <a:lnRef idx="1">
+            <a:schemeClr val="accent1"/>
+          </a:lnRef>
+          <a:fillRef idx="3">
+            <a:schemeClr val="accent1"/>
+          </a:fillRef>
+          <a:effectRef idx="2">
+            <a:schemeClr val="accent1"/>
+          </a:effectRef>
+          <a:fontRef idx="minor">
+            <a:schemeClr val="lt1"/>
+          </a:fontRef>
+        </p:style>
+        <p:txBody>
+          <a:bodyPr rtlCol="0" anchor="ctr"/>
+          <a:lstStyle/>
+          <a:p>
+            <a:pPr algn="ctr"/>
+          </a:p>
+        </p:txBody>
+      </p:sp>
+      <p:sp>
+        <p:nvSpPr>
+          <p:cNvPr id="50" name="Rectangle 49"/>
+          <p:cNvSpPr/>
+          <p:nvPr/>
+        </p:nvSpPr>
+        <p:spPr>
+          <a:xfrm>
+            <a:off x="4412232" y="2749434"/>
+            <a:ext cx="137882" cy="143394"/>
+          </a:xfrm>
+          <a:prstGeom prst="rect">
+            <a:avLst/>
+          </a:prstGeom>
+          <a:solidFill>
+            <a:srgbClr val="FFFFFF"/>
+          </a:solidFill>
+          <a:ln w="10160">
+            <a:solidFill>
+              <a:srgbClr val="546E7A"/>
+            </a:solidFill>
+          </a:ln>
+        </p:spPr>
+        <p:style>
+          <a:lnRef idx="1">
+            <a:schemeClr val="accent1"/>
+          </a:lnRef>
+          <a:fillRef idx="3">
+            <a:schemeClr val="accent1"/>
+          </a:fillRef>
+          <a:effectRef idx="2">
+            <a:schemeClr val="accent1"/>
+          </a:effectRef>
+          <a:fontRef idx="minor">
+            <a:schemeClr val="lt1"/>
+          </a:fontRef>
+        </p:style>
+        <p:txBody>
+          <a:bodyPr rtlCol="0" anchor="ctr"/>
+          <a:lstStyle/>
+          <a:p>
+            <a:pPr algn="ctr"/>
+          </a:p>
+        </p:txBody>
+      </p:sp>
+      <p:sp>
+        <p:nvSpPr>
+          <p:cNvPr id="51" name="Rectangle 50"/>
+          <p:cNvSpPr/>
+          <p:nvPr/>
+        </p:nvSpPr>
+        <p:spPr>
+          <a:xfrm>
+            <a:off x="4383204" y="2761903"/>
+            <a:ext cx="58055" cy="41148"/>
+          </a:xfrm>
+          <a:prstGeom prst="rect">
+            <a:avLst/>
+          </a:prstGeom>
+          <a:solidFill>
+            <a:srgbClr val="FFFFFF"/>
+          </a:solidFill>
+          <a:ln w="10160">
+            <a:solidFill>
+              <a:srgbClr val="546E7A"/>
+            </a:solidFill>
+          </a:ln>
+        </p:spPr>
+        <p:style>
+          <a:lnRef idx="1">
+            <a:schemeClr val="accent1"/>
+          </a:lnRef>
+          <a:fillRef idx="3">
+            <a:schemeClr val="accent1"/>
+          </a:fillRef>
+          <a:effectRef idx="2">
+            <a:schemeClr val="accent1"/>
+          </a:effectRef>
+          <a:fontRef idx="minor">
+            <a:schemeClr val="lt1"/>
+          </a:fontRef>
+        </p:style>
+        <p:txBody>
+          <a:bodyPr rtlCol="0" anchor="ctr"/>
+          <a:lstStyle/>
+          <a:p>
+            <a:pPr algn="ctr"/>
+          </a:p>
+        </p:txBody>
+      </p:sp>
+      <p:sp>
+        <p:nvSpPr>
+          <p:cNvPr id="52" name="Rectangle 51"/>
+          <p:cNvSpPr/>
+          <p:nvPr/>
+        </p:nvSpPr>
+        <p:spPr>
+          <a:xfrm>
+            <a:off x="4383204" y="2816767"/>
+            <a:ext cx="58055" cy="41148"/>
+          </a:xfrm>
+          <a:prstGeom prst="rect">
+            <a:avLst/>
+          </a:prstGeom>
+          <a:solidFill>
+            <a:srgbClr val="FFFFFF"/>
+          </a:solidFill>
+          <a:ln w="10160">
+            <a:solidFill>
+              <a:srgbClr val="546E7A"/>
+            </a:solidFill>
+          </a:ln>
+        </p:spPr>
+        <p:style>
+          <a:lnRef idx="1">
+            <a:schemeClr val="accent1"/>
+          </a:lnRef>
+          <a:fillRef idx="3">
+            <a:schemeClr val="accent1"/>
+          </a:fillRef>
+          <a:effectRef idx="2">
+            <a:schemeClr val="accent1"/>
+          </a:effectRef>
+          <a:fontRef idx="minor">
+            <a:schemeClr val="lt1"/>
+          </a:fontRef>
+        </p:style>
+        <p:txBody>
+          <a:bodyPr rtlCol="0" anchor="ctr"/>
+          <a:lstStyle/>
+          <a:p>
+            <a:pPr algn="ctr"/>
+          </a:p>
+        </p:txBody>
+      </p:sp>
+      <p:sp>
+        <p:nvSpPr>
+          <p:cNvPr id="53" name="TextBox 52"/>
+          <p:cNvSpPr txBox="1"/>
+          <p:nvPr/>
+        </p:nvSpPr>
+        <p:spPr>
+          <a:xfrm>
+            <a:off x="2764902" y="2761903"/>
+            <a:ext cx="1596531" cy="99752"/>
+          </a:xfrm>
+          <a:prstGeom prst="rect">
+            <a:avLst/>
+          </a:prstGeom>
+          <a:noFill/>
+          <a:ln>
+            <a:noFill/>
+          </a:ln>
+        </p:spPr>
+        <p:txBody>
+          <a:bodyPr wrap="square" anchor="t" lIns="0" rIns="0" tIns="0" bIns="0">
+            <a:spAutoFit/>
+          </a:bodyPr>
+          <a:lstStyle/>
+          <a:p>
+            <a:pPr algn="ctr">
+              <a:spcBef>
+                <a:spcPts val="0"/>
+              </a:spcBef>
+              <a:spcAft>
+                <a:spcPts val="0"/>
+              </a:spcAft>
+            </a:pPr>
+            <a:r>
+              <a:rPr sz="830" b="0" i="1">
+                <a:solidFill>
+                  <a:srgbClr val="555555"/>
+                </a:solidFill>
+                <a:latin typeface="Microsoft YaHei"/>
+              </a:rPr>
+              <a:t>«component»</a:t>
+            </a:r>
+          </a:p>
+        </p:txBody>
+      </p:sp>
+      <p:sp>
+        <p:nvSpPr>
+          <p:cNvPr id="54" name="TextBox 53"/>
+          <p:cNvSpPr txBox="1"/>
+          <p:nvPr/>
+        </p:nvSpPr>
+        <p:spPr>
+          <a:xfrm>
+            <a:off x="2764902" y="2899063"/>
+            <a:ext cx="1727156" cy="149629"/>
+          </a:xfrm>
+          <a:prstGeom prst="rect">
+            <a:avLst/>
+          </a:prstGeom>
+          <a:noFill/>
+          <a:ln>
+            <a:noFill/>
+          </a:ln>
+        </p:spPr>
+        <p:txBody>
+          <a:bodyPr wrap="square" anchor="ctr" lIns="0" rIns="0" tIns="0" bIns="0">
+            <a:spAutoFit/>
+          </a:bodyPr>
+          <a:lstStyle/>
+          <a:p>
+            <a:pPr algn="ctr">
+              <a:spcBef>
+                <a:spcPts val="0"/>
+              </a:spcBef>
+              <a:spcAft>
+                <a:spcPts val="0"/>
+              </a:spcAft>
+            </a:pPr>
+            <a:r>
+              <a:rPr sz="1240" b="1" i="0">
+                <a:solidFill>
+                  <a:srgbClr val="1A1A2E"/>
+                </a:solidFill>
+                <a:latin typeface="Microsoft YaHei"/>
+              </a:rPr>
+              <a:t>策略生成</a:t>
+            </a:r>
+          </a:p>
+        </p:txBody>
+      </p:sp>
+      <p:sp>
+        <p:nvSpPr>
+          <p:cNvPr id="55" name="TextBox 54"/>
+          <p:cNvSpPr txBox="1"/>
+          <p:nvPr/>
+        </p:nvSpPr>
+        <p:spPr>
+          <a:xfrm>
+            <a:off x="2779416" y="3098569"/>
+            <a:ext cx="1698128" cy="99752"/>
+          </a:xfrm>
+          <a:prstGeom prst="rect">
+            <a:avLst/>
+          </a:prstGeom>
+          <a:noFill/>
+          <a:ln>
+            <a:noFill/>
+          </a:ln>
+        </p:spPr>
+        <p:txBody>
+          <a:bodyPr wrap="square" anchor="ctr" lIns="0" rIns="0" tIns="0" bIns="0">
+            <a:spAutoFit/>
+          </a:bodyPr>
+          <a:lstStyle/>
+          <a:p>
+            <a:pPr algn="ctr">
+              <a:spcBef>
+                <a:spcPts val="0"/>
+              </a:spcBef>
+              <a:spcAft>
+                <a:spcPts val="0"/>
+              </a:spcAft>
+            </a:pPr>
+            <a:r>
+              <a:rPr sz="950" b="0" i="0">
+                <a:solidFill>
+                  <a:srgbClr val="555555"/>
+                </a:solidFill>
+                <a:latin typeface="Microsoft YaHei"/>
+              </a:rPr>
+              <a:t>候选生成</a:t>
+            </a:r>
+          </a:p>
+        </p:txBody>
+      </p:sp>
+      <p:sp>
+        <p:nvSpPr>
+          <p:cNvPr id="56" name="Rectangle 55"/>
+          <p:cNvSpPr/>
+          <p:nvPr/>
+        </p:nvSpPr>
+        <p:spPr>
+          <a:xfrm>
+            <a:off x="4825879" y="2712027"/>
+            <a:ext cx="1959379" cy="561109"/>
+          </a:xfrm>
+          <a:prstGeom prst="rect">
+            <a:avLst/>
+          </a:prstGeom>
+          <a:solidFill>
+            <a:srgbClr val="FFFFFF"/>
+          </a:solidFill>
+          <a:ln w="13970">
+            <a:solidFill>
+              <a:srgbClr val="546E7A"/>
+            </a:solidFill>
+          </a:ln>
+        </p:spPr>
+        <p:style>
+          <a:lnRef idx="1">
+            <a:schemeClr val="accent1"/>
+          </a:lnRef>
+          <a:fillRef idx="3">
+            <a:schemeClr val="accent1"/>
+          </a:fillRef>
+          <a:effectRef idx="2">
+            <a:schemeClr val="accent1"/>
+          </a:effectRef>
+          <a:fontRef idx="minor">
+            <a:schemeClr val="lt1"/>
+          </a:fontRef>
+        </p:style>
+        <p:txBody>
+          <a:bodyPr rtlCol="0" anchor="ctr"/>
+          <a:lstStyle/>
+          <a:p>
+            <a:pPr algn="ctr"/>
+          </a:p>
+        </p:txBody>
+      </p:sp>
+      <p:sp>
+        <p:nvSpPr>
+          <p:cNvPr id="57" name="Rectangle 56"/>
+          <p:cNvSpPr/>
+          <p:nvPr/>
+        </p:nvSpPr>
+        <p:spPr>
+          <a:xfrm>
+            <a:off x="6589320" y="2749434"/>
+            <a:ext cx="137882" cy="143394"/>
+          </a:xfrm>
+          <a:prstGeom prst="rect">
+            <a:avLst/>
+          </a:prstGeom>
+          <a:solidFill>
+            <a:srgbClr val="FFFFFF"/>
+          </a:solidFill>
+          <a:ln w="10160">
+            <a:solidFill>
+              <a:srgbClr val="546E7A"/>
+            </a:solidFill>
+          </a:ln>
+        </p:spPr>
+        <p:style>
+          <a:lnRef idx="1">
+            <a:schemeClr val="accent1"/>
+          </a:lnRef>
+          <a:fillRef idx="3">
+            <a:schemeClr val="accent1"/>
+          </a:fillRef>
+          <a:effectRef idx="2">
+            <a:schemeClr val="accent1"/>
+          </a:effectRef>
+          <a:fontRef idx="minor">
+            <a:schemeClr val="lt1"/>
+          </a:fontRef>
+        </p:style>
+        <p:txBody>
+          <a:bodyPr rtlCol="0" anchor="ctr"/>
+          <a:lstStyle/>
+          <a:p>
+            <a:pPr algn="ctr"/>
+          </a:p>
+        </p:txBody>
+      </p:sp>
+      <p:sp>
+        <p:nvSpPr>
+          <p:cNvPr id="58" name="Rectangle 57"/>
+          <p:cNvSpPr/>
+          <p:nvPr/>
+        </p:nvSpPr>
+        <p:spPr>
+          <a:xfrm>
+            <a:off x="6560293" y="2761903"/>
+            <a:ext cx="58055" cy="41148"/>
+          </a:xfrm>
+          <a:prstGeom prst="rect">
+            <a:avLst/>
+          </a:prstGeom>
+          <a:solidFill>
+            <a:srgbClr val="FFFFFF"/>
+          </a:solidFill>
+          <a:ln w="10160">
+            <a:solidFill>
+              <a:srgbClr val="546E7A"/>
+            </a:solidFill>
+          </a:ln>
+        </p:spPr>
+        <p:style>
+          <a:lnRef idx="1">
+            <a:schemeClr val="accent1"/>
+          </a:lnRef>
+          <a:fillRef idx="3">
+            <a:schemeClr val="accent1"/>
+          </a:fillRef>
+          <a:effectRef idx="2">
+            <a:schemeClr val="accent1"/>
+          </a:effectRef>
+          <a:fontRef idx="minor">
+            <a:schemeClr val="lt1"/>
+          </a:fontRef>
+        </p:style>
+        <p:txBody>
+          <a:bodyPr rtlCol="0" anchor="ctr"/>
+          <a:lstStyle/>
+          <a:p>
+            <a:pPr algn="ctr"/>
+          </a:p>
+        </p:txBody>
+      </p:sp>
+      <p:sp>
+        <p:nvSpPr>
+          <p:cNvPr id="59" name="Rectangle 58"/>
+          <p:cNvSpPr/>
+          <p:nvPr/>
+        </p:nvSpPr>
+        <p:spPr>
+          <a:xfrm>
+            <a:off x="6560293" y="2816767"/>
+            <a:ext cx="58055" cy="41148"/>
+          </a:xfrm>
+          <a:prstGeom prst="rect">
+            <a:avLst/>
+          </a:prstGeom>
+          <a:solidFill>
+            <a:srgbClr val="FFFFFF"/>
+          </a:solidFill>
+          <a:ln w="10160">
+            <a:solidFill>
+              <a:srgbClr val="546E7A"/>
+            </a:solidFill>
+          </a:ln>
+        </p:spPr>
+        <p:style>
+          <a:lnRef idx="1">
+            <a:schemeClr val="accent1"/>
+          </a:lnRef>
+          <a:fillRef idx="3">
+            <a:schemeClr val="accent1"/>
+          </a:fillRef>
+          <a:effectRef idx="2">
+            <a:schemeClr val="accent1"/>
+          </a:effectRef>
+          <a:fontRef idx="minor">
+            <a:schemeClr val="lt1"/>
+          </a:fontRef>
+        </p:style>
+        <p:txBody>
+          <a:bodyPr rtlCol="0" anchor="ctr"/>
+          <a:lstStyle/>
+          <a:p>
+            <a:pPr algn="ctr"/>
+          </a:p>
+        </p:txBody>
+      </p:sp>
+      <p:sp>
+        <p:nvSpPr>
+          <p:cNvPr id="60" name="TextBox 59"/>
+          <p:cNvSpPr txBox="1"/>
+          <p:nvPr/>
+        </p:nvSpPr>
+        <p:spPr>
+          <a:xfrm>
+            <a:off x="4941990" y="2761903"/>
+            <a:ext cx="1596531" cy="99752"/>
+          </a:xfrm>
+          <a:prstGeom prst="rect">
+            <a:avLst/>
+          </a:prstGeom>
+          <a:noFill/>
+          <a:ln>
+            <a:noFill/>
+          </a:ln>
+        </p:spPr>
+        <p:txBody>
+          <a:bodyPr wrap="square" anchor="t" lIns="0" rIns="0" tIns="0" bIns="0">
+            <a:spAutoFit/>
+          </a:bodyPr>
+          <a:lstStyle/>
+          <a:p>
+            <a:pPr algn="ctr">
+              <a:spcBef>
+                <a:spcPts val="0"/>
+              </a:spcBef>
+              <a:spcAft>
+                <a:spcPts val="0"/>
+              </a:spcAft>
+            </a:pPr>
+            <a:r>
+              <a:rPr sz="830" b="0" i="1">
+                <a:solidFill>
+                  <a:srgbClr val="555555"/>
+                </a:solidFill>
+                <a:latin typeface="Microsoft YaHei"/>
+              </a:rPr>
+              <a:t>«component»</a:t>
+            </a:r>
+          </a:p>
+        </p:txBody>
+      </p:sp>
+      <p:sp>
+        <p:nvSpPr>
+          <p:cNvPr id="61" name="TextBox 60"/>
+          <p:cNvSpPr txBox="1"/>
+          <p:nvPr/>
+        </p:nvSpPr>
+        <p:spPr>
+          <a:xfrm>
+            <a:off x="4941990" y="2899063"/>
+            <a:ext cx="1727156" cy="149629"/>
+          </a:xfrm>
+          <a:prstGeom prst="rect">
+            <a:avLst/>
+          </a:prstGeom>
+          <a:noFill/>
+          <a:ln>
+            <a:noFill/>
+          </a:ln>
+        </p:spPr>
+        <p:txBody>
+          <a:bodyPr wrap="square" anchor="ctr" lIns="0" rIns="0" tIns="0" bIns="0">
+            <a:spAutoFit/>
+          </a:bodyPr>
+          <a:lstStyle/>
+          <a:p>
+            <a:pPr algn="ctr">
+              <a:spcBef>
+                <a:spcPts val="0"/>
+              </a:spcBef>
+              <a:spcAft>
+                <a:spcPts val="0"/>
+              </a:spcAft>
+            </a:pPr>
+            <a:r>
+              <a:rPr sz="1240" b="1" i="0">
+                <a:solidFill>
+                  <a:srgbClr val="1A1A2E"/>
+                </a:solidFill>
+                <a:latin typeface="Microsoft YaHei"/>
+              </a:rPr>
+              <a:t>评审与排序</a:t>
+            </a:r>
+          </a:p>
+        </p:txBody>
+      </p:sp>
+      <p:sp>
+        <p:nvSpPr>
+          <p:cNvPr id="62" name="TextBox 61"/>
+          <p:cNvSpPr txBox="1"/>
+          <p:nvPr/>
+        </p:nvSpPr>
+        <p:spPr>
+          <a:xfrm>
+            <a:off x="4956504" y="3098569"/>
+            <a:ext cx="1698128" cy="99752"/>
+          </a:xfrm>
+          <a:prstGeom prst="rect">
+            <a:avLst/>
+          </a:prstGeom>
+          <a:noFill/>
+          <a:ln>
+            <a:noFill/>
+          </a:ln>
+        </p:spPr>
+        <p:txBody>
+          <a:bodyPr wrap="square" anchor="ctr" lIns="0" rIns="0" tIns="0" bIns="0">
+            <a:spAutoFit/>
+          </a:bodyPr>
+          <a:lstStyle/>
+          <a:p>
+            <a:pPr algn="ctr">
+              <a:spcBef>
+                <a:spcPts val="0"/>
+              </a:spcBef>
+              <a:spcAft>
+                <a:spcPts val="0"/>
+              </a:spcAft>
+            </a:pPr>
+            <a:r>
+              <a:rPr sz="950" b="0" i="0">
+                <a:solidFill>
+                  <a:srgbClr val="555555"/>
+                </a:solidFill>
+                <a:latin typeface="Microsoft YaHei"/>
+              </a:rPr>
+              <a:t>评审聚合</a:t>
+            </a:r>
+          </a:p>
+        </p:txBody>
+      </p:sp>
+      <p:sp>
+        <p:nvSpPr>
+          <p:cNvPr id="63" name="Rectangle 62"/>
+          <p:cNvSpPr/>
+          <p:nvPr/>
+        </p:nvSpPr>
+        <p:spPr>
+          <a:xfrm>
+            <a:off x="7002967" y="2712027"/>
+            <a:ext cx="1959379" cy="561109"/>
+          </a:xfrm>
+          <a:prstGeom prst="rect">
+            <a:avLst/>
+          </a:prstGeom>
+          <a:solidFill>
+            <a:srgbClr val="FFFFFF"/>
+          </a:solidFill>
+          <a:ln w="13970">
+            <a:solidFill>
+              <a:srgbClr val="546E7A"/>
+            </a:solidFill>
+          </a:ln>
+        </p:spPr>
+        <p:style>
+          <a:lnRef idx="1">
+            <a:schemeClr val="accent1"/>
+          </a:lnRef>
+          <a:fillRef idx="3">
+            <a:schemeClr val="accent1"/>
+          </a:fillRef>
+          <a:effectRef idx="2">
+            <a:schemeClr val="accent1"/>
+          </a:effectRef>
+          <a:fontRef idx="minor">
+            <a:schemeClr val="lt1"/>
+          </a:fontRef>
+        </p:style>
+        <p:txBody>
+          <a:bodyPr rtlCol="0" anchor="ctr"/>
+          <a:lstStyle/>
+          <a:p>
+            <a:pPr algn="ctr"/>
+          </a:p>
+        </p:txBody>
+      </p:sp>
+      <p:sp>
+        <p:nvSpPr>
+          <p:cNvPr id="64" name="Rectangle 63"/>
+          <p:cNvSpPr/>
+          <p:nvPr/>
+        </p:nvSpPr>
+        <p:spPr>
+          <a:xfrm>
+            <a:off x="8766409" y="2749434"/>
+            <a:ext cx="137882" cy="143394"/>
+          </a:xfrm>
+          <a:prstGeom prst="rect">
+            <a:avLst/>
+          </a:prstGeom>
+          <a:solidFill>
+            <a:srgbClr val="FFFFFF"/>
+          </a:solidFill>
+          <a:ln w="10160">
+            <a:solidFill>
+              <a:srgbClr val="546E7A"/>
+            </a:solidFill>
+          </a:ln>
+        </p:spPr>
+        <p:style>
+          <a:lnRef idx="1">
+            <a:schemeClr val="accent1"/>
+          </a:lnRef>
+          <a:fillRef idx="3">
+            <a:schemeClr val="accent1"/>
+          </a:fillRef>
+          <a:effectRef idx="2">
+            <a:schemeClr val="accent1"/>
+          </a:effectRef>
+          <a:fontRef idx="minor">
+            <a:schemeClr val="lt1"/>
+          </a:fontRef>
+        </p:style>
+        <p:txBody>
+          <a:bodyPr rtlCol="0" anchor="ctr"/>
+          <a:lstStyle/>
+          <a:p>
+            <a:pPr algn="ctr"/>
+          </a:p>
+        </p:txBody>
+      </p:sp>
+      <p:sp>
+        <p:nvSpPr>
+          <p:cNvPr id="65" name="Rectangle 64"/>
+          <p:cNvSpPr/>
+          <p:nvPr/>
+        </p:nvSpPr>
+        <p:spPr>
+          <a:xfrm>
+            <a:off x="8737381" y="2761903"/>
+            <a:ext cx="58055" cy="41148"/>
+          </a:xfrm>
+          <a:prstGeom prst="rect">
+            <a:avLst/>
+          </a:prstGeom>
+          <a:solidFill>
+            <a:srgbClr val="FFFFFF"/>
+          </a:solidFill>
+          <a:ln w="10160">
+            <a:solidFill>
+              <a:srgbClr val="546E7A"/>
+            </a:solidFill>
+          </a:ln>
+        </p:spPr>
+        <p:style>
+          <a:lnRef idx="1">
+            <a:schemeClr val="accent1"/>
+          </a:lnRef>
+          <a:fillRef idx="3">
+            <a:schemeClr val="accent1"/>
+          </a:fillRef>
+          <a:effectRef idx="2">
+            <a:schemeClr val="accent1"/>
+          </a:effectRef>
+          <a:fontRef idx="minor">
+            <a:schemeClr val="lt1"/>
+          </a:fontRef>
+        </p:style>
+        <p:txBody>
+          <a:bodyPr rtlCol="0" anchor="ctr"/>
+          <a:lstStyle/>
+          <a:p>
+            <a:pPr algn="ctr"/>
+          </a:p>
+        </p:txBody>
+      </p:sp>
+      <p:sp>
+        <p:nvSpPr>
+          <p:cNvPr id="66" name="Rectangle 65"/>
+          <p:cNvSpPr/>
+          <p:nvPr/>
+        </p:nvSpPr>
+        <p:spPr>
+          <a:xfrm>
+            <a:off x="8737381" y="2816767"/>
+            <a:ext cx="58055" cy="41148"/>
+          </a:xfrm>
+          <a:prstGeom prst="rect">
+            <a:avLst/>
+          </a:prstGeom>
+          <a:solidFill>
+            <a:srgbClr val="FFFFFF"/>
+          </a:solidFill>
+          <a:ln w="10160">
+            <a:solidFill>
+              <a:srgbClr val="546E7A"/>
+            </a:solidFill>
+          </a:ln>
+        </p:spPr>
+        <p:style>
+          <a:lnRef idx="1">
+            <a:schemeClr val="accent1"/>
+          </a:lnRef>
+          <a:fillRef idx="3">
+            <a:schemeClr val="accent1"/>
+          </a:fillRef>
+          <a:effectRef idx="2">
+            <a:schemeClr val="accent1"/>
+          </a:effectRef>
+          <a:fontRef idx="minor">
+            <a:schemeClr val="lt1"/>
+          </a:fontRef>
+        </p:style>
+        <p:txBody>
+          <a:bodyPr rtlCol="0" anchor="ctr"/>
+          <a:lstStyle/>
+          <a:p>
+            <a:pPr algn="ctr"/>
+          </a:p>
+        </p:txBody>
+      </p:sp>
+      <p:sp>
+        <p:nvSpPr>
+          <p:cNvPr id="67" name="TextBox 66"/>
+          <p:cNvSpPr txBox="1"/>
+          <p:nvPr/>
+        </p:nvSpPr>
+        <p:spPr>
+          <a:xfrm>
+            <a:off x="7119079" y="2761903"/>
+            <a:ext cx="1596531" cy="99752"/>
+          </a:xfrm>
+          <a:prstGeom prst="rect">
+            <a:avLst/>
+          </a:prstGeom>
+          <a:noFill/>
+          <a:ln>
+            <a:noFill/>
+          </a:ln>
+        </p:spPr>
+        <p:txBody>
+          <a:bodyPr wrap="square" anchor="t" lIns="0" rIns="0" tIns="0" bIns="0">
+            <a:spAutoFit/>
+          </a:bodyPr>
+          <a:lstStyle/>
+          <a:p>
+            <a:pPr algn="ctr">
+              <a:spcBef>
+                <a:spcPts val="0"/>
+              </a:spcBef>
+              <a:spcAft>
+                <a:spcPts val="0"/>
+              </a:spcAft>
+            </a:pPr>
+            <a:r>
+              <a:rPr sz="830" b="0" i="1">
+                <a:solidFill>
+                  <a:srgbClr val="555555"/>
+                </a:solidFill>
+                <a:latin typeface="Microsoft YaHei"/>
+              </a:rPr>
+              <a:t>«component»</a:t>
+            </a:r>
+          </a:p>
+        </p:txBody>
+      </p:sp>
+      <p:sp>
+        <p:nvSpPr>
+          <p:cNvPr id="68" name="TextBox 67"/>
+          <p:cNvSpPr txBox="1"/>
+          <p:nvPr/>
+        </p:nvSpPr>
+        <p:spPr>
+          <a:xfrm>
+            <a:off x="7119079" y="2899063"/>
+            <a:ext cx="1727156" cy="149629"/>
+          </a:xfrm>
+          <a:prstGeom prst="rect">
+            <a:avLst/>
+          </a:prstGeom>
+          <a:noFill/>
+          <a:ln>
+            <a:noFill/>
+          </a:ln>
+        </p:spPr>
+        <p:txBody>
+          <a:bodyPr wrap="square" anchor="ctr" lIns="0" rIns="0" tIns="0" bIns="0">
+            <a:spAutoFit/>
+          </a:bodyPr>
+          <a:lstStyle/>
+          <a:p>
+            <a:pPr algn="ctr">
+              <a:spcBef>
+                <a:spcPts val="0"/>
+              </a:spcBef>
+              <a:spcAft>
+                <a:spcPts val="0"/>
+              </a:spcAft>
+            </a:pPr>
+            <a:r>
+              <a:rPr sz="1240" b="1" i="0">
+                <a:solidFill>
+                  <a:srgbClr val="1A1A2E"/>
+                </a:solidFill>
+                <a:latin typeface="Microsoft YaHei"/>
               </a:rPr>
               <a:t>部署管理</a:t>
             </a:r>
-            <a:endParaRPr sz="2000" b="1" i="0" dirty="0">
-              <a:solidFill>
-                <a:srgbClr val="1A1A2E"/>
-              </a:solidFill>
-              <a:latin typeface="宋体" panose="02010600030101010101" pitchFamily="2" charset="-122"/>
-              <a:ea typeface="宋体" panose="02010600030101010101" pitchFamily="2" charset="-122"/>
-            </a:endParaRPr>
+          </a:p>
+        </p:txBody>
+      </p:sp>
+      <p:sp>
+        <p:nvSpPr>
+          <p:cNvPr id="69" name="TextBox 68"/>
+          <p:cNvSpPr txBox="1"/>
+          <p:nvPr/>
+        </p:nvSpPr>
+        <p:spPr>
+          <a:xfrm>
+            <a:off x="7133593" y="3098569"/>
+            <a:ext cx="1698128" cy="99752"/>
+          </a:xfrm>
+          <a:prstGeom prst="rect">
+            <a:avLst/>
+          </a:prstGeom>
+          <a:noFill/>
+          <a:ln>
+            <a:noFill/>
+          </a:ln>
+        </p:spPr>
+        <p:txBody>
+          <a:bodyPr wrap="square" anchor="ctr" lIns="0" rIns="0" tIns="0" bIns="0">
+            <a:spAutoFit/>
+          </a:bodyPr>
+          <a:lstStyle/>
+          <a:p>
+            <a:pPr algn="ctr">
+              <a:spcBef>
+                <a:spcPts val="0"/>
+              </a:spcBef>
+              <a:spcAft>
+                <a:spcPts val="0"/>
+              </a:spcAft>
+            </a:pPr>
+            <a:r>
+              <a:rPr sz="950" b="0" i="0">
+                <a:solidFill>
+                  <a:srgbClr val="555555"/>
+                </a:solidFill>
+                <a:latin typeface="Microsoft YaHei"/>
+              </a:rPr>
+              <a:t>下发 / 回滚</a:t>
+            </a:r>
+          </a:p>
+        </p:txBody>
+      </p:sp>
+      <p:sp>
+        <p:nvSpPr>
+          <p:cNvPr id="70" name="Rectangle 69"/>
+          <p:cNvSpPr/>
+          <p:nvPr/>
+        </p:nvSpPr>
+        <p:spPr>
+          <a:xfrm>
+            <a:off x="653126" y="4152207"/>
+            <a:ext cx="2757645" cy="673330"/>
+          </a:xfrm>
+          <a:prstGeom prst="rect">
+            <a:avLst/>
+          </a:prstGeom>
+          <a:solidFill>
+            <a:srgbClr val="F9F0FF"/>
+          </a:solidFill>
+          <a:ln w="13970">
+            <a:solidFill>
+              <a:srgbClr val="6A1B9A"/>
+            </a:solidFill>
+          </a:ln>
+        </p:spPr>
+        <p:style>
+          <a:lnRef idx="1">
+            <a:schemeClr val="accent1"/>
+          </a:lnRef>
+          <a:fillRef idx="3">
+            <a:schemeClr val="accent1"/>
+          </a:fillRef>
+          <a:effectRef idx="2">
+            <a:schemeClr val="accent1"/>
+          </a:effectRef>
+          <a:fontRef idx="minor">
+            <a:schemeClr val="lt1"/>
+          </a:fontRef>
+        </p:style>
+        <p:txBody>
+          <a:bodyPr rtlCol="0" anchor="ctr"/>
+          <a:lstStyle/>
+          <a:p>
+            <a:pPr algn="ctr"/>
+          </a:p>
+        </p:txBody>
+      </p:sp>
+      <p:sp>
+        <p:nvSpPr>
+          <p:cNvPr id="71" name="Rectangle 70"/>
+          <p:cNvSpPr/>
+          <p:nvPr/>
+        </p:nvSpPr>
+        <p:spPr>
+          <a:xfrm>
+            <a:off x="3214833" y="4189614"/>
+            <a:ext cx="137882" cy="143394"/>
+          </a:xfrm>
+          <a:prstGeom prst="rect">
+            <a:avLst/>
+          </a:prstGeom>
+          <a:solidFill>
+            <a:srgbClr val="FFFFFF"/>
+          </a:solidFill>
+          <a:ln w="10160">
+            <a:solidFill>
+              <a:srgbClr val="6A1B9A"/>
+            </a:solidFill>
+          </a:ln>
+        </p:spPr>
+        <p:style>
+          <a:lnRef idx="1">
+            <a:schemeClr val="accent1"/>
+          </a:lnRef>
+          <a:fillRef idx="3">
+            <a:schemeClr val="accent1"/>
+          </a:fillRef>
+          <a:effectRef idx="2">
+            <a:schemeClr val="accent1"/>
+          </a:effectRef>
+          <a:fontRef idx="minor">
+            <a:schemeClr val="lt1"/>
+          </a:fontRef>
+        </p:style>
+        <p:txBody>
+          <a:bodyPr rtlCol="0" anchor="ctr"/>
+          <a:lstStyle/>
+          <a:p>
+            <a:pPr algn="ctr"/>
+          </a:p>
+        </p:txBody>
+      </p:sp>
+      <p:sp>
+        <p:nvSpPr>
+          <p:cNvPr id="72" name="Rectangle 71"/>
+          <p:cNvSpPr/>
+          <p:nvPr/>
+        </p:nvSpPr>
+        <p:spPr>
+          <a:xfrm>
+            <a:off x="3185806" y="4202083"/>
+            <a:ext cx="58055" cy="41148"/>
+          </a:xfrm>
+          <a:prstGeom prst="rect">
+            <a:avLst/>
+          </a:prstGeom>
+          <a:solidFill>
+            <a:srgbClr val="FFFFFF"/>
+          </a:solidFill>
+          <a:ln w="10160">
+            <a:solidFill>
+              <a:srgbClr val="6A1B9A"/>
+            </a:solidFill>
+          </a:ln>
+        </p:spPr>
+        <p:style>
+          <a:lnRef idx="1">
+            <a:schemeClr val="accent1"/>
+          </a:lnRef>
+          <a:fillRef idx="3">
+            <a:schemeClr val="accent1"/>
+          </a:fillRef>
+          <a:effectRef idx="2">
+            <a:schemeClr val="accent1"/>
+          </a:effectRef>
+          <a:fontRef idx="minor">
+            <a:schemeClr val="lt1"/>
+          </a:fontRef>
+        </p:style>
+        <p:txBody>
+          <a:bodyPr rtlCol="0" anchor="ctr"/>
+          <a:lstStyle/>
+          <a:p>
+            <a:pPr algn="ctr"/>
+          </a:p>
+        </p:txBody>
+      </p:sp>
+      <p:sp>
+        <p:nvSpPr>
+          <p:cNvPr id="73" name="Rectangle 72"/>
+          <p:cNvSpPr/>
+          <p:nvPr/>
+        </p:nvSpPr>
+        <p:spPr>
+          <a:xfrm>
+            <a:off x="3185806" y="4256947"/>
+            <a:ext cx="58055" cy="41148"/>
+          </a:xfrm>
+          <a:prstGeom prst="rect">
+            <a:avLst/>
+          </a:prstGeom>
+          <a:solidFill>
+            <a:srgbClr val="FFFFFF"/>
+          </a:solidFill>
+          <a:ln w="10160">
+            <a:solidFill>
+              <a:srgbClr val="6A1B9A"/>
+            </a:solidFill>
+          </a:ln>
+        </p:spPr>
+        <p:style>
+          <a:lnRef idx="1">
+            <a:schemeClr val="accent1"/>
+          </a:lnRef>
+          <a:fillRef idx="3">
+            <a:schemeClr val="accent1"/>
+          </a:fillRef>
+          <a:effectRef idx="2">
+            <a:schemeClr val="accent1"/>
+          </a:effectRef>
+          <a:fontRef idx="minor">
+            <a:schemeClr val="lt1"/>
+          </a:fontRef>
+        </p:style>
+        <p:txBody>
+          <a:bodyPr rtlCol="0" anchor="ctr"/>
+          <a:lstStyle/>
+          <a:p>
+            <a:pPr algn="ctr"/>
+          </a:p>
+        </p:txBody>
+      </p:sp>
+      <p:sp>
+        <p:nvSpPr>
+          <p:cNvPr id="74" name="TextBox 73"/>
+          <p:cNvSpPr txBox="1"/>
+          <p:nvPr/>
+        </p:nvSpPr>
+        <p:spPr>
+          <a:xfrm>
+            <a:off x="769237" y="4202083"/>
+            <a:ext cx="2394797" cy="99752"/>
+          </a:xfrm>
+          <a:prstGeom prst="rect">
+            <a:avLst/>
+          </a:prstGeom>
+          <a:noFill/>
+          <a:ln>
+            <a:noFill/>
+          </a:ln>
+        </p:spPr>
+        <p:txBody>
+          <a:bodyPr wrap="square" anchor="t" lIns="0" rIns="0" tIns="0" bIns="0">
+            <a:spAutoFit/>
+          </a:bodyPr>
+          <a:lstStyle/>
+          <a:p>
+            <a:pPr algn="ctr">
+              <a:spcBef>
+                <a:spcPts val="0"/>
+              </a:spcBef>
+              <a:spcAft>
+                <a:spcPts val="0"/>
+              </a:spcAft>
+            </a:pPr>
+            <a:r>
+              <a:rPr sz="830" b="0" i="1">
+                <a:solidFill>
+                  <a:srgbClr val="555555"/>
+                </a:solidFill>
+                <a:latin typeface="Microsoft YaHei"/>
+              </a:rPr>
+              <a:t>«component»</a:t>
+            </a:r>
+          </a:p>
+        </p:txBody>
+      </p:sp>
+      <p:sp>
+        <p:nvSpPr>
+          <p:cNvPr id="75" name="TextBox 74"/>
+          <p:cNvSpPr txBox="1"/>
+          <p:nvPr/>
+        </p:nvSpPr>
+        <p:spPr>
+          <a:xfrm>
+            <a:off x="769237" y="4451465"/>
+            <a:ext cx="2525422" cy="149629"/>
+          </a:xfrm>
+          <a:prstGeom prst="rect">
+            <a:avLst/>
+          </a:prstGeom>
+          <a:noFill/>
+          <a:ln>
+            <a:noFill/>
+          </a:ln>
+        </p:spPr>
+        <p:txBody>
+          <a:bodyPr wrap="square" anchor="ctr" lIns="0" rIns="0" tIns="0" bIns="0">
+            <a:spAutoFit/>
+          </a:bodyPr>
+          <a:lstStyle/>
+          <a:p>
+            <a:pPr algn="ctr">
+              <a:spcBef>
+                <a:spcPts val="0"/>
+              </a:spcBef>
+              <a:spcAft>
+                <a:spcPts val="0"/>
+              </a:spcAft>
+            </a:pPr>
+            <a:r>
+              <a:rPr sz="1240" b="1" i="0">
+                <a:solidFill>
+                  <a:srgbClr val="1A1A2E"/>
+                </a:solidFill>
+                <a:latin typeface="Microsoft YaHei"/>
+              </a:rPr>
+              <a:t>KPEAgent 核心引擎</a:t>
+            </a:r>
+          </a:p>
+        </p:txBody>
+      </p:sp>
+      <p:sp>
+        <p:nvSpPr>
+          <p:cNvPr id="76" name="TextBox 75"/>
+          <p:cNvSpPr txBox="1"/>
+          <p:nvPr/>
+        </p:nvSpPr>
+        <p:spPr>
+          <a:xfrm>
+            <a:off x="783751" y="4650970"/>
+            <a:ext cx="2496394" cy="99752"/>
+          </a:xfrm>
+          <a:prstGeom prst="rect">
+            <a:avLst/>
+          </a:prstGeom>
+          <a:noFill/>
+          <a:ln>
+            <a:noFill/>
+          </a:ln>
+        </p:spPr>
+        <p:txBody>
+          <a:bodyPr wrap="square" anchor="ctr" lIns="0" rIns="0" tIns="0" bIns="0">
+            <a:spAutoFit/>
+          </a:bodyPr>
+          <a:lstStyle/>
+          <a:p>
+            <a:pPr algn="ctr">
+              <a:spcBef>
+                <a:spcPts val="0"/>
+              </a:spcBef>
+              <a:spcAft>
+                <a:spcPts val="0"/>
+              </a:spcAft>
+            </a:pPr>
+            <a:r>
+              <a:rPr sz="950" b="0" i="0">
+                <a:solidFill>
+                  <a:srgbClr val="555555"/>
+                </a:solidFill>
+                <a:latin typeface="Microsoft YaHei"/>
+              </a:rPr>
+              <a:t>统一编排</a:t>
+            </a:r>
+          </a:p>
+        </p:txBody>
+      </p:sp>
+      <p:sp>
+        <p:nvSpPr>
+          <p:cNvPr id="77" name="Rectangle 76"/>
+          <p:cNvSpPr/>
+          <p:nvPr/>
+        </p:nvSpPr>
+        <p:spPr>
+          <a:xfrm>
+            <a:off x="4100183" y="4208318"/>
+            <a:ext cx="1814240" cy="561109"/>
+          </a:xfrm>
+          <a:prstGeom prst="rect">
+            <a:avLst/>
+          </a:prstGeom>
+          <a:solidFill>
+            <a:srgbClr val="FFFFFF"/>
+          </a:solidFill>
+          <a:ln w="13970">
+            <a:solidFill>
+              <a:srgbClr val="546E7A"/>
+            </a:solidFill>
+          </a:ln>
+        </p:spPr>
+        <p:style>
+          <a:lnRef idx="1">
+            <a:schemeClr val="accent1"/>
+          </a:lnRef>
+          <a:fillRef idx="3">
+            <a:schemeClr val="accent1"/>
+          </a:fillRef>
+          <a:effectRef idx="2">
+            <a:schemeClr val="accent1"/>
+          </a:effectRef>
+          <a:fontRef idx="minor">
+            <a:schemeClr val="lt1"/>
+          </a:fontRef>
+        </p:style>
+        <p:txBody>
+          <a:bodyPr rtlCol="0" anchor="ctr"/>
+          <a:lstStyle/>
+          <a:p>
+            <a:pPr algn="ctr"/>
+          </a:p>
+        </p:txBody>
+      </p:sp>
+      <p:sp>
+        <p:nvSpPr>
+          <p:cNvPr id="78" name="Rectangle 77"/>
+          <p:cNvSpPr/>
+          <p:nvPr/>
+        </p:nvSpPr>
+        <p:spPr>
+          <a:xfrm>
+            <a:off x="5718485" y="4245725"/>
+            <a:ext cx="137882" cy="143394"/>
+          </a:xfrm>
+          <a:prstGeom prst="rect">
+            <a:avLst/>
+          </a:prstGeom>
+          <a:solidFill>
+            <a:srgbClr val="FFFFFF"/>
+          </a:solidFill>
+          <a:ln w="10160">
+            <a:solidFill>
+              <a:srgbClr val="546E7A"/>
+            </a:solidFill>
+          </a:ln>
+        </p:spPr>
+        <p:style>
+          <a:lnRef idx="1">
+            <a:schemeClr val="accent1"/>
+          </a:lnRef>
+          <a:fillRef idx="3">
+            <a:schemeClr val="accent1"/>
+          </a:fillRef>
+          <a:effectRef idx="2">
+            <a:schemeClr val="accent1"/>
+          </a:effectRef>
+          <a:fontRef idx="minor">
+            <a:schemeClr val="lt1"/>
+          </a:fontRef>
+        </p:style>
+        <p:txBody>
+          <a:bodyPr rtlCol="0" anchor="ctr"/>
+          <a:lstStyle/>
+          <a:p>
+            <a:pPr algn="ctr"/>
+          </a:p>
+        </p:txBody>
+      </p:sp>
+      <p:sp>
+        <p:nvSpPr>
+          <p:cNvPr id="79" name="Rectangle 78"/>
+          <p:cNvSpPr/>
+          <p:nvPr/>
+        </p:nvSpPr>
+        <p:spPr>
+          <a:xfrm>
+            <a:off x="5689457" y="4258194"/>
+            <a:ext cx="58055" cy="41148"/>
+          </a:xfrm>
+          <a:prstGeom prst="rect">
+            <a:avLst/>
+          </a:prstGeom>
+          <a:solidFill>
+            <a:srgbClr val="FFFFFF"/>
+          </a:solidFill>
+          <a:ln w="10160">
+            <a:solidFill>
+              <a:srgbClr val="546E7A"/>
+            </a:solidFill>
+          </a:ln>
+        </p:spPr>
+        <p:style>
+          <a:lnRef idx="1">
+            <a:schemeClr val="accent1"/>
+          </a:lnRef>
+          <a:fillRef idx="3">
+            <a:schemeClr val="accent1"/>
+          </a:fillRef>
+          <a:effectRef idx="2">
+            <a:schemeClr val="accent1"/>
+          </a:effectRef>
+          <a:fontRef idx="minor">
+            <a:schemeClr val="lt1"/>
+          </a:fontRef>
+        </p:style>
+        <p:txBody>
+          <a:bodyPr rtlCol="0" anchor="ctr"/>
+          <a:lstStyle/>
+          <a:p>
+            <a:pPr algn="ctr"/>
+          </a:p>
+        </p:txBody>
+      </p:sp>
+      <p:sp>
+        <p:nvSpPr>
+          <p:cNvPr id="80" name="Rectangle 79"/>
+          <p:cNvSpPr/>
+          <p:nvPr/>
+        </p:nvSpPr>
+        <p:spPr>
+          <a:xfrm>
+            <a:off x="5689457" y="4313058"/>
+            <a:ext cx="58055" cy="41148"/>
+          </a:xfrm>
+          <a:prstGeom prst="rect">
+            <a:avLst/>
+          </a:prstGeom>
+          <a:solidFill>
+            <a:srgbClr val="FFFFFF"/>
+          </a:solidFill>
+          <a:ln w="10160">
+            <a:solidFill>
+              <a:srgbClr val="546E7A"/>
+            </a:solidFill>
+          </a:ln>
+        </p:spPr>
+        <p:style>
+          <a:lnRef idx="1">
+            <a:schemeClr val="accent1"/>
+          </a:lnRef>
+          <a:fillRef idx="3">
+            <a:schemeClr val="accent1"/>
+          </a:fillRef>
+          <a:effectRef idx="2">
+            <a:schemeClr val="accent1"/>
+          </a:effectRef>
+          <a:fontRef idx="minor">
+            <a:schemeClr val="lt1"/>
+          </a:fontRef>
+        </p:style>
+        <p:txBody>
+          <a:bodyPr rtlCol="0" anchor="ctr"/>
+          <a:lstStyle/>
+          <a:p>
+            <a:pPr algn="ctr"/>
+          </a:p>
+        </p:txBody>
+      </p:sp>
+      <p:sp>
+        <p:nvSpPr>
+          <p:cNvPr id="81" name="TextBox 80"/>
+          <p:cNvSpPr txBox="1"/>
+          <p:nvPr/>
+        </p:nvSpPr>
+        <p:spPr>
+          <a:xfrm>
+            <a:off x="4216294" y="4258194"/>
+            <a:ext cx="1451392" cy="99752"/>
+          </a:xfrm>
+          <a:prstGeom prst="rect">
+            <a:avLst/>
+          </a:prstGeom>
+          <a:noFill/>
+          <a:ln>
+            <a:noFill/>
+          </a:ln>
+        </p:spPr>
+        <p:txBody>
+          <a:bodyPr wrap="square" anchor="t" lIns="0" rIns="0" tIns="0" bIns="0">
+            <a:spAutoFit/>
+          </a:bodyPr>
+          <a:lstStyle/>
+          <a:p>
+            <a:pPr algn="ctr">
+              <a:spcBef>
+                <a:spcPts val="0"/>
+              </a:spcBef>
+              <a:spcAft>
+                <a:spcPts val="0"/>
+              </a:spcAft>
+            </a:pPr>
+            <a:r>
+              <a:rPr sz="830" b="0" i="1">
+                <a:solidFill>
+                  <a:srgbClr val="555555"/>
+                </a:solidFill>
+                <a:latin typeface="Microsoft YaHei"/>
+              </a:rPr>
+              <a:t>«component»</a:t>
+            </a:r>
+          </a:p>
+        </p:txBody>
+      </p:sp>
+      <p:sp>
+        <p:nvSpPr>
+          <p:cNvPr id="82" name="TextBox 81"/>
+          <p:cNvSpPr txBox="1"/>
+          <p:nvPr/>
+        </p:nvSpPr>
+        <p:spPr>
+          <a:xfrm>
+            <a:off x="4216294" y="4395354"/>
+            <a:ext cx="1582017" cy="149629"/>
+          </a:xfrm>
+          <a:prstGeom prst="rect">
+            <a:avLst/>
+          </a:prstGeom>
+          <a:noFill/>
+          <a:ln>
+            <a:noFill/>
+          </a:ln>
+        </p:spPr>
+        <p:txBody>
+          <a:bodyPr wrap="square" anchor="ctr" lIns="0" rIns="0" tIns="0" bIns="0">
+            <a:spAutoFit/>
+          </a:bodyPr>
+          <a:lstStyle/>
+          <a:p>
+            <a:pPr algn="ctr">
+              <a:spcBef>
+                <a:spcPts val="0"/>
+              </a:spcBef>
+              <a:spcAft>
+                <a:spcPts val="0"/>
+              </a:spcAft>
+            </a:pPr>
+            <a:r>
+              <a:rPr sz="1240" b="1" i="0">
+                <a:solidFill>
+                  <a:srgbClr val="1A1A2E"/>
+                </a:solidFill>
+                <a:latin typeface="Microsoft YaHei"/>
+              </a:rPr>
+              <a:t>RAG 检索器</a:t>
+            </a:r>
+          </a:p>
+        </p:txBody>
+      </p:sp>
+      <p:sp>
+        <p:nvSpPr>
+          <p:cNvPr id="83" name="TextBox 82"/>
+          <p:cNvSpPr txBox="1"/>
+          <p:nvPr/>
+        </p:nvSpPr>
+        <p:spPr>
+          <a:xfrm>
+            <a:off x="4230808" y="4594859"/>
+            <a:ext cx="1552989" cy="99752"/>
+          </a:xfrm>
+          <a:prstGeom prst="rect">
+            <a:avLst/>
+          </a:prstGeom>
+          <a:noFill/>
+          <a:ln>
+            <a:noFill/>
+          </a:ln>
+        </p:spPr>
+        <p:txBody>
+          <a:bodyPr wrap="square" anchor="ctr" lIns="0" rIns="0" tIns="0" bIns="0">
+            <a:spAutoFit/>
+          </a:bodyPr>
+          <a:lstStyle/>
+          <a:p>
+            <a:pPr algn="ctr">
+              <a:spcBef>
+                <a:spcPts val="0"/>
+              </a:spcBef>
+              <a:spcAft>
+                <a:spcPts val="0"/>
+              </a:spcAft>
+            </a:pPr>
+            <a:r>
+              <a:rPr sz="950" b="0" i="0">
+                <a:solidFill>
+                  <a:srgbClr val="555555"/>
+                </a:solidFill>
+                <a:latin typeface="Microsoft YaHei"/>
+              </a:rPr>
+              <a:t>证据检索</a:t>
+            </a:r>
+          </a:p>
+        </p:txBody>
+      </p:sp>
+      <p:sp>
+        <p:nvSpPr>
+          <p:cNvPr id="84" name="Rectangle 83"/>
+          <p:cNvSpPr/>
+          <p:nvPr/>
+        </p:nvSpPr>
+        <p:spPr>
+          <a:xfrm>
+            <a:off x="6132132" y="4208318"/>
+            <a:ext cx="1814240" cy="561109"/>
+          </a:xfrm>
+          <a:prstGeom prst="rect">
+            <a:avLst/>
+          </a:prstGeom>
+          <a:solidFill>
+            <a:srgbClr val="FFFFFF"/>
+          </a:solidFill>
+          <a:ln w="13970">
+            <a:solidFill>
+              <a:srgbClr val="546E7A"/>
+            </a:solidFill>
+          </a:ln>
+        </p:spPr>
+        <p:style>
+          <a:lnRef idx="1">
+            <a:schemeClr val="accent1"/>
+          </a:lnRef>
+          <a:fillRef idx="3">
+            <a:schemeClr val="accent1"/>
+          </a:fillRef>
+          <a:effectRef idx="2">
+            <a:schemeClr val="accent1"/>
+          </a:effectRef>
+          <a:fontRef idx="minor">
+            <a:schemeClr val="lt1"/>
+          </a:fontRef>
+        </p:style>
+        <p:txBody>
+          <a:bodyPr rtlCol="0" anchor="ctr"/>
+          <a:lstStyle/>
+          <a:p>
+            <a:pPr algn="ctr"/>
+          </a:p>
+        </p:txBody>
+      </p:sp>
+      <p:sp>
+        <p:nvSpPr>
+          <p:cNvPr id="85" name="Rectangle 84"/>
+          <p:cNvSpPr/>
+          <p:nvPr/>
+        </p:nvSpPr>
+        <p:spPr>
+          <a:xfrm>
+            <a:off x="7750434" y="4245725"/>
+            <a:ext cx="137882" cy="143394"/>
+          </a:xfrm>
+          <a:prstGeom prst="rect">
+            <a:avLst/>
+          </a:prstGeom>
+          <a:solidFill>
+            <a:srgbClr val="FFFFFF"/>
+          </a:solidFill>
+          <a:ln w="10160">
+            <a:solidFill>
+              <a:srgbClr val="546E7A"/>
+            </a:solidFill>
+          </a:ln>
+        </p:spPr>
+        <p:style>
+          <a:lnRef idx="1">
+            <a:schemeClr val="accent1"/>
+          </a:lnRef>
+          <a:fillRef idx="3">
+            <a:schemeClr val="accent1"/>
+          </a:fillRef>
+          <a:effectRef idx="2">
+            <a:schemeClr val="accent1"/>
+          </a:effectRef>
+          <a:fontRef idx="minor">
+            <a:schemeClr val="lt1"/>
+          </a:fontRef>
+        </p:style>
+        <p:txBody>
+          <a:bodyPr rtlCol="0" anchor="ctr"/>
+          <a:lstStyle/>
+          <a:p>
+            <a:pPr algn="ctr"/>
+          </a:p>
+        </p:txBody>
+      </p:sp>
+      <p:sp>
+        <p:nvSpPr>
+          <p:cNvPr id="86" name="Rectangle 85"/>
+          <p:cNvSpPr/>
+          <p:nvPr/>
+        </p:nvSpPr>
+        <p:spPr>
+          <a:xfrm>
+            <a:off x="7721406" y="4258194"/>
+            <a:ext cx="58055" cy="41148"/>
+          </a:xfrm>
+          <a:prstGeom prst="rect">
+            <a:avLst/>
+          </a:prstGeom>
+          <a:solidFill>
+            <a:srgbClr val="FFFFFF"/>
+          </a:solidFill>
+          <a:ln w="10160">
+            <a:solidFill>
+              <a:srgbClr val="546E7A"/>
+            </a:solidFill>
+          </a:ln>
+        </p:spPr>
+        <p:style>
+          <a:lnRef idx="1">
+            <a:schemeClr val="accent1"/>
+          </a:lnRef>
+          <a:fillRef idx="3">
+            <a:schemeClr val="accent1"/>
+          </a:fillRef>
+          <a:effectRef idx="2">
+            <a:schemeClr val="accent1"/>
+          </a:effectRef>
+          <a:fontRef idx="minor">
+            <a:schemeClr val="lt1"/>
+          </a:fontRef>
+        </p:style>
+        <p:txBody>
+          <a:bodyPr rtlCol="0" anchor="ctr"/>
+          <a:lstStyle/>
+          <a:p>
+            <a:pPr algn="ctr"/>
+          </a:p>
+        </p:txBody>
+      </p:sp>
+      <p:sp>
+        <p:nvSpPr>
+          <p:cNvPr id="87" name="Rectangle 86"/>
+          <p:cNvSpPr/>
+          <p:nvPr/>
+        </p:nvSpPr>
+        <p:spPr>
+          <a:xfrm>
+            <a:off x="7721406" y="4313058"/>
+            <a:ext cx="58055" cy="41148"/>
+          </a:xfrm>
+          <a:prstGeom prst="rect">
+            <a:avLst/>
+          </a:prstGeom>
+          <a:solidFill>
+            <a:srgbClr val="FFFFFF"/>
+          </a:solidFill>
+          <a:ln w="10160">
+            <a:solidFill>
+              <a:srgbClr val="546E7A"/>
+            </a:solidFill>
+          </a:ln>
+        </p:spPr>
+        <p:style>
+          <a:lnRef idx="1">
+            <a:schemeClr val="accent1"/>
+          </a:lnRef>
+          <a:fillRef idx="3">
+            <a:schemeClr val="accent1"/>
+          </a:fillRef>
+          <a:effectRef idx="2">
+            <a:schemeClr val="accent1"/>
+          </a:effectRef>
+          <a:fontRef idx="minor">
+            <a:schemeClr val="lt1"/>
+          </a:fontRef>
+        </p:style>
+        <p:txBody>
+          <a:bodyPr rtlCol="0" anchor="ctr"/>
+          <a:lstStyle/>
+          <a:p>
+            <a:pPr algn="ctr"/>
+          </a:p>
+        </p:txBody>
+      </p:sp>
+      <p:sp>
+        <p:nvSpPr>
+          <p:cNvPr id="88" name="TextBox 87"/>
+          <p:cNvSpPr txBox="1"/>
+          <p:nvPr/>
+        </p:nvSpPr>
+        <p:spPr>
+          <a:xfrm>
+            <a:off x="6248243" y="4258194"/>
+            <a:ext cx="1451392" cy="99752"/>
+          </a:xfrm>
+          <a:prstGeom prst="rect">
+            <a:avLst/>
+          </a:prstGeom>
+          <a:noFill/>
+          <a:ln>
+            <a:noFill/>
+          </a:ln>
+        </p:spPr>
+        <p:txBody>
+          <a:bodyPr wrap="square" anchor="t" lIns="0" rIns="0" tIns="0" bIns="0">
+            <a:spAutoFit/>
+          </a:bodyPr>
+          <a:lstStyle/>
+          <a:p>
+            <a:pPr algn="ctr">
+              <a:spcBef>
+                <a:spcPts val="0"/>
+              </a:spcBef>
+              <a:spcAft>
+                <a:spcPts val="0"/>
+              </a:spcAft>
+            </a:pPr>
+            <a:r>
+              <a:rPr sz="830" b="0" i="1">
+                <a:solidFill>
+                  <a:srgbClr val="555555"/>
+                </a:solidFill>
+                <a:latin typeface="Microsoft YaHei"/>
+              </a:rPr>
+              <a:t>«component»</a:t>
+            </a:r>
+          </a:p>
+        </p:txBody>
+      </p:sp>
+      <p:sp>
+        <p:nvSpPr>
+          <p:cNvPr id="89" name="TextBox 88"/>
+          <p:cNvSpPr txBox="1"/>
+          <p:nvPr/>
+        </p:nvSpPr>
+        <p:spPr>
+          <a:xfrm>
+            <a:off x="6248243" y="4395354"/>
+            <a:ext cx="1582017" cy="149629"/>
+          </a:xfrm>
+          <a:prstGeom prst="rect">
+            <a:avLst/>
+          </a:prstGeom>
+          <a:noFill/>
+          <a:ln>
+            <a:noFill/>
+          </a:ln>
+        </p:spPr>
+        <p:txBody>
+          <a:bodyPr wrap="square" anchor="ctr" lIns="0" rIns="0" tIns="0" bIns="0">
+            <a:spAutoFit/>
+          </a:bodyPr>
+          <a:lstStyle/>
+          <a:p>
+            <a:pPr algn="ctr">
+              <a:spcBef>
+                <a:spcPts val="0"/>
+              </a:spcBef>
+              <a:spcAft>
+                <a:spcPts val="0"/>
+              </a:spcAft>
+            </a:pPr>
+            <a:r>
+              <a:rPr sz="1240" b="1" i="0">
+                <a:solidFill>
+                  <a:srgbClr val="1A1A2E"/>
+                </a:solidFill>
+                <a:latin typeface="Microsoft YaHei"/>
+              </a:rPr>
+              <a:t>CoT 推理机</a:t>
+            </a:r>
+          </a:p>
+        </p:txBody>
+      </p:sp>
+      <p:sp>
+        <p:nvSpPr>
+          <p:cNvPr id="90" name="TextBox 89"/>
+          <p:cNvSpPr txBox="1"/>
+          <p:nvPr/>
+        </p:nvSpPr>
+        <p:spPr>
+          <a:xfrm>
+            <a:off x="6262757" y="4594859"/>
+            <a:ext cx="1552989" cy="99752"/>
+          </a:xfrm>
+          <a:prstGeom prst="rect">
+            <a:avLst/>
+          </a:prstGeom>
+          <a:noFill/>
+          <a:ln>
+            <a:noFill/>
+          </a:ln>
+        </p:spPr>
+        <p:txBody>
+          <a:bodyPr wrap="square" anchor="ctr" lIns="0" rIns="0" tIns="0" bIns="0">
+            <a:spAutoFit/>
+          </a:bodyPr>
+          <a:lstStyle/>
+          <a:p>
+            <a:pPr algn="ctr">
+              <a:spcBef>
+                <a:spcPts val="0"/>
+              </a:spcBef>
+              <a:spcAft>
+                <a:spcPts val="0"/>
+              </a:spcAft>
+            </a:pPr>
+            <a:r>
+              <a:rPr sz="950" b="0" i="0">
+                <a:solidFill>
+                  <a:srgbClr val="555555"/>
+                </a:solidFill>
+                <a:latin typeface="Microsoft YaHei"/>
+              </a:rPr>
+              <a:t>漏洞分析</a:t>
+            </a:r>
+          </a:p>
+        </p:txBody>
+      </p:sp>
+      <p:sp>
+        <p:nvSpPr>
+          <p:cNvPr id="91" name="Rectangle 90"/>
+          <p:cNvSpPr/>
+          <p:nvPr/>
+        </p:nvSpPr>
+        <p:spPr>
+          <a:xfrm>
+            <a:off x="8164081" y="4208318"/>
+            <a:ext cx="1814240" cy="561109"/>
+          </a:xfrm>
+          <a:prstGeom prst="rect">
+            <a:avLst/>
+          </a:prstGeom>
+          <a:solidFill>
+            <a:srgbClr val="FFFFFF"/>
+          </a:solidFill>
+          <a:ln w="13970">
+            <a:solidFill>
+              <a:srgbClr val="546E7A"/>
+            </a:solidFill>
+          </a:ln>
+        </p:spPr>
+        <p:style>
+          <a:lnRef idx="1">
+            <a:schemeClr val="accent1"/>
+          </a:lnRef>
+          <a:fillRef idx="3">
+            <a:schemeClr val="accent1"/>
+          </a:fillRef>
+          <a:effectRef idx="2">
+            <a:schemeClr val="accent1"/>
+          </a:effectRef>
+          <a:fontRef idx="minor">
+            <a:schemeClr val="lt1"/>
+          </a:fontRef>
+        </p:style>
+        <p:txBody>
+          <a:bodyPr rtlCol="0" anchor="ctr"/>
+          <a:lstStyle/>
+          <a:p>
+            <a:pPr algn="ctr"/>
+          </a:p>
+        </p:txBody>
+      </p:sp>
+      <p:sp>
+        <p:nvSpPr>
+          <p:cNvPr id="92" name="Rectangle 91"/>
+          <p:cNvSpPr/>
+          <p:nvPr/>
+        </p:nvSpPr>
+        <p:spPr>
+          <a:xfrm>
+            <a:off x="9782384" y="4245725"/>
+            <a:ext cx="137882" cy="143394"/>
+          </a:xfrm>
+          <a:prstGeom prst="rect">
+            <a:avLst/>
+          </a:prstGeom>
+          <a:solidFill>
+            <a:srgbClr val="FFFFFF"/>
+          </a:solidFill>
+          <a:ln w="10160">
+            <a:solidFill>
+              <a:srgbClr val="546E7A"/>
+            </a:solidFill>
+          </a:ln>
+        </p:spPr>
+        <p:style>
+          <a:lnRef idx="1">
+            <a:schemeClr val="accent1"/>
+          </a:lnRef>
+          <a:fillRef idx="3">
+            <a:schemeClr val="accent1"/>
+          </a:fillRef>
+          <a:effectRef idx="2">
+            <a:schemeClr val="accent1"/>
+          </a:effectRef>
+          <a:fontRef idx="minor">
+            <a:schemeClr val="lt1"/>
+          </a:fontRef>
+        </p:style>
+        <p:txBody>
+          <a:bodyPr rtlCol="0" anchor="ctr"/>
+          <a:lstStyle/>
+          <a:p>
+            <a:pPr algn="ctr"/>
+          </a:p>
+        </p:txBody>
+      </p:sp>
+      <p:sp>
+        <p:nvSpPr>
+          <p:cNvPr id="93" name="Rectangle 92"/>
+          <p:cNvSpPr/>
+          <p:nvPr/>
+        </p:nvSpPr>
+        <p:spPr>
+          <a:xfrm>
+            <a:off x="9753356" y="4258194"/>
+            <a:ext cx="58055" cy="41148"/>
+          </a:xfrm>
+          <a:prstGeom prst="rect">
+            <a:avLst/>
+          </a:prstGeom>
+          <a:solidFill>
+            <a:srgbClr val="FFFFFF"/>
+          </a:solidFill>
+          <a:ln w="10160">
+            <a:solidFill>
+              <a:srgbClr val="546E7A"/>
+            </a:solidFill>
+          </a:ln>
+        </p:spPr>
+        <p:style>
+          <a:lnRef idx="1">
+            <a:schemeClr val="accent1"/>
+          </a:lnRef>
+          <a:fillRef idx="3">
+            <a:schemeClr val="accent1"/>
+          </a:fillRef>
+          <a:effectRef idx="2">
+            <a:schemeClr val="accent1"/>
+          </a:effectRef>
+          <a:fontRef idx="minor">
+            <a:schemeClr val="lt1"/>
+          </a:fontRef>
+        </p:style>
+        <p:txBody>
+          <a:bodyPr rtlCol="0" anchor="ctr"/>
+          <a:lstStyle/>
+          <a:p>
+            <a:pPr algn="ctr"/>
+          </a:p>
+        </p:txBody>
+      </p:sp>
+      <p:sp>
+        <p:nvSpPr>
+          <p:cNvPr id="94" name="Rectangle 93"/>
+          <p:cNvSpPr/>
+          <p:nvPr/>
+        </p:nvSpPr>
+        <p:spPr>
+          <a:xfrm>
+            <a:off x="9753356" y="4313058"/>
+            <a:ext cx="58055" cy="41148"/>
+          </a:xfrm>
+          <a:prstGeom prst="rect">
+            <a:avLst/>
+          </a:prstGeom>
+          <a:solidFill>
+            <a:srgbClr val="FFFFFF"/>
+          </a:solidFill>
+          <a:ln w="10160">
+            <a:solidFill>
+              <a:srgbClr val="546E7A"/>
+            </a:solidFill>
+          </a:ln>
+        </p:spPr>
+        <p:style>
+          <a:lnRef idx="1">
+            <a:schemeClr val="accent1"/>
+          </a:lnRef>
+          <a:fillRef idx="3">
+            <a:schemeClr val="accent1"/>
+          </a:fillRef>
+          <a:effectRef idx="2">
+            <a:schemeClr val="accent1"/>
+          </a:effectRef>
+          <a:fontRef idx="minor">
+            <a:schemeClr val="lt1"/>
+          </a:fontRef>
+        </p:style>
+        <p:txBody>
+          <a:bodyPr rtlCol="0" anchor="ctr"/>
+          <a:lstStyle/>
+          <a:p>
+            <a:pPr algn="ctr"/>
+          </a:p>
+        </p:txBody>
+      </p:sp>
+      <p:sp>
+        <p:nvSpPr>
+          <p:cNvPr id="95" name="TextBox 94"/>
+          <p:cNvSpPr txBox="1"/>
+          <p:nvPr/>
+        </p:nvSpPr>
+        <p:spPr>
+          <a:xfrm>
+            <a:off x="8280192" y="4258194"/>
+            <a:ext cx="1451392" cy="99752"/>
+          </a:xfrm>
+          <a:prstGeom prst="rect">
+            <a:avLst/>
+          </a:prstGeom>
+          <a:noFill/>
+          <a:ln>
+            <a:noFill/>
+          </a:ln>
+        </p:spPr>
+        <p:txBody>
+          <a:bodyPr wrap="square" anchor="t" lIns="0" rIns="0" tIns="0" bIns="0">
+            <a:spAutoFit/>
+          </a:bodyPr>
+          <a:lstStyle/>
+          <a:p>
+            <a:pPr algn="ctr">
+              <a:spcBef>
+                <a:spcPts val="0"/>
+              </a:spcBef>
+              <a:spcAft>
+                <a:spcPts val="0"/>
+              </a:spcAft>
+            </a:pPr>
+            <a:r>
+              <a:rPr sz="830" b="0" i="1">
+                <a:solidFill>
+                  <a:srgbClr val="555555"/>
+                </a:solidFill>
+                <a:latin typeface="Microsoft YaHei"/>
+              </a:rPr>
+              <a:t>«component»</a:t>
+            </a:r>
+          </a:p>
+        </p:txBody>
+      </p:sp>
+      <p:sp>
+        <p:nvSpPr>
+          <p:cNvPr id="96" name="TextBox 95"/>
+          <p:cNvSpPr txBox="1"/>
+          <p:nvPr/>
+        </p:nvSpPr>
+        <p:spPr>
+          <a:xfrm>
+            <a:off x="8280192" y="4395354"/>
+            <a:ext cx="1582017" cy="149629"/>
+          </a:xfrm>
+          <a:prstGeom prst="rect">
+            <a:avLst/>
+          </a:prstGeom>
+          <a:noFill/>
+          <a:ln>
+            <a:noFill/>
+          </a:ln>
+        </p:spPr>
+        <p:txBody>
+          <a:bodyPr wrap="square" anchor="ctr" lIns="0" rIns="0" tIns="0" bIns="0">
+            <a:spAutoFit/>
+          </a:bodyPr>
+          <a:lstStyle/>
+          <a:p>
+            <a:pPr algn="ctr">
+              <a:spcBef>
+                <a:spcPts val="0"/>
+              </a:spcBef>
+              <a:spcAft>
+                <a:spcPts val="0"/>
+              </a:spcAft>
+            </a:pPr>
+            <a:r>
+              <a:rPr sz="1240" b="1" i="0">
+                <a:solidFill>
+                  <a:srgbClr val="1A1A2E"/>
+                </a:solidFill>
+                <a:latin typeface="Microsoft YaHei"/>
+              </a:rPr>
+              <a:t>反馈优化器</a:t>
+            </a:r>
+          </a:p>
+        </p:txBody>
+      </p:sp>
+      <p:sp>
+        <p:nvSpPr>
+          <p:cNvPr id="97" name="TextBox 96"/>
+          <p:cNvSpPr txBox="1"/>
+          <p:nvPr/>
+        </p:nvSpPr>
+        <p:spPr>
+          <a:xfrm>
+            <a:off x="8294706" y="4594859"/>
+            <a:ext cx="1552989" cy="99752"/>
+          </a:xfrm>
+          <a:prstGeom prst="rect">
+            <a:avLst/>
+          </a:prstGeom>
+          <a:noFill/>
+          <a:ln>
+            <a:noFill/>
+          </a:ln>
+        </p:spPr>
+        <p:txBody>
+          <a:bodyPr wrap="square" anchor="ctr" lIns="0" rIns="0" tIns="0" bIns="0">
+            <a:spAutoFit/>
+          </a:bodyPr>
+          <a:lstStyle/>
+          <a:p>
+            <a:pPr algn="ctr">
+              <a:spcBef>
+                <a:spcPts val="0"/>
+              </a:spcBef>
+              <a:spcAft>
+                <a:spcPts val="0"/>
+              </a:spcAft>
+            </a:pPr>
+            <a:r>
+              <a:rPr sz="950" b="0" i="0">
+                <a:solidFill>
+                  <a:srgbClr val="555555"/>
+                </a:solidFill>
+                <a:latin typeface="Microsoft YaHei"/>
+              </a:rPr>
+              <a:t>反馈修正</a:t>
+            </a:r>
+          </a:p>
+        </p:txBody>
+      </p:sp>
+      <p:sp>
+        <p:nvSpPr>
+          <p:cNvPr id="98" name="Rectangle 97"/>
+          <p:cNvSpPr/>
+          <p:nvPr/>
+        </p:nvSpPr>
+        <p:spPr>
+          <a:xfrm>
+            <a:off x="2322227" y="5667201"/>
+            <a:ext cx="2322227" cy="698269"/>
+          </a:xfrm>
+          <a:prstGeom prst="rect">
+            <a:avLst/>
+          </a:prstGeom>
+          <a:solidFill>
+            <a:srgbClr val="E8F5E9"/>
+          </a:solidFill>
+          <a:ln w="15240">
+            <a:solidFill>
+              <a:srgbClr val="2E7D32"/>
+            </a:solidFill>
+          </a:ln>
+        </p:spPr>
+        <p:style>
+          <a:lnRef idx="1">
+            <a:schemeClr val="accent1"/>
+          </a:lnRef>
+          <a:fillRef idx="3">
+            <a:schemeClr val="accent1"/>
+          </a:fillRef>
+          <a:effectRef idx="2">
+            <a:schemeClr val="accent1"/>
+          </a:effectRef>
+          <a:fontRef idx="minor">
+            <a:schemeClr val="lt1"/>
+          </a:fontRef>
+        </p:style>
+        <p:txBody>
+          <a:bodyPr rtlCol="0" anchor="ctr"/>
+          <a:lstStyle/>
+          <a:p>
+            <a:pPr algn="ctr"/>
+          </a:p>
+        </p:txBody>
+      </p:sp>
+      <p:sp>
+        <p:nvSpPr>
+          <p:cNvPr id="99" name="TextBox 98"/>
+          <p:cNvSpPr txBox="1"/>
+          <p:nvPr/>
+        </p:nvSpPr>
+        <p:spPr>
+          <a:xfrm>
+            <a:off x="2452852" y="5729547"/>
+            <a:ext cx="2060977" cy="112221"/>
+          </a:xfrm>
+          <a:prstGeom prst="rect">
+            <a:avLst/>
+          </a:prstGeom>
+          <a:noFill/>
+          <a:ln>
+            <a:noFill/>
+          </a:ln>
+        </p:spPr>
+        <p:txBody>
+          <a:bodyPr wrap="square" anchor="t" lIns="0" rIns="0" tIns="0" bIns="0">
+            <a:spAutoFit/>
+          </a:bodyPr>
+          <a:lstStyle/>
+          <a:p>
+            <a:pPr algn="ctr">
+              <a:spcBef>
+                <a:spcPts val="0"/>
+              </a:spcBef>
+              <a:spcAft>
+                <a:spcPts val="0"/>
+              </a:spcAft>
+            </a:pPr>
+            <a:r>
+              <a:rPr sz="840" b="0" i="1">
+                <a:solidFill>
+                  <a:srgbClr val="2E7D32"/>
+                </a:solidFill>
+                <a:latin typeface="Microsoft YaHei"/>
+              </a:rPr>
+              <a:t>«artifact»</a:t>
+            </a:r>
+          </a:p>
+        </p:txBody>
+      </p:sp>
+      <p:sp>
+        <p:nvSpPr>
+          <p:cNvPr id="100" name="TextBox 99"/>
+          <p:cNvSpPr txBox="1"/>
+          <p:nvPr/>
+        </p:nvSpPr>
+        <p:spPr>
+          <a:xfrm>
+            <a:off x="2452852" y="6003867"/>
+            <a:ext cx="2060977" cy="149629"/>
+          </a:xfrm>
+          <a:prstGeom prst="rect">
+            <a:avLst/>
+          </a:prstGeom>
+          <a:noFill/>
+          <a:ln>
+            <a:noFill/>
+          </a:ln>
+        </p:spPr>
+        <p:txBody>
+          <a:bodyPr wrap="square" anchor="ctr" lIns="0" rIns="0" tIns="0" bIns="0">
+            <a:spAutoFit/>
+          </a:bodyPr>
+          <a:lstStyle/>
+          <a:p>
+            <a:pPr algn="ctr">
+              <a:spcBef>
+                <a:spcPts val="0"/>
+              </a:spcBef>
+              <a:spcAft>
+                <a:spcPts val="0"/>
+              </a:spcAft>
+            </a:pPr>
+            <a:r>
+              <a:rPr sz="1220" b="1" i="0">
+                <a:solidFill>
+                  <a:srgbClr val="1A1A2E"/>
+                </a:solidFill>
+                <a:latin typeface="Microsoft YaHei"/>
+              </a:rPr>
+              <a:t>文件存储</a:t>
+            </a:r>
+          </a:p>
+        </p:txBody>
+      </p:sp>
+      <p:sp>
+        <p:nvSpPr>
+          <p:cNvPr id="101" name="TextBox 100"/>
+          <p:cNvSpPr txBox="1"/>
+          <p:nvPr/>
+        </p:nvSpPr>
+        <p:spPr>
+          <a:xfrm>
+            <a:off x="2452852" y="6184669"/>
+            <a:ext cx="2060977" cy="99752"/>
+          </a:xfrm>
+          <a:prstGeom prst="rect">
+            <a:avLst/>
+          </a:prstGeom>
+          <a:noFill/>
+          <a:ln>
+            <a:noFill/>
+          </a:ln>
+        </p:spPr>
+        <p:txBody>
+          <a:bodyPr wrap="square" anchor="ctr" lIns="0" rIns="0" tIns="0" bIns="0">
+            <a:spAutoFit/>
+          </a:bodyPr>
+          <a:lstStyle/>
+          <a:p>
+            <a:pPr algn="ctr">
+              <a:spcBef>
+                <a:spcPts val="0"/>
+              </a:spcBef>
+              <a:spcAft>
+                <a:spcPts val="0"/>
+              </a:spcAft>
+            </a:pPr>
+            <a:r>
+              <a:rPr sz="940" b="0" i="0">
+                <a:solidFill>
+                  <a:srgbClr val="555555"/>
+                </a:solidFill>
+                <a:latin typeface="Microsoft YaHei"/>
+              </a:rPr>
+              <a:t>CVE / 策略结果</a:t>
+            </a:r>
+          </a:p>
+        </p:txBody>
+      </p:sp>
+      <p:sp>
+        <p:nvSpPr>
+          <p:cNvPr id="102" name="Rectangle 101"/>
+          <p:cNvSpPr/>
+          <p:nvPr/>
+        </p:nvSpPr>
+        <p:spPr>
+          <a:xfrm>
+            <a:off x="5950708" y="5667201"/>
+            <a:ext cx="2322227" cy="698269"/>
+          </a:xfrm>
+          <a:prstGeom prst="rect">
+            <a:avLst/>
+          </a:prstGeom>
+          <a:solidFill>
+            <a:srgbClr val="E8F5E9"/>
+          </a:solidFill>
+          <a:ln w="15240">
+            <a:solidFill>
+              <a:srgbClr val="2E7D32"/>
+            </a:solidFill>
+          </a:ln>
+        </p:spPr>
+        <p:style>
+          <a:lnRef idx="1">
+            <a:schemeClr val="accent1"/>
+          </a:lnRef>
+          <a:fillRef idx="3">
+            <a:schemeClr val="accent1"/>
+          </a:fillRef>
+          <a:effectRef idx="2">
+            <a:schemeClr val="accent1"/>
+          </a:effectRef>
+          <a:fontRef idx="minor">
+            <a:schemeClr val="lt1"/>
+          </a:fontRef>
+        </p:style>
+        <p:txBody>
+          <a:bodyPr rtlCol="0" anchor="ctr"/>
+          <a:lstStyle/>
+          <a:p>
+            <a:pPr algn="ctr"/>
+          </a:p>
+        </p:txBody>
+      </p:sp>
+      <p:sp>
+        <p:nvSpPr>
+          <p:cNvPr id="103" name="TextBox 102"/>
+          <p:cNvSpPr txBox="1"/>
+          <p:nvPr/>
+        </p:nvSpPr>
+        <p:spPr>
+          <a:xfrm>
+            <a:off x="6081333" y="5729547"/>
+            <a:ext cx="2060977" cy="112221"/>
+          </a:xfrm>
+          <a:prstGeom prst="rect">
+            <a:avLst/>
+          </a:prstGeom>
+          <a:noFill/>
+          <a:ln>
+            <a:noFill/>
+          </a:ln>
+        </p:spPr>
+        <p:txBody>
+          <a:bodyPr wrap="square" anchor="t" lIns="0" rIns="0" tIns="0" bIns="0">
+            <a:spAutoFit/>
+          </a:bodyPr>
+          <a:lstStyle/>
+          <a:p>
+            <a:pPr algn="ctr">
+              <a:spcBef>
+                <a:spcPts val="0"/>
+              </a:spcBef>
+              <a:spcAft>
+                <a:spcPts val="0"/>
+              </a:spcAft>
+            </a:pPr>
+            <a:r>
+              <a:rPr sz="840" b="0" i="1">
+                <a:solidFill>
+                  <a:srgbClr val="2E7D32"/>
+                </a:solidFill>
+                <a:latin typeface="Microsoft YaHei"/>
+              </a:rPr>
+              <a:t>«artifact»</a:t>
+            </a:r>
+          </a:p>
+        </p:txBody>
+      </p:sp>
+      <p:sp>
+        <p:nvSpPr>
+          <p:cNvPr id="104" name="TextBox 103"/>
+          <p:cNvSpPr txBox="1"/>
+          <p:nvPr/>
+        </p:nvSpPr>
+        <p:spPr>
+          <a:xfrm>
+            <a:off x="6081333" y="6003867"/>
+            <a:ext cx="2060977" cy="149629"/>
+          </a:xfrm>
+          <a:prstGeom prst="rect">
+            <a:avLst/>
+          </a:prstGeom>
+          <a:noFill/>
+          <a:ln>
+            <a:noFill/>
+          </a:ln>
+        </p:spPr>
+        <p:txBody>
+          <a:bodyPr wrap="square" anchor="ctr" lIns="0" rIns="0" tIns="0" bIns="0">
+            <a:spAutoFit/>
+          </a:bodyPr>
+          <a:lstStyle/>
+          <a:p>
+            <a:pPr algn="ctr">
+              <a:spcBef>
+                <a:spcPts val="0"/>
+              </a:spcBef>
+              <a:spcAft>
+                <a:spcPts val="0"/>
+              </a:spcAft>
+            </a:pPr>
+            <a:r>
+              <a:rPr sz="1220" b="1" i="0">
+                <a:solidFill>
+                  <a:srgbClr val="1A1A2E"/>
+                </a:solidFill>
+                <a:latin typeface="Microsoft YaHei"/>
+              </a:rPr>
+              <a:t>向量索引</a:t>
+            </a:r>
+          </a:p>
+        </p:txBody>
+      </p:sp>
+      <p:sp>
+        <p:nvSpPr>
+          <p:cNvPr id="105" name="TextBox 104"/>
+          <p:cNvSpPr txBox="1"/>
+          <p:nvPr/>
+        </p:nvSpPr>
+        <p:spPr>
+          <a:xfrm>
+            <a:off x="6081333" y="6184669"/>
+            <a:ext cx="2060977" cy="99752"/>
+          </a:xfrm>
+          <a:prstGeom prst="rect">
+            <a:avLst/>
+          </a:prstGeom>
+          <a:noFill/>
+          <a:ln>
+            <a:noFill/>
+          </a:ln>
+        </p:spPr>
+        <p:txBody>
+          <a:bodyPr wrap="square" anchor="ctr" lIns="0" rIns="0" tIns="0" bIns="0">
+            <a:spAutoFit/>
+          </a:bodyPr>
+          <a:lstStyle/>
+          <a:p>
+            <a:pPr algn="ctr">
+              <a:spcBef>
+                <a:spcPts val="0"/>
+              </a:spcBef>
+              <a:spcAft>
+                <a:spcPts val="0"/>
+              </a:spcAft>
+            </a:pPr>
+            <a:r>
+              <a:rPr sz="940" b="0" i="0">
+                <a:solidFill>
+                  <a:srgbClr val="555555"/>
+                </a:solidFill>
+                <a:latin typeface="Microsoft YaHei"/>
+              </a:rPr>
+              <a:t>语义检索</a:t>
+            </a:r>
           </a:p>
         </p:txBody>
       </p:sp>
@@ -4676,7 +7776,7 @@
         </p:nvSpPr>
         <p:spPr>
           <a:xfrm>
-            <a:off x="10401342" y="2840297"/>
+            <a:off x="10032749" y="2643447"/>
             <a:ext cx="1705385" cy="698269"/>
           </a:xfrm>
           <a:prstGeom prst="rect">
@@ -4710,23 +7810,19 @@
           <a:lstStyle/>
           <a:p>
             <a:pPr algn="ctr"/>
-            <a:endParaRPr sz="3200" b="1">
-              <a:latin typeface="宋体" panose="02010600030101010101" pitchFamily="2" charset="-122"/>
-              <a:ea typeface="宋体" panose="02010600030101010101" pitchFamily="2" charset="-122"/>
-            </a:endParaRPr>
-          </a:p>
-        </p:txBody>
-      </p:sp>
-      <p:sp>
-        <p:nvSpPr>
-          <p:cNvPr id="108" name="TextBox 107"/>
+          </a:p>
+        </p:txBody>
+      </p:sp>
+      <p:sp>
+        <p:nvSpPr>
+          <p:cNvPr id="107" name="TextBox 106"/>
           <p:cNvSpPr txBox="1"/>
           <p:nvPr/>
         </p:nvSpPr>
         <p:spPr>
           <a:xfrm>
-            <a:off x="10502939" y="2881654"/>
-            <a:ext cx="1502191" cy="615553"/>
+            <a:off x="10134346" y="2680854"/>
+            <a:ext cx="1502191" cy="99752"/>
           </a:xfrm>
           <a:prstGeom prst="rect">
             <a:avLst/>
@@ -4737,7 +7833,7 @@
           </a:ln>
         </p:spPr>
         <p:txBody>
-          <a:bodyPr wrap="square" lIns="0" tIns="0" rIns="0" bIns="0" anchor="ctr">
+          <a:bodyPr wrap="square" anchor="t" lIns="0" rIns="0" tIns="0" bIns="0">
             <a:spAutoFit/>
           </a:bodyPr>
           <a:lstStyle/>
@@ -4751,32 +7847,271 @@
               </a:spcAft>
             </a:pPr>
             <a:r>
-              <a:rPr lang="en-US" altLang="zh-CN" sz="2000" b="1" i="0" dirty="0" err="1">
+              <a:rPr sz="810" b="0" i="1">
+                <a:solidFill>
+                  <a:srgbClr val="78909C"/>
+                </a:solidFill>
+                <a:latin typeface="Microsoft YaHei"/>
+              </a:rPr>
+              <a:t>«node»</a:t>
+            </a:r>
+          </a:p>
+        </p:txBody>
+      </p:sp>
+      <p:sp>
+        <p:nvSpPr>
+          <p:cNvPr id="108" name="TextBox 107"/>
+          <p:cNvSpPr txBox="1"/>
+          <p:nvPr/>
+        </p:nvSpPr>
+        <p:spPr>
+          <a:xfrm>
+            <a:off x="10134346" y="2992581"/>
+            <a:ext cx="1502191" cy="137160"/>
+          </a:xfrm>
+          <a:prstGeom prst="rect">
+            <a:avLst/>
+          </a:prstGeom>
+          <a:noFill/>
+          <a:ln>
+            <a:noFill/>
+          </a:ln>
+        </p:spPr>
+        <p:txBody>
+          <a:bodyPr wrap="square" anchor="ctr" lIns="0" rIns="0" tIns="0" bIns="0">
+            <a:spAutoFit/>
+          </a:bodyPr>
+          <a:lstStyle/>
+          <a:p>
+            <a:pPr algn="ctr">
+              <a:spcBef>
+                <a:spcPts val="0"/>
+              </a:spcBef>
+              <a:spcAft>
+                <a:spcPts val="0"/>
+              </a:spcAft>
+            </a:pPr>
+            <a:r>
+              <a:rPr sz="1160" b="1" i="0">
                 <a:solidFill>
                   <a:srgbClr val="1A1A2E"/>
                 </a:solidFill>
-                <a:latin typeface="宋体" panose="02010600030101010101" pitchFamily="2" charset="-122"/>
-                <a:ea typeface="宋体" panose="02010600030101010101" pitchFamily="2" charset="-122"/>
+                <a:latin typeface="Microsoft YaHei"/>
               </a:rPr>
-              <a:t>Kubernetes</a:t>
-            </a:r>
-            <a:r>
-              <a:rPr sz="2000" b="1" i="0" dirty="0" err="1">
+              <a:t>目标集群</a:t>
+            </a:r>
+          </a:p>
+        </p:txBody>
+      </p:sp>
+      <p:sp>
+        <p:nvSpPr>
+          <p:cNvPr id="109" name="TextBox 108"/>
+          <p:cNvSpPr txBox="1"/>
+          <p:nvPr/>
+        </p:nvSpPr>
+        <p:spPr>
+          <a:xfrm>
+            <a:off x="10134346" y="3167149"/>
+            <a:ext cx="1502191" cy="99752"/>
+          </a:xfrm>
+          <a:prstGeom prst="rect">
+            <a:avLst/>
+          </a:prstGeom>
+          <a:noFill/>
+          <a:ln>
+            <a:noFill/>
+          </a:ln>
+        </p:spPr>
+        <p:txBody>
+          <a:bodyPr wrap="square" anchor="ctr" lIns="0" rIns="0" tIns="0" bIns="0">
+            <a:spAutoFit/>
+          </a:bodyPr>
+          <a:lstStyle/>
+          <a:p>
+            <a:pPr algn="ctr">
+              <a:spcBef>
+                <a:spcPts val="0"/>
+              </a:spcBef>
+              <a:spcAft>
+                <a:spcPts val="0"/>
+              </a:spcAft>
+            </a:pPr>
+            <a:r>
+              <a:rPr sz="900" b="0" i="0">
                 <a:solidFill>
-                  <a:srgbClr val="1A1A2E"/>
+                  <a:srgbClr val="555555"/>
                 </a:solidFill>
-                <a:latin typeface="宋体" panose="02010600030101010101" pitchFamily="2" charset="-122"/>
-                <a:ea typeface="宋体" panose="02010600030101010101" pitchFamily="2" charset="-122"/>
+                <a:latin typeface="Microsoft YaHei"/>
               </a:rPr>
-              <a:t>集群</a:t>
-            </a:r>
-            <a:endParaRPr sz="2000" b="1" i="0" dirty="0">
-              <a:solidFill>
-                <a:srgbClr val="1A1A2E"/>
-              </a:solidFill>
-              <a:latin typeface="宋体" panose="02010600030101010101" pitchFamily="2" charset="-122"/>
-              <a:ea typeface="宋体" panose="02010600030101010101" pitchFamily="2" charset="-122"/>
-            </a:endParaRPr>
+              <a:t>/ 主机</a:t>
+            </a:r>
+          </a:p>
+        </p:txBody>
+      </p:sp>
+      <p:cxnSp>
+        <p:nvCxnSpPr>
+          <p:cNvPr id="110" name="Connector 109"/>
+          <p:cNvCxnSpPr/>
+          <p:nvPr/>
+        </p:nvCxnSpPr>
+        <p:spPr>
+          <a:xfrm>
+            <a:off x="1886809" y="1115983"/>
+            <a:ext cx="0" cy="411480"/>
+          </a:xfrm>
+          <a:prstGeom prst="line">
+            <a:avLst/>
+          </a:prstGeom>
+          <a:ln w="19050">
+            <a:solidFill>
+              <a:srgbClr val="263238"/>
+            </a:solidFill>
+          </a:ln>
+        </p:spPr>
+        <p:style>
+          <a:lnRef idx="2">
+            <a:schemeClr val="accent1"/>
+          </a:lnRef>
+          <a:fillRef idx="0">
+            <a:schemeClr val="accent1"/>
+          </a:fillRef>
+          <a:effectRef idx="1">
+            <a:schemeClr val="accent1"/>
+          </a:effectRef>
+          <a:fontRef idx="minor">
+            <a:schemeClr val="tx1"/>
+          </a:fontRef>
+        </p:style>
+      </p:cxnSp>
+      <p:cxnSp>
+        <p:nvCxnSpPr>
+          <p:cNvPr id="111" name="Connector 110"/>
+          <p:cNvCxnSpPr/>
+          <p:nvPr/>
+        </p:nvCxnSpPr>
+        <p:spPr>
+          <a:xfrm>
+            <a:off x="1886809" y="1527463"/>
+            <a:ext cx="1451393" cy="0"/>
+          </a:xfrm>
+          <a:prstGeom prst="line">
+            <a:avLst/>
+          </a:prstGeom>
+          <a:ln w="19050">
+            <a:solidFill>
+              <a:srgbClr val="263238"/>
+            </a:solidFill>
+          </a:ln>
+        </p:spPr>
+        <p:style>
+          <a:lnRef idx="2">
+            <a:schemeClr val="accent1"/>
+          </a:lnRef>
+          <a:fillRef idx="0">
+            <a:schemeClr val="accent1"/>
+          </a:fillRef>
+          <a:effectRef idx="1">
+            <a:schemeClr val="accent1"/>
+          </a:effectRef>
+          <a:fontRef idx="minor">
+            <a:schemeClr val="tx1"/>
+          </a:fontRef>
+        </p:style>
+      </p:cxnSp>
+      <p:cxnSp>
+        <p:nvCxnSpPr>
+          <p:cNvPr id="112" name="Connector 111"/>
+          <p:cNvCxnSpPr/>
+          <p:nvPr/>
+        </p:nvCxnSpPr>
+        <p:spPr>
+          <a:xfrm>
+            <a:off x="3338202" y="1527463"/>
+            <a:ext cx="0" cy="205740"/>
+          </a:xfrm>
+          <a:prstGeom prst="line">
+            <a:avLst/>
+          </a:prstGeom>
+          <a:ln w="19050">
+            <a:solidFill>
+              <a:srgbClr val="263238"/>
+            </a:solidFill>
+            <a:tailEnd type="arrow"/>
+          </a:ln>
+        </p:spPr>
+        <p:style>
+          <a:lnRef idx="2">
+            <a:schemeClr val="accent1"/>
+          </a:lnRef>
+          <a:fillRef idx="0">
+            <a:schemeClr val="accent1"/>
+          </a:fillRef>
+          <a:effectRef idx="1">
+            <a:schemeClr val="accent1"/>
+          </a:effectRef>
+          <a:fontRef idx="minor">
+            <a:schemeClr val="tx1"/>
+          </a:fontRef>
+        </p:style>
+      </p:cxnSp>
+      <p:sp>
+        <p:nvSpPr>
+          <p:cNvPr id="113" name="Rounded Rectangle 112"/>
+          <p:cNvSpPr/>
+          <p:nvPr/>
+        </p:nvSpPr>
+        <p:spPr>
+          <a:xfrm>
+            <a:off x="1850525" y="1421476"/>
+            <a:ext cx="1523961" cy="211974"/>
+          </a:xfrm>
+          <a:prstGeom prst="roundRect">
+            <a:avLst/>
+          </a:prstGeom>
+          <a:solidFill>
+            <a:srgbClr val="FFFFFF"/>
+          </a:solidFill>
+          <a:ln w="10160">
+            <a:solidFill>
+              <a:srgbClr val="BDBDBD"/>
+            </a:solidFill>
+          </a:ln>
+        </p:spPr>
+        <p:style>
+          <a:lnRef idx="1">
+            <a:schemeClr val="accent1"/>
+          </a:lnRef>
+          <a:fillRef idx="3">
+            <a:schemeClr val="accent1"/>
+          </a:fillRef>
+          <a:effectRef idx="2">
+            <a:schemeClr val="accent1"/>
+          </a:effectRef>
+          <a:fontRef idx="minor">
+            <a:schemeClr val="lt1"/>
+          </a:fontRef>
+        </p:style>
+        <p:txBody>
+          <a:bodyPr rtlCol="0" anchor="ctr" wrap="square" lIns="0" rIns="0" tIns="0" bIns="0"/>
+          <a:lstStyle/>
+          <a:p>
+            <a:pPr algn="ctr">
+              <a:spcBef>
+                <a:spcPts val="0"/>
+              </a:spcBef>
+              <a:spcAft>
+                <a:spcPts val="0"/>
+              </a:spcAft>
+            </a:pPr>
+            <a:r>
+              <a:rPr sz="840" b="0" i="0">
+                <a:solidFill>
+                  <a:srgbClr val="37474F"/>
+                </a:solidFill>
+                <a:latin typeface="Microsoft YaHei"/>
+              </a:rPr>
+              <a:t>HTTP / JSON</a:t>
+            </a:r>
           </a:p>
         </p:txBody>
       </p:sp>
@@ -4788,7 +8123,7 @@
         </p:nvCxnSpPr>
         <p:spPr>
           <a:xfrm>
-            <a:off x="4717024" y="2223077"/>
+            <a:off x="4717024" y="2026227"/>
             <a:ext cx="1088545" cy="0"/>
           </a:xfrm>
           <a:prstGeom prst="line">
@@ -4824,7 +8159,7 @@
         </p:nvCxnSpPr>
         <p:spPr>
           <a:xfrm>
-            <a:off x="6966682" y="2516100"/>
+            <a:off x="6966682" y="2319250"/>
             <a:ext cx="0" cy="143395"/>
           </a:xfrm>
           <a:prstGeom prst="line">
@@ -4859,7 +8194,7 @@
         </p:nvCxnSpPr>
         <p:spPr>
           <a:xfrm flipH="1">
-            <a:off x="3628480" y="2659495"/>
+            <a:off x="3628480" y="2462645"/>
             <a:ext cx="3338202" cy="0"/>
           </a:xfrm>
           <a:prstGeom prst="line">
@@ -4894,7 +8229,7 @@
         </p:nvCxnSpPr>
         <p:spPr>
           <a:xfrm>
-            <a:off x="3628480" y="2659495"/>
+            <a:off x="3628480" y="2462645"/>
             <a:ext cx="0" cy="249382"/>
           </a:xfrm>
           <a:prstGeom prst="line">
@@ -4930,7 +8265,7 @@
         </p:nvSpPr>
         <p:spPr>
           <a:xfrm>
-            <a:off x="4880306" y="2553508"/>
+            <a:off x="4880306" y="2356658"/>
             <a:ext cx="834550" cy="211974"/>
           </a:xfrm>
           <a:prstGeom prst="roundRect">
@@ -4960,7 +8295,7 @@
           </a:fontRef>
         </p:style>
         <p:txBody>
-          <a:bodyPr wrap="square" lIns="0" tIns="0" rIns="0" bIns="0" rtlCol="0" anchor="ctr"/>
+          <a:bodyPr rtlCol="0" anchor="ctr" wrap="square" lIns="0" rIns="0" tIns="0" bIns="0"/>
           <a:lstStyle/>
           <a:p>
             <a:pPr algn="ctr">
@@ -4972,12 +8307,11 @@
               </a:spcAft>
             </a:pPr>
             <a:r>
-              <a:rPr sz="1100" b="1" i="0">
+              <a:rPr sz="840" b="0" i="0">
                 <a:solidFill>
                   <a:srgbClr val="37474F"/>
                 </a:solidFill>
-                <a:latin typeface="宋体" panose="02010600030101010101" pitchFamily="2" charset="-122"/>
-                <a:ea typeface="宋体" panose="02010600030101010101" pitchFamily="2" charset="-122"/>
+                <a:latin typeface="Microsoft YaHei"/>
               </a:rPr>
               <a:t>任务分发</a:t>
             </a:r>
@@ -4986,14 +8320,14 @@
       </p:sp>
       <p:cxnSp>
         <p:nvCxnSpPr>
-          <p:cNvPr id="120" name="Connector 119"/>
+          <p:cNvPr id="119" name="Connector 118"/>
           <p:cNvCxnSpPr/>
           <p:nvPr/>
         </p:nvCxnSpPr>
         <p:spPr>
-          <a:xfrm flipH="1">
-            <a:off x="2031949" y="3830550"/>
-            <a:ext cx="1596531" cy="0"/>
+          <a:xfrm>
+            <a:off x="3628480" y="3273136"/>
+            <a:ext cx="0" cy="417714"/>
           </a:xfrm>
           <a:prstGeom prst="line">
             <a:avLst/>
@@ -5021,17 +8355,14 @@
       </p:cxnSp>
       <p:cxnSp>
         <p:nvCxnSpPr>
-          <p:cNvPr id="132" name="Connector 131"/>
-          <p:cNvCxnSpPr>
-            <a:cxnSpLocks/>
-            <a:endCxn id="106" idx="1"/>
-          </p:cNvCxnSpPr>
+          <p:cNvPr id="120" name="Connector 119"/>
+          <p:cNvCxnSpPr/>
           <p:nvPr/>
         </p:nvCxnSpPr>
         <p:spPr>
-          <a:xfrm>
-            <a:off x="8962347" y="3189431"/>
-            <a:ext cx="1438995" cy="1"/>
+          <a:xfrm flipH="1">
+            <a:off x="2031949" y="3690850"/>
+            <a:ext cx="1596531" cy="0"/>
           </a:xfrm>
           <a:prstGeom prst="line">
             <a:avLst/>
@@ -5040,7 +8371,6 @@
             <a:solidFill>
               <a:srgbClr val="263238"/>
             </a:solidFill>
-            <a:tailEnd type="arrow"/>
           </a:ln>
         </p:spPr>
         <p:style>
@@ -5058,16 +8388,52 @@
           </a:fontRef>
         </p:style>
       </p:cxnSp>
-      <p:sp>
-        <p:nvSpPr>
-          <p:cNvPr id="133" name="Rounded Rectangle 132"/>
+      <p:cxnSp>
+        <p:nvCxnSpPr>
+          <p:cNvPr id="121" name="Connector 120"/>
+          <p:cNvCxnSpPr/>
+          <p:nvPr/>
+        </p:nvCxnSpPr>
+        <p:spPr>
+          <a:xfrm>
+            <a:off x="2031949" y="3690850"/>
+            <a:ext cx="0" cy="461357"/>
+          </a:xfrm>
+          <a:prstGeom prst="line">
+            <a:avLst/>
+          </a:prstGeom>
+          <a:ln w="19050">
+            <a:solidFill>
+              <a:srgbClr val="263238"/>
+            </a:solidFill>
+            <a:tailEnd type="arrow"/>
+          </a:ln>
+        </p:spPr>
+        <p:style>
+          <a:lnRef idx="2">
+            <a:schemeClr val="accent1"/>
+          </a:lnRef>
+          <a:fillRef idx="0">
+            <a:schemeClr val="accent1"/>
+          </a:fillRef>
+          <a:effectRef idx="1">
+            <a:schemeClr val="accent1"/>
+          </a:effectRef>
+          <a:fontRef idx="minor">
+            <a:schemeClr val="tx1"/>
+          </a:fontRef>
+        </p:style>
+      </p:cxnSp>
+      <p:sp>
+        <p:nvSpPr>
+          <p:cNvPr id="122" name="Rounded Rectangle 121"/>
           <p:cNvSpPr/>
           <p:nvPr/>
         </p:nvSpPr>
         <p:spPr>
           <a:xfrm>
-            <a:off x="9052465" y="2847385"/>
-            <a:ext cx="1288705" cy="249381"/>
+            <a:off x="2412939" y="3584863"/>
+            <a:ext cx="834550" cy="211974"/>
           </a:xfrm>
           <a:prstGeom prst="roundRect">
             <a:avLst/>
@@ -5096,7 +8462,7 @@
           </a:fontRef>
         </p:style>
         <p:txBody>
-          <a:bodyPr wrap="square" lIns="0" tIns="0" rIns="0" bIns="0" rtlCol="0" anchor="ctr"/>
+          <a:bodyPr rtlCol="0" anchor="ctr" wrap="square" lIns="0" rIns="0" tIns="0" bIns="0"/>
           <a:lstStyle/>
           <a:p>
             <a:pPr algn="ctr">
@@ -5108,3553 +8474,487 @@
               </a:spcAft>
             </a:pPr>
             <a:r>
-              <a:rPr sz="1100" b="1" i="0" dirty="0">
+              <a:rPr sz="840" b="0" i="0">
                 <a:solidFill>
                   <a:srgbClr val="37474F"/>
                 </a:solidFill>
-                <a:latin typeface="宋体" panose="02010600030101010101" pitchFamily="2" charset="-122"/>
-                <a:ea typeface="宋体" panose="02010600030101010101" pitchFamily="2" charset="-122"/>
+                <a:latin typeface="Microsoft YaHei"/>
+              </a:rPr>
+              <a:t>生成调用</a:t>
+            </a:r>
+          </a:p>
+        </p:txBody>
+      </p:sp>
+      <p:cxnSp>
+        <p:nvCxnSpPr>
+          <p:cNvPr id="123" name="Connector 122"/>
+          <p:cNvCxnSpPr/>
+          <p:nvPr/>
+        </p:nvCxnSpPr>
+        <p:spPr>
+          <a:xfrm>
+            <a:off x="9071201" y="4769427"/>
+            <a:ext cx="0" cy="405245"/>
+          </a:xfrm>
+          <a:prstGeom prst="line">
+            <a:avLst/>
+          </a:prstGeom>
+          <a:ln w="19050">
+            <a:solidFill>
+              <a:srgbClr val="263238"/>
+            </a:solidFill>
+          </a:ln>
+        </p:spPr>
+        <p:style>
+          <a:lnRef idx="2">
+            <a:schemeClr val="accent1"/>
+          </a:lnRef>
+          <a:fillRef idx="0">
+            <a:schemeClr val="accent1"/>
+          </a:fillRef>
+          <a:effectRef idx="1">
+            <a:schemeClr val="accent1"/>
+          </a:effectRef>
+          <a:fontRef idx="minor">
+            <a:schemeClr val="tx1"/>
+          </a:fontRef>
+        </p:style>
+      </p:cxnSp>
+      <p:cxnSp>
+        <p:nvCxnSpPr>
+          <p:cNvPr id="124" name="Connector 123"/>
+          <p:cNvCxnSpPr/>
+          <p:nvPr/>
+        </p:nvCxnSpPr>
+        <p:spPr>
+          <a:xfrm flipH="1">
+            <a:off x="3483341" y="5174672"/>
+            <a:ext cx="5587860" cy="0"/>
+          </a:xfrm>
+          <a:prstGeom prst="line">
+            <a:avLst/>
+          </a:prstGeom>
+          <a:ln w="19050">
+            <a:solidFill>
+              <a:srgbClr val="263238"/>
+            </a:solidFill>
+          </a:ln>
+        </p:spPr>
+        <p:style>
+          <a:lnRef idx="2">
+            <a:schemeClr val="accent1"/>
+          </a:lnRef>
+          <a:fillRef idx="0">
+            <a:schemeClr val="accent1"/>
+          </a:fillRef>
+          <a:effectRef idx="1">
+            <a:schemeClr val="accent1"/>
+          </a:effectRef>
+          <a:fontRef idx="minor">
+            <a:schemeClr val="tx1"/>
+          </a:fontRef>
+        </p:style>
+      </p:cxnSp>
+      <p:cxnSp>
+        <p:nvCxnSpPr>
+          <p:cNvPr id="125" name="Connector 124"/>
+          <p:cNvCxnSpPr/>
+          <p:nvPr/>
+        </p:nvCxnSpPr>
+        <p:spPr>
+          <a:xfrm>
+            <a:off x="3483341" y="5174672"/>
+            <a:ext cx="0" cy="492529"/>
+          </a:xfrm>
+          <a:prstGeom prst="line">
+            <a:avLst/>
+          </a:prstGeom>
+          <a:ln w="19050">
+            <a:solidFill>
+              <a:srgbClr val="263238"/>
+            </a:solidFill>
+            <a:tailEnd type="arrow"/>
+          </a:ln>
+        </p:spPr>
+        <p:style>
+          <a:lnRef idx="2">
+            <a:schemeClr val="accent1"/>
+          </a:lnRef>
+          <a:fillRef idx="0">
+            <a:schemeClr val="accent1"/>
+          </a:fillRef>
+          <a:effectRef idx="1">
+            <a:schemeClr val="accent1"/>
+          </a:effectRef>
+          <a:fontRef idx="minor">
+            <a:schemeClr val="tx1"/>
+          </a:fontRef>
+        </p:style>
+      </p:cxnSp>
+      <p:sp>
+        <p:nvSpPr>
+          <p:cNvPr id="126" name="Rounded Rectangle 125"/>
+          <p:cNvSpPr/>
+          <p:nvPr/>
+        </p:nvSpPr>
+        <p:spPr>
+          <a:xfrm>
+            <a:off x="5896281" y="5068685"/>
+            <a:ext cx="834550" cy="211974"/>
+          </a:xfrm>
+          <a:prstGeom prst="roundRect">
+            <a:avLst/>
+          </a:prstGeom>
+          <a:solidFill>
+            <a:srgbClr val="FFFFFF"/>
+          </a:solidFill>
+          <a:ln w="10160">
+            <a:solidFill>
+              <a:srgbClr val="BDBDBD"/>
+            </a:solidFill>
+          </a:ln>
+        </p:spPr>
+        <p:style>
+          <a:lnRef idx="1">
+            <a:schemeClr val="accent1"/>
+          </a:lnRef>
+          <a:fillRef idx="3">
+            <a:schemeClr val="accent1"/>
+          </a:fillRef>
+          <a:effectRef idx="2">
+            <a:schemeClr val="accent1"/>
+          </a:effectRef>
+          <a:fontRef idx="minor">
+            <a:schemeClr val="lt1"/>
+          </a:fontRef>
+        </p:style>
+        <p:txBody>
+          <a:bodyPr rtlCol="0" anchor="ctr" wrap="square" lIns="0" rIns="0" tIns="0" bIns="0"/>
+          <a:lstStyle/>
+          <a:p>
+            <a:pPr algn="ctr">
+              <a:spcBef>
+                <a:spcPts val="0"/>
+              </a:spcBef>
+              <a:spcAft>
+                <a:spcPts val="0"/>
+              </a:spcAft>
+            </a:pPr>
+            <a:r>
+              <a:rPr sz="840" b="0" i="0">
+                <a:solidFill>
+                  <a:srgbClr val="37474F"/>
+                </a:solidFill>
+                <a:latin typeface="Microsoft YaHei"/>
+              </a:rPr>
+              <a:t>持久化</a:t>
+            </a:r>
+          </a:p>
+        </p:txBody>
+      </p:sp>
+      <p:cxnSp>
+        <p:nvCxnSpPr>
+          <p:cNvPr id="127" name="Connector 126"/>
+          <p:cNvCxnSpPr/>
+          <p:nvPr/>
+        </p:nvCxnSpPr>
+        <p:spPr>
+          <a:xfrm>
+            <a:off x="5914423" y="4551218"/>
+            <a:ext cx="290279" cy="0"/>
+          </a:xfrm>
+          <a:prstGeom prst="line">
+            <a:avLst/>
+          </a:prstGeom>
+          <a:ln w="19050">
+            <a:solidFill>
+              <a:srgbClr val="263238"/>
+            </a:solidFill>
+            <a:prstDash val="dash"/>
+          </a:ln>
+        </p:spPr>
+        <p:style>
+          <a:lnRef idx="2">
+            <a:schemeClr val="accent1"/>
+          </a:lnRef>
+          <a:fillRef idx="0">
+            <a:schemeClr val="accent1"/>
+          </a:fillRef>
+          <a:effectRef idx="1">
+            <a:schemeClr val="accent1"/>
+          </a:effectRef>
+          <a:fontRef idx="minor">
+            <a:schemeClr val="tx1"/>
+          </a:fontRef>
+        </p:style>
+      </p:cxnSp>
+      <p:cxnSp>
+        <p:nvCxnSpPr>
+          <p:cNvPr id="128" name="Connector 127"/>
+          <p:cNvCxnSpPr/>
+          <p:nvPr/>
+        </p:nvCxnSpPr>
+        <p:spPr>
+          <a:xfrm>
+            <a:off x="6204702" y="4551218"/>
+            <a:ext cx="0" cy="760614"/>
+          </a:xfrm>
+          <a:prstGeom prst="line">
+            <a:avLst/>
+          </a:prstGeom>
+          <a:ln w="19050">
+            <a:solidFill>
+              <a:srgbClr val="263238"/>
+            </a:solidFill>
+            <a:prstDash val="dash"/>
+          </a:ln>
+        </p:spPr>
+        <p:style>
+          <a:lnRef idx="2">
+            <a:schemeClr val="accent1"/>
+          </a:lnRef>
+          <a:fillRef idx="0">
+            <a:schemeClr val="accent1"/>
+          </a:fillRef>
+          <a:effectRef idx="1">
+            <a:schemeClr val="accent1"/>
+          </a:effectRef>
+          <a:fontRef idx="minor">
+            <a:schemeClr val="tx1"/>
+          </a:fontRef>
+        </p:style>
+      </p:cxnSp>
+      <p:cxnSp>
+        <p:nvCxnSpPr>
+          <p:cNvPr id="129" name="Connector 128"/>
+          <p:cNvCxnSpPr/>
+          <p:nvPr/>
+        </p:nvCxnSpPr>
+        <p:spPr>
+          <a:xfrm>
+            <a:off x="6204702" y="5311832"/>
+            <a:ext cx="907120" cy="0"/>
+          </a:xfrm>
+          <a:prstGeom prst="line">
+            <a:avLst/>
+          </a:prstGeom>
+          <a:ln w="19050">
+            <a:solidFill>
+              <a:srgbClr val="263238"/>
+            </a:solidFill>
+            <a:prstDash val="dash"/>
+          </a:ln>
+        </p:spPr>
+        <p:style>
+          <a:lnRef idx="2">
+            <a:schemeClr val="accent1"/>
+          </a:lnRef>
+          <a:fillRef idx="0">
+            <a:schemeClr val="accent1"/>
+          </a:fillRef>
+          <a:effectRef idx="1">
+            <a:schemeClr val="accent1"/>
+          </a:effectRef>
+          <a:fontRef idx="minor">
+            <a:schemeClr val="tx1"/>
+          </a:fontRef>
+        </p:style>
+      </p:cxnSp>
+      <p:cxnSp>
+        <p:nvCxnSpPr>
+          <p:cNvPr id="130" name="Connector 129"/>
+          <p:cNvCxnSpPr/>
+          <p:nvPr/>
+        </p:nvCxnSpPr>
+        <p:spPr>
+          <a:xfrm>
+            <a:off x="7111822" y="5311832"/>
+            <a:ext cx="0" cy="355369"/>
+          </a:xfrm>
+          <a:prstGeom prst="line">
+            <a:avLst/>
+          </a:prstGeom>
+          <a:ln w="19050">
+            <a:solidFill>
+              <a:srgbClr val="263238"/>
+            </a:solidFill>
+            <a:prstDash val="dash"/>
+            <a:tailEnd type="arrow"/>
+          </a:ln>
+        </p:spPr>
+        <p:style>
+          <a:lnRef idx="2">
+            <a:schemeClr val="accent1"/>
+          </a:lnRef>
+          <a:fillRef idx="0">
+            <a:schemeClr val="accent1"/>
+          </a:fillRef>
+          <a:effectRef idx="1">
+            <a:schemeClr val="accent1"/>
+          </a:effectRef>
+          <a:fontRef idx="minor">
+            <a:schemeClr val="tx1"/>
+          </a:fontRef>
+        </p:style>
+      </p:cxnSp>
+      <p:sp>
+        <p:nvSpPr>
+          <p:cNvPr id="131" name="Rounded Rectangle 130"/>
+          <p:cNvSpPr/>
+          <p:nvPr/>
+        </p:nvSpPr>
+        <p:spPr>
+          <a:xfrm>
+            <a:off x="6549407" y="5205845"/>
+            <a:ext cx="834550" cy="211974"/>
+          </a:xfrm>
+          <a:prstGeom prst="roundRect">
+            <a:avLst/>
+          </a:prstGeom>
+          <a:solidFill>
+            <a:srgbClr val="FFFFFF"/>
+          </a:solidFill>
+          <a:ln w="10160">
+            <a:solidFill>
+              <a:srgbClr val="BDBDBD"/>
+            </a:solidFill>
+          </a:ln>
+        </p:spPr>
+        <p:style>
+          <a:lnRef idx="1">
+            <a:schemeClr val="accent1"/>
+          </a:lnRef>
+          <a:fillRef idx="3">
+            <a:schemeClr val="accent1"/>
+          </a:fillRef>
+          <a:effectRef idx="2">
+            <a:schemeClr val="accent1"/>
+          </a:effectRef>
+          <a:fontRef idx="minor">
+            <a:schemeClr val="lt1"/>
+          </a:fontRef>
+        </p:style>
+        <p:txBody>
+          <a:bodyPr rtlCol="0" anchor="ctr" wrap="square" lIns="0" rIns="0" tIns="0" bIns="0"/>
+          <a:lstStyle/>
+          <a:p>
+            <a:pPr algn="ctr">
+              <a:spcBef>
+                <a:spcPts val="0"/>
+              </a:spcBef>
+              <a:spcAft>
+                <a:spcPts val="0"/>
+              </a:spcAft>
+            </a:pPr>
+            <a:r>
+              <a:rPr sz="840" b="0" i="0">
+                <a:solidFill>
+                  <a:srgbClr val="37474F"/>
+                </a:solidFill>
+                <a:latin typeface="Microsoft YaHei"/>
+              </a:rPr>
+              <a:t>语义检索</a:t>
+            </a:r>
+          </a:p>
+        </p:txBody>
+      </p:sp>
+      <p:cxnSp>
+        <p:nvCxnSpPr>
+          <p:cNvPr id="132" name="Connector 131"/>
+          <p:cNvCxnSpPr/>
+          <p:nvPr/>
+        </p:nvCxnSpPr>
+        <p:spPr>
+          <a:xfrm>
+            <a:off x="8962347" y="2992581"/>
+            <a:ext cx="1070402" cy="0"/>
+          </a:xfrm>
+          <a:prstGeom prst="line">
+            <a:avLst/>
+          </a:prstGeom>
+          <a:ln w="19050">
+            <a:solidFill>
+              <a:srgbClr val="263238"/>
+            </a:solidFill>
+            <a:tailEnd type="arrow"/>
+          </a:ln>
+        </p:spPr>
+        <p:style>
+          <a:lnRef idx="2">
+            <a:schemeClr val="accent1"/>
+          </a:lnRef>
+          <a:fillRef idx="0">
+            <a:schemeClr val="accent1"/>
+          </a:fillRef>
+          <a:effectRef idx="1">
+            <a:schemeClr val="accent1"/>
+          </a:effectRef>
+          <a:fontRef idx="minor">
+            <a:schemeClr val="tx1"/>
+          </a:fontRef>
+        </p:style>
+      </p:cxnSp>
+      <p:sp>
+        <p:nvSpPr>
+          <p:cNvPr id="133" name="Rounded Rectangle 132"/>
+          <p:cNvSpPr/>
+          <p:nvPr/>
+        </p:nvSpPr>
+        <p:spPr>
+          <a:xfrm>
+            <a:off x="8817208" y="2743200"/>
+            <a:ext cx="1523961" cy="211974"/>
+          </a:xfrm>
+          <a:prstGeom prst="roundRect">
+            <a:avLst/>
+          </a:prstGeom>
+          <a:solidFill>
+            <a:srgbClr val="FFFFFF"/>
+          </a:solidFill>
+          <a:ln w="10160">
+            <a:solidFill>
+              <a:srgbClr val="BDBDBD"/>
+            </a:solidFill>
+          </a:ln>
+        </p:spPr>
+        <p:style>
+          <a:lnRef idx="1">
+            <a:schemeClr val="accent1"/>
+          </a:lnRef>
+          <a:fillRef idx="3">
+            <a:schemeClr val="accent1"/>
+          </a:fillRef>
+          <a:effectRef idx="2">
+            <a:schemeClr val="accent1"/>
+          </a:effectRef>
+          <a:fontRef idx="minor">
+            <a:schemeClr val="lt1"/>
+          </a:fontRef>
+        </p:style>
+        <p:txBody>
+          <a:bodyPr rtlCol="0" anchor="ctr" wrap="square" lIns="0" rIns="0" tIns="0" bIns="0"/>
+          <a:lstStyle/>
+          <a:p>
+            <a:pPr algn="ctr">
+              <a:spcBef>
+                <a:spcPts val="0"/>
+              </a:spcBef>
+              <a:spcAft>
+                <a:spcPts val="0"/>
+              </a:spcAft>
+            </a:pPr>
+            <a:r>
+              <a:rPr sz="840" b="0" i="0">
+                <a:solidFill>
+                  <a:srgbClr val="37474F"/>
+                </a:solidFill>
+                <a:latin typeface="Microsoft YaHei"/>
               </a:rPr>
               <a:t>K8s API / SSH</a:t>
             </a:r>
           </a:p>
         </p:txBody>
       </p:sp>
-      <p:grpSp>
-        <p:nvGrpSpPr>
-          <p:cNvPr id="147" name="组合 146">
-            <a:extLst>
-              <a:ext uri="{FF2B5EF4-FFF2-40B4-BE49-F238E27FC236}">
-                <a16:creationId xmlns:a16="http://schemas.microsoft.com/office/drawing/2014/main" id="{2A7A4564-8E59-D1D4-7E64-2D49E931991E}"/>
-              </a:ext>
-            </a:extLst>
-          </p:cNvPr>
-          <p:cNvGrpSpPr/>
-          <p:nvPr/>
-        </p:nvGrpSpPr>
-        <p:grpSpPr>
-          <a:xfrm>
-            <a:off x="3301918" y="4378748"/>
-            <a:ext cx="1814240" cy="561109"/>
-            <a:chOff x="10502939" y="6072707"/>
-            <a:chExt cx="1814240" cy="561109"/>
-          </a:xfrm>
-        </p:grpSpPr>
-        <p:grpSp>
-          <p:nvGrpSpPr>
-            <p:cNvPr id="146" name="组合 145">
-              <a:extLst>
-                <a:ext uri="{FF2B5EF4-FFF2-40B4-BE49-F238E27FC236}">
-                  <a16:creationId xmlns:a16="http://schemas.microsoft.com/office/drawing/2014/main" id="{219625C5-21BB-493D-CD6B-C7216B29D225}"/>
-                </a:ext>
-              </a:extLst>
-            </p:cNvPr>
-            <p:cNvGrpSpPr/>
-            <p:nvPr/>
-          </p:nvGrpSpPr>
-          <p:grpSpPr>
-            <a:xfrm>
-              <a:off x="10502939" y="6072707"/>
-              <a:ext cx="1814240" cy="561109"/>
-              <a:chOff x="1249250" y="4369987"/>
-              <a:chExt cx="1814240" cy="561109"/>
-            </a:xfrm>
-          </p:grpSpPr>
-          <p:sp>
-            <p:nvSpPr>
-              <p:cNvPr id="72" name="Rectangle 76">
-                <a:extLst>
-                  <a:ext uri="{FF2B5EF4-FFF2-40B4-BE49-F238E27FC236}">
-                    <a16:creationId xmlns:a16="http://schemas.microsoft.com/office/drawing/2014/main" id="{914FA448-16C4-5D89-FA09-FEF8EE96A8A2}"/>
-                  </a:ext>
-                </a:extLst>
-              </p:cNvPr>
-              <p:cNvSpPr/>
-              <p:nvPr/>
-            </p:nvSpPr>
-            <p:spPr>
-              <a:xfrm>
-                <a:off x="1249250" y="4369987"/>
-                <a:ext cx="1814240" cy="561109"/>
-              </a:xfrm>
-              <a:prstGeom prst="rect">
-                <a:avLst/>
-              </a:prstGeom>
-              <a:solidFill>
-                <a:srgbClr val="FFFFFF"/>
-              </a:solidFill>
-              <a:ln w="13970">
-                <a:solidFill>
-                  <a:schemeClr val="tx1">
-                    <a:lumMod val="65000"/>
-                    <a:lumOff val="35000"/>
-                  </a:schemeClr>
-                </a:solidFill>
-              </a:ln>
-            </p:spPr>
-            <p:style>
-              <a:lnRef idx="1">
-                <a:schemeClr val="accent1"/>
-              </a:lnRef>
-              <a:fillRef idx="3">
-                <a:schemeClr val="accent1"/>
-              </a:fillRef>
-              <a:effectRef idx="2">
-                <a:schemeClr val="accent1"/>
-              </a:effectRef>
-              <a:fontRef idx="minor">
-                <a:schemeClr val="lt1"/>
-              </a:fontRef>
-            </p:style>
-            <p:txBody>
-              <a:bodyPr rtlCol="0" anchor="ctr"/>
-              <a:lstStyle/>
-              <a:p>
-                <a:pPr algn="ctr"/>
-                <a:endParaRPr sz="3200" b="1">
-                  <a:latin typeface="宋体" panose="02010600030101010101" pitchFamily="2" charset="-122"/>
-                  <a:ea typeface="宋体" panose="02010600030101010101" pitchFamily="2" charset="-122"/>
-                </a:endParaRPr>
-              </a:p>
-            </p:txBody>
-          </p:sp>
-          <p:grpSp>
-            <p:nvGrpSpPr>
-              <p:cNvPr id="142" name="组合 141">
-                <a:extLst>
-                  <a:ext uri="{FF2B5EF4-FFF2-40B4-BE49-F238E27FC236}">
-                    <a16:creationId xmlns:a16="http://schemas.microsoft.com/office/drawing/2014/main" id="{044774A4-9BC0-1CD2-1C3A-1E1C745532C2}"/>
-                  </a:ext>
-                </a:extLst>
-              </p:cNvPr>
-              <p:cNvGrpSpPr/>
-              <p:nvPr/>
-            </p:nvGrpSpPr>
-            <p:grpSpPr>
-              <a:xfrm>
-                <a:off x="2791063" y="4407913"/>
-                <a:ext cx="166910" cy="143394"/>
-                <a:chOff x="10916798" y="4537825"/>
-                <a:chExt cx="166910" cy="143394"/>
-              </a:xfrm>
-            </p:grpSpPr>
-            <p:sp>
-              <p:nvSpPr>
-                <p:cNvPr id="143" name="Rectangle 91">
-                  <a:extLst>
-                    <a:ext uri="{FF2B5EF4-FFF2-40B4-BE49-F238E27FC236}">
-                      <a16:creationId xmlns:a16="http://schemas.microsoft.com/office/drawing/2014/main" id="{59BC87D9-F8D4-CA1C-985F-9185AAC0946F}"/>
-                    </a:ext>
-                  </a:extLst>
-                </p:cNvPr>
-                <p:cNvSpPr/>
-                <p:nvPr/>
-              </p:nvSpPr>
-              <p:spPr>
-                <a:xfrm>
-                  <a:off x="10945826" y="4537825"/>
-                  <a:ext cx="137882" cy="143394"/>
-                </a:xfrm>
-                <a:prstGeom prst="rect">
-                  <a:avLst/>
-                </a:prstGeom>
-                <a:solidFill>
-                  <a:srgbClr val="FFFFFF"/>
-                </a:solidFill>
-                <a:ln w="10160">
-                  <a:solidFill>
-                    <a:schemeClr val="tx1"/>
-                  </a:solidFill>
-                </a:ln>
-              </p:spPr>
-              <p:style>
-                <a:lnRef idx="1">
-                  <a:schemeClr val="accent1"/>
-                </a:lnRef>
-                <a:fillRef idx="3">
-                  <a:schemeClr val="accent1"/>
-                </a:fillRef>
-                <a:effectRef idx="2">
-                  <a:schemeClr val="accent1"/>
-                </a:effectRef>
-                <a:fontRef idx="minor">
-                  <a:schemeClr val="lt1"/>
-                </a:fontRef>
-              </p:style>
-              <p:txBody>
-                <a:bodyPr rtlCol="0" anchor="ctr"/>
-                <a:lstStyle/>
-                <a:p>
-                  <a:pPr algn="ctr"/>
-                  <a:endParaRPr sz="3200" b="1">
-                    <a:solidFill>
-                      <a:schemeClr val="tx1"/>
-                    </a:solidFill>
-                    <a:latin typeface="宋体" panose="02010600030101010101" pitchFamily="2" charset="-122"/>
-                    <a:ea typeface="宋体" panose="02010600030101010101" pitchFamily="2" charset="-122"/>
-                  </a:endParaRPr>
-                </a:p>
-              </p:txBody>
-            </p:sp>
-            <p:sp>
-              <p:nvSpPr>
-                <p:cNvPr id="144" name="Rectangle 92">
-                  <a:extLst>
-                    <a:ext uri="{FF2B5EF4-FFF2-40B4-BE49-F238E27FC236}">
-                      <a16:creationId xmlns:a16="http://schemas.microsoft.com/office/drawing/2014/main" id="{76E62264-A359-AB2C-C648-ED5E49CAC074}"/>
-                    </a:ext>
-                  </a:extLst>
-                </p:cNvPr>
-                <p:cNvSpPr/>
-                <p:nvPr/>
-              </p:nvSpPr>
-              <p:spPr>
-                <a:xfrm>
-                  <a:off x="10916798" y="4550294"/>
-                  <a:ext cx="58055" cy="41148"/>
-                </a:xfrm>
-                <a:prstGeom prst="rect">
-                  <a:avLst/>
-                </a:prstGeom>
-                <a:solidFill>
-                  <a:srgbClr val="FFFFFF"/>
-                </a:solidFill>
-                <a:ln w="10160">
-                  <a:solidFill>
-                    <a:schemeClr val="tx1"/>
-                  </a:solidFill>
-                </a:ln>
-              </p:spPr>
-              <p:style>
-                <a:lnRef idx="1">
-                  <a:schemeClr val="accent1"/>
-                </a:lnRef>
-                <a:fillRef idx="3">
-                  <a:schemeClr val="accent1"/>
-                </a:fillRef>
-                <a:effectRef idx="2">
-                  <a:schemeClr val="accent1"/>
-                </a:effectRef>
-                <a:fontRef idx="minor">
-                  <a:schemeClr val="lt1"/>
-                </a:fontRef>
-              </p:style>
-              <p:txBody>
-                <a:bodyPr rtlCol="0" anchor="ctr"/>
-                <a:lstStyle/>
-                <a:p>
-                  <a:pPr algn="ctr"/>
-                  <a:endParaRPr sz="3200" b="1">
-                    <a:solidFill>
-                      <a:schemeClr val="tx1"/>
-                    </a:solidFill>
-                    <a:latin typeface="宋体" panose="02010600030101010101" pitchFamily="2" charset="-122"/>
-                    <a:ea typeface="宋体" panose="02010600030101010101" pitchFamily="2" charset="-122"/>
-                  </a:endParaRPr>
-                </a:p>
-              </p:txBody>
-            </p:sp>
-            <p:sp>
-              <p:nvSpPr>
-                <p:cNvPr id="145" name="Rectangle 93">
-                  <a:extLst>
-                    <a:ext uri="{FF2B5EF4-FFF2-40B4-BE49-F238E27FC236}">
-                      <a16:creationId xmlns:a16="http://schemas.microsoft.com/office/drawing/2014/main" id="{C5ACF2D1-2B81-575E-A61C-1AA68232AE69}"/>
-                    </a:ext>
-                  </a:extLst>
-                </p:cNvPr>
-                <p:cNvSpPr/>
-                <p:nvPr/>
-              </p:nvSpPr>
-              <p:spPr>
-                <a:xfrm>
-                  <a:off x="10916798" y="4605158"/>
-                  <a:ext cx="58055" cy="41148"/>
-                </a:xfrm>
-                <a:prstGeom prst="rect">
-                  <a:avLst/>
-                </a:prstGeom>
-                <a:solidFill>
-                  <a:srgbClr val="FFFFFF"/>
-                </a:solidFill>
-                <a:ln w="10160">
-                  <a:solidFill>
-                    <a:schemeClr val="tx1"/>
-                  </a:solidFill>
-                </a:ln>
-              </p:spPr>
-              <p:style>
-                <a:lnRef idx="1">
-                  <a:schemeClr val="accent1"/>
-                </a:lnRef>
-                <a:fillRef idx="3">
-                  <a:schemeClr val="accent1"/>
-                </a:fillRef>
-                <a:effectRef idx="2">
-                  <a:schemeClr val="accent1"/>
-                </a:effectRef>
-                <a:fontRef idx="minor">
-                  <a:schemeClr val="lt1"/>
-                </a:fontRef>
-              </p:style>
-              <p:txBody>
-                <a:bodyPr rtlCol="0" anchor="ctr"/>
-                <a:lstStyle/>
-                <a:p>
-                  <a:pPr algn="ctr"/>
-                  <a:endParaRPr sz="3200" b="1">
-                    <a:solidFill>
-                      <a:schemeClr val="tx1"/>
-                    </a:solidFill>
-                    <a:latin typeface="宋体" panose="02010600030101010101" pitchFamily="2" charset="-122"/>
-                    <a:ea typeface="宋体" panose="02010600030101010101" pitchFamily="2" charset="-122"/>
-                  </a:endParaRPr>
-                </a:p>
-              </p:txBody>
-            </p:sp>
-          </p:grpSp>
-        </p:grpSp>
-        <p:sp>
-          <p:nvSpPr>
-            <p:cNvPr id="136" name="TextBox 81">
-              <a:extLst>
-                <a:ext uri="{FF2B5EF4-FFF2-40B4-BE49-F238E27FC236}">
-                  <a16:creationId xmlns:a16="http://schemas.microsoft.com/office/drawing/2014/main" id="{6AA78E17-7C1F-DDA6-C7EB-BBD9E2C3A6D5}"/>
-                </a:ext>
-              </a:extLst>
-            </p:cNvPr>
-            <p:cNvSpPr txBox="1"/>
-            <p:nvPr/>
-          </p:nvSpPr>
-          <p:spPr>
-            <a:xfrm>
-              <a:off x="10609983" y="6187518"/>
-              <a:ext cx="1582017" cy="307777"/>
-            </a:xfrm>
-            <a:prstGeom prst="rect">
-              <a:avLst/>
-            </a:prstGeom>
-            <a:noFill/>
-            <a:ln>
-              <a:noFill/>
-            </a:ln>
-          </p:spPr>
-          <p:txBody>
-            <a:bodyPr wrap="square" lIns="0" tIns="0" rIns="0" bIns="0" anchor="ctr">
-              <a:spAutoFit/>
-            </a:bodyPr>
-            <a:lstStyle/>
-            <a:p>
-              <a:pPr algn="ctr">
-                <a:spcBef>
-                  <a:spcPts val="0"/>
-                </a:spcBef>
-                <a:spcAft>
-                  <a:spcPts val="0"/>
-                </a:spcAft>
-              </a:pPr>
-              <a:r>
-                <a:rPr lang="en-US" altLang="zh-CN" sz="2000" b="1" dirty="0">
-                  <a:solidFill>
-                    <a:srgbClr val="1A1A2E"/>
-                  </a:solidFill>
-                  <a:latin typeface="宋体" panose="02010600030101010101" pitchFamily="2" charset="-122"/>
-                </a:rPr>
-                <a:t>RAG </a:t>
-              </a:r>
-              <a:r>
-                <a:rPr lang="zh-CN" altLang="en-US" sz="2000" b="1" dirty="0">
-                  <a:solidFill>
-                    <a:srgbClr val="1A1A2E"/>
-                  </a:solidFill>
-                  <a:latin typeface="宋体" panose="02010600030101010101" pitchFamily="2" charset="-122"/>
-                </a:rPr>
-                <a:t>检索器</a:t>
-              </a:r>
-            </a:p>
-          </p:txBody>
-        </p:sp>
-      </p:grpSp>
-      <p:grpSp>
-        <p:nvGrpSpPr>
-          <p:cNvPr id="148" name="组合 147">
-            <a:extLst>
-              <a:ext uri="{FF2B5EF4-FFF2-40B4-BE49-F238E27FC236}">
-                <a16:creationId xmlns:a16="http://schemas.microsoft.com/office/drawing/2014/main" id="{83F8000B-3B3F-0ED8-1467-074BCE2C78D9}"/>
-              </a:ext>
-            </a:extLst>
-          </p:cNvPr>
-          <p:cNvGrpSpPr/>
-          <p:nvPr/>
-        </p:nvGrpSpPr>
-        <p:grpSpPr>
-          <a:xfrm>
-            <a:off x="989141" y="4378748"/>
-            <a:ext cx="1814240" cy="561109"/>
-            <a:chOff x="10502939" y="6072707"/>
-            <a:chExt cx="1814240" cy="561109"/>
-          </a:xfrm>
-        </p:grpSpPr>
-        <p:grpSp>
-          <p:nvGrpSpPr>
-            <p:cNvPr id="149" name="组合 148">
-              <a:extLst>
-                <a:ext uri="{FF2B5EF4-FFF2-40B4-BE49-F238E27FC236}">
-                  <a16:creationId xmlns:a16="http://schemas.microsoft.com/office/drawing/2014/main" id="{24D3B050-5E76-6E12-D76D-0D5FE0106662}"/>
-                </a:ext>
-              </a:extLst>
-            </p:cNvPr>
-            <p:cNvGrpSpPr/>
-            <p:nvPr/>
-          </p:nvGrpSpPr>
-          <p:grpSpPr>
-            <a:xfrm>
-              <a:off x="10502939" y="6072707"/>
-              <a:ext cx="1814240" cy="561109"/>
-              <a:chOff x="1249250" y="4369987"/>
-              <a:chExt cx="1814240" cy="561109"/>
-            </a:xfrm>
-          </p:grpSpPr>
-          <p:sp>
-            <p:nvSpPr>
-              <p:cNvPr id="151" name="Rectangle 76">
-                <a:extLst>
-                  <a:ext uri="{FF2B5EF4-FFF2-40B4-BE49-F238E27FC236}">
-                    <a16:creationId xmlns:a16="http://schemas.microsoft.com/office/drawing/2014/main" id="{9B1F5BB1-387F-E0B5-328D-B0A8D2C64FB5}"/>
-                  </a:ext>
-                </a:extLst>
-              </p:cNvPr>
-              <p:cNvSpPr/>
-              <p:nvPr/>
-            </p:nvSpPr>
-            <p:spPr>
-              <a:xfrm>
-                <a:off x="1249250" y="4369987"/>
-                <a:ext cx="1814240" cy="561109"/>
-              </a:xfrm>
-              <a:prstGeom prst="rect">
-                <a:avLst/>
-              </a:prstGeom>
-              <a:solidFill>
-                <a:srgbClr val="FFFFFF"/>
-              </a:solidFill>
-              <a:ln w="13970">
-                <a:solidFill>
-                  <a:schemeClr val="tx1">
-                    <a:lumMod val="65000"/>
-                    <a:lumOff val="35000"/>
-                  </a:schemeClr>
-                </a:solidFill>
-              </a:ln>
-            </p:spPr>
-            <p:style>
-              <a:lnRef idx="1">
-                <a:schemeClr val="accent1"/>
-              </a:lnRef>
-              <a:fillRef idx="3">
-                <a:schemeClr val="accent1"/>
-              </a:fillRef>
-              <a:effectRef idx="2">
-                <a:schemeClr val="accent1"/>
-              </a:effectRef>
-              <a:fontRef idx="minor">
-                <a:schemeClr val="lt1"/>
-              </a:fontRef>
-            </p:style>
-            <p:txBody>
-              <a:bodyPr rtlCol="0" anchor="ctr"/>
-              <a:lstStyle/>
-              <a:p>
-                <a:pPr algn="ctr"/>
-                <a:endParaRPr sz="3200" b="1">
-                  <a:latin typeface="宋体" panose="02010600030101010101" pitchFamily="2" charset="-122"/>
-                  <a:ea typeface="宋体" panose="02010600030101010101" pitchFamily="2" charset="-122"/>
-                </a:endParaRPr>
-              </a:p>
-            </p:txBody>
-          </p:sp>
-          <p:grpSp>
-            <p:nvGrpSpPr>
-              <p:cNvPr id="152" name="组合 151">
-                <a:extLst>
-                  <a:ext uri="{FF2B5EF4-FFF2-40B4-BE49-F238E27FC236}">
-                    <a16:creationId xmlns:a16="http://schemas.microsoft.com/office/drawing/2014/main" id="{A536543F-0198-443C-3C16-AFAB703AEFC0}"/>
-                  </a:ext>
-                </a:extLst>
-              </p:cNvPr>
-              <p:cNvGrpSpPr/>
-              <p:nvPr/>
-            </p:nvGrpSpPr>
-            <p:grpSpPr>
-              <a:xfrm>
-                <a:off x="2791063" y="4407913"/>
-                <a:ext cx="166910" cy="143394"/>
-                <a:chOff x="10916798" y="4537825"/>
-                <a:chExt cx="166910" cy="143394"/>
-              </a:xfrm>
-            </p:grpSpPr>
-            <p:sp>
-              <p:nvSpPr>
-                <p:cNvPr id="153" name="Rectangle 91">
-                  <a:extLst>
-                    <a:ext uri="{FF2B5EF4-FFF2-40B4-BE49-F238E27FC236}">
-                      <a16:creationId xmlns:a16="http://schemas.microsoft.com/office/drawing/2014/main" id="{A143BD04-7D68-625C-0971-702509204B36}"/>
-                    </a:ext>
-                  </a:extLst>
-                </p:cNvPr>
-                <p:cNvSpPr/>
-                <p:nvPr/>
-              </p:nvSpPr>
-              <p:spPr>
-                <a:xfrm>
-                  <a:off x="10945826" y="4537825"/>
-                  <a:ext cx="137882" cy="143394"/>
-                </a:xfrm>
-                <a:prstGeom prst="rect">
-                  <a:avLst/>
-                </a:prstGeom>
-                <a:solidFill>
-                  <a:srgbClr val="FFFFFF"/>
-                </a:solidFill>
-                <a:ln w="10160">
-                  <a:solidFill>
-                    <a:schemeClr val="tx1"/>
-                  </a:solidFill>
-                </a:ln>
-              </p:spPr>
-              <p:style>
-                <a:lnRef idx="1">
-                  <a:schemeClr val="accent1"/>
-                </a:lnRef>
-                <a:fillRef idx="3">
-                  <a:schemeClr val="accent1"/>
-                </a:fillRef>
-                <a:effectRef idx="2">
-                  <a:schemeClr val="accent1"/>
-                </a:effectRef>
-                <a:fontRef idx="minor">
-                  <a:schemeClr val="lt1"/>
-                </a:fontRef>
-              </p:style>
-              <p:txBody>
-                <a:bodyPr rtlCol="0" anchor="ctr"/>
-                <a:lstStyle/>
-                <a:p>
-                  <a:pPr algn="ctr"/>
-                  <a:endParaRPr sz="3200" b="1">
-                    <a:solidFill>
-                      <a:schemeClr val="tx1"/>
-                    </a:solidFill>
-                    <a:latin typeface="宋体" panose="02010600030101010101" pitchFamily="2" charset="-122"/>
-                    <a:ea typeface="宋体" panose="02010600030101010101" pitchFamily="2" charset="-122"/>
-                  </a:endParaRPr>
-                </a:p>
-              </p:txBody>
-            </p:sp>
-            <p:sp>
-              <p:nvSpPr>
-                <p:cNvPr id="154" name="Rectangle 92">
-                  <a:extLst>
-                    <a:ext uri="{FF2B5EF4-FFF2-40B4-BE49-F238E27FC236}">
-                      <a16:creationId xmlns:a16="http://schemas.microsoft.com/office/drawing/2014/main" id="{2F549C2B-10F8-DB19-BF00-EDA23B564320}"/>
-                    </a:ext>
-                  </a:extLst>
-                </p:cNvPr>
-                <p:cNvSpPr/>
-                <p:nvPr/>
-              </p:nvSpPr>
-              <p:spPr>
-                <a:xfrm>
-                  <a:off x="10916798" y="4550294"/>
-                  <a:ext cx="58055" cy="41148"/>
-                </a:xfrm>
-                <a:prstGeom prst="rect">
-                  <a:avLst/>
-                </a:prstGeom>
-                <a:solidFill>
-                  <a:srgbClr val="FFFFFF"/>
-                </a:solidFill>
-                <a:ln w="10160">
-                  <a:solidFill>
-                    <a:schemeClr val="tx1"/>
-                  </a:solidFill>
-                </a:ln>
-              </p:spPr>
-              <p:style>
-                <a:lnRef idx="1">
-                  <a:schemeClr val="accent1"/>
-                </a:lnRef>
-                <a:fillRef idx="3">
-                  <a:schemeClr val="accent1"/>
-                </a:fillRef>
-                <a:effectRef idx="2">
-                  <a:schemeClr val="accent1"/>
-                </a:effectRef>
-                <a:fontRef idx="minor">
-                  <a:schemeClr val="lt1"/>
-                </a:fontRef>
-              </p:style>
-              <p:txBody>
-                <a:bodyPr rtlCol="0" anchor="ctr"/>
-                <a:lstStyle/>
-                <a:p>
-                  <a:pPr algn="ctr"/>
-                  <a:endParaRPr sz="3200" b="1">
-                    <a:solidFill>
-                      <a:schemeClr val="tx1"/>
-                    </a:solidFill>
-                    <a:latin typeface="宋体" panose="02010600030101010101" pitchFamily="2" charset="-122"/>
-                    <a:ea typeface="宋体" panose="02010600030101010101" pitchFamily="2" charset="-122"/>
-                  </a:endParaRPr>
-                </a:p>
-              </p:txBody>
-            </p:sp>
-            <p:sp>
-              <p:nvSpPr>
-                <p:cNvPr id="155" name="Rectangle 93">
-                  <a:extLst>
-                    <a:ext uri="{FF2B5EF4-FFF2-40B4-BE49-F238E27FC236}">
-                      <a16:creationId xmlns:a16="http://schemas.microsoft.com/office/drawing/2014/main" id="{4E53258B-DBB6-EB5F-4930-961896DBFEAE}"/>
-                    </a:ext>
-                  </a:extLst>
-                </p:cNvPr>
-                <p:cNvSpPr/>
-                <p:nvPr/>
-              </p:nvSpPr>
-              <p:spPr>
-                <a:xfrm>
-                  <a:off x="10916798" y="4605158"/>
-                  <a:ext cx="58055" cy="41148"/>
-                </a:xfrm>
-                <a:prstGeom prst="rect">
-                  <a:avLst/>
-                </a:prstGeom>
-                <a:solidFill>
-                  <a:srgbClr val="FFFFFF"/>
-                </a:solidFill>
-                <a:ln w="10160">
-                  <a:solidFill>
-                    <a:schemeClr val="tx1"/>
-                  </a:solidFill>
-                </a:ln>
-              </p:spPr>
-              <p:style>
-                <a:lnRef idx="1">
-                  <a:schemeClr val="accent1"/>
-                </a:lnRef>
-                <a:fillRef idx="3">
-                  <a:schemeClr val="accent1"/>
-                </a:fillRef>
-                <a:effectRef idx="2">
-                  <a:schemeClr val="accent1"/>
-                </a:effectRef>
-                <a:fontRef idx="minor">
-                  <a:schemeClr val="lt1"/>
-                </a:fontRef>
-              </p:style>
-              <p:txBody>
-                <a:bodyPr rtlCol="0" anchor="ctr"/>
-                <a:lstStyle/>
-                <a:p>
-                  <a:pPr algn="ctr"/>
-                  <a:endParaRPr sz="3200" b="1">
-                    <a:solidFill>
-                      <a:schemeClr val="tx1"/>
-                    </a:solidFill>
-                    <a:latin typeface="宋体" panose="02010600030101010101" pitchFamily="2" charset="-122"/>
-                    <a:ea typeface="宋体" panose="02010600030101010101" pitchFamily="2" charset="-122"/>
-                  </a:endParaRPr>
-                </a:p>
-              </p:txBody>
-            </p:sp>
-          </p:grpSp>
-        </p:grpSp>
-        <p:sp>
-          <p:nvSpPr>
-            <p:cNvPr id="150" name="TextBox 81">
-              <a:extLst>
-                <a:ext uri="{FF2B5EF4-FFF2-40B4-BE49-F238E27FC236}">
-                  <a16:creationId xmlns:a16="http://schemas.microsoft.com/office/drawing/2014/main" id="{BD6038A3-5EE3-DF70-64A3-FEF744300620}"/>
-                </a:ext>
-              </a:extLst>
-            </p:cNvPr>
-            <p:cNvSpPr txBox="1"/>
-            <p:nvPr/>
-          </p:nvSpPr>
-          <p:spPr>
-            <a:xfrm>
-              <a:off x="10609983" y="6187518"/>
-              <a:ext cx="1582017" cy="307777"/>
-            </a:xfrm>
-            <a:prstGeom prst="rect">
-              <a:avLst/>
-            </a:prstGeom>
-            <a:noFill/>
-            <a:ln>
-              <a:noFill/>
-            </a:ln>
-          </p:spPr>
-          <p:txBody>
-            <a:bodyPr wrap="square" lIns="0" tIns="0" rIns="0" bIns="0" anchor="ctr">
-              <a:spAutoFit/>
-            </a:bodyPr>
-            <a:lstStyle/>
-            <a:p>
-              <a:pPr algn="ctr">
-                <a:spcBef>
-                  <a:spcPts val="0"/>
-                </a:spcBef>
-                <a:spcAft>
-                  <a:spcPts val="0"/>
-                </a:spcAft>
-              </a:pPr>
-              <a:r>
-                <a:rPr lang="zh-CN" altLang="en-US" sz="2000" b="1" i="0" dirty="0">
-                  <a:solidFill>
-                    <a:srgbClr val="1A1A2E"/>
-                  </a:solidFill>
-                  <a:latin typeface="宋体" panose="02010600030101010101" pitchFamily="2" charset="-122"/>
-                  <a:ea typeface="宋体" panose="02010600030101010101" pitchFamily="2" charset="-122"/>
-                </a:rPr>
-                <a:t>大模型接口</a:t>
-              </a:r>
-              <a:endParaRPr sz="2000" b="1" i="0" dirty="0">
-                <a:solidFill>
-                  <a:srgbClr val="1A1A2E"/>
-                </a:solidFill>
-                <a:latin typeface="宋体" panose="02010600030101010101" pitchFamily="2" charset="-122"/>
-                <a:ea typeface="宋体" panose="02010600030101010101" pitchFamily="2" charset="-122"/>
-              </a:endParaRPr>
-            </a:p>
-          </p:txBody>
-        </p:sp>
-      </p:grpSp>
-      <p:grpSp>
-        <p:nvGrpSpPr>
-          <p:cNvPr id="156" name="组合 155">
-            <a:extLst>
-              <a:ext uri="{FF2B5EF4-FFF2-40B4-BE49-F238E27FC236}">
-                <a16:creationId xmlns:a16="http://schemas.microsoft.com/office/drawing/2014/main" id="{252FBDE4-3814-0A65-2BFB-3F1A99BF22AA}"/>
-              </a:ext>
-            </a:extLst>
-          </p:cNvPr>
-          <p:cNvGrpSpPr/>
-          <p:nvPr/>
-        </p:nvGrpSpPr>
-        <p:grpSpPr>
-          <a:xfrm>
-            <a:off x="5701439" y="4378748"/>
-            <a:ext cx="1814240" cy="561109"/>
-            <a:chOff x="10502939" y="6072707"/>
-            <a:chExt cx="1814240" cy="561109"/>
-          </a:xfrm>
-        </p:grpSpPr>
-        <p:grpSp>
-          <p:nvGrpSpPr>
-            <p:cNvPr id="157" name="组合 156">
-              <a:extLst>
-                <a:ext uri="{FF2B5EF4-FFF2-40B4-BE49-F238E27FC236}">
-                  <a16:creationId xmlns:a16="http://schemas.microsoft.com/office/drawing/2014/main" id="{A79E7D21-7703-7FB1-ABBF-FA3F5BE53F60}"/>
-                </a:ext>
-              </a:extLst>
-            </p:cNvPr>
-            <p:cNvGrpSpPr/>
-            <p:nvPr/>
-          </p:nvGrpSpPr>
-          <p:grpSpPr>
-            <a:xfrm>
-              <a:off x="10502939" y="6072707"/>
-              <a:ext cx="1814240" cy="561109"/>
-              <a:chOff x="1249250" y="4369987"/>
-              <a:chExt cx="1814240" cy="561109"/>
-            </a:xfrm>
-          </p:grpSpPr>
-          <p:sp>
-            <p:nvSpPr>
-              <p:cNvPr id="159" name="Rectangle 76">
-                <a:extLst>
-                  <a:ext uri="{FF2B5EF4-FFF2-40B4-BE49-F238E27FC236}">
-                    <a16:creationId xmlns:a16="http://schemas.microsoft.com/office/drawing/2014/main" id="{A6D56859-EE52-2856-C283-810379A2D2D4}"/>
-                  </a:ext>
-                </a:extLst>
-              </p:cNvPr>
-              <p:cNvSpPr/>
-              <p:nvPr/>
-            </p:nvSpPr>
-            <p:spPr>
-              <a:xfrm>
-                <a:off x="1249250" y="4369987"/>
-                <a:ext cx="1814240" cy="561109"/>
-              </a:xfrm>
-              <a:prstGeom prst="rect">
-                <a:avLst/>
-              </a:prstGeom>
-              <a:solidFill>
-                <a:srgbClr val="FFFFFF"/>
-              </a:solidFill>
-              <a:ln w="13970">
-                <a:solidFill>
-                  <a:schemeClr val="tx1">
-                    <a:lumMod val="65000"/>
-                    <a:lumOff val="35000"/>
-                  </a:schemeClr>
-                </a:solidFill>
-              </a:ln>
-            </p:spPr>
-            <p:style>
-              <a:lnRef idx="1">
-                <a:schemeClr val="accent1"/>
-              </a:lnRef>
-              <a:fillRef idx="3">
-                <a:schemeClr val="accent1"/>
-              </a:fillRef>
-              <a:effectRef idx="2">
-                <a:schemeClr val="accent1"/>
-              </a:effectRef>
-              <a:fontRef idx="minor">
-                <a:schemeClr val="lt1"/>
-              </a:fontRef>
-            </p:style>
-            <p:txBody>
-              <a:bodyPr rtlCol="0" anchor="ctr"/>
-              <a:lstStyle/>
-              <a:p>
-                <a:pPr algn="ctr"/>
-                <a:endParaRPr sz="3200" b="1">
-                  <a:latin typeface="宋体" panose="02010600030101010101" pitchFamily="2" charset="-122"/>
-                  <a:ea typeface="宋体" panose="02010600030101010101" pitchFamily="2" charset="-122"/>
-                </a:endParaRPr>
-              </a:p>
-            </p:txBody>
-          </p:sp>
-          <p:grpSp>
-            <p:nvGrpSpPr>
-              <p:cNvPr id="160" name="组合 159">
-                <a:extLst>
-                  <a:ext uri="{FF2B5EF4-FFF2-40B4-BE49-F238E27FC236}">
-                    <a16:creationId xmlns:a16="http://schemas.microsoft.com/office/drawing/2014/main" id="{D3243099-1D67-82F1-A7CD-D8E0FE032069}"/>
-                  </a:ext>
-                </a:extLst>
-              </p:cNvPr>
-              <p:cNvGrpSpPr/>
-              <p:nvPr/>
-            </p:nvGrpSpPr>
-            <p:grpSpPr>
-              <a:xfrm>
-                <a:off x="2791063" y="4407913"/>
-                <a:ext cx="166910" cy="143394"/>
-                <a:chOff x="10916798" y="4537825"/>
-                <a:chExt cx="166910" cy="143394"/>
-              </a:xfrm>
-            </p:grpSpPr>
-            <p:sp>
-              <p:nvSpPr>
-                <p:cNvPr id="161" name="Rectangle 91">
-                  <a:extLst>
-                    <a:ext uri="{FF2B5EF4-FFF2-40B4-BE49-F238E27FC236}">
-                      <a16:creationId xmlns:a16="http://schemas.microsoft.com/office/drawing/2014/main" id="{1A7767E9-B2D2-AC86-B4FF-4606027489F9}"/>
-                    </a:ext>
-                  </a:extLst>
-                </p:cNvPr>
-                <p:cNvSpPr/>
-                <p:nvPr/>
-              </p:nvSpPr>
-              <p:spPr>
-                <a:xfrm>
-                  <a:off x="10945826" y="4537825"/>
-                  <a:ext cx="137882" cy="143394"/>
-                </a:xfrm>
-                <a:prstGeom prst="rect">
-                  <a:avLst/>
-                </a:prstGeom>
-                <a:solidFill>
-                  <a:srgbClr val="FFFFFF"/>
-                </a:solidFill>
-                <a:ln w="10160">
-                  <a:solidFill>
-                    <a:schemeClr val="tx1"/>
-                  </a:solidFill>
-                </a:ln>
-              </p:spPr>
-              <p:style>
-                <a:lnRef idx="1">
-                  <a:schemeClr val="accent1"/>
-                </a:lnRef>
-                <a:fillRef idx="3">
-                  <a:schemeClr val="accent1"/>
-                </a:fillRef>
-                <a:effectRef idx="2">
-                  <a:schemeClr val="accent1"/>
-                </a:effectRef>
-                <a:fontRef idx="minor">
-                  <a:schemeClr val="lt1"/>
-                </a:fontRef>
-              </p:style>
-              <p:txBody>
-                <a:bodyPr rtlCol="0" anchor="ctr"/>
-                <a:lstStyle/>
-                <a:p>
-                  <a:pPr algn="ctr"/>
-                  <a:endParaRPr sz="3200" b="1">
-                    <a:solidFill>
-                      <a:schemeClr val="tx1"/>
-                    </a:solidFill>
-                    <a:latin typeface="宋体" panose="02010600030101010101" pitchFamily="2" charset="-122"/>
-                    <a:ea typeface="宋体" panose="02010600030101010101" pitchFamily="2" charset="-122"/>
-                  </a:endParaRPr>
-                </a:p>
-              </p:txBody>
-            </p:sp>
-            <p:sp>
-              <p:nvSpPr>
-                <p:cNvPr id="162" name="Rectangle 92">
-                  <a:extLst>
-                    <a:ext uri="{FF2B5EF4-FFF2-40B4-BE49-F238E27FC236}">
-                      <a16:creationId xmlns:a16="http://schemas.microsoft.com/office/drawing/2014/main" id="{7332336B-0BF2-0367-B1A6-8D434FABA0FD}"/>
-                    </a:ext>
-                  </a:extLst>
-                </p:cNvPr>
-                <p:cNvSpPr/>
-                <p:nvPr/>
-              </p:nvSpPr>
-              <p:spPr>
-                <a:xfrm>
-                  <a:off x="10916798" y="4550294"/>
-                  <a:ext cx="58055" cy="41148"/>
-                </a:xfrm>
-                <a:prstGeom prst="rect">
-                  <a:avLst/>
-                </a:prstGeom>
-                <a:solidFill>
-                  <a:srgbClr val="FFFFFF"/>
-                </a:solidFill>
-                <a:ln w="10160">
-                  <a:solidFill>
-                    <a:schemeClr val="tx1"/>
-                  </a:solidFill>
-                </a:ln>
-              </p:spPr>
-              <p:style>
-                <a:lnRef idx="1">
-                  <a:schemeClr val="accent1"/>
-                </a:lnRef>
-                <a:fillRef idx="3">
-                  <a:schemeClr val="accent1"/>
-                </a:fillRef>
-                <a:effectRef idx="2">
-                  <a:schemeClr val="accent1"/>
-                </a:effectRef>
-                <a:fontRef idx="minor">
-                  <a:schemeClr val="lt1"/>
-                </a:fontRef>
-              </p:style>
-              <p:txBody>
-                <a:bodyPr rtlCol="0" anchor="ctr"/>
-                <a:lstStyle/>
-                <a:p>
-                  <a:pPr algn="ctr"/>
-                  <a:endParaRPr sz="3200" b="1">
-                    <a:solidFill>
-                      <a:schemeClr val="tx1"/>
-                    </a:solidFill>
-                    <a:latin typeface="宋体" panose="02010600030101010101" pitchFamily="2" charset="-122"/>
-                    <a:ea typeface="宋体" panose="02010600030101010101" pitchFamily="2" charset="-122"/>
-                  </a:endParaRPr>
-                </a:p>
-              </p:txBody>
-            </p:sp>
-            <p:sp>
-              <p:nvSpPr>
-                <p:cNvPr id="163" name="Rectangle 93">
-                  <a:extLst>
-                    <a:ext uri="{FF2B5EF4-FFF2-40B4-BE49-F238E27FC236}">
-                      <a16:creationId xmlns:a16="http://schemas.microsoft.com/office/drawing/2014/main" id="{9B1CC008-A8D4-868E-6837-F93292B4D148}"/>
-                    </a:ext>
-                  </a:extLst>
-                </p:cNvPr>
-                <p:cNvSpPr/>
-                <p:nvPr/>
-              </p:nvSpPr>
-              <p:spPr>
-                <a:xfrm>
-                  <a:off x="10916798" y="4605158"/>
-                  <a:ext cx="58055" cy="41148"/>
-                </a:xfrm>
-                <a:prstGeom prst="rect">
-                  <a:avLst/>
-                </a:prstGeom>
-                <a:solidFill>
-                  <a:srgbClr val="FFFFFF"/>
-                </a:solidFill>
-                <a:ln w="10160">
-                  <a:solidFill>
-                    <a:schemeClr val="tx1"/>
-                  </a:solidFill>
-                </a:ln>
-              </p:spPr>
-              <p:style>
-                <a:lnRef idx="1">
-                  <a:schemeClr val="accent1"/>
-                </a:lnRef>
-                <a:fillRef idx="3">
-                  <a:schemeClr val="accent1"/>
-                </a:fillRef>
-                <a:effectRef idx="2">
-                  <a:schemeClr val="accent1"/>
-                </a:effectRef>
-                <a:fontRef idx="minor">
-                  <a:schemeClr val="lt1"/>
-                </a:fontRef>
-              </p:style>
-              <p:txBody>
-                <a:bodyPr rtlCol="0" anchor="ctr"/>
-                <a:lstStyle/>
-                <a:p>
-                  <a:pPr algn="ctr"/>
-                  <a:endParaRPr sz="3200" b="1">
-                    <a:solidFill>
-                      <a:schemeClr val="tx1"/>
-                    </a:solidFill>
-                    <a:latin typeface="宋体" panose="02010600030101010101" pitchFamily="2" charset="-122"/>
-                    <a:ea typeface="宋体" panose="02010600030101010101" pitchFamily="2" charset="-122"/>
-                  </a:endParaRPr>
-                </a:p>
-              </p:txBody>
-            </p:sp>
-          </p:grpSp>
-        </p:grpSp>
-        <p:sp>
-          <p:nvSpPr>
-            <p:cNvPr id="158" name="TextBox 81">
-              <a:extLst>
-                <a:ext uri="{FF2B5EF4-FFF2-40B4-BE49-F238E27FC236}">
-                  <a16:creationId xmlns:a16="http://schemas.microsoft.com/office/drawing/2014/main" id="{E9F8475C-96C0-D0ED-423F-1D664676DE07}"/>
-                </a:ext>
-              </a:extLst>
-            </p:cNvPr>
-            <p:cNvSpPr txBox="1"/>
-            <p:nvPr/>
-          </p:nvSpPr>
-          <p:spPr>
-            <a:xfrm>
-              <a:off x="10609983" y="6187518"/>
-              <a:ext cx="1582017" cy="307777"/>
-            </a:xfrm>
-            <a:prstGeom prst="rect">
-              <a:avLst/>
-            </a:prstGeom>
-            <a:noFill/>
-            <a:ln>
-              <a:noFill/>
-            </a:ln>
-          </p:spPr>
-          <p:txBody>
-            <a:bodyPr wrap="square" lIns="0" tIns="0" rIns="0" bIns="0" anchor="ctr">
-              <a:spAutoFit/>
-            </a:bodyPr>
-            <a:lstStyle/>
-            <a:p>
-              <a:pPr algn="ctr">
-                <a:spcBef>
-                  <a:spcPts val="0"/>
-                </a:spcBef>
-                <a:spcAft>
-                  <a:spcPts val="0"/>
-                </a:spcAft>
-              </a:pPr>
-              <a:r>
-                <a:rPr lang="zh-CN" altLang="en-US" sz="2000" b="1" dirty="0">
-                  <a:solidFill>
-                    <a:srgbClr val="1A1A2E"/>
-                  </a:solidFill>
-                  <a:latin typeface="宋体" panose="02010600030101010101" pitchFamily="2" charset="-122"/>
-                </a:rPr>
-                <a:t>工作流管理</a:t>
-              </a:r>
-            </a:p>
-          </p:txBody>
-        </p:sp>
-      </p:grpSp>
-      <p:grpSp>
-        <p:nvGrpSpPr>
-          <p:cNvPr id="164" name="组合 163">
-            <a:extLst>
-              <a:ext uri="{FF2B5EF4-FFF2-40B4-BE49-F238E27FC236}">
-                <a16:creationId xmlns:a16="http://schemas.microsoft.com/office/drawing/2014/main" id="{8BE53EEE-5D6A-4AA2-F329-3DC8950E026E}"/>
-              </a:ext>
-            </a:extLst>
-          </p:cNvPr>
-          <p:cNvGrpSpPr/>
-          <p:nvPr/>
-        </p:nvGrpSpPr>
-        <p:grpSpPr>
-          <a:xfrm>
-            <a:off x="8036344" y="4378748"/>
-            <a:ext cx="1814240" cy="561109"/>
-            <a:chOff x="10502939" y="6072707"/>
-            <a:chExt cx="1814240" cy="561109"/>
-          </a:xfrm>
-        </p:grpSpPr>
-        <p:grpSp>
-          <p:nvGrpSpPr>
-            <p:cNvPr id="165" name="组合 164">
-              <a:extLst>
-                <a:ext uri="{FF2B5EF4-FFF2-40B4-BE49-F238E27FC236}">
-                  <a16:creationId xmlns:a16="http://schemas.microsoft.com/office/drawing/2014/main" id="{2C7925DF-936E-3578-3EC9-8EC6DAC33F3C}"/>
-                </a:ext>
-              </a:extLst>
-            </p:cNvPr>
-            <p:cNvGrpSpPr/>
-            <p:nvPr/>
-          </p:nvGrpSpPr>
-          <p:grpSpPr>
-            <a:xfrm>
-              <a:off x="10502939" y="6072707"/>
-              <a:ext cx="1814240" cy="561109"/>
-              <a:chOff x="1249250" y="4369987"/>
-              <a:chExt cx="1814240" cy="561109"/>
-            </a:xfrm>
-          </p:grpSpPr>
-          <p:sp>
-            <p:nvSpPr>
-              <p:cNvPr id="167" name="Rectangle 76">
-                <a:extLst>
-                  <a:ext uri="{FF2B5EF4-FFF2-40B4-BE49-F238E27FC236}">
-                    <a16:creationId xmlns:a16="http://schemas.microsoft.com/office/drawing/2014/main" id="{920A93E3-F95D-961D-4C56-989CA2E9B6F5}"/>
-                  </a:ext>
-                </a:extLst>
-              </p:cNvPr>
-              <p:cNvSpPr/>
-              <p:nvPr/>
-            </p:nvSpPr>
-            <p:spPr>
-              <a:xfrm>
-                <a:off x="1249250" y="4369987"/>
-                <a:ext cx="1814240" cy="561109"/>
-              </a:xfrm>
-              <a:prstGeom prst="rect">
-                <a:avLst/>
-              </a:prstGeom>
-              <a:solidFill>
-                <a:srgbClr val="FFFFFF"/>
-              </a:solidFill>
-              <a:ln w="13970">
-                <a:solidFill>
-                  <a:schemeClr val="tx1">
-                    <a:lumMod val="65000"/>
-                    <a:lumOff val="35000"/>
-                  </a:schemeClr>
-                </a:solidFill>
-              </a:ln>
-            </p:spPr>
-            <p:style>
-              <a:lnRef idx="1">
-                <a:schemeClr val="accent1"/>
-              </a:lnRef>
-              <a:fillRef idx="3">
-                <a:schemeClr val="accent1"/>
-              </a:fillRef>
-              <a:effectRef idx="2">
-                <a:schemeClr val="accent1"/>
-              </a:effectRef>
-              <a:fontRef idx="minor">
-                <a:schemeClr val="lt1"/>
-              </a:fontRef>
-            </p:style>
-            <p:txBody>
-              <a:bodyPr rtlCol="0" anchor="ctr"/>
-              <a:lstStyle/>
-              <a:p>
-                <a:pPr algn="ctr"/>
-                <a:endParaRPr sz="3200" b="1">
-                  <a:latin typeface="宋体" panose="02010600030101010101" pitchFamily="2" charset="-122"/>
-                  <a:ea typeface="宋体" panose="02010600030101010101" pitchFamily="2" charset="-122"/>
-                </a:endParaRPr>
-              </a:p>
-            </p:txBody>
-          </p:sp>
-          <p:grpSp>
-            <p:nvGrpSpPr>
-              <p:cNvPr id="168" name="组合 167">
-                <a:extLst>
-                  <a:ext uri="{FF2B5EF4-FFF2-40B4-BE49-F238E27FC236}">
-                    <a16:creationId xmlns:a16="http://schemas.microsoft.com/office/drawing/2014/main" id="{8E7BDABB-0309-D200-1256-1148901B14D2}"/>
-                  </a:ext>
-                </a:extLst>
-              </p:cNvPr>
-              <p:cNvGrpSpPr/>
-              <p:nvPr/>
-            </p:nvGrpSpPr>
-            <p:grpSpPr>
-              <a:xfrm>
-                <a:off x="2791063" y="4407913"/>
-                <a:ext cx="166910" cy="143394"/>
-                <a:chOff x="10916798" y="4537825"/>
-                <a:chExt cx="166910" cy="143394"/>
-              </a:xfrm>
-            </p:grpSpPr>
-            <p:sp>
-              <p:nvSpPr>
-                <p:cNvPr id="169" name="Rectangle 91">
-                  <a:extLst>
-                    <a:ext uri="{FF2B5EF4-FFF2-40B4-BE49-F238E27FC236}">
-                      <a16:creationId xmlns:a16="http://schemas.microsoft.com/office/drawing/2014/main" id="{92E741AC-90CD-261D-AE38-229880A73EA7}"/>
-                    </a:ext>
-                  </a:extLst>
-                </p:cNvPr>
-                <p:cNvSpPr/>
-                <p:nvPr/>
-              </p:nvSpPr>
-              <p:spPr>
-                <a:xfrm>
-                  <a:off x="10945826" y="4537825"/>
-                  <a:ext cx="137882" cy="143394"/>
-                </a:xfrm>
-                <a:prstGeom prst="rect">
-                  <a:avLst/>
-                </a:prstGeom>
-                <a:solidFill>
-                  <a:srgbClr val="FFFFFF"/>
-                </a:solidFill>
-                <a:ln w="10160">
-                  <a:solidFill>
-                    <a:schemeClr val="tx1"/>
-                  </a:solidFill>
-                </a:ln>
-              </p:spPr>
-              <p:style>
-                <a:lnRef idx="1">
-                  <a:schemeClr val="accent1"/>
-                </a:lnRef>
-                <a:fillRef idx="3">
-                  <a:schemeClr val="accent1"/>
-                </a:fillRef>
-                <a:effectRef idx="2">
-                  <a:schemeClr val="accent1"/>
-                </a:effectRef>
-                <a:fontRef idx="minor">
-                  <a:schemeClr val="lt1"/>
-                </a:fontRef>
-              </p:style>
-              <p:txBody>
-                <a:bodyPr rtlCol="0" anchor="ctr"/>
-                <a:lstStyle/>
-                <a:p>
-                  <a:pPr algn="ctr"/>
-                  <a:endParaRPr sz="3200" b="1">
-                    <a:solidFill>
-                      <a:schemeClr val="tx1"/>
-                    </a:solidFill>
-                    <a:latin typeface="宋体" panose="02010600030101010101" pitchFamily="2" charset="-122"/>
-                    <a:ea typeface="宋体" panose="02010600030101010101" pitchFamily="2" charset="-122"/>
-                  </a:endParaRPr>
-                </a:p>
-              </p:txBody>
-            </p:sp>
-            <p:sp>
-              <p:nvSpPr>
-                <p:cNvPr id="170" name="Rectangle 92">
-                  <a:extLst>
-                    <a:ext uri="{FF2B5EF4-FFF2-40B4-BE49-F238E27FC236}">
-                      <a16:creationId xmlns:a16="http://schemas.microsoft.com/office/drawing/2014/main" id="{5720B63F-3DB2-902B-923E-329312886D29}"/>
-                    </a:ext>
-                  </a:extLst>
-                </p:cNvPr>
-                <p:cNvSpPr/>
-                <p:nvPr/>
-              </p:nvSpPr>
-              <p:spPr>
-                <a:xfrm>
-                  <a:off x="10916798" y="4550294"/>
-                  <a:ext cx="58055" cy="41148"/>
-                </a:xfrm>
-                <a:prstGeom prst="rect">
-                  <a:avLst/>
-                </a:prstGeom>
-                <a:solidFill>
-                  <a:srgbClr val="FFFFFF"/>
-                </a:solidFill>
-                <a:ln w="10160">
-                  <a:solidFill>
-                    <a:schemeClr val="tx1"/>
-                  </a:solidFill>
-                </a:ln>
-              </p:spPr>
-              <p:style>
-                <a:lnRef idx="1">
-                  <a:schemeClr val="accent1"/>
-                </a:lnRef>
-                <a:fillRef idx="3">
-                  <a:schemeClr val="accent1"/>
-                </a:fillRef>
-                <a:effectRef idx="2">
-                  <a:schemeClr val="accent1"/>
-                </a:effectRef>
-                <a:fontRef idx="minor">
-                  <a:schemeClr val="lt1"/>
-                </a:fontRef>
-              </p:style>
-              <p:txBody>
-                <a:bodyPr rtlCol="0" anchor="ctr"/>
-                <a:lstStyle/>
-                <a:p>
-                  <a:pPr algn="ctr"/>
-                  <a:endParaRPr sz="3200" b="1">
-                    <a:solidFill>
-                      <a:schemeClr val="tx1"/>
-                    </a:solidFill>
-                    <a:latin typeface="宋体" panose="02010600030101010101" pitchFamily="2" charset="-122"/>
-                    <a:ea typeface="宋体" panose="02010600030101010101" pitchFamily="2" charset="-122"/>
-                  </a:endParaRPr>
-                </a:p>
-              </p:txBody>
-            </p:sp>
-            <p:sp>
-              <p:nvSpPr>
-                <p:cNvPr id="171" name="Rectangle 93">
-                  <a:extLst>
-                    <a:ext uri="{FF2B5EF4-FFF2-40B4-BE49-F238E27FC236}">
-                      <a16:creationId xmlns:a16="http://schemas.microsoft.com/office/drawing/2014/main" id="{5C19589A-4A03-148C-3CF9-2E75672F4DE8}"/>
-                    </a:ext>
-                  </a:extLst>
-                </p:cNvPr>
-                <p:cNvSpPr/>
-                <p:nvPr/>
-              </p:nvSpPr>
-              <p:spPr>
-                <a:xfrm>
-                  <a:off x="10916798" y="4605158"/>
-                  <a:ext cx="58055" cy="41148"/>
-                </a:xfrm>
-                <a:prstGeom prst="rect">
-                  <a:avLst/>
-                </a:prstGeom>
-                <a:solidFill>
-                  <a:srgbClr val="FFFFFF"/>
-                </a:solidFill>
-                <a:ln w="10160">
-                  <a:solidFill>
-                    <a:schemeClr val="tx1"/>
-                  </a:solidFill>
-                </a:ln>
-              </p:spPr>
-              <p:style>
-                <a:lnRef idx="1">
-                  <a:schemeClr val="accent1"/>
-                </a:lnRef>
-                <a:fillRef idx="3">
-                  <a:schemeClr val="accent1"/>
-                </a:fillRef>
-                <a:effectRef idx="2">
-                  <a:schemeClr val="accent1"/>
-                </a:effectRef>
-                <a:fontRef idx="minor">
-                  <a:schemeClr val="lt1"/>
-                </a:fontRef>
-              </p:style>
-              <p:txBody>
-                <a:bodyPr rtlCol="0" anchor="ctr"/>
-                <a:lstStyle/>
-                <a:p>
-                  <a:pPr algn="ctr"/>
-                  <a:endParaRPr sz="3200" b="1">
-                    <a:solidFill>
-                      <a:schemeClr val="tx1"/>
-                    </a:solidFill>
-                    <a:latin typeface="宋体" panose="02010600030101010101" pitchFamily="2" charset="-122"/>
-                    <a:ea typeface="宋体" panose="02010600030101010101" pitchFamily="2" charset="-122"/>
-                  </a:endParaRPr>
-                </a:p>
-              </p:txBody>
-            </p:sp>
-          </p:grpSp>
-        </p:grpSp>
-        <p:sp>
-          <p:nvSpPr>
-            <p:cNvPr id="166" name="TextBox 81">
-              <a:extLst>
-                <a:ext uri="{FF2B5EF4-FFF2-40B4-BE49-F238E27FC236}">
-                  <a16:creationId xmlns:a16="http://schemas.microsoft.com/office/drawing/2014/main" id="{0C947B41-A997-32CB-DA60-7E9A76A7A7CB}"/>
-                </a:ext>
-              </a:extLst>
-            </p:cNvPr>
-            <p:cNvSpPr txBox="1"/>
-            <p:nvPr/>
-          </p:nvSpPr>
-          <p:spPr>
-            <a:xfrm>
-              <a:off x="10609983" y="6187518"/>
-              <a:ext cx="1582017" cy="307777"/>
-            </a:xfrm>
-            <a:prstGeom prst="rect">
-              <a:avLst/>
-            </a:prstGeom>
-            <a:noFill/>
-            <a:ln>
-              <a:noFill/>
-            </a:ln>
-          </p:spPr>
-          <p:txBody>
-            <a:bodyPr wrap="square" lIns="0" tIns="0" rIns="0" bIns="0" anchor="ctr">
-              <a:spAutoFit/>
-            </a:bodyPr>
-            <a:lstStyle/>
-            <a:p>
-              <a:pPr algn="ctr">
-                <a:spcBef>
-                  <a:spcPts val="0"/>
-                </a:spcBef>
-                <a:spcAft>
-                  <a:spcPts val="0"/>
-                </a:spcAft>
-              </a:pPr>
-              <a:r>
-                <a:rPr lang="zh-CN" altLang="en-US" sz="2000" b="1" dirty="0">
-                  <a:solidFill>
-                    <a:srgbClr val="1A1A2E"/>
-                  </a:solidFill>
-                  <a:latin typeface="宋体" panose="02010600030101010101" pitchFamily="2" charset="-122"/>
-                </a:rPr>
-                <a:t>智能体管理</a:t>
-              </a:r>
-            </a:p>
-          </p:txBody>
-        </p:sp>
-      </p:grpSp>
-      <p:grpSp>
-        <p:nvGrpSpPr>
-          <p:cNvPr id="172" name="组合 171">
-            <a:extLst>
-              <a:ext uri="{FF2B5EF4-FFF2-40B4-BE49-F238E27FC236}">
-                <a16:creationId xmlns:a16="http://schemas.microsoft.com/office/drawing/2014/main" id="{5B8F9056-0792-F0EB-7676-50C5AC1C549C}"/>
-              </a:ext>
-            </a:extLst>
-          </p:cNvPr>
-          <p:cNvGrpSpPr/>
-          <p:nvPr/>
-        </p:nvGrpSpPr>
-        <p:grpSpPr>
-          <a:xfrm>
-            <a:off x="2274052" y="5835373"/>
-            <a:ext cx="2276062" cy="561109"/>
-            <a:chOff x="10041117" y="6072707"/>
-            <a:chExt cx="2276062" cy="561109"/>
-          </a:xfrm>
-        </p:grpSpPr>
-        <p:grpSp>
-          <p:nvGrpSpPr>
-            <p:cNvPr id="173" name="组合 172">
-              <a:extLst>
-                <a:ext uri="{FF2B5EF4-FFF2-40B4-BE49-F238E27FC236}">
-                  <a16:creationId xmlns:a16="http://schemas.microsoft.com/office/drawing/2014/main" id="{11DF7DC0-A225-1FB3-B9E8-DC652024AA22}"/>
-                </a:ext>
-              </a:extLst>
-            </p:cNvPr>
-            <p:cNvGrpSpPr/>
-            <p:nvPr/>
-          </p:nvGrpSpPr>
-          <p:grpSpPr>
-            <a:xfrm>
-              <a:off x="10041117" y="6072707"/>
-              <a:ext cx="2276062" cy="561109"/>
-              <a:chOff x="787428" y="4369987"/>
-              <a:chExt cx="2276062" cy="561109"/>
-            </a:xfrm>
-          </p:grpSpPr>
-          <p:sp>
-            <p:nvSpPr>
-              <p:cNvPr id="175" name="Rectangle 76">
-                <a:extLst>
-                  <a:ext uri="{FF2B5EF4-FFF2-40B4-BE49-F238E27FC236}">
-                    <a16:creationId xmlns:a16="http://schemas.microsoft.com/office/drawing/2014/main" id="{8BB01156-F85D-531D-7F2F-2F22CA2D5BA6}"/>
-                  </a:ext>
-                </a:extLst>
-              </p:cNvPr>
-              <p:cNvSpPr/>
-              <p:nvPr/>
-            </p:nvSpPr>
-            <p:spPr>
-              <a:xfrm>
-                <a:off x="787428" y="4369987"/>
-                <a:ext cx="2276062" cy="561109"/>
-              </a:xfrm>
-              <a:prstGeom prst="rect">
-                <a:avLst/>
-              </a:prstGeom>
-              <a:solidFill>
-                <a:srgbClr val="FFFFFF"/>
-              </a:solidFill>
-              <a:ln w="13970">
-                <a:solidFill>
-                  <a:schemeClr val="tx1">
-                    <a:lumMod val="65000"/>
-                    <a:lumOff val="35000"/>
-                  </a:schemeClr>
-                </a:solidFill>
-              </a:ln>
-            </p:spPr>
-            <p:style>
-              <a:lnRef idx="1">
-                <a:schemeClr val="accent1"/>
-              </a:lnRef>
-              <a:fillRef idx="3">
-                <a:schemeClr val="accent1"/>
-              </a:fillRef>
-              <a:effectRef idx="2">
-                <a:schemeClr val="accent1"/>
-              </a:effectRef>
-              <a:fontRef idx="minor">
-                <a:schemeClr val="lt1"/>
-              </a:fontRef>
-            </p:style>
-            <p:txBody>
-              <a:bodyPr rtlCol="0" anchor="ctr"/>
-              <a:lstStyle/>
-              <a:p>
-                <a:pPr algn="ctr"/>
-                <a:endParaRPr sz="3200" b="1" dirty="0">
-                  <a:latin typeface="宋体" panose="02010600030101010101" pitchFamily="2" charset="-122"/>
-                  <a:ea typeface="宋体" panose="02010600030101010101" pitchFamily="2" charset="-122"/>
-                </a:endParaRPr>
-              </a:p>
-            </p:txBody>
-          </p:sp>
-          <p:grpSp>
-            <p:nvGrpSpPr>
-              <p:cNvPr id="176" name="组合 175">
-                <a:extLst>
-                  <a:ext uri="{FF2B5EF4-FFF2-40B4-BE49-F238E27FC236}">
-                    <a16:creationId xmlns:a16="http://schemas.microsoft.com/office/drawing/2014/main" id="{779C5AF7-80D5-F73D-6D62-DC0D4027A1C3}"/>
-                  </a:ext>
-                </a:extLst>
-              </p:cNvPr>
-              <p:cNvGrpSpPr/>
-              <p:nvPr/>
-            </p:nvGrpSpPr>
-            <p:grpSpPr>
-              <a:xfrm>
-                <a:off x="2791063" y="4407913"/>
-                <a:ext cx="166910" cy="143394"/>
-                <a:chOff x="10916798" y="4537825"/>
-                <a:chExt cx="166910" cy="143394"/>
-              </a:xfrm>
-            </p:grpSpPr>
-            <p:sp>
-              <p:nvSpPr>
-                <p:cNvPr id="177" name="Rectangle 91">
-                  <a:extLst>
-                    <a:ext uri="{FF2B5EF4-FFF2-40B4-BE49-F238E27FC236}">
-                      <a16:creationId xmlns:a16="http://schemas.microsoft.com/office/drawing/2014/main" id="{B540752F-7DF6-4ECA-45F9-C12A930AFFB8}"/>
-                    </a:ext>
-                  </a:extLst>
-                </p:cNvPr>
-                <p:cNvSpPr/>
-                <p:nvPr/>
-              </p:nvSpPr>
-              <p:spPr>
-                <a:xfrm>
-                  <a:off x="10945826" y="4537825"/>
-                  <a:ext cx="137882" cy="143394"/>
-                </a:xfrm>
-                <a:prstGeom prst="rect">
-                  <a:avLst/>
-                </a:prstGeom>
-                <a:solidFill>
-                  <a:srgbClr val="FFFFFF"/>
-                </a:solidFill>
-                <a:ln w="10160">
-                  <a:solidFill>
-                    <a:schemeClr val="tx1"/>
-                  </a:solidFill>
-                </a:ln>
-              </p:spPr>
-              <p:style>
-                <a:lnRef idx="1">
-                  <a:schemeClr val="accent1"/>
-                </a:lnRef>
-                <a:fillRef idx="3">
-                  <a:schemeClr val="accent1"/>
-                </a:fillRef>
-                <a:effectRef idx="2">
-                  <a:schemeClr val="accent1"/>
-                </a:effectRef>
-                <a:fontRef idx="minor">
-                  <a:schemeClr val="lt1"/>
-                </a:fontRef>
-              </p:style>
-              <p:txBody>
-                <a:bodyPr rtlCol="0" anchor="ctr"/>
-                <a:lstStyle/>
-                <a:p>
-                  <a:pPr algn="ctr"/>
-                  <a:endParaRPr sz="3200" b="1">
-                    <a:solidFill>
-                      <a:schemeClr val="tx1"/>
-                    </a:solidFill>
-                    <a:latin typeface="宋体" panose="02010600030101010101" pitchFamily="2" charset="-122"/>
-                    <a:ea typeface="宋体" panose="02010600030101010101" pitchFamily="2" charset="-122"/>
-                  </a:endParaRPr>
-                </a:p>
-              </p:txBody>
-            </p:sp>
-            <p:sp>
-              <p:nvSpPr>
-                <p:cNvPr id="178" name="Rectangle 92">
-                  <a:extLst>
-                    <a:ext uri="{FF2B5EF4-FFF2-40B4-BE49-F238E27FC236}">
-                      <a16:creationId xmlns:a16="http://schemas.microsoft.com/office/drawing/2014/main" id="{3C5227E6-6BEB-1BD1-5A89-B6180784ED25}"/>
-                    </a:ext>
-                  </a:extLst>
-                </p:cNvPr>
-                <p:cNvSpPr/>
-                <p:nvPr/>
-              </p:nvSpPr>
-              <p:spPr>
-                <a:xfrm>
-                  <a:off x="10916798" y="4550294"/>
-                  <a:ext cx="58055" cy="41148"/>
-                </a:xfrm>
-                <a:prstGeom prst="rect">
-                  <a:avLst/>
-                </a:prstGeom>
-                <a:solidFill>
-                  <a:srgbClr val="FFFFFF"/>
-                </a:solidFill>
-                <a:ln w="10160">
-                  <a:solidFill>
-                    <a:schemeClr val="tx1"/>
-                  </a:solidFill>
-                </a:ln>
-              </p:spPr>
-              <p:style>
-                <a:lnRef idx="1">
-                  <a:schemeClr val="accent1"/>
-                </a:lnRef>
-                <a:fillRef idx="3">
-                  <a:schemeClr val="accent1"/>
-                </a:fillRef>
-                <a:effectRef idx="2">
-                  <a:schemeClr val="accent1"/>
-                </a:effectRef>
-                <a:fontRef idx="minor">
-                  <a:schemeClr val="lt1"/>
-                </a:fontRef>
-              </p:style>
-              <p:txBody>
-                <a:bodyPr rtlCol="0" anchor="ctr"/>
-                <a:lstStyle/>
-                <a:p>
-                  <a:pPr algn="ctr"/>
-                  <a:endParaRPr sz="3200" b="1">
-                    <a:solidFill>
-                      <a:schemeClr val="tx1"/>
-                    </a:solidFill>
-                    <a:latin typeface="宋体" panose="02010600030101010101" pitchFamily="2" charset="-122"/>
-                    <a:ea typeface="宋体" panose="02010600030101010101" pitchFamily="2" charset="-122"/>
-                  </a:endParaRPr>
-                </a:p>
-              </p:txBody>
-            </p:sp>
-            <p:sp>
-              <p:nvSpPr>
-                <p:cNvPr id="179" name="Rectangle 93">
-                  <a:extLst>
-                    <a:ext uri="{FF2B5EF4-FFF2-40B4-BE49-F238E27FC236}">
-                      <a16:creationId xmlns:a16="http://schemas.microsoft.com/office/drawing/2014/main" id="{94149542-2CAD-540A-CFDD-27EA1386D583}"/>
-                    </a:ext>
-                  </a:extLst>
-                </p:cNvPr>
-                <p:cNvSpPr/>
-                <p:nvPr/>
-              </p:nvSpPr>
-              <p:spPr>
-                <a:xfrm>
-                  <a:off x="10916798" y="4605158"/>
-                  <a:ext cx="58055" cy="41148"/>
-                </a:xfrm>
-                <a:prstGeom prst="rect">
-                  <a:avLst/>
-                </a:prstGeom>
-                <a:solidFill>
-                  <a:srgbClr val="FFFFFF"/>
-                </a:solidFill>
-                <a:ln w="10160">
-                  <a:solidFill>
-                    <a:schemeClr val="tx1"/>
-                  </a:solidFill>
-                </a:ln>
-              </p:spPr>
-              <p:style>
-                <a:lnRef idx="1">
-                  <a:schemeClr val="accent1"/>
-                </a:lnRef>
-                <a:fillRef idx="3">
-                  <a:schemeClr val="accent1"/>
-                </a:fillRef>
-                <a:effectRef idx="2">
-                  <a:schemeClr val="accent1"/>
-                </a:effectRef>
-                <a:fontRef idx="minor">
-                  <a:schemeClr val="lt1"/>
-                </a:fontRef>
-              </p:style>
-              <p:txBody>
-                <a:bodyPr rtlCol="0" anchor="ctr"/>
-                <a:lstStyle/>
-                <a:p>
-                  <a:pPr algn="ctr"/>
-                  <a:endParaRPr sz="3200" b="1">
-                    <a:solidFill>
-                      <a:schemeClr val="tx1"/>
-                    </a:solidFill>
-                    <a:latin typeface="宋体" panose="02010600030101010101" pitchFamily="2" charset="-122"/>
-                    <a:ea typeface="宋体" panose="02010600030101010101" pitchFamily="2" charset="-122"/>
-                  </a:endParaRPr>
-                </a:p>
-              </p:txBody>
-            </p:sp>
-          </p:grpSp>
-        </p:grpSp>
-        <p:sp>
-          <p:nvSpPr>
-            <p:cNvPr id="174" name="TextBox 81">
-              <a:extLst>
-                <a:ext uri="{FF2B5EF4-FFF2-40B4-BE49-F238E27FC236}">
-                  <a16:creationId xmlns:a16="http://schemas.microsoft.com/office/drawing/2014/main" id="{812D02F1-4201-541A-E082-4E74CFD8724A}"/>
-                </a:ext>
-              </a:extLst>
-            </p:cNvPr>
-            <p:cNvSpPr txBox="1"/>
-            <p:nvPr/>
-          </p:nvSpPr>
-          <p:spPr>
-            <a:xfrm>
-              <a:off x="10376068" y="6192580"/>
-              <a:ext cx="1582017" cy="307777"/>
-            </a:xfrm>
-            <a:prstGeom prst="rect">
-              <a:avLst/>
-            </a:prstGeom>
-            <a:noFill/>
-            <a:ln>
-              <a:noFill/>
-            </a:ln>
-          </p:spPr>
-          <p:txBody>
-            <a:bodyPr wrap="square" lIns="0" tIns="0" rIns="0" bIns="0" anchor="ctr">
-              <a:spAutoFit/>
-            </a:bodyPr>
-            <a:lstStyle/>
-            <a:p>
-              <a:pPr algn="ctr">
-                <a:spcBef>
-                  <a:spcPts val="0"/>
-                </a:spcBef>
-                <a:spcAft>
-                  <a:spcPts val="0"/>
-                </a:spcAft>
-              </a:pPr>
-              <a:r>
-                <a:rPr lang="zh-CN" altLang="en-US" sz="2000" b="1" dirty="0">
-                  <a:solidFill>
-                    <a:srgbClr val="1A1A2E"/>
-                  </a:solidFill>
-                  <a:latin typeface="宋体" panose="02010600030101010101" pitchFamily="2" charset="-122"/>
-                  <a:ea typeface="宋体" panose="02010600030101010101" pitchFamily="2" charset="-122"/>
-                </a:rPr>
-                <a:t>会话</a:t>
-              </a:r>
-              <a:r>
-                <a:rPr lang="zh-CN" altLang="en-US" sz="2000" b="1" i="0" dirty="0">
-                  <a:solidFill>
-                    <a:srgbClr val="1A1A2E"/>
-                  </a:solidFill>
-                  <a:latin typeface="宋体" panose="02010600030101010101" pitchFamily="2" charset="-122"/>
-                  <a:ea typeface="宋体" panose="02010600030101010101" pitchFamily="2" charset="-122"/>
-                </a:rPr>
-                <a:t>数据库</a:t>
-              </a:r>
-              <a:endParaRPr sz="2000" b="1" i="0" dirty="0">
-                <a:solidFill>
-                  <a:srgbClr val="1A1A2E"/>
-                </a:solidFill>
-                <a:latin typeface="宋体" panose="02010600030101010101" pitchFamily="2" charset="-122"/>
-                <a:ea typeface="宋体" panose="02010600030101010101" pitchFamily="2" charset="-122"/>
-              </a:endParaRPr>
-            </a:p>
-          </p:txBody>
-        </p:sp>
-      </p:grpSp>
-      <p:grpSp>
-        <p:nvGrpSpPr>
-          <p:cNvPr id="180" name="组合 179">
-            <a:extLst>
-              <a:ext uri="{FF2B5EF4-FFF2-40B4-BE49-F238E27FC236}">
-                <a16:creationId xmlns:a16="http://schemas.microsoft.com/office/drawing/2014/main" id="{06AD7465-91AC-D320-5267-F241F4CA1800}"/>
-              </a:ext>
-            </a:extLst>
-          </p:cNvPr>
-          <p:cNvGrpSpPr/>
-          <p:nvPr/>
-        </p:nvGrpSpPr>
-        <p:grpSpPr>
-          <a:xfrm>
-            <a:off x="1279849" y="598949"/>
-            <a:ext cx="2276062" cy="561109"/>
-            <a:chOff x="10041117" y="6072707"/>
-            <a:chExt cx="2276062" cy="561109"/>
-          </a:xfrm>
-        </p:grpSpPr>
-        <p:grpSp>
-          <p:nvGrpSpPr>
-            <p:cNvPr id="181" name="组合 180">
-              <a:extLst>
-                <a:ext uri="{FF2B5EF4-FFF2-40B4-BE49-F238E27FC236}">
-                  <a16:creationId xmlns:a16="http://schemas.microsoft.com/office/drawing/2014/main" id="{EC2A9ED1-9F38-AE15-29B4-E5E60F50927D}"/>
-                </a:ext>
-              </a:extLst>
-            </p:cNvPr>
-            <p:cNvGrpSpPr/>
-            <p:nvPr/>
-          </p:nvGrpSpPr>
-          <p:grpSpPr>
-            <a:xfrm>
-              <a:off x="10041117" y="6072707"/>
-              <a:ext cx="2276062" cy="561109"/>
-              <a:chOff x="787428" y="4369987"/>
-              <a:chExt cx="2276062" cy="561109"/>
-            </a:xfrm>
-          </p:grpSpPr>
-          <p:sp>
-            <p:nvSpPr>
-              <p:cNvPr id="183" name="Rectangle 76">
-                <a:extLst>
-                  <a:ext uri="{FF2B5EF4-FFF2-40B4-BE49-F238E27FC236}">
-                    <a16:creationId xmlns:a16="http://schemas.microsoft.com/office/drawing/2014/main" id="{27E65F54-3F22-9739-FE3E-81A9C2222C05}"/>
-                  </a:ext>
-                </a:extLst>
-              </p:cNvPr>
-              <p:cNvSpPr/>
-              <p:nvPr/>
-            </p:nvSpPr>
-            <p:spPr>
-              <a:xfrm>
-                <a:off x="787428" y="4369987"/>
-                <a:ext cx="2276062" cy="561109"/>
-              </a:xfrm>
-              <a:prstGeom prst="rect">
-                <a:avLst/>
-              </a:prstGeom>
-              <a:solidFill>
-                <a:srgbClr val="FFFFFF"/>
-              </a:solidFill>
-              <a:ln w="13970">
-                <a:solidFill>
-                  <a:schemeClr val="tx1">
-                    <a:lumMod val="65000"/>
-                    <a:lumOff val="35000"/>
-                  </a:schemeClr>
-                </a:solidFill>
-              </a:ln>
-            </p:spPr>
-            <p:style>
-              <a:lnRef idx="1">
-                <a:schemeClr val="accent1"/>
-              </a:lnRef>
-              <a:fillRef idx="3">
-                <a:schemeClr val="accent1"/>
-              </a:fillRef>
-              <a:effectRef idx="2">
-                <a:schemeClr val="accent1"/>
-              </a:effectRef>
-              <a:fontRef idx="minor">
-                <a:schemeClr val="lt1"/>
-              </a:fontRef>
-            </p:style>
-            <p:txBody>
-              <a:bodyPr rtlCol="0" anchor="ctr"/>
-              <a:lstStyle/>
-              <a:p>
-                <a:pPr algn="ctr"/>
-                <a:endParaRPr sz="3200" b="1">
-                  <a:latin typeface="宋体" panose="02010600030101010101" pitchFamily="2" charset="-122"/>
-                  <a:ea typeface="宋体" panose="02010600030101010101" pitchFamily="2" charset="-122"/>
-                </a:endParaRPr>
-              </a:p>
-            </p:txBody>
-          </p:sp>
-          <p:grpSp>
-            <p:nvGrpSpPr>
-              <p:cNvPr id="184" name="组合 183">
-                <a:extLst>
-                  <a:ext uri="{FF2B5EF4-FFF2-40B4-BE49-F238E27FC236}">
-                    <a16:creationId xmlns:a16="http://schemas.microsoft.com/office/drawing/2014/main" id="{BEEE6D1B-C021-CE61-265E-A5682D416612}"/>
-                  </a:ext>
-                </a:extLst>
-              </p:cNvPr>
-              <p:cNvGrpSpPr/>
-              <p:nvPr/>
-            </p:nvGrpSpPr>
-            <p:grpSpPr>
-              <a:xfrm>
-                <a:off x="2791063" y="4407913"/>
-                <a:ext cx="166910" cy="143394"/>
-                <a:chOff x="10916798" y="4537825"/>
-                <a:chExt cx="166910" cy="143394"/>
-              </a:xfrm>
-            </p:grpSpPr>
-            <p:sp>
-              <p:nvSpPr>
-                <p:cNvPr id="185" name="Rectangle 91">
-                  <a:extLst>
-                    <a:ext uri="{FF2B5EF4-FFF2-40B4-BE49-F238E27FC236}">
-                      <a16:creationId xmlns:a16="http://schemas.microsoft.com/office/drawing/2014/main" id="{6FDDFA09-4C12-D269-3FC9-B6A0A787B4C2}"/>
-                    </a:ext>
-                  </a:extLst>
-                </p:cNvPr>
-                <p:cNvSpPr/>
-                <p:nvPr/>
-              </p:nvSpPr>
-              <p:spPr>
-                <a:xfrm>
-                  <a:off x="10945826" y="4537825"/>
-                  <a:ext cx="137882" cy="143394"/>
-                </a:xfrm>
-                <a:prstGeom prst="rect">
-                  <a:avLst/>
-                </a:prstGeom>
-                <a:solidFill>
-                  <a:srgbClr val="FFFFFF"/>
-                </a:solidFill>
-                <a:ln w="10160">
-                  <a:solidFill>
-                    <a:schemeClr val="tx1"/>
-                  </a:solidFill>
-                </a:ln>
-              </p:spPr>
-              <p:style>
-                <a:lnRef idx="1">
-                  <a:schemeClr val="accent1"/>
-                </a:lnRef>
-                <a:fillRef idx="3">
-                  <a:schemeClr val="accent1"/>
-                </a:fillRef>
-                <a:effectRef idx="2">
-                  <a:schemeClr val="accent1"/>
-                </a:effectRef>
-                <a:fontRef idx="minor">
-                  <a:schemeClr val="lt1"/>
-                </a:fontRef>
-              </p:style>
-              <p:txBody>
-                <a:bodyPr rtlCol="0" anchor="ctr"/>
-                <a:lstStyle/>
-                <a:p>
-                  <a:pPr algn="ctr"/>
-                  <a:endParaRPr sz="3200" b="1">
-                    <a:solidFill>
-                      <a:schemeClr val="tx1"/>
-                    </a:solidFill>
-                    <a:latin typeface="宋体" panose="02010600030101010101" pitchFamily="2" charset="-122"/>
-                    <a:ea typeface="宋体" panose="02010600030101010101" pitchFamily="2" charset="-122"/>
-                  </a:endParaRPr>
-                </a:p>
-              </p:txBody>
-            </p:sp>
-            <p:sp>
-              <p:nvSpPr>
-                <p:cNvPr id="186" name="Rectangle 92">
-                  <a:extLst>
-                    <a:ext uri="{FF2B5EF4-FFF2-40B4-BE49-F238E27FC236}">
-                      <a16:creationId xmlns:a16="http://schemas.microsoft.com/office/drawing/2014/main" id="{8F312806-7DAE-BCCB-BA44-3578786AC69D}"/>
-                    </a:ext>
-                  </a:extLst>
-                </p:cNvPr>
-                <p:cNvSpPr/>
-                <p:nvPr/>
-              </p:nvSpPr>
-              <p:spPr>
-                <a:xfrm>
-                  <a:off x="10916798" y="4550294"/>
-                  <a:ext cx="58055" cy="41148"/>
-                </a:xfrm>
-                <a:prstGeom prst="rect">
-                  <a:avLst/>
-                </a:prstGeom>
-                <a:solidFill>
-                  <a:srgbClr val="FFFFFF"/>
-                </a:solidFill>
-                <a:ln w="10160">
-                  <a:solidFill>
-                    <a:schemeClr val="tx1"/>
-                  </a:solidFill>
-                </a:ln>
-              </p:spPr>
-              <p:style>
-                <a:lnRef idx="1">
-                  <a:schemeClr val="accent1"/>
-                </a:lnRef>
-                <a:fillRef idx="3">
-                  <a:schemeClr val="accent1"/>
-                </a:fillRef>
-                <a:effectRef idx="2">
-                  <a:schemeClr val="accent1"/>
-                </a:effectRef>
-                <a:fontRef idx="minor">
-                  <a:schemeClr val="lt1"/>
-                </a:fontRef>
-              </p:style>
-              <p:txBody>
-                <a:bodyPr rtlCol="0" anchor="ctr"/>
-                <a:lstStyle/>
-                <a:p>
-                  <a:pPr algn="ctr"/>
-                  <a:endParaRPr sz="3200" b="1">
-                    <a:solidFill>
-                      <a:schemeClr val="tx1"/>
-                    </a:solidFill>
-                    <a:latin typeface="宋体" panose="02010600030101010101" pitchFamily="2" charset="-122"/>
-                    <a:ea typeface="宋体" panose="02010600030101010101" pitchFamily="2" charset="-122"/>
-                  </a:endParaRPr>
-                </a:p>
-              </p:txBody>
-            </p:sp>
-            <p:sp>
-              <p:nvSpPr>
-                <p:cNvPr id="187" name="Rectangle 93">
-                  <a:extLst>
-                    <a:ext uri="{FF2B5EF4-FFF2-40B4-BE49-F238E27FC236}">
-                      <a16:creationId xmlns:a16="http://schemas.microsoft.com/office/drawing/2014/main" id="{2FC63862-0B1E-D857-C008-7C6321810CE9}"/>
-                    </a:ext>
-                  </a:extLst>
-                </p:cNvPr>
-                <p:cNvSpPr/>
-                <p:nvPr/>
-              </p:nvSpPr>
-              <p:spPr>
-                <a:xfrm>
-                  <a:off x="10916798" y="4605158"/>
-                  <a:ext cx="58055" cy="41148"/>
-                </a:xfrm>
-                <a:prstGeom prst="rect">
-                  <a:avLst/>
-                </a:prstGeom>
-                <a:solidFill>
-                  <a:srgbClr val="FFFFFF"/>
-                </a:solidFill>
-                <a:ln w="10160">
-                  <a:solidFill>
-                    <a:schemeClr val="tx1"/>
-                  </a:solidFill>
-                </a:ln>
-              </p:spPr>
-              <p:style>
-                <a:lnRef idx="1">
-                  <a:schemeClr val="accent1"/>
-                </a:lnRef>
-                <a:fillRef idx="3">
-                  <a:schemeClr val="accent1"/>
-                </a:fillRef>
-                <a:effectRef idx="2">
-                  <a:schemeClr val="accent1"/>
-                </a:effectRef>
-                <a:fontRef idx="minor">
-                  <a:schemeClr val="lt1"/>
-                </a:fontRef>
-              </p:style>
-              <p:txBody>
-                <a:bodyPr rtlCol="0" anchor="ctr"/>
-                <a:lstStyle/>
-                <a:p>
-                  <a:pPr algn="ctr"/>
-                  <a:endParaRPr sz="3200" b="1">
-                    <a:solidFill>
-                      <a:schemeClr val="tx1"/>
-                    </a:solidFill>
-                    <a:latin typeface="宋体" panose="02010600030101010101" pitchFamily="2" charset="-122"/>
-                    <a:ea typeface="宋体" panose="02010600030101010101" pitchFamily="2" charset="-122"/>
-                  </a:endParaRPr>
-                </a:p>
-              </p:txBody>
-            </p:sp>
-          </p:grpSp>
-        </p:grpSp>
-        <p:sp>
-          <p:nvSpPr>
-            <p:cNvPr id="182" name="TextBox 81">
-              <a:extLst>
-                <a:ext uri="{FF2B5EF4-FFF2-40B4-BE49-F238E27FC236}">
-                  <a16:creationId xmlns:a16="http://schemas.microsoft.com/office/drawing/2014/main" id="{EF3BEB34-9A2E-F43C-E364-3C2CE63444FD}"/>
-                </a:ext>
-              </a:extLst>
-            </p:cNvPr>
-            <p:cNvSpPr txBox="1"/>
-            <p:nvPr/>
-          </p:nvSpPr>
-          <p:spPr>
-            <a:xfrm>
-              <a:off x="10376068" y="6192580"/>
-              <a:ext cx="1582017" cy="307777"/>
-            </a:xfrm>
-            <a:prstGeom prst="rect">
-              <a:avLst/>
-            </a:prstGeom>
-            <a:noFill/>
-            <a:ln>
-              <a:noFill/>
-            </a:ln>
-          </p:spPr>
-          <p:txBody>
-            <a:bodyPr wrap="square" lIns="0" tIns="0" rIns="0" bIns="0" anchor="ctr">
-              <a:spAutoFit/>
-            </a:bodyPr>
-            <a:lstStyle/>
-            <a:p>
-              <a:pPr algn="ctr">
-                <a:spcBef>
-                  <a:spcPts val="0"/>
-                </a:spcBef>
-                <a:spcAft>
-                  <a:spcPts val="0"/>
-                </a:spcAft>
-              </a:pPr>
-              <a:r>
-                <a:rPr lang="zh-CN" altLang="en-US" sz="2000" b="1" i="0" dirty="0">
-                  <a:solidFill>
-                    <a:srgbClr val="1A1A2E"/>
-                  </a:solidFill>
-                  <a:latin typeface="宋体" panose="02010600030101010101" pitchFamily="2" charset="-122"/>
-                  <a:ea typeface="宋体" panose="02010600030101010101" pitchFamily="2" charset="-122"/>
-                </a:rPr>
-                <a:t>策略代码生成</a:t>
-              </a:r>
-              <a:endParaRPr sz="2000" b="1" i="0" dirty="0">
-                <a:solidFill>
-                  <a:srgbClr val="1A1A2E"/>
-                </a:solidFill>
-                <a:latin typeface="宋体" panose="02010600030101010101" pitchFamily="2" charset="-122"/>
-                <a:ea typeface="宋体" panose="02010600030101010101" pitchFamily="2" charset="-122"/>
-              </a:endParaRPr>
-            </a:p>
-          </p:txBody>
-        </p:sp>
-      </p:grpSp>
-      <p:grpSp>
-        <p:nvGrpSpPr>
-          <p:cNvPr id="188" name="组合 187">
-            <a:extLst>
-              <a:ext uri="{FF2B5EF4-FFF2-40B4-BE49-F238E27FC236}">
-                <a16:creationId xmlns:a16="http://schemas.microsoft.com/office/drawing/2014/main" id="{A54FC7AE-DDAC-F3B9-E3FB-732879FBEA4E}"/>
-              </a:ext>
-            </a:extLst>
-          </p:cNvPr>
-          <p:cNvGrpSpPr/>
-          <p:nvPr/>
-        </p:nvGrpSpPr>
-        <p:grpSpPr>
-          <a:xfrm>
-            <a:off x="4123265" y="604750"/>
-            <a:ext cx="2276062" cy="561109"/>
-            <a:chOff x="10041117" y="6072707"/>
-            <a:chExt cx="2276062" cy="561109"/>
-          </a:xfrm>
-        </p:grpSpPr>
-        <p:grpSp>
-          <p:nvGrpSpPr>
-            <p:cNvPr id="189" name="组合 188">
-              <a:extLst>
-                <a:ext uri="{FF2B5EF4-FFF2-40B4-BE49-F238E27FC236}">
-                  <a16:creationId xmlns:a16="http://schemas.microsoft.com/office/drawing/2014/main" id="{538E4576-D539-0AE5-10B1-BF068FC8F1E8}"/>
-                </a:ext>
-              </a:extLst>
-            </p:cNvPr>
-            <p:cNvGrpSpPr/>
-            <p:nvPr/>
-          </p:nvGrpSpPr>
-          <p:grpSpPr>
-            <a:xfrm>
-              <a:off x="10041117" y="6072707"/>
-              <a:ext cx="2276062" cy="561109"/>
-              <a:chOff x="787428" y="4369987"/>
-              <a:chExt cx="2276062" cy="561109"/>
-            </a:xfrm>
-          </p:grpSpPr>
-          <p:sp>
-            <p:nvSpPr>
-              <p:cNvPr id="191" name="Rectangle 76">
-                <a:extLst>
-                  <a:ext uri="{FF2B5EF4-FFF2-40B4-BE49-F238E27FC236}">
-                    <a16:creationId xmlns:a16="http://schemas.microsoft.com/office/drawing/2014/main" id="{81FDD6C1-EF0C-10CB-0B76-D7793159A745}"/>
-                  </a:ext>
-                </a:extLst>
-              </p:cNvPr>
-              <p:cNvSpPr/>
-              <p:nvPr/>
-            </p:nvSpPr>
-            <p:spPr>
-              <a:xfrm>
-                <a:off x="787428" y="4369987"/>
-                <a:ext cx="2276062" cy="561109"/>
-              </a:xfrm>
-              <a:prstGeom prst="rect">
-                <a:avLst/>
-              </a:prstGeom>
-              <a:solidFill>
-                <a:srgbClr val="FFFFFF"/>
-              </a:solidFill>
-              <a:ln w="13970">
-                <a:solidFill>
-                  <a:schemeClr val="tx1">
-                    <a:lumMod val="65000"/>
-                    <a:lumOff val="35000"/>
-                  </a:schemeClr>
-                </a:solidFill>
-              </a:ln>
-            </p:spPr>
-            <p:style>
-              <a:lnRef idx="1">
-                <a:schemeClr val="accent1"/>
-              </a:lnRef>
-              <a:fillRef idx="3">
-                <a:schemeClr val="accent1"/>
-              </a:fillRef>
-              <a:effectRef idx="2">
-                <a:schemeClr val="accent1"/>
-              </a:effectRef>
-              <a:fontRef idx="minor">
-                <a:schemeClr val="lt1"/>
-              </a:fontRef>
-            </p:style>
-            <p:txBody>
-              <a:bodyPr rtlCol="0" anchor="ctr"/>
-              <a:lstStyle/>
-              <a:p>
-                <a:pPr algn="ctr"/>
-                <a:endParaRPr sz="3200" b="1">
-                  <a:latin typeface="宋体" panose="02010600030101010101" pitchFamily="2" charset="-122"/>
-                  <a:ea typeface="宋体" panose="02010600030101010101" pitchFamily="2" charset="-122"/>
-                </a:endParaRPr>
-              </a:p>
-            </p:txBody>
-          </p:sp>
-          <p:grpSp>
-            <p:nvGrpSpPr>
-              <p:cNvPr id="192" name="组合 191">
-                <a:extLst>
-                  <a:ext uri="{FF2B5EF4-FFF2-40B4-BE49-F238E27FC236}">
-                    <a16:creationId xmlns:a16="http://schemas.microsoft.com/office/drawing/2014/main" id="{222A27E7-EB72-2BB9-5E65-49EA3E0EF888}"/>
-                  </a:ext>
-                </a:extLst>
-              </p:cNvPr>
-              <p:cNvGrpSpPr/>
-              <p:nvPr/>
-            </p:nvGrpSpPr>
-            <p:grpSpPr>
-              <a:xfrm>
-                <a:off x="2791063" y="4407913"/>
-                <a:ext cx="166910" cy="143394"/>
-                <a:chOff x="10916798" y="4537825"/>
-                <a:chExt cx="166910" cy="143394"/>
-              </a:xfrm>
-            </p:grpSpPr>
-            <p:sp>
-              <p:nvSpPr>
-                <p:cNvPr id="193" name="Rectangle 91">
-                  <a:extLst>
-                    <a:ext uri="{FF2B5EF4-FFF2-40B4-BE49-F238E27FC236}">
-                      <a16:creationId xmlns:a16="http://schemas.microsoft.com/office/drawing/2014/main" id="{1920C06E-2176-C1AC-4E94-376BC5F30AD5}"/>
-                    </a:ext>
-                  </a:extLst>
-                </p:cNvPr>
-                <p:cNvSpPr/>
-                <p:nvPr/>
-              </p:nvSpPr>
-              <p:spPr>
-                <a:xfrm>
-                  <a:off x="10945826" y="4537825"/>
-                  <a:ext cx="137882" cy="143394"/>
-                </a:xfrm>
-                <a:prstGeom prst="rect">
-                  <a:avLst/>
-                </a:prstGeom>
-                <a:solidFill>
-                  <a:srgbClr val="FFFFFF"/>
-                </a:solidFill>
-                <a:ln w="10160">
-                  <a:solidFill>
-                    <a:schemeClr val="tx1"/>
-                  </a:solidFill>
-                </a:ln>
-              </p:spPr>
-              <p:style>
-                <a:lnRef idx="1">
-                  <a:schemeClr val="accent1"/>
-                </a:lnRef>
-                <a:fillRef idx="3">
-                  <a:schemeClr val="accent1"/>
-                </a:fillRef>
-                <a:effectRef idx="2">
-                  <a:schemeClr val="accent1"/>
-                </a:effectRef>
-                <a:fontRef idx="minor">
-                  <a:schemeClr val="lt1"/>
-                </a:fontRef>
-              </p:style>
-              <p:txBody>
-                <a:bodyPr rtlCol="0" anchor="ctr"/>
-                <a:lstStyle/>
-                <a:p>
-                  <a:pPr algn="ctr"/>
-                  <a:endParaRPr sz="3200" b="1">
-                    <a:solidFill>
-                      <a:schemeClr val="tx1"/>
-                    </a:solidFill>
-                    <a:latin typeface="宋体" panose="02010600030101010101" pitchFamily="2" charset="-122"/>
-                    <a:ea typeface="宋体" panose="02010600030101010101" pitchFamily="2" charset="-122"/>
-                  </a:endParaRPr>
-                </a:p>
-              </p:txBody>
-            </p:sp>
-            <p:sp>
-              <p:nvSpPr>
-                <p:cNvPr id="194" name="Rectangle 92">
-                  <a:extLst>
-                    <a:ext uri="{FF2B5EF4-FFF2-40B4-BE49-F238E27FC236}">
-                      <a16:creationId xmlns:a16="http://schemas.microsoft.com/office/drawing/2014/main" id="{42A74A64-C5FC-1256-2B53-C93D488D7DD9}"/>
-                    </a:ext>
-                  </a:extLst>
-                </p:cNvPr>
-                <p:cNvSpPr/>
-                <p:nvPr/>
-              </p:nvSpPr>
-              <p:spPr>
-                <a:xfrm>
-                  <a:off x="10916798" y="4550294"/>
-                  <a:ext cx="58055" cy="41148"/>
-                </a:xfrm>
-                <a:prstGeom prst="rect">
-                  <a:avLst/>
-                </a:prstGeom>
-                <a:solidFill>
-                  <a:srgbClr val="FFFFFF"/>
-                </a:solidFill>
-                <a:ln w="10160">
-                  <a:solidFill>
-                    <a:schemeClr val="tx1"/>
-                  </a:solidFill>
-                </a:ln>
-              </p:spPr>
-              <p:style>
-                <a:lnRef idx="1">
-                  <a:schemeClr val="accent1"/>
-                </a:lnRef>
-                <a:fillRef idx="3">
-                  <a:schemeClr val="accent1"/>
-                </a:fillRef>
-                <a:effectRef idx="2">
-                  <a:schemeClr val="accent1"/>
-                </a:effectRef>
-                <a:fontRef idx="minor">
-                  <a:schemeClr val="lt1"/>
-                </a:fontRef>
-              </p:style>
-              <p:txBody>
-                <a:bodyPr rtlCol="0" anchor="ctr"/>
-                <a:lstStyle/>
-                <a:p>
-                  <a:pPr algn="ctr"/>
-                  <a:endParaRPr sz="3200" b="1">
-                    <a:solidFill>
-                      <a:schemeClr val="tx1"/>
-                    </a:solidFill>
-                    <a:latin typeface="宋体" panose="02010600030101010101" pitchFamily="2" charset="-122"/>
-                    <a:ea typeface="宋体" panose="02010600030101010101" pitchFamily="2" charset="-122"/>
-                  </a:endParaRPr>
-                </a:p>
-              </p:txBody>
-            </p:sp>
-            <p:sp>
-              <p:nvSpPr>
-                <p:cNvPr id="195" name="Rectangle 93">
-                  <a:extLst>
-                    <a:ext uri="{FF2B5EF4-FFF2-40B4-BE49-F238E27FC236}">
-                      <a16:creationId xmlns:a16="http://schemas.microsoft.com/office/drawing/2014/main" id="{9C69FA34-F285-F766-48D1-5D4842262444}"/>
-                    </a:ext>
-                  </a:extLst>
-                </p:cNvPr>
-                <p:cNvSpPr/>
-                <p:nvPr/>
-              </p:nvSpPr>
-              <p:spPr>
-                <a:xfrm>
-                  <a:off x="10916798" y="4605158"/>
-                  <a:ext cx="58055" cy="41148"/>
-                </a:xfrm>
-                <a:prstGeom prst="rect">
-                  <a:avLst/>
-                </a:prstGeom>
-                <a:solidFill>
-                  <a:srgbClr val="FFFFFF"/>
-                </a:solidFill>
-                <a:ln w="10160">
-                  <a:solidFill>
-                    <a:schemeClr val="tx1"/>
-                  </a:solidFill>
-                </a:ln>
-              </p:spPr>
-              <p:style>
-                <a:lnRef idx="1">
-                  <a:schemeClr val="accent1"/>
-                </a:lnRef>
-                <a:fillRef idx="3">
-                  <a:schemeClr val="accent1"/>
-                </a:fillRef>
-                <a:effectRef idx="2">
-                  <a:schemeClr val="accent1"/>
-                </a:effectRef>
-                <a:fontRef idx="minor">
-                  <a:schemeClr val="lt1"/>
-                </a:fontRef>
-              </p:style>
-              <p:txBody>
-                <a:bodyPr rtlCol="0" anchor="ctr"/>
-                <a:lstStyle/>
-                <a:p>
-                  <a:pPr algn="ctr"/>
-                  <a:endParaRPr sz="3200" b="1">
-                    <a:solidFill>
-                      <a:schemeClr val="tx1"/>
-                    </a:solidFill>
-                    <a:latin typeface="宋体" panose="02010600030101010101" pitchFamily="2" charset="-122"/>
-                    <a:ea typeface="宋体" panose="02010600030101010101" pitchFamily="2" charset="-122"/>
-                  </a:endParaRPr>
-                </a:p>
-              </p:txBody>
-            </p:sp>
-          </p:grpSp>
-        </p:grpSp>
-        <p:sp>
-          <p:nvSpPr>
-            <p:cNvPr id="190" name="TextBox 81">
-              <a:extLst>
-                <a:ext uri="{FF2B5EF4-FFF2-40B4-BE49-F238E27FC236}">
-                  <a16:creationId xmlns:a16="http://schemas.microsoft.com/office/drawing/2014/main" id="{8AE54614-E735-12CB-F85D-DD4ED80861E9}"/>
-                </a:ext>
-              </a:extLst>
-            </p:cNvPr>
-            <p:cNvSpPr txBox="1"/>
-            <p:nvPr/>
-          </p:nvSpPr>
-          <p:spPr>
-            <a:xfrm>
-              <a:off x="10376068" y="6192580"/>
-              <a:ext cx="1582017" cy="307777"/>
-            </a:xfrm>
-            <a:prstGeom prst="rect">
-              <a:avLst/>
-            </a:prstGeom>
-            <a:noFill/>
-            <a:ln>
-              <a:noFill/>
-            </a:ln>
-          </p:spPr>
-          <p:txBody>
-            <a:bodyPr wrap="square" lIns="0" tIns="0" rIns="0" bIns="0" anchor="ctr">
-              <a:spAutoFit/>
-            </a:bodyPr>
-            <a:lstStyle/>
-            <a:p>
-              <a:pPr algn="ctr">
-                <a:spcBef>
-                  <a:spcPts val="0"/>
-                </a:spcBef>
-                <a:spcAft>
-                  <a:spcPts val="0"/>
-                </a:spcAft>
-              </a:pPr>
-              <a:r>
-                <a:rPr lang="zh-CN" altLang="en-US" sz="2000" b="1" i="0" dirty="0">
-                  <a:solidFill>
-                    <a:srgbClr val="1A1A2E"/>
-                  </a:solidFill>
-                  <a:latin typeface="宋体" panose="02010600030101010101" pitchFamily="2" charset="-122"/>
-                  <a:ea typeface="宋体" panose="02010600030101010101" pitchFamily="2" charset="-122"/>
-                </a:rPr>
-                <a:t>策略代码评估</a:t>
-              </a:r>
-              <a:endParaRPr sz="2000" b="1" i="0" dirty="0">
-                <a:solidFill>
-                  <a:srgbClr val="1A1A2E"/>
-                </a:solidFill>
-                <a:latin typeface="宋体" panose="02010600030101010101" pitchFamily="2" charset="-122"/>
-                <a:ea typeface="宋体" panose="02010600030101010101" pitchFamily="2" charset="-122"/>
-              </a:endParaRPr>
-            </a:p>
-          </p:txBody>
-        </p:sp>
-      </p:grpSp>
-      <p:grpSp>
-        <p:nvGrpSpPr>
-          <p:cNvPr id="196" name="组合 195">
-            <a:extLst>
-              <a:ext uri="{FF2B5EF4-FFF2-40B4-BE49-F238E27FC236}">
-                <a16:creationId xmlns:a16="http://schemas.microsoft.com/office/drawing/2014/main" id="{F4A7CB99-71BA-3CB2-223C-FD1DD7C03C8A}"/>
-              </a:ext>
-            </a:extLst>
-          </p:cNvPr>
-          <p:cNvGrpSpPr/>
-          <p:nvPr/>
-        </p:nvGrpSpPr>
-        <p:grpSpPr>
-          <a:xfrm>
-            <a:off x="6966681" y="616597"/>
-            <a:ext cx="2276062" cy="561109"/>
-            <a:chOff x="10041117" y="6072707"/>
-            <a:chExt cx="2276062" cy="561109"/>
-          </a:xfrm>
-        </p:grpSpPr>
-        <p:grpSp>
-          <p:nvGrpSpPr>
-            <p:cNvPr id="197" name="组合 196">
-              <a:extLst>
-                <a:ext uri="{FF2B5EF4-FFF2-40B4-BE49-F238E27FC236}">
-                  <a16:creationId xmlns:a16="http://schemas.microsoft.com/office/drawing/2014/main" id="{BD7183CA-1A77-A04A-D989-2E242206419E}"/>
-                </a:ext>
-              </a:extLst>
-            </p:cNvPr>
-            <p:cNvGrpSpPr/>
-            <p:nvPr/>
-          </p:nvGrpSpPr>
-          <p:grpSpPr>
-            <a:xfrm>
-              <a:off x="10041117" y="6072707"/>
-              <a:ext cx="2276062" cy="561109"/>
-              <a:chOff x="787428" y="4369987"/>
-              <a:chExt cx="2276062" cy="561109"/>
-            </a:xfrm>
-          </p:grpSpPr>
-          <p:sp>
-            <p:nvSpPr>
-              <p:cNvPr id="199" name="Rectangle 76">
-                <a:extLst>
-                  <a:ext uri="{FF2B5EF4-FFF2-40B4-BE49-F238E27FC236}">
-                    <a16:creationId xmlns:a16="http://schemas.microsoft.com/office/drawing/2014/main" id="{5F8C338D-95F3-E1D0-EC0D-E75D17EBDA48}"/>
-                  </a:ext>
-                </a:extLst>
-              </p:cNvPr>
-              <p:cNvSpPr/>
-              <p:nvPr/>
-            </p:nvSpPr>
-            <p:spPr>
-              <a:xfrm>
-                <a:off x="787428" y="4369987"/>
-                <a:ext cx="2276062" cy="561109"/>
-              </a:xfrm>
-              <a:prstGeom prst="rect">
-                <a:avLst/>
-              </a:prstGeom>
-              <a:solidFill>
-                <a:srgbClr val="FFFFFF"/>
-              </a:solidFill>
-              <a:ln w="13970">
-                <a:solidFill>
-                  <a:schemeClr val="tx1">
-                    <a:lumMod val="65000"/>
-                    <a:lumOff val="35000"/>
-                  </a:schemeClr>
-                </a:solidFill>
-              </a:ln>
-            </p:spPr>
-            <p:style>
-              <a:lnRef idx="1">
-                <a:schemeClr val="accent1"/>
-              </a:lnRef>
-              <a:fillRef idx="3">
-                <a:schemeClr val="accent1"/>
-              </a:fillRef>
-              <a:effectRef idx="2">
-                <a:schemeClr val="accent1"/>
-              </a:effectRef>
-              <a:fontRef idx="minor">
-                <a:schemeClr val="lt1"/>
-              </a:fontRef>
-            </p:style>
-            <p:txBody>
-              <a:bodyPr rtlCol="0" anchor="ctr"/>
-              <a:lstStyle/>
-              <a:p>
-                <a:pPr algn="ctr"/>
-                <a:endParaRPr sz="3200" b="1">
-                  <a:latin typeface="宋体" panose="02010600030101010101" pitchFamily="2" charset="-122"/>
-                  <a:ea typeface="宋体" panose="02010600030101010101" pitchFamily="2" charset="-122"/>
-                </a:endParaRPr>
-              </a:p>
-            </p:txBody>
-          </p:sp>
-          <p:grpSp>
-            <p:nvGrpSpPr>
-              <p:cNvPr id="200" name="组合 199">
-                <a:extLst>
-                  <a:ext uri="{FF2B5EF4-FFF2-40B4-BE49-F238E27FC236}">
-                    <a16:creationId xmlns:a16="http://schemas.microsoft.com/office/drawing/2014/main" id="{83EDD26F-8691-38B8-B8DB-C69703566B95}"/>
-                  </a:ext>
-                </a:extLst>
-              </p:cNvPr>
-              <p:cNvGrpSpPr/>
-              <p:nvPr/>
-            </p:nvGrpSpPr>
-            <p:grpSpPr>
-              <a:xfrm>
-                <a:off x="2791063" y="4407913"/>
-                <a:ext cx="166910" cy="143394"/>
-                <a:chOff x="10916798" y="4537825"/>
-                <a:chExt cx="166910" cy="143394"/>
-              </a:xfrm>
-            </p:grpSpPr>
-            <p:sp>
-              <p:nvSpPr>
-                <p:cNvPr id="201" name="Rectangle 91">
-                  <a:extLst>
-                    <a:ext uri="{FF2B5EF4-FFF2-40B4-BE49-F238E27FC236}">
-                      <a16:creationId xmlns:a16="http://schemas.microsoft.com/office/drawing/2014/main" id="{C962B2A3-1318-EDAB-F175-98235C1D0EAF}"/>
-                    </a:ext>
-                  </a:extLst>
-                </p:cNvPr>
-                <p:cNvSpPr/>
-                <p:nvPr/>
-              </p:nvSpPr>
-              <p:spPr>
-                <a:xfrm>
-                  <a:off x="10945826" y="4537825"/>
-                  <a:ext cx="137882" cy="143394"/>
-                </a:xfrm>
-                <a:prstGeom prst="rect">
-                  <a:avLst/>
-                </a:prstGeom>
-                <a:solidFill>
-                  <a:srgbClr val="FFFFFF"/>
-                </a:solidFill>
-                <a:ln w="10160">
-                  <a:solidFill>
-                    <a:schemeClr val="tx1"/>
-                  </a:solidFill>
-                </a:ln>
-              </p:spPr>
-              <p:style>
-                <a:lnRef idx="1">
-                  <a:schemeClr val="accent1"/>
-                </a:lnRef>
-                <a:fillRef idx="3">
-                  <a:schemeClr val="accent1"/>
-                </a:fillRef>
-                <a:effectRef idx="2">
-                  <a:schemeClr val="accent1"/>
-                </a:effectRef>
-                <a:fontRef idx="minor">
-                  <a:schemeClr val="lt1"/>
-                </a:fontRef>
-              </p:style>
-              <p:txBody>
-                <a:bodyPr rtlCol="0" anchor="ctr"/>
-                <a:lstStyle/>
-                <a:p>
-                  <a:pPr algn="ctr"/>
-                  <a:endParaRPr sz="3200" b="1">
-                    <a:solidFill>
-                      <a:schemeClr val="tx1"/>
-                    </a:solidFill>
-                    <a:latin typeface="宋体" panose="02010600030101010101" pitchFamily="2" charset="-122"/>
-                    <a:ea typeface="宋体" panose="02010600030101010101" pitchFamily="2" charset="-122"/>
-                  </a:endParaRPr>
-                </a:p>
-              </p:txBody>
-            </p:sp>
-            <p:sp>
-              <p:nvSpPr>
-                <p:cNvPr id="202" name="Rectangle 92">
-                  <a:extLst>
-                    <a:ext uri="{FF2B5EF4-FFF2-40B4-BE49-F238E27FC236}">
-                      <a16:creationId xmlns:a16="http://schemas.microsoft.com/office/drawing/2014/main" id="{A0814D1D-EF70-CB77-C83A-B8ACF1C980BA}"/>
-                    </a:ext>
-                  </a:extLst>
-                </p:cNvPr>
-                <p:cNvSpPr/>
-                <p:nvPr/>
-              </p:nvSpPr>
-              <p:spPr>
-                <a:xfrm>
-                  <a:off x="10916798" y="4550294"/>
-                  <a:ext cx="58055" cy="41148"/>
-                </a:xfrm>
-                <a:prstGeom prst="rect">
-                  <a:avLst/>
-                </a:prstGeom>
-                <a:solidFill>
-                  <a:srgbClr val="FFFFFF"/>
-                </a:solidFill>
-                <a:ln w="10160">
-                  <a:solidFill>
-                    <a:schemeClr val="tx1"/>
-                  </a:solidFill>
-                </a:ln>
-              </p:spPr>
-              <p:style>
-                <a:lnRef idx="1">
-                  <a:schemeClr val="accent1"/>
-                </a:lnRef>
-                <a:fillRef idx="3">
-                  <a:schemeClr val="accent1"/>
-                </a:fillRef>
-                <a:effectRef idx="2">
-                  <a:schemeClr val="accent1"/>
-                </a:effectRef>
-                <a:fontRef idx="minor">
-                  <a:schemeClr val="lt1"/>
-                </a:fontRef>
-              </p:style>
-              <p:txBody>
-                <a:bodyPr rtlCol="0" anchor="ctr"/>
-                <a:lstStyle/>
-                <a:p>
-                  <a:pPr algn="ctr"/>
-                  <a:endParaRPr sz="3200" b="1">
-                    <a:solidFill>
-                      <a:schemeClr val="tx1"/>
-                    </a:solidFill>
-                    <a:latin typeface="宋体" panose="02010600030101010101" pitchFamily="2" charset="-122"/>
-                    <a:ea typeface="宋体" panose="02010600030101010101" pitchFamily="2" charset="-122"/>
-                  </a:endParaRPr>
-                </a:p>
-              </p:txBody>
-            </p:sp>
-            <p:sp>
-              <p:nvSpPr>
-                <p:cNvPr id="203" name="Rectangle 93">
-                  <a:extLst>
-                    <a:ext uri="{FF2B5EF4-FFF2-40B4-BE49-F238E27FC236}">
-                      <a16:creationId xmlns:a16="http://schemas.microsoft.com/office/drawing/2014/main" id="{D56E0EF9-2FCD-04FF-77F1-DE5F0E071B2A}"/>
-                    </a:ext>
-                  </a:extLst>
-                </p:cNvPr>
-                <p:cNvSpPr/>
-                <p:nvPr/>
-              </p:nvSpPr>
-              <p:spPr>
-                <a:xfrm>
-                  <a:off x="10916798" y="4605158"/>
-                  <a:ext cx="58055" cy="41148"/>
-                </a:xfrm>
-                <a:prstGeom prst="rect">
-                  <a:avLst/>
-                </a:prstGeom>
-                <a:solidFill>
-                  <a:srgbClr val="FFFFFF"/>
-                </a:solidFill>
-                <a:ln w="10160">
-                  <a:solidFill>
-                    <a:schemeClr val="tx1"/>
-                  </a:solidFill>
-                </a:ln>
-              </p:spPr>
-              <p:style>
-                <a:lnRef idx="1">
-                  <a:schemeClr val="accent1"/>
-                </a:lnRef>
-                <a:fillRef idx="3">
-                  <a:schemeClr val="accent1"/>
-                </a:fillRef>
-                <a:effectRef idx="2">
-                  <a:schemeClr val="accent1"/>
-                </a:effectRef>
-                <a:fontRef idx="minor">
-                  <a:schemeClr val="lt1"/>
-                </a:fontRef>
-              </p:style>
-              <p:txBody>
-                <a:bodyPr rtlCol="0" anchor="ctr"/>
-                <a:lstStyle/>
-                <a:p>
-                  <a:pPr algn="ctr"/>
-                  <a:endParaRPr sz="3200" b="1">
-                    <a:solidFill>
-                      <a:schemeClr val="tx1"/>
-                    </a:solidFill>
-                    <a:latin typeface="宋体" panose="02010600030101010101" pitchFamily="2" charset="-122"/>
-                    <a:ea typeface="宋体" panose="02010600030101010101" pitchFamily="2" charset="-122"/>
-                  </a:endParaRPr>
-                </a:p>
-              </p:txBody>
-            </p:sp>
-          </p:grpSp>
-        </p:grpSp>
-        <p:sp>
-          <p:nvSpPr>
-            <p:cNvPr id="198" name="TextBox 81">
-              <a:extLst>
-                <a:ext uri="{FF2B5EF4-FFF2-40B4-BE49-F238E27FC236}">
-                  <a16:creationId xmlns:a16="http://schemas.microsoft.com/office/drawing/2014/main" id="{DC894A40-9377-F082-7B7E-2C9C1AD2007C}"/>
-                </a:ext>
-              </a:extLst>
-            </p:cNvPr>
-            <p:cNvSpPr txBox="1"/>
-            <p:nvPr/>
-          </p:nvSpPr>
-          <p:spPr>
-            <a:xfrm>
-              <a:off x="10376068" y="6192580"/>
-              <a:ext cx="1582017" cy="307777"/>
-            </a:xfrm>
-            <a:prstGeom prst="rect">
-              <a:avLst/>
-            </a:prstGeom>
-            <a:noFill/>
-            <a:ln>
-              <a:noFill/>
-            </a:ln>
-          </p:spPr>
-          <p:txBody>
-            <a:bodyPr wrap="square" lIns="0" tIns="0" rIns="0" bIns="0" anchor="ctr">
-              <a:spAutoFit/>
-            </a:bodyPr>
-            <a:lstStyle/>
-            <a:p>
-              <a:pPr algn="ctr">
-                <a:spcBef>
-                  <a:spcPts val="0"/>
-                </a:spcBef>
-                <a:spcAft>
-                  <a:spcPts val="0"/>
-                </a:spcAft>
-              </a:pPr>
-              <a:r>
-                <a:rPr lang="zh-CN" altLang="en-US" sz="2000" b="1" i="0" dirty="0">
-                  <a:solidFill>
-                    <a:srgbClr val="1A1A2E"/>
-                  </a:solidFill>
-                  <a:latin typeface="宋体" panose="02010600030101010101" pitchFamily="2" charset="-122"/>
-                  <a:ea typeface="宋体" panose="02010600030101010101" pitchFamily="2" charset="-122"/>
-                </a:rPr>
-                <a:t>安全策略部署</a:t>
-              </a:r>
-              <a:endParaRPr sz="2000" b="1" i="0" dirty="0">
-                <a:solidFill>
-                  <a:srgbClr val="1A1A2E"/>
-                </a:solidFill>
-                <a:latin typeface="宋体" panose="02010600030101010101" pitchFamily="2" charset="-122"/>
-                <a:ea typeface="宋体" panose="02010600030101010101" pitchFamily="2" charset="-122"/>
-              </a:endParaRPr>
-            </a:p>
-          </p:txBody>
-        </p:sp>
-      </p:grpSp>
-      <p:grpSp>
-        <p:nvGrpSpPr>
-          <p:cNvPr id="212" name="组合 211">
-            <a:extLst>
-              <a:ext uri="{FF2B5EF4-FFF2-40B4-BE49-F238E27FC236}">
-                <a16:creationId xmlns:a16="http://schemas.microsoft.com/office/drawing/2014/main" id="{C38463C9-126F-DB8B-32E4-E1E788E0D60D}"/>
-              </a:ext>
-            </a:extLst>
-          </p:cNvPr>
-          <p:cNvGrpSpPr/>
-          <p:nvPr/>
-        </p:nvGrpSpPr>
-        <p:grpSpPr>
-          <a:xfrm>
-            <a:off x="525940" y="2915479"/>
-            <a:ext cx="1814240" cy="561109"/>
-            <a:chOff x="10502939" y="6072707"/>
-            <a:chExt cx="1814240" cy="561109"/>
-          </a:xfrm>
-        </p:grpSpPr>
-        <p:grpSp>
-          <p:nvGrpSpPr>
-            <p:cNvPr id="213" name="组合 212">
-              <a:extLst>
-                <a:ext uri="{FF2B5EF4-FFF2-40B4-BE49-F238E27FC236}">
-                  <a16:creationId xmlns:a16="http://schemas.microsoft.com/office/drawing/2014/main" id="{33FCCED9-2C67-CD6C-864C-025FE537875D}"/>
-                </a:ext>
-              </a:extLst>
-            </p:cNvPr>
-            <p:cNvGrpSpPr/>
-            <p:nvPr/>
-          </p:nvGrpSpPr>
-          <p:grpSpPr>
-            <a:xfrm>
-              <a:off x="10502939" y="6072707"/>
-              <a:ext cx="1814240" cy="561109"/>
-              <a:chOff x="1249250" y="4369987"/>
-              <a:chExt cx="1814240" cy="561109"/>
-            </a:xfrm>
-          </p:grpSpPr>
-          <p:sp>
-            <p:nvSpPr>
-              <p:cNvPr id="215" name="Rectangle 76">
-                <a:extLst>
-                  <a:ext uri="{FF2B5EF4-FFF2-40B4-BE49-F238E27FC236}">
-                    <a16:creationId xmlns:a16="http://schemas.microsoft.com/office/drawing/2014/main" id="{D6B45455-4559-198F-A257-5DA717A2A9A8}"/>
-                  </a:ext>
-                </a:extLst>
-              </p:cNvPr>
-              <p:cNvSpPr/>
-              <p:nvPr/>
-            </p:nvSpPr>
-            <p:spPr>
-              <a:xfrm>
-                <a:off x="1249250" y="4369987"/>
-                <a:ext cx="1814240" cy="561109"/>
-              </a:xfrm>
-              <a:prstGeom prst="rect">
-                <a:avLst/>
-              </a:prstGeom>
-              <a:solidFill>
-                <a:srgbClr val="FFFFFF"/>
-              </a:solidFill>
-              <a:ln w="13970">
-                <a:solidFill>
-                  <a:schemeClr val="tx1">
-                    <a:lumMod val="65000"/>
-                    <a:lumOff val="35000"/>
-                  </a:schemeClr>
-                </a:solidFill>
-              </a:ln>
-            </p:spPr>
-            <p:style>
-              <a:lnRef idx="1">
-                <a:schemeClr val="accent1"/>
-              </a:lnRef>
-              <a:fillRef idx="3">
-                <a:schemeClr val="accent1"/>
-              </a:fillRef>
-              <a:effectRef idx="2">
-                <a:schemeClr val="accent1"/>
-              </a:effectRef>
-              <a:fontRef idx="minor">
-                <a:schemeClr val="lt1"/>
-              </a:fontRef>
-            </p:style>
-            <p:txBody>
-              <a:bodyPr rtlCol="0" anchor="ctr"/>
-              <a:lstStyle/>
-              <a:p>
-                <a:pPr algn="ctr"/>
-                <a:endParaRPr sz="3200" b="1">
-                  <a:latin typeface="宋体" panose="02010600030101010101" pitchFamily="2" charset="-122"/>
-                  <a:ea typeface="宋体" panose="02010600030101010101" pitchFamily="2" charset="-122"/>
-                </a:endParaRPr>
-              </a:p>
-            </p:txBody>
-          </p:sp>
-          <p:grpSp>
-            <p:nvGrpSpPr>
-              <p:cNvPr id="216" name="组合 215">
-                <a:extLst>
-                  <a:ext uri="{FF2B5EF4-FFF2-40B4-BE49-F238E27FC236}">
-                    <a16:creationId xmlns:a16="http://schemas.microsoft.com/office/drawing/2014/main" id="{34D60608-7233-2DDD-15DA-94A2AAAB2297}"/>
-                  </a:ext>
-                </a:extLst>
-              </p:cNvPr>
-              <p:cNvGrpSpPr/>
-              <p:nvPr/>
-            </p:nvGrpSpPr>
-            <p:grpSpPr>
-              <a:xfrm>
-                <a:off x="2791063" y="4407913"/>
-                <a:ext cx="166910" cy="143394"/>
-                <a:chOff x="10916798" y="4537825"/>
-                <a:chExt cx="166910" cy="143394"/>
-              </a:xfrm>
-            </p:grpSpPr>
-            <p:sp>
-              <p:nvSpPr>
-                <p:cNvPr id="217" name="Rectangle 91">
-                  <a:extLst>
-                    <a:ext uri="{FF2B5EF4-FFF2-40B4-BE49-F238E27FC236}">
-                      <a16:creationId xmlns:a16="http://schemas.microsoft.com/office/drawing/2014/main" id="{9E8C6463-DCDB-274C-7B18-10DFF52674C9}"/>
-                    </a:ext>
-                  </a:extLst>
-                </p:cNvPr>
-                <p:cNvSpPr/>
-                <p:nvPr/>
-              </p:nvSpPr>
-              <p:spPr>
-                <a:xfrm>
-                  <a:off x="10945826" y="4537825"/>
-                  <a:ext cx="137882" cy="143394"/>
-                </a:xfrm>
-                <a:prstGeom prst="rect">
-                  <a:avLst/>
-                </a:prstGeom>
-                <a:solidFill>
-                  <a:srgbClr val="FFFFFF"/>
-                </a:solidFill>
-                <a:ln w="10160">
-                  <a:solidFill>
-                    <a:schemeClr val="tx1"/>
-                  </a:solidFill>
-                </a:ln>
-              </p:spPr>
-              <p:style>
-                <a:lnRef idx="1">
-                  <a:schemeClr val="accent1"/>
-                </a:lnRef>
-                <a:fillRef idx="3">
-                  <a:schemeClr val="accent1"/>
-                </a:fillRef>
-                <a:effectRef idx="2">
-                  <a:schemeClr val="accent1"/>
-                </a:effectRef>
-                <a:fontRef idx="minor">
-                  <a:schemeClr val="lt1"/>
-                </a:fontRef>
-              </p:style>
-              <p:txBody>
-                <a:bodyPr rtlCol="0" anchor="ctr"/>
-                <a:lstStyle/>
-                <a:p>
-                  <a:pPr algn="ctr"/>
-                  <a:endParaRPr sz="3200" b="1">
-                    <a:solidFill>
-                      <a:schemeClr val="tx1"/>
-                    </a:solidFill>
-                    <a:latin typeface="宋体" panose="02010600030101010101" pitchFamily="2" charset="-122"/>
-                    <a:ea typeface="宋体" panose="02010600030101010101" pitchFamily="2" charset="-122"/>
-                  </a:endParaRPr>
-                </a:p>
-              </p:txBody>
-            </p:sp>
-            <p:sp>
-              <p:nvSpPr>
-                <p:cNvPr id="218" name="Rectangle 92">
-                  <a:extLst>
-                    <a:ext uri="{FF2B5EF4-FFF2-40B4-BE49-F238E27FC236}">
-                      <a16:creationId xmlns:a16="http://schemas.microsoft.com/office/drawing/2014/main" id="{22C3F85C-EC0F-5501-4F9C-18CE43E51D3F}"/>
-                    </a:ext>
-                  </a:extLst>
-                </p:cNvPr>
-                <p:cNvSpPr/>
-                <p:nvPr/>
-              </p:nvSpPr>
-              <p:spPr>
-                <a:xfrm>
-                  <a:off x="10916798" y="4550294"/>
-                  <a:ext cx="58055" cy="41148"/>
-                </a:xfrm>
-                <a:prstGeom prst="rect">
-                  <a:avLst/>
-                </a:prstGeom>
-                <a:solidFill>
-                  <a:srgbClr val="FFFFFF"/>
-                </a:solidFill>
-                <a:ln w="10160">
-                  <a:solidFill>
-                    <a:schemeClr val="tx1"/>
-                  </a:solidFill>
-                </a:ln>
-              </p:spPr>
-              <p:style>
-                <a:lnRef idx="1">
-                  <a:schemeClr val="accent1"/>
-                </a:lnRef>
-                <a:fillRef idx="3">
-                  <a:schemeClr val="accent1"/>
-                </a:fillRef>
-                <a:effectRef idx="2">
-                  <a:schemeClr val="accent1"/>
-                </a:effectRef>
-                <a:fontRef idx="minor">
-                  <a:schemeClr val="lt1"/>
-                </a:fontRef>
-              </p:style>
-              <p:txBody>
-                <a:bodyPr rtlCol="0" anchor="ctr"/>
-                <a:lstStyle/>
-                <a:p>
-                  <a:pPr algn="ctr"/>
-                  <a:endParaRPr sz="3200" b="1">
-                    <a:solidFill>
-                      <a:schemeClr val="tx1"/>
-                    </a:solidFill>
-                    <a:latin typeface="宋体" panose="02010600030101010101" pitchFamily="2" charset="-122"/>
-                    <a:ea typeface="宋体" panose="02010600030101010101" pitchFamily="2" charset="-122"/>
-                  </a:endParaRPr>
-                </a:p>
-              </p:txBody>
-            </p:sp>
-            <p:sp>
-              <p:nvSpPr>
-                <p:cNvPr id="219" name="Rectangle 93">
-                  <a:extLst>
-                    <a:ext uri="{FF2B5EF4-FFF2-40B4-BE49-F238E27FC236}">
-                      <a16:creationId xmlns:a16="http://schemas.microsoft.com/office/drawing/2014/main" id="{D8EAD353-DE30-89CF-2DB9-AB92296E558B}"/>
-                    </a:ext>
-                  </a:extLst>
-                </p:cNvPr>
-                <p:cNvSpPr/>
-                <p:nvPr/>
-              </p:nvSpPr>
-              <p:spPr>
-                <a:xfrm>
-                  <a:off x="10916798" y="4605158"/>
-                  <a:ext cx="58055" cy="41148"/>
-                </a:xfrm>
-                <a:prstGeom prst="rect">
-                  <a:avLst/>
-                </a:prstGeom>
-                <a:solidFill>
-                  <a:srgbClr val="FFFFFF"/>
-                </a:solidFill>
-                <a:ln w="10160">
-                  <a:solidFill>
-                    <a:schemeClr val="tx1"/>
-                  </a:solidFill>
-                </a:ln>
-              </p:spPr>
-              <p:style>
-                <a:lnRef idx="1">
-                  <a:schemeClr val="accent1"/>
-                </a:lnRef>
-                <a:fillRef idx="3">
-                  <a:schemeClr val="accent1"/>
-                </a:fillRef>
-                <a:effectRef idx="2">
-                  <a:schemeClr val="accent1"/>
-                </a:effectRef>
-                <a:fontRef idx="minor">
-                  <a:schemeClr val="lt1"/>
-                </a:fontRef>
-              </p:style>
-              <p:txBody>
-                <a:bodyPr rtlCol="0" anchor="ctr"/>
-                <a:lstStyle/>
-                <a:p>
-                  <a:pPr algn="ctr"/>
-                  <a:endParaRPr sz="3200" b="1">
-                    <a:solidFill>
-                      <a:schemeClr val="tx1"/>
-                    </a:solidFill>
-                    <a:latin typeface="宋体" panose="02010600030101010101" pitchFamily="2" charset="-122"/>
-                    <a:ea typeface="宋体" panose="02010600030101010101" pitchFamily="2" charset="-122"/>
-                  </a:endParaRPr>
-                </a:p>
-              </p:txBody>
-            </p:sp>
-          </p:grpSp>
-        </p:grpSp>
-        <p:sp>
-          <p:nvSpPr>
-            <p:cNvPr id="214" name="TextBox 81">
-              <a:extLst>
-                <a:ext uri="{FF2B5EF4-FFF2-40B4-BE49-F238E27FC236}">
-                  <a16:creationId xmlns:a16="http://schemas.microsoft.com/office/drawing/2014/main" id="{46D0D569-834E-B75C-38C0-60B4FA69480C}"/>
-                </a:ext>
-              </a:extLst>
-            </p:cNvPr>
-            <p:cNvSpPr txBox="1"/>
-            <p:nvPr/>
-          </p:nvSpPr>
-          <p:spPr>
-            <a:xfrm>
-              <a:off x="10609983" y="6187518"/>
-              <a:ext cx="1582017" cy="307777"/>
-            </a:xfrm>
-            <a:prstGeom prst="rect">
-              <a:avLst/>
-            </a:prstGeom>
-            <a:noFill/>
-            <a:ln>
-              <a:noFill/>
-            </a:ln>
-          </p:spPr>
-          <p:txBody>
-            <a:bodyPr wrap="square" lIns="0" tIns="0" rIns="0" bIns="0" anchor="ctr">
-              <a:spAutoFit/>
-            </a:bodyPr>
-            <a:lstStyle/>
-            <a:p>
-              <a:pPr algn="ctr">
-                <a:spcBef>
-                  <a:spcPts val="0"/>
-                </a:spcBef>
-                <a:spcAft>
-                  <a:spcPts val="0"/>
-                </a:spcAft>
-              </a:pPr>
-              <a:r>
-                <a:rPr lang="zh-CN" altLang="en-US" sz="2000" b="1" i="0" dirty="0">
-                  <a:solidFill>
-                    <a:srgbClr val="1A1A2E"/>
-                  </a:solidFill>
-                  <a:latin typeface="宋体" panose="02010600030101010101" pitchFamily="2" charset="-122"/>
-                  <a:ea typeface="宋体" panose="02010600030101010101" pitchFamily="2" charset="-122"/>
-                </a:rPr>
-                <a:t>知识库构建</a:t>
-              </a:r>
-              <a:endParaRPr sz="2000" b="1" i="0" dirty="0">
-                <a:solidFill>
-                  <a:srgbClr val="1A1A2E"/>
-                </a:solidFill>
-                <a:latin typeface="宋体" panose="02010600030101010101" pitchFamily="2" charset="-122"/>
-                <a:ea typeface="宋体" panose="02010600030101010101" pitchFamily="2" charset="-122"/>
-              </a:endParaRPr>
-            </a:p>
-          </p:txBody>
-        </p:sp>
-      </p:grpSp>
-      <p:grpSp>
-        <p:nvGrpSpPr>
-          <p:cNvPr id="220" name="组合 219">
-            <a:extLst>
-              <a:ext uri="{FF2B5EF4-FFF2-40B4-BE49-F238E27FC236}">
-                <a16:creationId xmlns:a16="http://schemas.microsoft.com/office/drawing/2014/main" id="{D05DC38A-DE5E-A214-9461-20C33F32A3A7}"/>
-              </a:ext>
-            </a:extLst>
-          </p:cNvPr>
-          <p:cNvGrpSpPr/>
-          <p:nvPr/>
-        </p:nvGrpSpPr>
-        <p:grpSpPr>
-          <a:xfrm>
-            <a:off x="5589171" y="5844947"/>
-            <a:ext cx="2276062" cy="561109"/>
-            <a:chOff x="10041117" y="6072707"/>
-            <a:chExt cx="2276062" cy="561109"/>
-          </a:xfrm>
-        </p:grpSpPr>
-        <p:grpSp>
-          <p:nvGrpSpPr>
-            <p:cNvPr id="221" name="组合 220">
-              <a:extLst>
-                <a:ext uri="{FF2B5EF4-FFF2-40B4-BE49-F238E27FC236}">
-                  <a16:creationId xmlns:a16="http://schemas.microsoft.com/office/drawing/2014/main" id="{E379BCA5-2D37-445F-0250-97787FA3CA58}"/>
-                </a:ext>
-              </a:extLst>
-            </p:cNvPr>
-            <p:cNvGrpSpPr/>
-            <p:nvPr/>
-          </p:nvGrpSpPr>
-          <p:grpSpPr>
-            <a:xfrm>
-              <a:off x="10041117" y="6072707"/>
-              <a:ext cx="2276062" cy="561109"/>
-              <a:chOff x="787428" y="4369987"/>
-              <a:chExt cx="2276062" cy="561109"/>
-            </a:xfrm>
-          </p:grpSpPr>
-          <p:sp>
-            <p:nvSpPr>
-              <p:cNvPr id="223" name="Rectangle 76">
-                <a:extLst>
-                  <a:ext uri="{FF2B5EF4-FFF2-40B4-BE49-F238E27FC236}">
-                    <a16:creationId xmlns:a16="http://schemas.microsoft.com/office/drawing/2014/main" id="{7B3D639F-EC2A-6623-8C0A-141CBFDEAA5A}"/>
-                  </a:ext>
-                </a:extLst>
-              </p:cNvPr>
-              <p:cNvSpPr/>
-              <p:nvPr/>
-            </p:nvSpPr>
-            <p:spPr>
-              <a:xfrm>
-                <a:off x="787428" y="4369987"/>
-                <a:ext cx="2276062" cy="561109"/>
-              </a:xfrm>
-              <a:prstGeom prst="rect">
-                <a:avLst/>
-              </a:prstGeom>
-              <a:solidFill>
-                <a:srgbClr val="FFFFFF"/>
-              </a:solidFill>
-              <a:ln w="13970">
-                <a:solidFill>
-                  <a:schemeClr val="tx1">
-                    <a:lumMod val="65000"/>
-                    <a:lumOff val="35000"/>
-                  </a:schemeClr>
-                </a:solidFill>
-              </a:ln>
-            </p:spPr>
-            <p:style>
-              <a:lnRef idx="1">
-                <a:schemeClr val="accent1"/>
-              </a:lnRef>
-              <a:fillRef idx="3">
-                <a:schemeClr val="accent1"/>
-              </a:fillRef>
-              <a:effectRef idx="2">
-                <a:schemeClr val="accent1"/>
-              </a:effectRef>
-              <a:fontRef idx="minor">
-                <a:schemeClr val="lt1"/>
-              </a:fontRef>
-            </p:style>
-            <p:txBody>
-              <a:bodyPr rtlCol="0" anchor="ctr"/>
-              <a:lstStyle/>
-              <a:p>
-                <a:pPr algn="ctr"/>
-                <a:endParaRPr sz="3200" b="1" dirty="0">
-                  <a:latin typeface="宋体" panose="02010600030101010101" pitchFamily="2" charset="-122"/>
-                  <a:ea typeface="宋体" panose="02010600030101010101" pitchFamily="2" charset="-122"/>
-                </a:endParaRPr>
-              </a:p>
-            </p:txBody>
-          </p:sp>
-          <p:grpSp>
-            <p:nvGrpSpPr>
-              <p:cNvPr id="224" name="组合 223">
-                <a:extLst>
-                  <a:ext uri="{FF2B5EF4-FFF2-40B4-BE49-F238E27FC236}">
-                    <a16:creationId xmlns:a16="http://schemas.microsoft.com/office/drawing/2014/main" id="{19E95F28-3BBF-D50D-EAFF-6903814D81AC}"/>
-                  </a:ext>
-                </a:extLst>
-              </p:cNvPr>
-              <p:cNvGrpSpPr/>
-              <p:nvPr/>
-            </p:nvGrpSpPr>
-            <p:grpSpPr>
-              <a:xfrm>
-                <a:off x="2791063" y="4407913"/>
-                <a:ext cx="166910" cy="143394"/>
-                <a:chOff x="10916798" y="4537825"/>
-                <a:chExt cx="166910" cy="143394"/>
-              </a:xfrm>
-            </p:grpSpPr>
-            <p:sp>
-              <p:nvSpPr>
-                <p:cNvPr id="225" name="Rectangle 91">
-                  <a:extLst>
-                    <a:ext uri="{FF2B5EF4-FFF2-40B4-BE49-F238E27FC236}">
-                      <a16:creationId xmlns:a16="http://schemas.microsoft.com/office/drawing/2014/main" id="{8C612528-B755-35AF-41C7-8E3CD3C340A8}"/>
-                    </a:ext>
-                  </a:extLst>
-                </p:cNvPr>
-                <p:cNvSpPr/>
-                <p:nvPr/>
-              </p:nvSpPr>
-              <p:spPr>
-                <a:xfrm>
-                  <a:off x="10945826" y="4537825"/>
-                  <a:ext cx="137882" cy="143394"/>
-                </a:xfrm>
-                <a:prstGeom prst="rect">
-                  <a:avLst/>
-                </a:prstGeom>
-                <a:solidFill>
-                  <a:srgbClr val="FFFFFF"/>
-                </a:solidFill>
-                <a:ln w="10160">
-                  <a:solidFill>
-                    <a:schemeClr val="tx1"/>
-                  </a:solidFill>
-                </a:ln>
-              </p:spPr>
-              <p:style>
-                <a:lnRef idx="1">
-                  <a:schemeClr val="accent1"/>
-                </a:lnRef>
-                <a:fillRef idx="3">
-                  <a:schemeClr val="accent1"/>
-                </a:fillRef>
-                <a:effectRef idx="2">
-                  <a:schemeClr val="accent1"/>
-                </a:effectRef>
-                <a:fontRef idx="minor">
-                  <a:schemeClr val="lt1"/>
-                </a:fontRef>
-              </p:style>
-              <p:txBody>
-                <a:bodyPr rtlCol="0" anchor="ctr"/>
-                <a:lstStyle/>
-                <a:p>
-                  <a:pPr algn="ctr"/>
-                  <a:endParaRPr sz="3200" b="1">
-                    <a:solidFill>
-                      <a:schemeClr val="tx1"/>
-                    </a:solidFill>
-                    <a:latin typeface="宋体" panose="02010600030101010101" pitchFamily="2" charset="-122"/>
-                    <a:ea typeface="宋体" panose="02010600030101010101" pitchFamily="2" charset="-122"/>
-                  </a:endParaRPr>
-                </a:p>
-              </p:txBody>
-            </p:sp>
-            <p:sp>
-              <p:nvSpPr>
-                <p:cNvPr id="226" name="Rectangle 92">
-                  <a:extLst>
-                    <a:ext uri="{FF2B5EF4-FFF2-40B4-BE49-F238E27FC236}">
-                      <a16:creationId xmlns:a16="http://schemas.microsoft.com/office/drawing/2014/main" id="{8B843C37-044B-2426-3E8F-2EB8600BC411}"/>
-                    </a:ext>
-                  </a:extLst>
-                </p:cNvPr>
-                <p:cNvSpPr/>
-                <p:nvPr/>
-              </p:nvSpPr>
-              <p:spPr>
-                <a:xfrm>
-                  <a:off x="10916798" y="4550294"/>
-                  <a:ext cx="58055" cy="41148"/>
-                </a:xfrm>
-                <a:prstGeom prst="rect">
-                  <a:avLst/>
-                </a:prstGeom>
-                <a:solidFill>
-                  <a:srgbClr val="FFFFFF"/>
-                </a:solidFill>
-                <a:ln w="10160">
-                  <a:solidFill>
-                    <a:schemeClr val="tx1"/>
-                  </a:solidFill>
-                </a:ln>
-              </p:spPr>
-              <p:style>
-                <a:lnRef idx="1">
-                  <a:schemeClr val="accent1"/>
-                </a:lnRef>
-                <a:fillRef idx="3">
-                  <a:schemeClr val="accent1"/>
-                </a:fillRef>
-                <a:effectRef idx="2">
-                  <a:schemeClr val="accent1"/>
-                </a:effectRef>
-                <a:fontRef idx="minor">
-                  <a:schemeClr val="lt1"/>
-                </a:fontRef>
-              </p:style>
-              <p:txBody>
-                <a:bodyPr rtlCol="0" anchor="ctr"/>
-                <a:lstStyle/>
-                <a:p>
-                  <a:pPr algn="ctr"/>
-                  <a:endParaRPr sz="3200" b="1">
-                    <a:solidFill>
-                      <a:schemeClr val="tx1"/>
-                    </a:solidFill>
-                    <a:latin typeface="宋体" panose="02010600030101010101" pitchFamily="2" charset="-122"/>
-                    <a:ea typeface="宋体" panose="02010600030101010101" pitchFamily="2" charset="-122"/>
-                  </a:endParaRPr>
-                </a:p>
-              </p:txBody>
-            </p:sp>
-            <p:sp>
-              <p:nvSpPr>
-                <p:cNvPr id="227" name="Rectangle 93">
-                  <a:extLst>
-                    <a:ext uri="{FF2B5EF4-FFF2-40B4-BE49-F238E27FC236}">
-                      <a16:creationId xmlns:a16="http://schemas.microsoft.com/office/drawing/2014/main" id="{061B2ED9-E218-AE5D-5E4B-CA131B329430}"/>
-                    </a:ext>
-                  </a:extLst>
-                </p:cNvPr>
-                <p:cNvSpPr/>
-                <p:nvPr/>
-              </p:nvSpPr>
-              <p:spPr>
-                <a:xfrm>
-                  <a:off x="10916798" y="4605158"/>
-                  <a:ext cx="58055" cy="41148"/>
-                </a:xfrm>
-                <a:prstGeom prst="rect">
-                  <a:avLst/>
-                </a:prstGeom>
-                <a:solidFill>
-                  <a:srgbClr val="FFFFFF"/>
-                </a:solidFill>
-                <a:ln w="10160">
-                  <a:solidFill>
-                    <a:schemeClr val="tx1"/>
-                  </a:solidFill>
-                </a:ln>
-              </p:spPr>
-              <p:style>
-                <a:lnRef idx="1">
-                  <a:schemeClr val="accent1"/>
-                </a:lnRef>
-                <a:fillRef idx="3">
-                  <a:schemeClr val="accent1"/>
-                </a:fillRef>
-                <a:effectRef idx="2">
-                  <a:schemeClr val="accent1"/>
-                </a:effectRef>
-                <a:fontRef idx="minor">
-                  <a:schemeClr val="lt1"/>
-                </a:fontRef>
-              </p:style>
-              <p:txBody>
-                <a:bodyPr rtlCol="0" anchor="ctr"/>
-                <a:lstStyle/>
-                <a:p>
-                  <a:pPr algn="ctr"/>
-                  <a:endParaRPr sz="3200" b="1">
-                    <a:solidFill>
-                      <a:schemeClr val="tx1"/>
-                    </a:solidFill>
-                    <a:latin typeface="宋体" panose="02010600030101010101" pitchFamily="2" charset="-122"/>
-                    <a:ea typeface="宋体" panose="02010600030101010101" pitchFamily="2" charset="-122"/>
-                  </a:endParaRPr>
-                </a:p>
-              </p:txBody>
-            </p:sp>
-          </p:grpSp>
-        </p:grpSp>
-        <p:sp>
-          <p:nvSpPr>
-            <p:cNvPr id="222" name="TextBox 81">
-              <a:extLst>
-                <a:ext uri="{FF2B5EF4-FFF2-40B4-BE49-F238E27FC236}">
-                  <a16:creationId xmlns:a16="http://schemas.microsoft.com/office/drawing/2014/main" id="{26805522-A694-8C4B-F123-13E951631E9B}"/>
-                </a:ext>
-              </a:extLst>
-            </p:cNvPr>
-            <p:cNvSpPr txBox="1"/>
-            <p:nvPr/>
-          </p:nvSpPr>
-          <p:spPr>
-            <a:xfrm>
-              <a:off x="10376068" y="6192580"/>
-              <a:ext cx="1582017" cy="307777"/>
-            </a:xfrm>
-            <a:prstGeom prst="rect">
-              <a:avLst/>
-            </a:prstGeom>
-            <a:noFill/>
-            <a:ln>
-              <a:noFill/>
-            </a:ln>
-          </p:spPr>
-          <p:txBody>
-            <a:bodyPr wrap="square" lIns="0" tIns="0" rIns="0" bIns="0" anchor="ctr">
-              <a:spAutoFit/>
-            </a:bodyPr>
-            <a:lstStyle/>
-            <a:p>
-              <a:pPr algn="ctr">
-                <a:spcBef>
-                  <a:spcPts val="0"/>
-                </a:spcBef>
-                <a:spcAft>
-                  <a:spcPts val="0"/>
-                </a:spcAft>
-              </a:pPr>
-              <a:r>
-                <a:rPr lang="zh-CN" altLang="en-US" sz="2000" b="1" i="0" dirty="0">
-                  <a:solidFill>
-                    <a:srgbClr val="1A1A2E"/>
-                  </a:solidFill>
-                  <a:latin typeface="宋体" panose="02010600030101010101" pitchFamily="2" charset="-122"/>
-                  <a:ea typeface="宋体" panose="02010600030101010101" pitchFamily="2" charset="-122"/>
-                </a:rPr>
-                <a:t>向量数据库</a:t>
-              </a:r>
-              <a:endParaRPr sz="2000" b="1" i="0" dirty="0">
-                <a:solidFill>
-                  <a:srgbClr val="1A1A2E"/>
-                </a:solidFill>
-                <a:latin typeface="宋体" panose="02010600030101010101" pitchFamily="2" charset="-122"/>
-                <a:ea typeface="宋体" panose="02010600030101010101" pitchFamily="2" charset="-122"/>
-              </a:endParaRPr>
-            </a:p>
-          </p:txBody>
-        </p:sp>
-      </p:grpSp>
     </p:spTree>
   </p:cSld>
   <p:clrMapOvr>
@@ -8980,10 +9280,5 @@
     </a:lnDef>
   </a:objectDefaults>
   <a:extraClrSchemeLst/>
-  <a:extLst>
-    <a:ext uri="{05A4C25C-085E-4340-85A3-A5531E510DB2}">
-      <thm15:themeFamily xmlns:thm15="http://schemas.microsoft.com/office/thememl/2012/main" name="Office Theme" id="{62F939B6-93AF-4DB8-9C6B-D6C7DFDC589F}" vid="{4A3C46E8-61CC-4603-A589-7422A47A8E4A}"/>
-    </a:ext>
-  </a:extLst>
 </a:theme>
 </file>